--- a/Seminario de Sistemas/Clases/Clase 11 - Avance del proyecto de diseno/Presentacion.pptx
+++ b/Seminario de Sistemas/Clases/Clase 11 - Avance del proyecto de diseno/Presentacion.pptx
@@ -17,10 +17,6 @@
     <p:sldId id="265" r:id="rId17"/>
     <p:sldId id="266" r:id="rId18"/>
     <p:sldId id="267" r:id="rId19"/>
-    <p:sldId id="268" r:id="rId20"/>
-    <p:sldId id="269" r:id="rId21"/>
-    <p:sldId id="270" r:id="rId22"/>
-    <p:sldId id="271" r:id="rId23"/>
   </p:sldIdLst>
   <p:sldSz cx="12191695" cy="6858000" type="screen4x3"/>
   <p:notesSz cx="6858000" cy="9144000"/>
@@ -517,6 +513,36 @@
           <a:lstStyle/>
           <a:p>
             <a:r>
+              <a:t>DESARROLLO (para explicarlo, no se proyecta):</a:t>
+            </a:r>
+          </a:p>
+          <a:p/>
+          <a:p>
+            <a:r>
+              <a:t>Un paquete de diseño no es una carpeta de archivos sueltos: es un sistema de documentos que deben decir lo mismo con las mismas palabras.</a:t>
+            </a:r>
+          </a:p>
+          <a:p/>
+          <a:p>
+            <a:r>
+              <a:t>El problema es que esos documentos se escribieron en semanas distintas, muchas veces por personas distintas del equipo, y cada semana el entendimiento del dominio cambio un poquito.</a:t>
+            </a:r>
+          </a:p>
+          <a:p/>
+          <a:p>
+            <a:r>
+              <a:t>Ninguno de los tres documentos esta mal por si solo; lo que esta mal es el conjunto.</a:t>
+            </a:r>
+          </a:p>
+          <a:p/>
+          <a:p>
+            <a:r>
+              <a:t>NOTAS:</a:t>
+            </a:r>
+          </a:p>
+          <a:p/>
+          <a:p>
+            <a:r>
               <a:t>Asi es como en la clinica aparece un requisito RF-07 que promete recordatorio de cita por mensajeria, un diagrama de casos de uso donde no existe ningun caso de uso de recordatorio, y un diagrama de clases donde no hay nada parecido a una clase Notificacion.</a:t>
             </a:r>
           </a:p>
@@ -599,7 +625,61 @@
           <a:lstStyle/>
           <a:p>
             <a:r>
-              <a:t>Un sistema se diseña bien cuando existe un solo nombre para cada concepto y todos lo usan, desde la entrevista con la clinica hasta el nombre de la clase.</a:t>
+              <a:t>DESARROLLO (para explicarlo, no se proyecta):</a:t>
+            </a:r>
+          </a:p>
+          <a:p/>
+          <a:p>
+            <a:r>
+              <a:t>La herramienta central para eso es la trazabilidad, y se verifica en dos direcciones.</a:t>
+            </a:r>
+          </a:p>
+          <a:p/>
+          <a:p>
+            <a:r>
+              <a:t>Hacia adelante se pregunta si todo requisito funcional llega a algun caso de uso y si ese caso de uso llega a alguna clase, atributo u operacion que lo soporte</a:t>
+            </a:r>
+          </a:p>
+          <a:p/>
+          <a:p>
+            <a:r>
+              <a:t>Si un RF no llega a nada, es un requisito huerfano y significa que el equipo prometio algo que el diseño no cumple.</a:t>
+            </a:r>
+          </a:p>
+          <a:p/>
+          <a:p>
+            <a:r>
+              <a:t>Hacia atras se pregunta si todo elemento del diseño nace de algun requisito</a:t>
+            </a:r>
+          </a:p>
+          <a:p/>
+          <a:p>
+            <a:r>
+              <a:t>Si un caso de uso o una clase no viene de ningun RF, es un elemento viudo y casi siempre significa que alguien agrego funcionalidad por gusto propio o que la fila de la matriz quedo sin diligenciar.</a:t>
+            </a:r>
+          </a:p>
+          <a:p/>
+          <a:p>
+            <a:r>
+              <a:t>En la clinica esto se vuelve concreto rapidisimo: RF-05, consultar el expediente de una mascota, junto con el RNF-02 que exige que el resultado aparezca en menos de tres segundos</a:t>
+            </a:r>
+          </a:p>
+          <a:p/>
+          <a:p>
+            <a:r>
+              <a:t>Debe llegar a CU-02 Buscar expediente y de ahi a las clases Mascota y Consulta, con una operacion de busqueda por codigo o por nombre</a:t>
+            </a:r>
+          </a:p>
+          <a:p/>
+          <a:p>
+            <a:r>
+              <a:t>Si ese camino se rompe en cualquier punto, el problema numero dos de la clinica sigue sin resolverse aunque el equipo tenga veinte paginas escritas.</a:t>
+            </a:r>
+          </a:p>
+          <a:p/>
+          <a:p>
+            <a:r>
+              <a:t>La matriz de trazabilidad es apenas una tabla de cuatro columnas, pero es la unica prueba objetiva de que el paquete es coherente.</a:t>
             </a:r>
           </a:p>
         </p:txBody>
@@ -669,7 +749,61 @@
           <a:lstStyle/>
           <a:p>
             <a:r>
-              <a:t>Eso es util.</a:t>
+              <a:t>DESARROLLO (para explicarlo, no se proyecta):</a:t>
+            </a:r>
+          </a:p>
+          <a:p/>
+          <a:p>
+            <a:r>
+              <a:t>El segundo eje de la auditoria es el lenguaje.</a:t>
+            </a:r>
+          </a:p>
+          <a:p/>
+          <a:p>
+            <a:r>
+              <a:t>Cuando en un documento se lee Dueño, en otro Propietario, en otro Cliente y en el mockup Responsable, no hay cuatro sinonimos: hay cuatro oportunidades de que alguien crea que son cuatro cosas distintas y termine con cuatro tablas.</a:t>
+            </a:r>
+          </a:p>
+          <a:p/>
+          <a:p>
+            <a:r>
+              <a:t>La solucion es un glosario canonico donde cada concepto del dominio tiene un nombre unico, una definicion de una linea y una lista explicita de sinonimos prohibidos.</a:t>
+            </a:r>
+          </a:p>
+          <a:p/>
+          <a:p>
+            <a:r>
+              <a:t>Ese glosario manda sobre todos los artefactos: si el nombre canonico es Propietario, entonces el requisito, el caso de uso, el mockup, el diccionario de datos y la clase se llaman Propietario, sin excepciones y sin diminutivos.</a:t>
+            </a:r>
+          </a:p>
+          <a:p/>
+          <a:p>
+            <a:r>
+              <a:t>El glosario tambien separa parejas peligrosas: en la clinica, Cita es la reserva de un horario futuro y Consulta es el registro de una atencion ya realizada, y confundirlas produce un modelo donde nadie sabe si se esta agendando o atendiendo.</a:t>
+            </a:r>
+          </a:p>
+          <a:p/>
+          <a:p>
+            <a:r>
+              <a:t>La ganancia es inmediata para el compañero que solo cursa Programacion II, porque puede buscar una palabra en el documento y encontrarla en todos lados; y tambien para el que solo cursa Seminario</a:t>
+            </a:r>
+          </a:p>
+          <a:p/>
+          <a:p>
+            <a:r>
+              <a:t>Porque su documento de diseño se lee como un texto y no como un rompecabezas.</a:t>
+            </a:r>
+          </a:p>
+          <a:p/>
+          <a:p>
+            <a:r>
+              <a:t>NOTAS:</a:t>
+            </a:r>
+          </a:p>
+          <a:p/>
+          <a:p>
+            <a:r>
+              <a:t>Un sistema se diseña bien cuando existe un solo nombre para cada concepto y todos lo usan, desde la entrevista con la clinica hasta el nombre de la clase.</a:t>
             </a:r>
           </a:p>
         </p:txBody>
@@ -739,7 +873,267 @@
           <a:lstStyle/>
           <a:p>
             <a:r>
+              <a:t>DESARROLLO (para explicarlo, no se proyecta):</a:t>
+            </a:r>
+          </a:p>
+          <a:p/>
+          <a:p>
+            <a:r>
+              <a:t>La revision entre pares se hace con reglas o no sirve.</a:t>
+            </a:r>
+          </a:p>
+          <a:p/>
+          <a:p>
+            <a:r>
+              <a:t>Se revisa el artefacto, nunca a la persona, y para eso se asignan tres roles: el autor, que entrega su paquete y permanece en silencio mientras lo revisan; el revisor</a:t>
+            </a:r>
+          </a:p>
+          <a:p/>
+          <a:p>
+            <a:r>
+              <a:t>Que recorre la lista de verificacion punto por punto y solo reporta hechos observables; y el moderador, que controla el tiempo y escribe los hallazgos.</a:t>
+            </a:r>
+          </a:p>
+          <a:p/>
+          <a:p>
+            <a:r>
+              <a:t>Cada hallazgo se anota con ubicacion exacta, descripcion de la inconsistencia y severidad: bloqueante cuando impide construir el sistema, mayor cuando obliga a rehacer un artefacto completo, menor cuando es cosmetico.</a:t>
+            </a:r>
+          </a:p>
+          <a:p/>
+          <a:p>
+            <a:r>
+              <a:t>Prohibido discutir la solucion durante la revision, porque ahi es donde se van los cuarenta minutos y no se revisa nada.</a:t>
+            </a:r>
+          </a:p>
+          <a:p/>
+          <a:p>
+            <a:r>
+              <a:t>En la clinica, un hallazgo bien escrito se ve asi: en el diagrama de clases, la clase Consulta no tiene relacion con Veterinario, pero el flujo principal de CU-03 dice que toda consulta queda a nombre del veterinario que atendio; severidad mayor.</a:t>
+            </a:r>
+          </a:p>
+          <a:p/>
+          <a:p>
+            <a:r>
+              <a:t>En cambio esta mal hecho, no me gusta o le falta orden no es un hallazgo, es una opinion.</a:t>
+            </a:r>
+          </a:p>
+          <a:p/>
+          <a:p>
+            <a:r>
+              <a:t>NOTAS:</a:t>
+            </a:r>
+          </a:p>
+          <a:p/>
+          <a:p>
+            <a:r>
+              <a:t>Eso es util.</a:t>
+            </a:r>
+          </a:p>
+        </p:txBody>
+      </p:sp>
+      <p:sp>
+        <p:nvSpPr>
+          <p:cNvPr id="4" name="Slide Number Placeholder 3"/>
+          <p:cNvSpPr>
+            <a:spLocks noGrp="1"/>
+          </p:cNvSpPr>
+          <p:nvPr>
+            <p:ph type="sldNum" idx="5" sz="quarter"/>
+          </p:nvPr>
+        </p:nvSpPr>
+        <p:spPr/>
+      </p:sp>
+    </p:spTree>
+  </p:cSld>
+  <p:clrMapOvr>
+    <a:masterClrMapping/>
+  </p:clrMapOvr>
+</p:notes>
+</file>
+
+<file path=ppt/notesSlides/notesSlide5.xml><?xml version="1.0" encoding="utf-8"?>
+<p:notes xmlns:a="http://schemas.openxmlformats.org/drawingml/2006/main" xmlns:p="http://schemas.openxmlformats.org/presentationml/2006/main" xmlns:r="http://schemas.openxmlformats.org/officeDocument/2006/relationships">
+  <p:cSld>
+    <p:spTree>
+      <p:nvGrpSpPr>
+        <p:cNvPr id="1" name=""/>
+        <p:cNvGrpSpPr/>
+        <p:nvPr/>
+      </p:nvGrpSpPr>
+      <p:grpSpPr>
+        <a:xfrm>
+          <a:off x="0" y="0"/>
+          <a:ext cx="0" cy="0"/>
+          <a:chOff x="0" y="0"/>
+          <a:chExt cx="0" cy="0"/>
+        </a:xfrm>
+      </p:grpSpPr>
+      <p:sp>
+        <p:nvSpPr>
+          <p:cNvPr id="2" name="Slide Image Placeholder 1"/>
+          <p:cNvSpPr>
+            <a:spLocks noGrp="1"/>
+          </p:cNvSpPr>
+          <p:nvPr>
+            <p:ph type="sldImg" idx="2"/>
+          </p:nvPr>
+        </p:nvSpPr>
+        <p:spPr/>
+      </p:sp>
+      <p:sp>
+        <p:nvSpPr>
+          <p:cNvPr id="3" name="Notes Placeholder 2"/>
+          <p:cNvSpPr>
+            <a:spLocks noGrp="1"/>
+          </p:cNvSpPr>
+          <p:nvPr>
+            <p:ph type="body" idx="3" sz="quarter"/>
+          </p:nvPr>
+        </p:nvSpPr>
+        <p:spPr/>
+        <p:txBody>
+          <a:bodyPr/>
+          <a:lstStyle/>
+          <a:p>
+            <a:r>
+              <a:t>DESARROLLO (para explicarlo, no se proyecta):</a:t>
+            </a:r>
+          </a:p>
+          <a:p/>
+          <a:p>
+            <a:r>
+              <a:t>Cada hallazgo pasa a ser un item con responsable, severidad, criterio de cierre verificable y un estado que puede ser aceptado, rechazado con justificacion escrita o aplazado por acuerdo.</a:t>
+            </a:r>
+          </a:p>
+          <a:p/>
+          <a:p>
+            <a:r>
+              <a:t>Rechazar un hallazgo es legitimo si se argumenta, y aprender a hacerlo es parte del oficio del analista.</a:t>
+            </a:r>
+          </a:p>
+          <a:p/>
+          <a:p>
+            <a:r>
+              <a:t>Sobre ese backlog se define lo que en la industria se llama definicion de terminado del paquete de diseño de la clinica: catalogo de RF y RNF numerado y sin huerfanos</a:t>
+            </a:r>
+          </a:p>
+          <a:p/>
+          <a:p>
+            <a:r>
+              <a:t>Diagrama y especificaciones de casos de uso, diagrama de clases con multiplicidades, mockups de las pantallas criticas y diccionario de datos.</a:t>
+            </a:r>
+          </a:p>
+          <a:p/>
+          <a:p>
+            <a:r>
+              <a:t>Aqui se hacen visibles los tres casos de matricula: el que cursa las dos materias entrega estos planos aca y el codigo alla; el que solo cursa Programacion II recibe este paquete y todo lo que hoy quede ambiguo lo va a pagar en horas de reproceso</a:t>
+            </a:r>
+          </a:p>
+          <a:p/>
+          <a:p>
+            <a:r>
+              <a:t>Y el que solo cursa Seminario cierra con este mismo documento mas el prototipo navegable, que es una ruta completa y valida, no una version reducida del curso.</a:t>
+            </a:r>
+          </a:p>
+          <a:p/>
+          <a:p>
+            <a:r>
+              <a:t>NOTAS:</a:t>
+            </a:r>
+          </a:p>
+          <a:p/>
+          <a:p>
+            <a:r>
               <a:t>Todo lo que se encuentra se convierte en backlog de deuda de diseño, no en angustia.</a:t>
+            </a:r>
+          </a:p>
+        </p:txBody>
+      </p:sp>
+      <p:sp>
+        <p:nvSpPr>
+          <p:cNvPr id="4" name="Slide Number Placeholder 3"/>
+          <p:cNvSpPr>
+            <a:spLocks noGrp="1"/>
+          </p:cNvSpPr>
+          <p:nvPr>
+            <p:ph type="sldNum" idx="5" sz="quarter"/>
+          </p:nvPr>
+        </p:nvSpPr>
+        <p:spPr/>
+      </p:sp>
+    </p:spTree>
+  </p:cSld>
+  <p:clrMapOvr>
+    <a:masterClrMapping/>
+  </p:clrMapOvr>
+</p:notes>
+</file>
+
+<file path=ppt/notesSlides/notesSlide6.xml><?xml version="1.0" encoding="utf-8"?>
+<p:notes xmlns:a="http://schemas.openxmlformats.org/drawingml/2006/main" xmlns:p="http://schemas.openxmlformats.org/presentationml/2006/main" xmlns:r="http://schemas.openxmlformats.org/officeDocument/2006/relationships">
+  <p:cSld>
+    <p:spTree>
+      <p:nvGrpSpPr>
+        <p:cNvPr id="1" name=""/>
+        <p:cNvGrpSpPr/>
+        <p:nvPr/>
+      </p:nvGrpSpPr>
+      <p:grpSpPr>
+        <a:xfrm>
+          <a:off x="0" y="0"/>
+          <a:ext cx="0" cy="0"/>
+          <a:chOff x="0" y="0"/>
+          <a:chExt cx="0" cy="0"/>
+        </a:xfrm>
+      </p:grpSpPr>
+      <p:sp>
+        <p:nvSpPr>
+          <p:cNvPr id="2" name="Slide Image Placeholder 1"/>
+          <p:cNvSpPr>
+            <a:spLocks noGrp="1"/>
+          </p:cNvSpPr>
+          <p:nvPr>
+            <p:ph type="sldImg" idx="2"/>
+          </p:nvPr>
+        </p:nvSpPr>
+        <p:spPr/>
+      </p:sp>
+      <p:sp>
+        <p:nvSpPr>
+          <p:cNvPr id="3" name="Notes Placeholder 2"/>
+          <p:cNvSpPr>
+            <a:spLocks noGrp="1"/>
+          </p:cNvSpPr>
+          <p:nvPr>
+            <p:ph type="body" idx="3" sz="quarter"/>
+          </p:nvPr>
+        </p:nvSpPr>
+        <p:spPr/>
+        <p:txBody>
+          <a:bodyPr/>
+          <a:lstStyle/>
+          <a:p>
+            <a:r>
+              <a:t>TEXTO COMPLETO DE LA LÁMINA (se proyecta resumido):</a:t>
+            </a:r>
+          </a:p>
+          <a:p/>
+          <a:p>
+            <a:r>
+              <a:t>Herramienta: Google Docs · draw.io</a:t>
+            </a:r>
+          </a:p>
+          <a:p/>
+          <a:p>
+            <a:r>
+              <a:t>Demo: Se proyecta el paquete de un equipo ficticio de la clinica y encuentra en vivo tres inconsistencias: un RF sin caso de uso, una clase llamada Dueño que en el catalogo de requisitos se llama Propietario, y un caso de uso que ninguna clase puede soportar.</a:t>
+            </a:r>
+          </a:p>
+          <a:p/>
+          <a:p>
+            <a:r>
+              <a:t>Mismo dominio: la clinica veterinaria — no otro ejemplo. Aqui se diseña, no se programa.</a:t>
             </a:r>
           </a:p>
         </p:txBody>
@@ -4263,21 +4657,173 @@
                 </a:solidFill>
                 <a:latin typeface="Calibri"/>
               </a:rPr>
-              <a:t>La revision entre pares se hace con reglas o no sirve (2/2)</a:t>
-            </a:r>
-          </a:p>
-        </p:txBody>
-      </p:sp>
-      <p:sp>
-        <p:nvSpPr>
-          <p:cNvPr id="5" name="TextBox 4"/>
+              <a:t>Del hallazgo al backlog de deuda de diseño</a:t>
+            </a:r>
+          </a:p>
+        </p:txBody>
+      </p:sp>
+      <p:sp>
+        <p:nvSpPr>
+          <p:cNvPr id="5" name="Rounded Rectangle 4"/>
+          <p:cNvSpPr/>
+          <p:nvPr/>
+        </p:nvSpPr>
+        <p:spPr>
+          <a:xfrm>
+            <a:off x="5803166" y="1188719"/>
+            <a:ext cx="5998464" cy="4828032"/>
+          </a:xfrm>
+          <a:prstGeom prst="roundRect">
+            <a:avLst>
+              <a:gd name="adj" fmla="val 4000"/>
+            </a:avLst>
+          </a:prstGeom>
+          <a:solidFill>
+            <a:srgbClr val="E8EEF4"/>
+          </a:solidFill>
+          <a:ln>
+            <a:noFill/>
+          </a:ln>
+        </p:spPr>
+        <p:style>
+          <a:lnRef idx="1">
+            <a:schemeClr val="accent1"/>
+          </a:lnRef>
+          <a:fillRef idx="3">
+            <a:schemeClr val="accent1"/>
+          </a:fillRef>
+          <a:effectRef idx="2">
+            <a:schemeClr val="accent1"/>
+          </a:effectRef>
+          <a:fontRef idx="minor">
+            <a:schemeClr val="lt1"/>
+          </a:fontRef>
+        </p:style>
+        <p:txBody>
+          <a:bodyPr rtlCol="0" anchor="ctr"/>
+          <a:lstStyle/>
+          <a:p>
+            <a:pPr algn="ctr"/>
+          </a:p>
+        </p:txBody>
+      </p:sp>
+      <p:pic>
+        <p:nvPicPr>
+          <p:cNvPr id="6" name="Picture 5" descr="backlog-deuda-paso1.png"/>
+          <p:cNvPicPr>
+            <a:picLocks noChangeAspect="1"/>
+          </p:cNvPicPr>
+          <p:nvPr/>
+        </p:nvPicPr>
+        <p:blipFill>
+          <a:blip r:embed="rId2"/>
+          <a:stretch>
+            <a:fillRect/>
+          </a:stretch>
+        </p:blipFill>
+        <p:spPr>
+          <a:xfrm>
+            <a:off x="5876318" y="1261872"/>
+            <a:ext cx="5852160" cy="4681728"/>
+          </a:xfrm>
+          <a:prstGeom prst="rect">
+            <a:avLst/>
+          </a:prstGeom>
+        </p:spPr>
+      </p:pic>
+      <p:pic>
+        <p:nvPicPr>
+          <p:cNvPr id="7" name="Picture 6" descr="backlog-deuda-paso2.png"/>
+          <p:cNvPicPr>
+            <a:picLocks noChangeAspect="1"/>
+          </p:cNvPicPr>
+          <p:nvPr/>
+        </p:nvPicPr>
+        <p:blipFill>
+          <a:blip r:embed="rId3"/>
+          <a:stretch>
+            <a:fillRect/>
+          </a:stretch>
+        </p:blipFill>
+        <p:spPr>
+          <a:xfrm>
+            <a:off x="5876318" y="1261872"/>
+            <a:ext cx="5852160" cy="4681728"/>
+          </a:xfrm>
+          <a:prstGeom prst="rect">
+            <a:avLst/>
+          </a:prstGeom>
+        </p:spPr>
+      </p:pic>
+      <p:pic>
+        <p:nvPicPr>
+          <p:cNvPr id="8" name="Picture 7" descr="backlog-deuda-paso3.png"/>
+          <p:cNvPicPr>
+            <a:picLocks noChangeAspect="1"/>
+          </p:cNvPicPr>
+          <p:nvPr/>
+        </p:nvPicPr>
+        <p:blipFill>
+          <a:blip r:embed="rId4"/>
+          <a:stretch>
+            <a:fillRect/>
+          </a:stretch>
+        </p:blipFill>
+        <p:spPr>
+          <a:xfrm>
+            <a:off x="5876318" y="1261872"/>
+            <a:ext cx="5852160" cy="4681728"/>
+          </a:xfrm>
+          <a:prstGeom prst="rect">
+            <a:avLst/>
+          </a:prstGeom>
+        </p:spPr>
+      </p:pic>
+      <p:sp>
+        <p:nvSpPr>
+          <p:cNvPr id="13" name="TextBox 12"/>
           <p:cNvSpPr txBox="1"/>
           <p:nvPr/>
         </p:nvSpPr>
         <p:spPr>
           <a:xfrm>
-            <a:off x="457200" y="1170432"/>
-            <a:ext cx="11277295" cy="5230368"/>
+            <a:off x="5870301" y="5961888"/>
+            <a:ext cx="5864193" cy="320040"/>
+          </a:xfrm>
+          <a:prstGeom prst="rect">
+            <a:avLst/>
+          </a:prstGeom>
+          <a:noFill/>
+        </p:spPr>
+        <p:txBody>
+          <a:bodyPr wrap="square">
+            <a:spAutoFit/>
+          </a:bodyPr>
+          <a:lstStyle/>
+          <a:p>
+            <a:pPr algn="ctr"/>
+            <a:r>
+              <a:rPr sz="1100" b="0" i="1">
+                <a:solidFill>
+                  <a:srgbClr val="666666"/>
+                </a:solidFill>
+                <a:latin typeface="Calibri"/>
+              </a:rPr>
+              <a:t>Clic para avanzar la animación</a:t>
+            </a:r>
+          </a:p>
+        </p:txBody>
+      </p:sp>
+      <p:sp>
+        <p:nvSpPr>
+          <p:cNvPr id="14" name="TextBox 13"/>
+          <p:cNvSpPr txBox="1"/>
+          <p:nvPr/>
+        </p:nvSpPr>
+        <p:spPr>
+          <a:xfrm>
+            <a:off x="457200" y="1353312"/>
+            <a:ext cx="5093061" cy="5047488"/>
           </a:xfrm>
           <a:prstGeom prst="rect">
             <a:avLst/>
@@ -4302,7 +4848,7 @@
                 </a:solidFill>
                 <a:latin typeface="Calibri"/>
               </a:rPr>
-              <a:t>–   Prohibido discutir la solucion durante la revision, porque ahi es donde se van los cuarenta minutos y no se revisa nada.</a:t>
+              <a:t>–   Cada hallazgo es un ítem con responsable, severidad, criterio de cierre y estado.</a:t>
             </a:r>
           </a:p>
           <a:p>
@@ -4318,7 +4864,7 @@
                 </a:solidFill>
                 <a:latin typeface="Calibri"/>
               </a:rPr>
-              <a:t>–   En la clinica, un hallazgo bien escrito se ve asi: en el diagrama de clases, la clase Consulta no tiene relacion con Veterinario, pero el flujo principal de CU-03 dice que toda consulta queda a nombre del veterinario que atendio; severidad mayor.</a:t>
+              <a:t>–   Estados: aceptado, rechazado con justificación escrita, o aplazado por acuerdo.</a:t>
             </a:r>
           </a:p>
           <a:p>
@@ -4334,14 +4880,30 @@
                 </a:solidFill>
                 <a:latin typeface="Calibri"/>
               </a:rPr>
-              <a:t>–   En cambio esta mal hecho, no me gusta o le falta orden no es un hallazgo, es una opinion.</a:t>
-            </a:r>
-          </a:p>
-        </p:txBody>
-      </p:sp>
-      <p:sp>
-        <p:nvSpPr>
-          <p:cNvPr id="6" name="TextBox 5"/>
+              <a:t>–   Rechazar un hallazgo es legítimo si se argumenta.</a:t>
+            </a:r>
+          </a:p>
+          <a:p>
+            <a:pPr>
+              <a:spcAft>
+                <a:spcPts val="800"/>
+              </a:spcAft>
+            </a:pPr>
+            <a:r>
+              <a:rPr sz="2000" b="0" i="0">
+                <a:solidFill>
+                  <a:srgbClr val="333333"/>
+                </a:solidFill>
+                <a:latin typeface="Calibri"/>
+              </a:rPr>
+              <a:t>–   Definición de terminado: RF y RNF sin huérfanos, casos de uso, clases con multiplicidades, mockups y diccionario de datos.</a:t>
+            </a:r>
+          </a:p>
+        </p:txBody>
+      </p:sp>
+      <p:sp>
+        <p:nvSpPr>
+          <p:cNvPr id="15" name="TextBox 14"/>
           <p:cNvSpPr txBox="1"/>
           <p:nvPr/>
         </p:nvSpPr>
@@ -4379,6 +4941,142 @@
   <p:clrMapOvr>
     <a:masterClrMapping/>
   </p:clrMapOvr>
+  <p:timing>
+    <p:tnLst>
+      <p:par>
+        <p:cTn id="1" dur="indefinite" restart="never" nodeType="tmRoot">
+          <p:childTnLst>
+            <p:seq concurrent="1" nextAc="seek">
+              <p:cTn id="2" dur="indefinite" nodeType="mainSeq">
+                <p:childTnLst>
+                  <p:par>
+                    <p:cTn id="3" fill="hold">
+                      <p:stCondLst>
+                        <p:cond delay="indefinite"/>
+                      </p:stCondLst>
+                      <p:childTnLst>
+                        <p:par>
+                          <p:cTn id="4" fill="hold">
+                            <p:stCondLst>
+                              <p:cond delay="0"/>
+                            </p:stCondLst>
+                            <p:childTnLst>
+                              <p:par>
+                                <p:cTn id="5" presetID="10" presetClass="entr" presetSubtype="0" fill="hold" nodeType="clickEffect">
+                                  <p:stCondLst>
+                                    <p:cond delay="0"/>
+                                  </p:stCondLst>
+                                  <p:childTnLst>
+                                    <p:set>
+                                      <p:cBhvr>
+                                        <p:cTn id="6" dur="1" fill="hold">
+                                          <p:stCondLst>
+                                            <p:cond delay="0"/>
+                                          </p:stCondLst>
+                                        </p:cTn>
+                                        <p:tgtEl>
+                                          <p:spTgt spid="7"/>
+                                        </p:tgtEl>
+                                        <p:attrNameLst>
+                                          <p:attrName>style.visibility</p:attrName>
+                                        </p:attrNameLst>
+                                      </p:cBhvr>
+                                      <p:to>
+                                        <p:strVal val="visible"/>
+                                      </p:to>
+                                    </p:set>
+                                    <p:animEffect transition="in" filter="fade">
+                                      <p:cBhvr>
+                                        <p:cTn id="7" dur="450"/>
+                                        <p:tgtEl>
+                                          <p:spTgt spid="7"/>
+                                        </p:tgtEl>
+                                      </p:cBhvr>
+                                    </p:animEffect>
+                                  </p:childTnLst>
+                                </p:cTn>
+                              </p:par>
+                            </p:childTnLst>
+                          </p:cTn>
+                        </p:par>
+                      </p:childTnLst>
+                    </p:cTn>
+                  </p:par>
+                  <p:par>
+                    <p:cTn id="8" fill="hold">
+                      <p:stCondLst>
+                        <p:cond delay="indefinite"/>
+                      </p:stCondLst>
+                      <p:childTnLst>
+                        <p:par>
+                          <p:cTn id="9" fill="hold">
+                            <p:stCondLst>
+                              <p:cond delay="0"/>
+                            </p:stCondLst>
+                            <p:childTnLst>
+                              <p:par>
+                                <p:cTn id="10" presetID="10" presetClass="entr" presetSubtype="0" fill="hold" nodeType="clickEffect">
+                                  <p:stCondLst>
+                                    <p:cond delay="0"/>
+                                  </p:stCondLst>
+                                  <p:childTnLst>
+                                    <p:set>
+                                      <p:cBhvr>
+                                        <p:cTn id="11" dur="1" fill="hold">
+                                          <p:stCondLst>
+                                            <p:cond delay="0"/>
+                                          </p:stCondLst>
+                                        </p:cTn>
+                                        <p:tgtEl>
+                                          <p:spTgt spid="8"/>
+                                        </p:tgtEl>
+                                        <p:attrNameLst>
+                                          <p:attrName>style.visibility</p:attrName>
+                                        </p:attrNameLst>
+                                      </p:cBhvr>
+                                      <p:to>
+                                        <p:strVal val="visible"/>
+                                      </p:to>
+                                    </p:set>
+                                    <p:animEffect transition="in" filter="fade">
+                                      <p:cBhvr>
+                                        <p:cTn id="12" dur="450"/>
+                                        <p:tgtEl>
+                                          <p:spTgt spid="8"/>
+                                        </p:tgtEl>
+                                      </p:cBhvr>
+                                    </p:animEffect>
+                                  </p:childTnLst>
+                                </p:cTn>
+                              </p:par>
+                            </p:childTnLst>
+                          </p:cTn>
+                        </p:par>
+                      </p:childTnLst>
+                    </p:cTn>
+                  </p:par>
+                </p:childTnLst>
+              </p:cTn>
+              <p:prevCondLst>
+                <p:cond evt="onPrev" delay="0">
+                  <p:tgtEl>
+                    <p:sldTgt/>
+                  </p:tgtEl>
+                </p:cond>
+              </p:prevCondLst>
+              <p:nextCondLst>
+                <p:cond evt="onNext" delay="0">
+                  <p:tgtEl>
+                    <p:sldTgt/>
+                  </p:tgtEl>
+                </p:cond>
+              </p:nextCondLst>
+            </p:seq>
+          </p:childTnLst>
+        </p:cTn>
+      </p:par>
+    </p:tnLst>
+  </p:timing>
 </p:sld>
 </file>
 
@@ -4515,21 +5213,125 @@
                 </a:solidFill>
                 <a:latin typeface="Calibri"/>
               </a:rPr>
-              <a:t>Todo lo que se encuentra se convierte en backlog de deuda de diseño, no... (1/2)</a:t>
-            </a:r>
-          </a:p>
-        </p:txBody>
-      </p:sp>
-      <p:sp>
-        <p:nvSpPr>
-          <p:cNvPr id="5" name="TextBox 4"/>
+              <a:t>Demo del dia</a:t>
+            </a:r>
+          </a:p>
+        </p:txBody>
+      </p:sp>
+      <p:sp>
+        <p:nvSpPr>
+          <p:cNvPr id="5" name="Rounded Rectangle 4"/>
+          <p:cNvSpPr/>
+          <p:nvPr/>
+        </p:nvSpPr>
+        <p:spPr>
+          <a:xfrm>
+            <a:off x="5797149" y="1573813"/>
+            <a:ext cx="6010497" cy="4057845"/>
+          </a:xfrm>
+          <a:prstGeom prst="roundRect">
+            <a:avLst>
+              <a:gd name="adj" fmla="val 4000"/>
+            </a:avLst>
+          </a:prstGeom>
+          <a:solidFill>
+            <a:srgbClr val="E8EEF4"/>
+          </a:solidFill>
+          <a:ln>
+            <a:noFill/>
+          </a:ln>
+        </p:spPr>
+        <p:style>
+          <a:lnRef idx="1">
+            <a:schemeClr val="accent1"/>
+          </a:lnRef>
+          <a:fillRef idx="3">
+            <a:schemeClr val="accent1"/>
+          </a:fillRef>
+          <a:effectRef idx="2">
+            <a:schemeClr val="accent1"/>
+          </a:effectRef>
+          <a:fontRef idx="minor">
+            <a:schemeClr val="lt1"/>
+          </a:fontRef>
+        </p:style>
+        <p:txBody>
+          <a:bodyPr rtlCol="0" anchor="ctr"/>
+          <a:lstStyle/>
+          <a:p>
+            <a:pPr algn="ctr"/>
+          </a:p>
+        </p:txBody>
+      </p:sp>
+      <p:pic>
+        <p:nvPicPr>
+          <p:cNvPr id="6" name="Picture 5" descr="laptop-code-live-demo.jpg"/>
+          <p:cNvPicPr>
+            <a:picLocks noChangeAspect="1"/>
+          </p:cNvPicPr>
+          <p:nvPr/>
+        </p:nvPicPr>
+        <p:blipFill>
+          <a:blip r:embed="rId2"/>
+          <a:stretch>
+            <a:fillRect/>
+          </a:stretch>
+        </p:blipFill>
+        <p:spPr>
+          <a:xfrm>
+            <a:off x="5870301" y="1646965"/>
+            <a:ext cx="5864193" cy="3911541"/>
+          </a:xfrm>
+          <a:prstGeom prst="rect">
+            <a:avLst/>
+          </a:prstGeom>
+        </p:spPr>
+      </p:pic>
+      <p:sp>
+        <p:nvSpPr>
+          <p:cNvPr id="7" name="TextBox 6"/>
           <p:cNvSpPr txBox="1"/>
           <p:nvPr/>
         </p:nvSpPr>
         <p:spPr>
           <a:xfrm>
-            <a:off x="457200" y="1170432"/>
-            <a:ext cx="11277295" cy="5230368"/>
+            <a:off x="5870301" y="5961888"/>
+            <a:ext cx="5864193" cy="320040"/>
+          </a:xfrm>
+          <a:prstGeom prst="rect">
+            <a:avLst/>
+          </a:prstGeom>
+          <a:noFill/>
+        </p:spPr>
+        <p:txBody>
+          <a:bodyPr wrap="square">
+            <a:spAutoFit/>
+          </a:bodyPr>
+          <a:lstStyle/>
+          <a:p>
+            <a:pPr algn="ctr"/>
+            <a:r>
+              <a:rPr sz="1100" b="0" i="1">
+                <a:solidFill>
+                  <a:srgbClr val="666666"/>
+                </a:solidFill>
+                <a:latin typeface="Calibri"/>
+              </a:rPr>
+              <a:t>Foto: olia danilevich · Pexels</a:t>
+            </a:r>
+          </a:p>
+        </p:txBody>
+      </p:sp>
+      <p:sp>
+        <p:nvSpPr>
+          <p:cNvPr id="8" name="TextBox 7"/>
+          <p:cNvSpPr txBox="1"/>
+          <p:nvPr/>
+        </p:nvSpPr>
+        <p:spPr>
+          <a:xfrm>
+            <a:off x="457200" y="1353312"/>
+            <a:ext cx="5093061" cy="5047488"/>
           </a:xfrm>
           <a:prstGeom prst="rect">
             <a:avLst/>
@@ -4554,7 +5356,25 @@
                 </a:solidFill>
                 <a:latin typeface="Calibri"/>
               </a:rPr>
-              <a:t>–   Cada hallazgo pasa a ser un item con responsable, severidad, criterio de cierre verificable y un estado que puede ser aceptado, rechazado con justificacion escrita o aplazado por acuerdo.</a:t>
+              <a:t>–   </a:t>
+            </a:r>
+            <a:r>
+              <a:rPr sz="2000" b="1" i="0">
+                <a:solidFill>
+                  <a:srgbClr val="333333"/>
+                </a:solidFill>
+                <a:latin typeface="Calibri"/>
+              </a:rPr>
+              <a:t>Herramienta:</a:t>
+            </a:r>
+            <a:r>
+              <a:rPr sz="2000" b="0" i="0">
+                <a:solidFill>
+                  <a:srgbClr val="333333"/>
+                </a:solidFill>
+                <a:latin typeface="Calibri"/>
+              </a:rPr>
+              <a:t> Google Docs · draw.io</a:t>
             </a:r>
           </a:p>
           <a:p>
@@ -4570,7 +5390,25 @@
                 </a:solidFill>
                 <a:latin typeface="Calibri"/>
               </a:rPr>
-              <a:t>–   Rechazar un hallazgo es legitimo si se argumenta, y aprender a hacerlo es parte del oficio del analista.</a:t>
+              <a:t>–   </a:t>
+            </a:r>
+            <a:r>
+              <a:rPr sz="2000" b="1" i="0">
+                <a:solidFill>
+                  <a:srgbClr val="333333"/>
+                </a:solidFill>
+                <a:latin typeface="Calibri"/>
+              </a:rPr>
+              <a:t>Demo:</a:t>
+            </a:r>
+            <a:r>
+              <a:rPr sz="2000" b="0" i="0">
+                <a:solidFill>
+                  <a:srgbClr val="333333"/>
+                </a:solidFill>
+                <a:latin typeface="Calibri"/>
+              </a:rPr>
+              <a:t> Se proyecta el paquete de un equipo ficticio de la clinica y encuentra en vivo tres inconsistencias:</a:t>
             </a:r>
           </a:p>
           <a:p>
@@ -4586,30 +5424,14 @@
                 </a:solidFill>
                 <a:latin typeface="Calibri"/>
               </a:rPr>
-              <a:t>–   Sobre ese backlog se define lo que en la industria se llama definicion de terminado del paquete de diseño de la clinica: catalogo de RF y RNF numerado y sin huerfanos</a:t>
-            </a:r>
-          </a:p>
-          <a:p>
-            <a:pPr>
-              <a:spcAft>
-                <a:spcPts val="800"/>
-              </a:spcAft>
-            </a:pPr>
-            <a:r>
-              <a:rPr sz="2000" b="0" i="0">
-                <a:solidFill>
-                  <a:srgbClr val="333333"/>
-                </a:solidFill>
-                <a:latin typeface="Calibri"/>
-              </a:rPr>
-              <a:t>–   Diagrama y especificaciones de casos de uso, diagrama de clases con multiplicidades, mockups de las pantallas criticas y diccionario de datos.</a:t>
-            </a:r>
-          </a:p>
-        </p:txBody>
-      </p:sp>
-      <p:sp>
-        <p:nvSpPr>
-          <p:cNvPr id="6" name="TextBox 5"/>
+              <a:t>–   Mismo dominio: la clinica veterinaria — no otro ejemplo. Aqui se diseña, no se programa.</a:t>
+            </a:r>
+          </a:p>
+        </p:txBody>
+      </p:sp>
+      <p:sp>
+        <p:nvSpPr>
+          <p:cNvPr id="9" name="TextBox 8"/>
           <p:cNvSpPr txBox="1"/>
           <p:nvPr/>
         </p:nvSpPr>
@@ -4677,1613 +5499,6 @@
         <p:spPr>
           <a:xfrm>
             <a:off x="0" y="0"/>
-            <a:ext cx="12191695" cy="960120"/>
-          </a:xfrm>
-          <a:prstGeom prst="rect">
-            <a:avLst/>
-          </a:prstGeom>
-          <a:solidFill>
-            <a:srgbClr val="095292"/>
-          </a:solidFill>
-          <a:ln>
-            <a:noFill/>
-          </a:ln>
-        </p:spPr>
-        <p:style>
-          <a:lnRef idx="1">
-            <a:schemeClr val="accent1"/>
-          </a:lnRef>
-          <a:fillRef idx="3">
-            <a:schemeClr val="accent1"/>
-          </a:fillRef>
-          <a:effectRef idx="2">
-            <a:schemeClr val="accent1"/>
-          </a:effectRef>
-          <a:fontRef idx="minor">
-            <a:schemeClr val="lt1"/>
-          </a:fontRef>
-        </p:style>
-        <p:txBody>
-          <a:bodyPr rtlCol="0" anchor="ctr"/>
-          <a:lstStyle/>
-          <a:p>
-            <a:pPr algn="ctr"/>
-          </a:p>
-        </p:txBody>
-      </p:sp>
-      <p:sp>
-        <p:nvSpPr>
-          <p:cNvPr id="3" name="Rectangle 2"/>
-          <p:cNvSpPr/>
-          <p:nvPr/>
-        </p:nvSpPr>
-        <p:spPr>
-          <a:xfrm>
-            <a:off x="0" y="960120"/>
-            <a:ext cx="12191695" cy="41148"/>
-          </a:xfrm>
-          <a:prstGeom prst="rect">
-            <a:avLst/>
-          </a:prstGeom>
-          <a:solidFill>
-            <a:srgbClr val="FFD000"/>
-          </a:solidFill>
-          <a:ln>
-            <a:noFill/>
-          </a:ln>
-        </p:spPr>
-        <p:style>
-          <a:lnRef idx="1">
-            <a:schemeClr val="accent1"/>
-          </a:lnRef>
-          <a:fillRef idx="3">
-            <a:schemeClr val="accent1"/>
-          </a:fillRef>
-          <a:effectRef idx="2">
-            <a:schemeClr val="accent1"/>
-          </a:effectRef>
-          <a:fontRef idx="minor">
-            <a:schemeClr val="lt1"/>
-          </a:fontRef>
-        </p:style>
-        <p:txBody>
-          <a:bodyPr rtlCol="0" anchor="ctr"/>
-          <a:lstStyle/>
-          <a:p>
-            <a:pPr algn="ctr"/>
-          </a:p>
-        </p:txBody>
-      </p:sp>
-      <p:sp>
-        <p:nvSpPr>
-          <p:cNvPr id="4" name="TextBox 3"/>
-          <p:cNvSpPr txBox="1"/>
-          <p:nvPr/>
-        </p:nvSpPr>
-        <p:spPr>
-          <a:xfrm>
-            <a:off x="457200" y="164592"/>
-            <a:ext cx="11277295" cy="502920"/>
-          </a:xfrm>
-          <a:prstGeom prst="rect">
-            <a:avLst/>
-          </a:prstGeom>
-          <a:noFill/>
-        </p:spPr>
-        <p:txBody>
-          <a:bodyPr wrap="square">
-            <a:spAutoFit/>
-          </a:bodyPr>
-          <a:lstStyle/>
-          <a:p>
-            <a:r>
-              <a:rPr sz="2600" b="1" i="0">
-                <a:solidFill>
-                  <a:srgbClr val="FFFFFF"/>
-                </a:solidFill>
-                <a:latin typeface="Calibri"/>
-              </a:rPr>
-              <a:t>Todo lo que se encuentra se convierte en backlog de deuda de diseño, no... (2/2)</a:t>
-            </a:r>
-          </a:p>
-        </p:txBody>
-      </p:sp>
-      <p:sp>
-        <p:nvSpPr>
-          <p:cNvPr id="5" name="TextBox 4"/>
-          <p:cNvSpPr txBox="1"/>
-          <p:nvPr/>
-        </p:nvSpPr>
-        <p:spPr>
-          <a:xfrm>
-            <a:off x="457200" y="1170432"/>
-            <a:ext cx="11277295" cy="5230368"/>
-          </a:xfrm>
-          <a:prstGeom prst="rect">
-            <a:avLst/>
-          </a:prstGeom>
-          <a:noFill/>
-        </p:spPr>
-        <p:txBody>
-          <a:bodyPr wrap="square">
-            <a:spAutoFit/>
-          </a:bodyPr>
-          <a:lstStyle/>
-          <a:p>
-            <a:pPr>
-              <a:spcAft>
-                <a:spcPts val="800"/>
-              </a:spcAft>
-            </a:pPr>
-            <a:r>
-              <a:rPr sz="2000" b="0" i="0">
-                <a:solidFill>
-                  <a:srgbClr val="333333"/>
-                </a:solidFill>
-                <a:latin typeface="Calibri"/>
-              </a:rPr>
-              <a:t>–   Aqui se hacen visibles los tres casos de matricula: el que cursa las dos materias entrega estos planos aca y el codigo alla; el que solo cursa Programacion II recibe este paquete y todo lo que hoy quede ambiguo lo va a pagar en horas de reproceso</a:t>
-            </a:r>
-          </a:p>
-          <a:p>
-            <a:pPr>
-              <a:spcAft>
-                <a:spcPts val="800"/>
-              </a:spcAft>
-            </a:pPr>
-            <a:r>
-              <a:rPr sz="2000" b="0" i="0">
-                <a:solidFill>
-                  <a:srgbClr val="333333"/>
-                </a:solidFill>
-                <a:latin typeface="Calibri"/>
-              </a:rPr>
-              <a:t>–   Y el que solo cursa Seminario cierra con este mismo documento mas el prototipo navegable, que es una ruta completa y valida, no una version reducida del curso.</a:t>
-            </a:r>
-          </a:p>
-        </p:txBody>
-      </p:sp>
-      <p:sp>
-        <p:nvSpPr>
-          <p:cNvPr id="6" name="TextBox 5"/>
-          <p:cNvSpPr txBox="1"/>
-          <p:nvPr/>
-        </p:nvSpPr>
-        <p:spPr>
-          <a:xfrm>
-            <a:off x="11185855" y="6473952"/>
-            <a:ext cx="640080" cy="274320"/>
-          </a:xfrm>
-          <a:prstGeom prst="rect">
-            <a:avLst/>
-          </a:prstGeom>
-          <a:noFill/>
-        </p:spPr>
-        <p:txBody>
-          <a:bodyPr wrap="square">
-            <a:spAutoFit/>
-          </a:bodyPr>
-          <a:lstStyle/>
-          <a:p>
-            <a:pPr algn="r"/>
-            <a:r>
-              <a:rPr sz="1100" b="0" i="0">
-                <a:solidFill>
-                  <a:srgbClr val="666666"/>
-                </a:solidFill>
-                <a:latin typeface="Calibri"/>
-              </a:rPr>
-              <a:t>12</a:t>
-            </a:r>
-          </a:p>
-        </p:txBody>
-      </p:sp>
-    </p:spTree>
-  </p:cSld>
-  <p:clrMapOvr>
-    <a:masterClrMapping/>
-  </p:clrMapOvr>
-</p:sld>
-</file>
-
-<file path=ppt/slides/slide13.xml><?xml version="1.0" encoding="utf-8"?>
-<p:sld xmlns:a="http://schemas.openxmlformats.org/drawingml/2006/main" xmlns:p="http://schemas.openxmlformats.org/presentationml/2006/main" xmlns:r="http://schemas.openxmlformats.org/officeDocument/2006/relationships">
-  <p:cSld>
-    <p:bg>
-      <p:bgPr>
-        <a:solidFill>
-          <a:srgbClr val="FFFFFF"/>
-        </a:solidFill>
-        <a:effectLst/>
-      </p:bgPr>
-    </p:bg>
-    <p:spTree>
-      <p:nvGrpSpPr>
-        <p:cNvPr id="1" name=""/>
-        <p:cNvGrpSpPr/>
-        <p:nvPr/>
-      </p:nvGrpSpPr>
-      <p:grpSpPr/>
-      <p:sp>
-        <p:nvSpPr>
-          <p:cNvPr id="2" name="Rectangle 1"/>
-          <p:cNvSpPr/>
-          <p:nvPr/>
-        </p:nvSpPr>
-        <p:spPr>
-          <a:xfrm>
-            <a:off x="0" y="0"/>
-            <a:ext cx="12191695" cy="960120"/>
-          </a:xfrm>
-          <a:prstGeom prst="rect">
-            <a:avLst/>
-          </a:prstGeom>
-          <a:solidFill>
-            <a:srgbClr val="095292"/>
-          </a:solidFill>
-          <a:ln>
-            <a:noFill/>
-          </a:ln>
-        </p:spPr>
-        <p:style>
-          <a:lnRef idx="1">
-            <a:schemeClr val="accent1"/>
-          </a:lnRef>
-          <a:fillRef idx="3">
-            <a:schemeClr val="accent1"/>
-          </a:fillRef>
-          <a:effectRef idx="2">
-            <a:schemeClr val="accent1"/>
-          </a:effectRef>
-          <a:fontRef idx="minor">
-            <a:schemeClr val="lt1"/>
-          </a:fontRef>
-        </p:style>
-        <p:txBody>
-          <a:bodyPr rtlCol="0" anchor="ctr"/>
-          <a:lstStyle/>
-          <a:p>
-            <a:pPr algn="ctr"/>
-          </a:p>
-        </p:txBody>
-      </p:sp>
-      <p:sp>
-        <p:nvSpPr>
-          <p:cNvPr id="3" name="Rectangle 2"/>
-          <p:cNvSpPr/>
-          <p:nvPr/>
-        </p:nvSpPr>
-        <p:spPr>
-          <a:xfrm>
-            <a:off x="0" y="960120"/>
-            <a:ext cx="12191695" cy="41148"/>
-          </a:xfrm>
-          <a:prstGeom prst="rect">
-            <a:avLst/>
-          </a:prstGeom>
-          <a:solidFill>
-            <a:srgbClr val="FFD000"/>
-          </a:solidFill>
-          <a:ln>
-            <a:noFill/>
-          </a:ln>
-        </p:spPr>
-        <p:style>
-          <a:lnRef idx="1">
-            <a:schemeClr val="accent1"/>
-          </a:lnRef>
-          <a:fillRef idx="3">
-            <a:schemeClr val="accent1"/>
-          </a:fillRef>
-          <a:effectRef idx="2">
-            <a:schemeClr val="accent1"/>
-          </a:effectRef>
-          <a:fontRef idx="minor">
-            <a:schemeClr val="lt1"/>
-          </a:fontRef>
-        </p:style>
-        <p:txBody>
-          <a:bodyPr rtlCol="0" anchor="ctr"/>
-          <a:lstStyle/>
-          <a:p>
-            <a:pPr algn="ctr"/>
-          </a:p>
-        </p:txBody>
-      </p:sp>
-      <p:sp>
-        <p:nvSpPr>
-          <p:cNvPr id="4" name="TextBox 3"/>
-          <p:cNvSpPr txBox="1"/>
-          <p:nvPr/>
-        </p:nvSpPr>
-        <p:spPr>
-          <a:xfrm>
-            <a:off x="457200" y="164592"/>
-            <a:ext cx="11277295" cy="502920"/>
-          </a:xfrm>
-          <a:prstGeom prst="rect">
-            <a:avLst/>
-          </a:prstGeom>
-          <a:noFill/>
-        </p:spPr>
-        <p:txBody>
-          <a:bodyPr wrap="square">
-            <a:spAutoFit/>
-          </a:bodyPr>
-          <a:lstStyle/>
-          <a:p>
-            <a:r>
-              <a:rPr sz="2600" b="1" i="0">
-                <a:solidFill>
-                  <a:srgbClr val="FFFFFF"/>
-                </a:solidFill>
-                <a:latin typeface="Calibri"/>
-              </a:rPr>
-              <a:t>El glosario de nombres canonicos: el hueco mas comun</a:t>
-            </a:r>
-          </a:p>
-        </p:txBody>
-      </p:sp>
-      <p:sp>
-        <p:nvSpPr>
-          <p:cNvPr id="5" name="Rounded Rectangle 4"/>
-          <p:cNvSpPr/>
-          <p:nvPr/>
-        </p:nvSpPr>
-        <p:spPr>
-          <a:xfrm>
-            <a:off x="457200" y="1261872"/>
-            <a:ext cx="11277295" cy="5093208"/>
-          </a:xfrm>
-          <a:prstGeom prst="roundRect">
-            <a:avLst>
-              <a:gd name="adj" fmla="val 12000"/>
-            </a:avLst>
-          </a:prstGeom>
-          <a:solidFill>
-            <a:srgbClr val="1E2A38"/>
-          </a:solidFill>
-          <a:ln>
-            <a:noFill/>
-          </a:ln>
-        </p:spPr>
-        <p:style>
-          <a:lnRef idx="1">
-            <a:schemeClr val="accent1"/>
-          </a:lnRef>
-          <a:fillRef idx="3">
-            <a:schemeClr val="accent1"/>
-          </a:fillRef>
-          <a:effectRef idx="2">
-            <a:schemeClr val="accent1"/>
-          </a:effectRef>
-          <a:fontRef idx="minor">
-            <a:schemeClr val="lt1"/>
-          </a:fontRef>
-        </p:style>
-        <p:txBody>
-          <a:bodyPr rtlCol="0" anchor="ctr"/>
-          <a:lstStyle/>
-          <a:p>
-            <a:pPr algn="ctr"/>
-          </a:p>
-        </p:txBody>
-      </p:sp>
-      <p:sp>
-        <p:nvSpPr>
-          <p:cNvPr id="6" name="Rectangle 5"/>
-          <p:cNvSpPr/>
-          <p:nvPr/>
-        </p:nvSpPr>
-        <p:spPr>
-          <a:xfrm>
-            <a:off x="457200" y="1261872"/>
-            <a:ext cx="11277295" cy="320040"/>
-          </a:xfrm>
-          <a:prstGeom prst="rect">
-            <a:avLst/>
-          </a:prstGeom>
-          <a:solidFill>
-            <a:srgbClr val="095292"/>
-          </a:solidFill>
-          <a:ln>
-            <a:noFill/>
-          </a:ln>
-        </p:spPr>
-        <p:style>
-          <a:lnRef idx="1">
-            <a:schemeClr val="accent1"/>
-          </a:lnRef>
-          <a:fillRef idx="3">
-            <a:schemeClr val="accent1"/>
-          </a:fillRef>
-          <a:effectRef idx="2">
-            <a:schemeClr val="accent1"/>
-          </a:effectRef>
-          <a:fontRef idx="minor">
-            <a:schemeClr val="lt1"/>
-          </a:fontRef>
-        </p:style>
-        <p:txBody>
-          <a:bodyPr rtlCol="0" anchor="ctr"/>
-          <a:lstStyle/>
-          <a:p>
-            <a:pPr algn="ctr"/>
-          </a:p>
-        </p:txBody>
-      </p:sp>
-      <p:sp>
-        <p:nvSpPr>
-          <p:cNvPr id="7" name="TextBox 6"/>
-          <p:cNvSpPr txBox="1"/>
-          <p:nvPr/>
-        </p:nvSpPr>
-        <p:spPr>
-          <a:xfrm>
-            <a:off x="685800" y="1307592"/>
-            <a:ext cx="10820095" cy="256032"/>
-          </a:xfrm>
-          <a:prstGeom prst="rect">
-            <a:avLst/>
-          </a:prstGeom>
-          <a:noFill/>
-        </p:spPr>
-        <p:txBody>
-          <a:bodyPr wrap="square" anchor="ctr"/>
-          <a:lstStyle/>
-          <a:p>
-            <a:r>
-              <a:rPr sz="1000" b="1" i="0">
-                <a:solidFill>
-                  <a:srgbClr val="269CCB"/>
-                </a:solidFill>
-                <a:latin typeface="Calibri"/>
-              </a:rPr>
-              <a:t>● ● ●</a:t>
-            </a:r>
-          </a:p>
-        </p:txBody>
-      </p:sp>
-      <p:sp>
-        <p:nvSpPr>
-          <p:cNvPr id="8" name="TextBox 7"/>
-          <p:cNvSpPr txBox="1"/>
-          <p:nvPr/>
-        </p:nvSpPr>
-        <p:spPr>
-          <a:xfrm>
-            <a:off x="777240" y="1719072"/>
-            <a:ext cx="10637215" cy="4453128"/>
-          </a:xfrm>
-          <a:prstGeom prst="rect">
-            <a:avLst/>
-          </a:prstGeom>
-          <a:noFill/>
-        </p:spPr>
-        <p:txBody>
-          <a:bodyPr wrap="square">
-            <a:spAutoFit/>
-          </a:bodyPr>
-          <a:lstStyle/>
-          <a:p>
-            <a:pPr>
-              <a:spcAft>
-                <a:spcPts val="400"/>
-              </a:spcAft>
-            </a:pPr>
-            <a:r>
-              <a:rPr sz="1400" b="0" i="0">
-                <a:solidFill>
-                  <a:srgbClr val="FFFFFF"/>
-                </a:solidFill>
-                <a:latin typeface="Calibri"/>
-              </a:rPr>
-              <a:t>| Concepto      | Nombre canonico | Como aparece mal en el paquete     |</a:t>
-            </a:r>
-          </a:p>
-          <a:p>
-            <a:pPr>
-              <a:spcAft>
-                <a:spcPts val="400"/>
-              </a:spcAft>
-            </a:pPr>
-            <a:r>
-              <a:rPr sz="1400" b="0" i="0">
-                <a:solidFill>
-                  <a:srgbClr val="FFFFFF"/>
-                </a:solidFill>
-                <a:latin typeface="Calibri"/>
-              </a:rPr>
-              <a:t>|---------------|-----------------|------------------------------------|</a:t>
-            </a:r>
-          </a:p>
-          <a:p>
-            <a:pPr>
-              <a:spcAft>
-                <a:spcPts val="400"/>
-              </a:spcAft>
-            </a:pPr>
-            <a:r>
-              <a:rPr sz="1400" b="0" i="0">
-                <a:solidFill>
-                  <a:srgbClr val="FFFFFF"/>
-                </a:solidFill>
-                <a:latin typeface="Calibri"/>
-              </a:rPr>
-              <a:t>| el animal     | Mascota         | Paciente, Animal, mascotas         |</a:t>
-            </a:r>
-          </a:p>
-          <a:p>
-            <a:pPr>
-              <a:spcAft>
-                <a:spcPts val="400"/>
-              </a:spcAft>
-            </a:pPr>
-            <a:r>
-              <a:rPr sz="1400" b="0" i="0">
-                <a:solidFill>
-                  <a:srgbClr val="FFFFFF"/>
-                </a:solidFill>
-                <a:latin typeface="Calibri"/>
-              </a:rPr>
-              <a:t>| quien lo trae | Dueno           | Propietario, Cliente, Amo          |</a:t>
-            </a:r>
-          </a:p>
-          <a:p>
-            <a:pPr>
-              <a:spcAft>
-                <a:spcPts val="400"/>
-              </a:spcAft>
-            </a:pPr>
-            <a:r>
-              <a:rPr sz="1400" b="0" i="0">
-                <a:solidFill>
-                  <a:srgbClr val="FFFFFF"/>
-                </a:solidFill>
-                <a:latin typeface="Calibri"/>
-              </a:rPr>
-              <a:t>| el encuentro  | Cita            | Turno, Agendamiento, Reserva       |</a:t>
-            </a:r>
-          </a:p>
-          <a:p>
-            <a:pPr>
-              <a:spcAft>
-                <a:spcPts val="400"/>
-              </a:spcAft>
-            </a:pPr>
-            <a:r>
-              <a:rPr sz="1400" b="0" i="0">
-                <a:solidFill>
-                  <a:srgbClr val="FFFFFF"/>
-                </a:solidFill>
-                <a:latin typeface="Calibri"/>
-              </a:rPr>
-              <a:t>| el registro   | Consulta        | Atencion, HistoriaClinica          |</a:t>
-            </a:r>
-          </a:p>
-          <a:p>
-            <a:pPr>
-              <a:spcAft>
-                <a:spcPts val="400"/>
-              </a:spcAft>
-            </a:pPr>
-            <a:r>
-              <a:rPr sz="1400" b="0" i="0">
-                <a:solidFill>
-                  <a:srgbClr val="FFFFFF"/>
-                </a:solidFill>
-                <a:latin typeface="Calibri"/>
-              </a:rPr>
-              <a:t/>
-            </a:r>
-          </a:p>
-          <a:p>
-            <a:pPr>
-              <a:spcAft>
-                <a:spcPts val="400"/>
-              </a:spcAft>
-            </a:pPr>
-            <a:r>
-              <a:rPr sz="1400" b="0" i="0">
-                <a:solidFill>
-                  <a:srgbClr val="FFFFFF"/>
-                </a:solidFill>
-                <a:latin typeface="Calibri"/>
-              </a:rPr>
-              <a:t>-- El diagrama de clases dice Mascota, el caso de uso dice Paciente y el</a:t>
-            </a:r>
-          </a:p>
-          <a:p>
-            <a:pPr>
-              <a:spcAft>
-                <a:spcPts val="400"/>
-              </a:spcAft>
-            </a:pPr>
-            <a:r>
-              <a:rPr sz="1400" b="0" i="0">
-                <a:solidFill>
-                  <a:srgbClr val="FFFFFF"/>
-                </a:solidFill>
-                <a:latin typeface="Calibri"/>
-              </a:rPr>
-              <a:t>-- wireframe dice Animal: son tres artefactos que hablan de cosas</a:t>
-            </a:r>
-          </a:p>
-          <a:p>
-            <a:pPr>
-              <a:spcAft>
-                <a:spcPts val="400"/>
-              </a:spcAft>
-            </a:pPr>
-            <a:r>
-              <a:rPr sz="1400" b="0" i="0">
-                <a:solidFill>
-                  <a:srgbClr val="FFFFFF"/>
-                </a:solidFill>
-                <a:latin typeface="Calibri"/>
-              </a:rPr>
-              <a:t>-- distintas para quien los lee. Un solo nombre por concepto, y el mismo</a:t>
-            </a:r>
-          </a:p>
-          <a:p>
-            <a:pPr>
-              <a:spcAft>
-                <a:spcPts val="400"/>
-              </a:spcAft>
-            </a:pPr>
-            <a:r>
-              <a:rPr sz="1400" b="0" i="0">
-                <a:solidFill>
-                  <a:srgbClr val="FFFFFF"/>
-                </a:solidFill>
-                <a:latin typeface="Calibri"/>
-              </a:rPr>
-              <a:t>-- en TODOS los artefactos.</a:t>
-            </a:r>
-          </a:p>
-        </p:txBody>
-      </p:sp>
-      <p:sp>
-        <p:nvSpPr>
-          <p:cNvPr id="9" name="TextBox 8"/>
-          <p:cNvSpPr txBox="1"/>
-          <p:nvPr/>
-        </p:nvSpPr>
-        <p:spPr>
-          <a:xfrm>
-            <a:off x="11185855" y="6473952"/>
-            <a:ext cx="640080" cy="274320"/>
-          </a:xfrm>
-          <a:prstGeom prst="rect">
-            <a:avLst/>
-          </a:prstGeom>
-          <a:noFill/>
-        </p:spPr>
-        <p:txBody>
-          <a:bodyPr wrap="square">
-            <a:spAutoFit/>
-          </a:bodyPr>
-          <a:lstStyle/>
-          <a:p>
-            <a:pPr algn="r"/>
-            <a:r>
-              <a:rPr sz="1100" b="0" i="0">
-                <a:solidFill>
-                  <a:srgbClr val="666666"/>
-                </a:solidFill>
-                <a:latin typeface="Calibri"/>
-              </a:rPr>
-              <a:t>13</a:t>
-            </a:r>
-          </a:p>
-        </p:txBody>
-      </p:sp>
-    </p:spTree>
-  </p:cSld>
-  <p:clrMapOvr>
-    <a:masterClrMapping/>
-  </p:clrMapOvr>
-</p:sld>
-</file>
-
-<file path=ppt/slides/slide14.xml><?xml version="1.0" encoding="utf-8"?>
-<p:sld xmlns:a="http://schemas.openxmlformats.org/drawingml/2006/main" xmlns:p="http://schemas.openxmlformats.org/presentationml/2006/main" xmlns:r="http://schemas.openxmlformats.org/officeDocument/2006/relationships">
-  <p:cSld>
-    <p:bg>
-      <p:bgPr>
-        <a:solidFill>
-          <a:srgbClr val="FFFFFF"/>
-        </a:solidFill>
-        <a:effectLst/>
-      </p:bgPr>
-    </p:bg>
-    <p:spTree>
-      <p:nvGrpSpPr>
-        <p:cNvPr id="1" name=""/>
-        <p:cNvGrpSpPr/>
-        <p:nvPr/>
-      </p:nvGrpSpPr>
-      <p:grpSpPr/>
-      <p:sp>
-        <p:nvSpPr>
-          <p:cNvPr id="2" name="Rectangle 1"/>
-          <p:cNvSpPr/>
-          <p:nvPr/>
-        </p:nvSpPr>
-        <p:spPr>
-          <a:xfrm>
-            <a:off x="0" y="0"/>
-            <a:ext cx="12191695" cy="960120"/>
-          </a:xfrm>
-          <a:prstGeom prst="rect">
-            <a:avLst/>
-          </a:prstGeom>
-          <a:solidFill>
-            <a:srgbClr val="095292"/>
-          </a:solidFill>
-          <a:ln>
-            <a:noFill/>
-          </a:ln>
-        </p:spPr>
-        <p:style>
-          <a:lnRef idx="1">
-            <a:schemeClr val="accent1"/>
-          </a:lnRef>
-          <a:fillRef idx="3">
-            <a:schemeClr val="accent1"/>
-          </a:fillRef>
-          <a:effectRef idx="2">
-            <a:schemeClr val="accent1"/>
-          </a:effectRef>
-          <a:fontRef idx="minor">
-            <a:schemeClr val="lt1"/>
-          </a:fontRef>
-        </p:style>
-        <p:txBody>
-          <a:bodyPr rtlCol="0" anchor="ctr"/>
-          <a:lstStyle/>
-          <a:p>
-            <a:pPr algn="ctr"/>
-          </a:p>
-        </p:txBody>
-      </p:sp>
-      <p:sp>
-        <p:nvSpPr>
-          <p:cNvPr id="3" name="Rectangle 2"/>
-          <p:cNvSpPr/>
-          <p:nvPr/>
-        </p:nvSpPr>
-        <p:spPr>
-          <a:xfrm>
-            <a:off x="0" y="960120"/>
-            <a:ext cx="12191695" cy="41148"/>
-          </a:xfrm>
-          <a:prstGeom prst="rect">
-            <a:avLst/>
-          </a:prstGeom>
-          <a:solidFill>
-            <a:srgbClr val="FFD000"/>
-          </a:solidFill>
-          <a:ln>
-            <a:noFill/>
-          </a:ln>
-        </p:spPr>
-        <p:style>
-          <a:lnRef idx="1">
-            <a:schemeClr val="accent1"/>
-          </a:lnRef>
-          <a:fillRef idx="3">
-            <a:schemeClr val="accent1"/>
-          </a:fillRef>
-          <a:effectRef idx="2">
-            <a:schemeClr val="accent1"/>
-          </a:effectRef>
-          <a:fontRef idx="minor">
-            <a:schemeClr val="lt1"/>
-          </a:fontRef>
-        </p:style>
-        <p:txBody>
-          <a:bodyPr rtlCol="0" anchor="ctr"/>
-          <a:lstStyle/>
-          <a:p>
-            <a:pPr algn="ctr"/>
-          </a:p>
-        </p:txBody>
-      </p:sp>
-      <p:sp>
-        <p:nvSpPr>
-          <p:cNvPr id="4" name="TextBox 3"/>
-          <p:cNvSpPr txBox="1"/>
-          <p:nvPr/>
-        </p:nvSpPr>
-        <p:spPr>
-          <a:xfrm>
-            <a:off x="457200" y="164592"/>
-            <a:ext cx="11277295" cy="502920"/>
-          </a:xfrm>
-          <a:prstGeom prst="rect">
-            <a:avLst/>
-          </a:prstGeom>
-          <a:noFill/>
-        </p:spPr>
-        <p:txBody>
-          <a:bodyPr wrap="square">
-            <a:spAutoFit/>
-          </a:bodyPr>
-          <a:lstStyle/>
-          <a:p>
-            <a:r>
-              <a:rPr sz="2600" b="1" i="0">
-                <a:solidFill>
-                  <a:srgbClr val="FFFFFF"/>
-                </a:solidFill>
-                <a:latin typeface="Calibri"/>
-              </a:rPr>
-              <a:t>Auditoria cruzada de la clinica: la matriz que delata las contradicciones</a:t>
-            </a:r>
-          </a:p>
-        </p:txBody>
-      </p:sp>
-      <p:sp>
-        <p:nvSpPr>
-          <p:cNvPr id="5" name="Rounded Rectangle 4"/>
-          <p:cNvSpPr/>
-          <p:nvPr/>
-        </p:nvSpPr>
-        <p:spPr>
-          <a:xfrm>
-            <a:off x="457200" y="1261872"/>
-            <a:ext cx="11277295" cy="4773168"/>
-          </a:xfrm>
-          <a:prstGeom prst="roundRect">
-            <a:avLst>
-              <a:gd name="adj" fmla="val 12000"/>
-            </a:avLst>
-          </a:prstGeom>
-          <a:solidFill>
-            <a:srgbClr val="1E2A38"/>
-          </a:solidFill>
-          <a:ln>
-            <a:noFill/>
-          </a:ln>
-        </p:spPr>
-        <p:style>
-          <a:lnRef idx="1">
-            <a:schemeClr val="accent1"/>
-          </a:lnRef>
-          <a:fillRef idx="3">
-            <a:schemeClr val="accent1"/>
-          </a:fillRef>
-          <a:effectRef idx="2">
-            <a:schemeClr val="accent1"/>
-          </a:effectRef>
-          <a:fontRef idx="minor">
-            <a:schemeClr val="lt1"/>
-          </a:fontRef>
-        </p:style>
-        <p:txBody>
-          <a:bodyPr rtlCol="0" anchor="ctr"/>
-          <a:lstStyle/>
-          <a:p>
-            <a:pPr algn="ctr"/>
-          </a:p>
-        </p:txBody>
-      </p:sp>
-      <p:sp>
-        <p:nvSpPr>
-          <p:cNvPr id="6" name="Rectangle 5"/>
-          <p:cNvSpPr/>
-          <p:nvPr/>
-        </p:nvSpPr>
-        <p:spPr>
-          <a:xfrm>
-            <a:off x="457200" y="1261872"/>
-            <a:ext cx="11277295" cy="320040"/>
-          </a:xfrm>
-          <a:prstGeom prst="rect">
-            <a:avLst/>
-          </a:prstGeom>
-          <a:solidFill>
-            <a:srgbClr val="095292"/>
-          </a:solidFill>
-          <a:ln>
-            <a:noFill/>
-          </a:ln>
-        </p:spPr>
-        <p:style>
-          <a:lnRef idx="1">
-            <a:schemeClr val="accent1"/>
-          </a:lnRef>
-          <a:fillRef idx="3">
-            <a:schemeClr val="accent1"/>
-          </a:fillRef>
-          <a:effectRef idx="2">
-            <a:schemeClr val="accent1"/>
-          </a:effectRef>
-          <a:fontRef idx="minor">
-            <a:schemeClr val="lt1"/>
-          </a:fontRef>
-        </p:style>
-        <p:txBody>
-          <a:bodyPr rtlCol="0" anchor="ctr"/>
-          <a:lstStyle/>
-          <a:p>
-            <a:pPr algn="ctr"/>
-          </a:p>
-        </p:txBody>
-      </p:sp>
-      <p:sp>
-        <p:nvSpPr>
-          <p:cNvPr id="7" name="TextBox 6"/>
-          <p:cNvSpPr txBox="1"/>
-          <p:nvPr/>
-        </p:nvSpPr>
-        <p:spPr>
-          <a:xfrm>
-            <a:off x="685800" y="1307592"/>
-            <a:ext cx="10820095" cy="256032"/>
-          </a:xfrm>
-          <a:prstGeom prst="rect">
-            <a:avLst/>
-          </a:prstGeom>
-          <a:noFill/>
-        </p:spPr>
-        <p:txBody>
-          <a:bodyPr wrap="square" anchor="ctr"/>
-          <a:lstStyle/>
-          <a:p>
-            <a:r>
-              <a:rPr sz="1000" b="1" i="0">
-                <a:solidFill>
-                  <a:srgbClr val="269CCB"/>
-                </a:solidFill>
-                <a:latin typeface="Calibri"/>
-              </a:rPr>
-              <a:t>● ● ●</a:t>
-            </a:r>
-          </a:p>
-        </p:txBody>
-      </p:sp>
-      <p:sp>
-        <p:nvSpPr>
-          <p:cNvPr id="8" name="TextBox 7"/>
-          <p:cNvSpPr txBox="1"/>
-          <p:nvPr/>
-        </p:nvSpPr>
-        <p:spPr>
-          <a:xfrm>
-            <a:off x="777240" y="1719072"/>
-            <a:ext cx="10637215" cy="4133087"/>
-          </a:xfrm>
-          <a:prstGeom prst="rect">
-            <a:avLst/>
-          </a:prstGeom>
-          <a:noFill/>
-        </p:spPr>
-        <p:txBody>
-          <a:bodyPr wrap="square">
-            <a:spAutoFit/>
-          </a:bodyPr>
-          <a:lstStyle/>
-          <a:p>
-            <a:pPr>
-              <a:spcAft>
-                <a:spcPts val="400"/>
-              </a:spcAft>
-            </a:pPr>
-            <a:r>
-              <a:rPr sz="1400" b="0" i="0">
-                <a:solidFill>
-                  <a:srgbClr val="FFFFFF"/>
-                </a:solidFill>
-                <a:latin typeface="Calibri"/>
-              </a:rPr>
-              <a:t>| RF     | Caso de uso                  | Clases implicadas      | Mockup | Estado      |</a:t>
-            </a:r>
-          </a:p>
-          <a:p>
-            <a:pPr>
-              <a:spcAft>
-                <a:spcPts val="400"/>
-              </a:spcAft>
-            </a:pPr>
-            <a:r>
-              <a:rPr sz="1400" b="0" i="0">
-                <a:solidFill>
-                  <a:srgbClr val="FFFFFF"/>
-                </a:solidFill>
-                <a:latin typeface="Calibri"/>
-              </a:rPr>
-              <a:t>|--------|------------------------------|------------------------|--------|-------------|</a:t>
-            </a:r>
-          </a:p>
-          <a:p>
-            <a:pPr>
-              <a:spcAft>
-                <a:spcPts val="400"/>
-              </a:spcAft>
-            </a:pPr>
-            <a:r>
-              <a:rPr sz="1400" b="0" i="0">
-                <a:solidFill>
-                  <a:srgbClr val="FFFFFF"/>
-                </a:solidFill>
-                <a:latin typeface="Calibri"/>
-              </a:rPr>
-              <a:t>| RF-02  | CU-00 Registrar propietario  | Propietario            | M-01   | OK          |</a:t>
-            </a:r>
-          </a:p>
-          <a:p>
-            <a:pPr>
-              <a:spcAft>
-                <a:spcPts val="400"/>
-              </a:spcAft>
-            </a:pPr>
-            <a:r>
-              <a:rPr sz="1400" b="0" i="0">
-                <a:solidFill>
-                  <a:srgbClr val="FFFFFF"/>
-                </a:solidFill>
-                <a:latin typeface="Calibri"/>
-              </a:rPr>
-              <a:t>| RF-03  | CU-01 Registrar mascota      | Mascota, Propietario   | M-02   | OK          |</a:t>
-            </a:r>
-          </a:p>
-          <a:p>
-            <a:pPr>
-              <a:spcAft>
-                <a:spcPts val="400"/>
-              </a:spcAft>
-            </a:pPr>
-            <a:r>
-              <a:rPr sz="1400" b="0" i="0">
-                <a:solidFill>
-                  <a:srgbClr val="FFFFFF"/>
-                </a:solidFill>
-                <a:latin typeface="Calibri"/>
-              </a:rPr>
-              <a:t>| RF-05  | CU-02 Buscar expediente      | Mascota, Consulta      | M-03   | OK          |</a:t>
-            </a:r>
-          </a:p>
-          <a:p>
-            <a:pPr>
-              <a:spcAft>
-                <a:spcPts val="400"/>
-              </a:spcAft>
-            </a:pPr>
-            <a:r>
-              <a:rPr sz="1400" b="0" i="0">
-                <a:solidFill>
-                  <a:srgbClr val="FFFFFF"/>
-                </a:solidFill>
-                <a:latin typeface="Calibri"/>
-              </a:rPr>
-              <a:t>| RF-06  | CU-03 Registrar consulta     | Consulta, ???          | M-05   | HALLAZGO    |</a:t>
-            </a:r>
-          </a:p>
-          <a:p>
-            <a:pPr>
-              <a:spcAft>
-                <a:spcPts val="400"/>
-              </a:spcAft>
-            </a:pPr>
-            <a:r>
-              <a:rPr sz="1400" b="0" i="0">
-                <a:solidFill>
-                  <a:srgbClr val="FFFFFF"/>
-                </a:solidFill>
-                <a:latin typeface="Calibri"/>
-              </a:rPr>
-              <a:t>| RF-07  | (no existe)                  | (no existe)            | --     | HUERFANO    |</a:t>
-            </a:r>
-          </a:p>
-          <a:p>
-            <a:pPr>
-              <a:spcAft>
-                <a:spcPts val="400"/>
-              </a:spcAft>
-            </a:pPr>
-            <a:r>
-              <a:rPr sz="1400" b="0" i="0">
-                <a:solidFill>
-                  <a:srgbClr val="FFFFFF"/>
-                </a:solidFill>
-                <a:latin typeface="Calibri"/>
-              </a:rPr>
-              <a:t>| (sin)  | CU-04 Agendar cita           | Cita, Veterinario      | M-04   | SIN ORIGEN  |</a:t>
-            </a:r>
-          </a:p>
-          <a:p>
-            <a:pPr>
-              <a:spcAft>
-                <a:spcPts val="400"/>
-              </a:spcAft>
-            </a:pPr>
-            <a:r>
-              <a:rPr sz="1400" b="0" i="0">
-                <a:solidFill>
-                  <a:srgbClr val="FFFFFF"/>
-                </a:solidFill>
-                <a:latin typeface="Calibri"/>
-              </a:rPr>
-              <a:t/>
-            </a:r>
-          </a:p>
-          <a:p>
-            <a:pPr>
-              <a:spcAft>
-                <a:spcPts val="400"/>
-              </a:spcAft>
-            </a:pPr>
-            <a:r>
-              <a:rPr sz="1400" b="0" i="0">
-                <a:solidFill>
-                  <a:srgbClr val="FFFFFF"/>
-                </a:solidFill>
-                <a:latin typeface="Calibri"/>
-              </a:rPr>
-              <a:t>H-01 (mayor): CU-03 exige registrar quien atendio, pero Consulta no se relaciona con Veterinario.</a:t>
-            </a:r>
-          </a:p>
-          <a:p>
-            <a:pPr>
-              <a:spcAft>
-                <a:spcPts val="400"/>
-              </a:spcAft>
-            </a:pPr>
-            <a:r>
-              <a:rPr sz="1400" b="0" i="0">
-                <a:solidFill>
-                  <a:srgbClr val="FFFFFF"/>
-                </a:solidFill>
-                <a:latin typeface="Calibri"/>
-              </a:rPr>
-              <a:t>H-02 (mayor): la fila de CU-04 quedo sin RF; debe ligarse a RF-08 Agendar cita o eliminarse el CU.</a:t>
-            </a:r>
-          </a:p>
-          <a:p>
-            <a:pPr>
-              <a:spcAft>
-                <a:spcPts val="400"/>
-              </a:spcAft>
-            </a:pPr>
-            <a:r>
-              <a:rPr sz="1400" b="0" i="0">
-                <a:solidFill>
-                  <a:srgbClr val="FFFFFF"/>
-                </a:solidFill>
-                <a:latin typeface="Calibri"/>
-              </a:rPr>
-              <a:t>H-03 (bloqueante): la clase Mascota guarda dueño como texto en lugar de asociarse a Propietario.</a:t>
-            </a:r>
-          </a:p>
-          <a:p>
-            <a:pPr>
-              <a:spcAft>
-                <a:spcPts val="400"/>
-              </a:spcAft>
-            </a:pPr>
-            <a:r>
-              <a:rPr sz="1400" b="0" i="0">
-                <a:solidFill>
-                  <a:srgbClr val="FFFFFF"/>
-                </a:solidFill>
-                <a:latin typeface="Calibri"/>
-              </a:rPr>
-              <a:t>H-04 (menor): el RNF-02 de 3 segundos no aparece en ninguna postcondicion de CU-02.</a:t>
-            </a:r>
-          </a:p>
-          <a:p>
-            <a:pPr>
-              <a:spcAft>
-                <a:spcPts val="400"/>
-              </a:spcAft>
-            </a:pPr>
-            <a:r>
-              <a:rPr sz="1400" b="0" i="0">
-                <a:solidFill>
-                  <a:srgbClr val="FFFFFF"/>
-                </a:solidFill>
-                <a:latin typeface="Calibri"/>
-              </a:rPr>
-              <a:t>Glosario canonico: Propietario (prohibido Dueño, Cliente, Responsable) | Cita != Consulta.</a:t>
-            </a:r>
-          </a:p>
-        </p:txBody>
-      </p:sp>
-      <p:sp>
-        <p:nvSpPr>
-          <p:cNvPr id="9" name="TextBox 8"/>
-          <p:cNvSpPr txBox="1"/>
-          <p:nvPr/>
-        </p:nvSpPr>
-        <p:spPr>
-          <a:xfrm>
-            <a:off x="457200" y="6080760"/>
-            <a:ext cx="11277295" cy="320040"/>
-          </a:xfrm>
-          <a:prstGeom prst="rect">
-            <a:avLst/>
-          </a:prstGeom>
-          <a:noFill/>
-        </p:spPr>
-        <p:txBody>
-          <a:bodyPr wrap="square">
-            <a:spAutoFit/>
-          </a:bodyPr>
-          <a:lstStyle/>
-          <a:p>
-            <a:pPr algn="ctr"/>
-            <a:r>
-              <a:rPr sz="1200" b="0" i="1">
-                <a:solidFill>
-                  <a:srgbClr val="666666"/>
-                </a:solidFill>
-                <a:latin typeface="Calibri"/>
-              </a:rPr>
-              <a:t>Una tabla de cuatro columnas encuentra en veinte minutos las contradicciones que un equipo no ve en tres semanas.</a:t>
-            </a:r>
-          </a:p>
-        </p:txBody>
-      </p:sp>
-      <p:sp>
-        <p:nvSpPr>
-          <p:cNvPr id="10" name="TextBox 9"/>
-          <p:cNvSpPr txBox="1"/>
-          <p:nvPr/>
-        </p:nvSpPr>
-        <p:spPr>
-          <a:xfrm>
-            <a:off x="11185855" y="6473952"/>
-            <a:ext cx="640080" cy="274320"/>
-          </a:xfrm>
-          <a:prstGeom prst="rect">
-            <a:avLst/>
-          </a:prstGeom>
-          <a:noFill/>
-        </p:spPr>
-        <p:txBody>
-          <a:bodyPr wrap="square">
-            <a:spAutoFit/>
-          </a:bodyPr>
-          <a:lstStyle/>
-          <a:p>
-            <a:pPr algn="r"/>
-            <a:r>
-              <a:rPr sz="1100" b="0" i="0">
-                <a:solidFill>
-                  <a:srgbClr val="666666"/>
-                </a:solidFill>
-                <a:latin typeface="Calibri"/>
-              </a:rPr>
-              <a:t>14</a:t>
-            </a:r>
-          </a:p>
-        </p:txBody>
-      </p:sp>
-    </p:spTree>
-  </p:cSld>
-  <p:clrMapOvr>
-    <a:masterClrMapping/>
-  </p:clrMapOvr>
-</p:sld>
-</file>
-
-<file path=ppt/slides/slide15.xml><?xml version="1.0" encoding="utf-8"?>
-<p:sld xmlns:a="http://schemas.openxmlformats.org/drawingml/2006/main" xmlns:p="http://schemas.openxmlformats.org/presentationml/2006/main" xmlns:r="http://schemas.openxmlformats.org/officeDocument/2006/relationships">
-  <p:cSld>
-    <p:bg>
-      <p:bgPr>
-        <a:solidFill>
-          <a:srgbClr val="FFFFFF"/>
-        </a:solidFill>
-        <a:effectLst/>
-      </p:bgPr>
-    </p:bg>
-    <p:spTree>
-      <p:nvGrpSpPr>
-        <p:cNvPr id="1" name=""/>
-        <p:cNvGrpSpPr/>
-        <p:nvPr/>
-      </p:nvGrpSpPr>
-      <p:grpSpPr/>
-      <p:sp>
-        <p:nvSpPr>
-          <p:cNvPr id="2" name="Rectangle 1"/>
-          <p:cNvSpPr/>
-          <p:nvPr/>
-        </p:nvSpPr>
-        <p:spPr>
-          <a:xfrm>
-            <a:off x="0" y="0"/>
-            <a:ext cx="12191695" cy="960120"/>
-          </a:xfrm>
-          <a:prstGeom prst="rect">
-            <a:avLst/>
-          </a:prstGeom>
-          <a:solidFill>
-            <a:srgbClr val="095292"/>
-          </a:solidFill>
-          <a:ln>
-            <a:noFill/>
-          </a:ln>
-        </p:spPr>
-        <p:style>
-          <a:lnRef idx="1">
-            <a:schemeClr val="accent1"/>
-          </a:lnRef>
-          <a:fillRef idx="3">
-            <a:schemeClr val="accent1"/>
-          </a:fillRef>
-          <a:effectRef idx="2">
-            <a:schemeClr val="accent1"/>
-          </a:effectRef>
-          <a:fontRef idx="minor">
-            <a:schemeClr val="lt1"/>
-          </a:fontRef>
-        </p:style>
-        <p:txBody>
-          <a:bodyPr rtlCol="0" anchor="ctr"/>
-          <a:lstStyle/>
-          <a:p>
-            <a:pPr algn="ctr"/>
-          </a:p>
-        </p:txBody>
-      </p:sp>
-      <p:sp>
-        <p:nvSpPr>
-          <p:cNvPr id="3" name="Rectangle 2"/>
-          <p:cNvSpPr/>
-          <p:nvPr/>
-        </p:nvSpPr>
-        <p:spPr>
-          <a:xfrm>
-            <a:off x="0" y="960120"/>
-            <a:ext cx="12191695" cy="41148"/>
-          </a:xfrm>
-          <a:prstGeom prst="rect">
-            <a:avLst/>
-          </a:prstGeom>
-          <a:solidFill>
-            <a:srgbClr val="FFD000"/>
-          </a:solidFill>
-          <a:ln>
-            <a:noFill/>
-          </a:ln>
-        </p:spPr>
-        <p:style>
-          <a:lnRef idx="1">
-            <a:schemeClr val="accent1"/>
-          </a:lnRef>
-          <a:fillRef idx="3">
-            <a:schemeClr val="accent1"/>
-          </a:fillRef>
-          <a:effectRef idx="2">
-            <a:schemeClr val="accent1"/>
-          </a:effectRef>
-          <a:fontRef idx="minor">
-            <a:schemeClr val="lt1"/>
-          </a:fontRef>
-        </p:style>
-        <p:txBody>
-          <a:bodyPr rtlCol="0" anchor="ctr"/>
-          <a:lstStyle/>
-          <a:p>
-            <a:pPr algn="ctr"/>
-          </a:p>
-        </p:txBody>
-      </p:sp>
-      <p:sp>
-        <p:nvSpPr>
-          <p:cNvPr id="4" name="TextBox 3"/>
-          <p:cNvSpPr txBox="1"/>
-          <p:nvPr/>
-        </p:nvSpPr>
-        <p:spPr>
-          <a:xfrm>
-            <a:off x="457200" y="164592"/>
-            <a:ext cx="11277295" cy="502920"/>
-          </a:xfrm>
-          <a:prstGeom prst="rect">
-            <a:avLst/>
-          </a:prstGeom>
-          <a:noFill/>
-        </p:spPr>
-        <p:txBody>
-          <a:bodyPr wrap="square">
-            <a:spAutoFit/>
-          </a:bodyPr>
-          <a:lstStyle/>
-          <a:p>
-            <a:r>
-              <a:rPr sz="2600" b="1" i="0">
-                <a:solidFill>
-                  <a:srgbClr val="FFFFFF"/>
-                </a:solidFill>
-                <a:latin typeface="Calibri"/>
-              </a:rPr>
-              <a:t>Demo del dia</a:t>
-            </a:r>
-          </a:p>
-        </p:txBody>
-      </p:sp>
-      <p:sp>
-        <p:nvSpPr>
-          <p:cNvPr id="5" name="TextBox 4"/>
-          <p:cNvSpPr txBox="1"/>
-          <p:nvPr/>
-        </p:nvSpPr>
-        <p:spPr>
-          <a:xfrm>
-            <a:off x="457200" y="1170432"/>
-            <a:ext cx="11277295" cy="5230368"/>
-          </a:xfrm>
-          <a:prstGeom prst="rect">
-            <a:avLst/>
-          </a:prstGeom>
-          <a:noFill/>
-        </p:spPr>
-        <p:txBody>
-          <a:bodyPr wrap="square">
-            <a:spAutoFit/>
-          </a:bodyPr>
-          <a:lstStyle/>
-          <a:p>
-            <a:pPr>
-              <a:spcAft>
-                <a:spcPts val="800"/>
-              </a:spcAft>
-            </a:pPr>
-            <a:r>
-              <a:rPr sz="2000" b="0" i="0">
-                <a:solidFill>
-                  <a:srgbClr val="333333"/>
-                </a:solidFill>
-                <a:latin typeface="Calibri"/>
-              </a:rPr>
-              <a:t>–   </a:t>
-            </a:r>
-            <a:r>
-              <a:rPr sz="2000" b="1" i="0">
-                <a:solidFill>
-                  <a:srgbClr val="333333"/>
-                </a:solidFill>
-                <a:latin typeface="Calibri"/>
-              </a:rPr>
-              <a:t>Herramienta:</a:t>
-            </a:r>
-            <a:r>
-              <a:rPr sz="2000" b="0" i="0">
-                <a:solidFill>
-                  <a:srgbClr val="333333"/>
-                </a:solidFill>
-                <a:latin typeface="Calibri"/>
-              </a:rPr>
-              <a:t> Google Docs · draw.io</a:t>
-            </a:r>
-          </a:p>
-          <a:p>
-            <a:pPr>
-              <a:spcAft>
-                <a:spcPts val="800"/>
-              </a:spcAft>
-            </a:pPr>
-            <a:r>
-              <a:rPr sz="2000" b="0" i="0">
-                <a:solidFill>
-                  <a:srgbClr val="333333"/>
-                </a:solidFill>
-                <a:latin typeface="Calibri"/>
-              </a:rPr>
-              <a:t>–   </a:t>
-            </a:r>
-            <a:r>
-              <a:rPr sz="2000" b="1" i="0">
-                <a:solidFill>
-                  <a:srgbClr val="333333"/>
-                </a:solidFill>
-                <a:latin typeface="Calibri"/>
-              </a:rPr>
-              <a:t>Demo:</a:t>
-            </a:r>
-            <a:r>
-              <a:rPr sz="2000" b="0" i="0">
-                <a:solidFill>
-                  <a:srgbClr val="333333"/>
-                </a:solidFill>
-                <a:latin typeface="Calibri"/>
-              </a:rPr>
-              <a:t> Se proyecta el paquete de un equipo ficticio de la clinica y encuentra en vivo tres inconsistencias: un RF sin caso de uso, una clase llamada Dueño que en el catalogo de requisitos se llama Propietario, y un caso de uso que ninguna clase puede soportar.</a:t>
-            </a:r>
-          </a:p>
-          <a:p>
-            <a:pPr>
-              <a:spcAft>
-                <a:spcPts val="800"/>
-              </a:spcAft>
-            </a:pPr>
-            <a:r>
-              <a:rPr sz="2000" b="0" i="0">
-                <a:solidFill>
-                  <a:srgbClr val="333333"/>
-                </a:solidFill>
-                <a:latin typeface="Calibri"/>
-              </a:rPr>
-              <a:t>–   Mismo dominio: la clinica veterinaria — no otro ejemplo. Aqui se diseña, no se programa.</a:t>
-            </a:r>
-          </a:p>
-        </p:txBody>
-      </p:sp>
-      <p:sp>
-        <p:nvSpPr>
-          <p:cNvPr id="6" name="TextBox 5"/>
-          <p:cNvSpPr txBox="1"/>
-          <p:nvPr/>
-        </p:nvSpPr>
-        <p:spPr>
-          <a:xfrm>
-            <a:off x="11185855" y="6473952"/>
-            <a:ext cx="640080" cy="274320"/>
-          </a:xfrm>
-          <a:prstGeom prst="rect">
-            <a:avLst/>
-          </a:prstGeom>
-          <a:noFill/>
-        </p:spPr>
-        <p:txBody>
-          <a:bodyPr wrap="square">
-            <a:spAutoFit/>
-          </a:bodyPr>
-          <a:lstStyle/>
-          <a:p>
-            <a:pPr algn="r"/>
-            <a:r>
-              <a:rPr sz="1100" b="0" i="0">
-                <a:solidFill>
-                  <a:srgbClr val="666666"/>
-                </a:solidFill>
-                <a:latin typeface="Calibri"/>
-              </a:rPr>
-              <a:t>15</a:t>
-            </a:r>
-          </a:p>
-        </p:txBody>
-      </p:sp>
-    </p:spTree>
-  </p:cSld>
-  <p:clrMapOvr>
-    <a:masterClrMapping/>
-  </p:clrMapOvr>
-</p:sld>
-</file>
-
-<file path=ppt/slides/slide16.xml><?xml version="1.0" encoding="utf-8"?>
-<p:sld xmlns:a="http://schemas.openxmlformats.org/drawingml/2006/main" xmlns:p="http://schemas.openxmlformats.org/presentationml/2006/main" xmlns:r="http://schemas.openxmlformats.org/officeDocument/2006/relationships">
-  <p:cSld>
-    <p:bg>
-      <p:bgPr>
-        <a:solidFill>
-          <a:srgbClr val="FFFFFF"/>
-        </a:solidFill>
-        <a:effectLst/>
-      </p:bgPr>
-    </p:bg>
-    <p:spTree>
-      <p:nvGrpSpPr>
-        <p:cNvPr id="1" name=""/>
-        <p:cNvGrpSpPr/>
-        <p:nvPr/>
-      </p:nvGrpSpPr>
-      <p:grpSpPr/>
-      <p:sp>
-        <p:nvSpPr>
-          <p:cNvPr id="2" name="Rectangle 1"/>
-          <p:cNvSpPr/>
-          <p:nvPr/>
-        </p:nvSpPr>
-        <p:spPr>
-          <a:xfrm>
-            <a:off x="0" y="0"/>
             <a:ext cx="12191695" cy="164592"/>
           </a:xfrm>
           <a:prstGeom prst="rect">
@@ -6629,14 +5844,118 @@
       </p:sp>
       <p:sp>
         <p:nvSpPr>
-          <p:cNvPr id="5" name="TextBox 4"/>
+          <p:cNvPr id="5" name="Rounded Rectangle 4"/>
+          <p:cNvSpPr/>
+          <p:nvPr/>
+        </p:nvSpPr>
+        <p:spPr>
+          <a:xfrm>
+            <a:off x="5797149" y="1573813"/>
+            <a:ext cx="6010497" cy="4057845"/>
+          </a:xfrm>
+          <a:prstGeom prst="roundRect">
+            <a:avLst>
+              <a:gd name="adj" fmla="val 4000"/>
+            </a:avLst>
+          </a:prstGeom>
+          <a:solidFill>
+            <a:srgbClr val="E8EEF4"/>
+          </a:solidFill>
+          <a:ln>
+            <a:noFill/>
+          </a:ln>
+        </p:spPr>
+        <p:style>
+          <a:lnRef idx="1">
+            <a:schemeClr val="accent1"/>
+          </a:lnRef>
+          <a:fillRef idx="3">
+            <a:schemeClr val="accent1"/>
+          </a:fillRef>
+          <a:effectRef idx="2">
+            <a:schemeClr val="accent1"/>
+          </a:effectRef>
+          <a:fontRef idx="minor">
+            <a:schemeClr val="lt1"/>
+          </a:fontRef>
+        </p:style>
+        <p:txBody>
+          <a:bodyPr rtlCol="0" anchor="ctr"/>
+          <a:lstStyle/>
+          <a:p>
+            <a:pPr algn="ctr"/>
+          </a:p>
+        </p:txBody>
+      </p:sp>
+      <p:pic>
+        <p:nvPicPr>
+          <p:cNvPr id="6" name="Picture 5" descr="notebook-planning-desk-coffee.jpg"/>
+          <p:cNvPicPr>
+            <a:picLocks noChangeAspect="1"/>
+          </p:cNvPicPr>
+          <p:nvPr/>
+        </p:nvPicPr>
+        <p:blipFill>
+          <a:blip r:embed="rId2"/>
+          <a:stretch>
+            <a:fillRect/>
+          </a:stretch>
+        </p:blipFill>
+        <p:spPr>
+          <a:xfrm>
+            <a:off x="5870301" y="1646965"/>
+            <a:ext cx="5864193" cy="3911541"/>
+          </a:xfrm>
+          <a:prstGeom prst="rect">
+            <a:avLst/>
+          </a:prstGeom>
+        </p:spPr>
+      </p:pic>
+      <p:sp>
+        <p:nvSpPr>
+          <p:cNvPr id="7" name="TextBox 6"/>
           <p:cNvSpPr txBox="1"/>
           <p:nvPr/>
         </p:nvSpPr>
         <p:spPr>
           <a:xfrm>
-            <a:off x="457200" y="1170432"/>
-            <a:ext cx="11277295" cy="5230368"/>
+            <a:off x="5870301" y="5961888"/>
+            <a:ext cx="5864193" cy="320040"/>
+          </a:xfrm>
+          <a:prstGeom prst="rect">
+            <a:avLst/>
+          </a:prstGeom>
+          <a:noFill/>
+        </p:spPr>
+        <p:txBody>
+          <a:bodyPr wrap="square">
+            <a:spAutoFit/>
+          </a:bodyPr>
+          <a:lstStyle/>
+          <a:p>
+            <a:pPr algn="ctr"/>
+            <a:r>
+              <a:rPr sz="1100" b="0" i="1">
+                <a:solidFill>
+                  <a:srgbClr val="666666"/>
+                </a:solidFill>
+                <a:latin typeface="Calibri"/>
+              </a:rPr>
+              <a:t>Foto: Cup of  Couple · Pexels</a:t>
+            </a:r>
+          </a:p>
+        </p:txBody>
+      </p:sp>
+      <p:sp>
+        <p:nvSpPr>
+          <p:cNvPr id="8" name="TextBox 7"/>
+          <p:cNvSpPr txBox="1"/>
+          <p:nvPr/>
+        </p:nvSpPr>
+        <p:spPr>
+          <a:xfrm>
+            <a:off x="457200" y="1353312"/>
+            <a:ext cx="5093061" cy="5047488"/>
           </a:xfrm>
           <a:prstGeom prst="rect">
             <a:avLst/>
@@ -6761,7 +6080,7 @@
       </p:sp>
       <p:sp>
         <p:nvSpPr>
-          <p:cNvPr id="6" name="TextBox 5"/>
+          <p:cNvPr id="9" name="TextBox 8"/>
           <p:cNvSpPr txBox="1"/>
           <p:nvPr/>
         </p:nvSpPr>
@@ -7787,21 +7106,173 @@
                 </a:solidFill>
                 <a:latin typeface="Calibri"/>
               </a:rPr>
-              <a:t>Un paquete de diseño no es una carpeta de archivos sueltos: es un...</a:t>
-            </a:r>
-          </a:p>
-        </p:txBody>
-      </p:sp>
-      <p:sp>
-        <p:nvSpPr>
-          <p:cNvPr id="5" name="TextBox 4"/>
+              <a:t>El paquete de diseño es un sistema de documentos</a:t>
+            </a:r>
+          </a:p>
+        </p:txBody>
+      </p:sp>
+      <p:sp>
+        <p:nvSpPr>
+          <p:cNvPr id="5" name="Rounded Rectangle 4"/>
+          <p:cNvSpPr/>
+          <p:nvPr/>
+        </p:nvSpPr>
+        <p:spPr>
+          <a:xfrm>
+            <a:off x="5803166" y="1188719"/>
+            <a:ext cx="5998464" cy="4828032"/>
+          </a:xfrm>
+          <a:prstGeom prst="roundRect">
+            <a:avLst>
+              <a:gd name="adj" fmla="val 4000"/>
+            </a:avLst>
+          </a:prstGeom>
+          <a:solidFill>
+            <a:srgbClr val="E8EEF4"/>
+          </a:solidFill>
+          <a:ln>
+            <a:noFill/>
+          </a:ln>
+        </p:spPr>
+        <p:style>
+          <a:lnRef idx="1">
+            <a:schemeClr val="accent1"/>
+          </a:lnRef>
+          <a:fillRef idx="3">
+            <a:schemeClr val="accent1"/>
+          </a:fillRef>
+          <a:effectRef idx="2">
+            <a:schemeClr val="accent1"/>
+          </a:effectRef>
+          <a:fontRef idx="minor">
+            <a:schemeClr val="lt1"/>
+          </a:fontRef>
+        </p:style>
+        <p:txBody>
+          <a:bodyPr rtlCol="0" anchor="ctr"/>
+          <a:lstStyle/>
+          <a:p>
+            <a:pPr algn="ctr"/>
+          </a:p>
+        </p:txBody>
+      </p:sp>
+      <p:pic>
+        <p:nvPicPr>
+          <p:cNvPr id="6" name="Picture 5" descr="paquete-inconsistente-paso1.png"/>
+          <p:cNvPicPr>
+            <a:picLocks noChangeAspect="1"/>
+          </p:cNvPicPr>
+          <p:nvPr/>
+        </p:nvPicPr>
+        <p:blipFill>
+          <a:blip r:embed="rId2"/>
+          <a:stretch>
+            <a:fillRect/>
+          </a:stretch>
+        </p:blipFill>
+        <p:spPr>
+          <a:xfrm>
+            <a:off x="5876318" y="1261872"/>
+            <a:ext cx="5852160" cy="4681728"/>
+          </a:xfrm>
+          <a:prstGeom prst="rect">
+            <a:avLst/>
+          </a:prstGeom>
+        </p:spPr>
+      </p:pic>
+      <p:pic>
+        <p:nvPicPr>
+          <p:cNvPr id="7" name="Picture 6" descr="paquete-inconsistente-paso2.png"/>
+          <p:cNvPicPr>
+            <a:picLocks noChangeAspect="1"/>
+          </p:cNvPicPr>
+          <p:nvPr/>
+        </p:nvPicPr>
+        <p:blipFill>
+          <a:blip r:embed="rId3"/>
+          <a:stretch>
+            <a:fillRect/>
+          </a:stretch>
+        </p:blipFill>
+        <p:spPr>
+          <a:xfrm>
+            <a:off x="5876318" y="1261872"/>
+            <a:ext cx="5852160" cy="4681728"/>
+          </a:xfrm>
+          <a:prstGeom prst="rect">
+            <a:avLst/>
+          </a:prstGeom>
+        </p:spPr>
+      </p:pic>
+      <p:pic>
+        <p:nvPicPr>
+          <p:cNvPr id="8" name="Picture 7" descr="paquete-inconsistente-paso3.png"/>
+          <p:cNvPicPr>
+            <a:picLocks noChangeAspect="1"/>
+          </p:cNvPicPr>
+          <p:nvPr/>
+        </p:nvPicPr>
+        <p:blipFill>
+          <a:blip r:embed="rId4"/>
+          <a:stretch>
+            <a:fillRect/>
+          </a:stretch>
+        </p:blipFill>
+        <p:spPr>
+          <a:xfrm>
+            <a:off x="5876318" y="1261872"/>
+            <a:ext cx="5852160" cy="4681728"/>
+          </a:xfrm>
+          <a:prstGeom prst="rect">
+            <a:avLst/>
+          </a:prstGeom>
+        </p:spPr>
+      </p:pic>
+      <p:sp>
+        <p:nvSpPr>
+          <p:cNvPr id="13" name="TextBox 12"/>
           <p:cNvSpPr txBox="1"/>
           <p:nvPr/>
         </p:nvSpPr>
         <p:spPr>
           <a:xfrm>
-            <a:off x="457200" y="1170432"/>
-            <a:ext cx="11277295" cy="5230368"/>
+            <a:off x="5870301" y="5961888"/>
+            <a:ext cx="5864193" cy="320040"/>
+          </a:xfrm>
+          <a:prstGeom prst="rect">
+            <a:avLst/>
+          </a:prstGeom>
+          <a:noFill/>
+        </p:spPr>
+        <p:txBody>
+          <a:bodyPr wrap="square">
+            <a:spAutoFit/>
+          </a:bodyPr>
+          <a:lstStyle/>
+          <a:p>
+            <a:pPr algn="ctr"/>
+            <a:r>
+              <a:rPr sz="1100" b="0" i="1">
+                <a:solidFill>
+                  <a:srgbClr val="666666"/>
+                </a:solidFill>
+                <a:latin typeface="Calibri"/>
+              </a:rPr>
+              <a:t>Clic para avanzar la animación</a:t>
+            </a:r>
+          </a:p>
+        </p:txBody>
+      </p:sp>
+      <p:sp>
+        <p:nvSpPr>
+          <p:cNvPr id="14" name="TextBox 13"/>
+          <p:cNvSpPr txBox="1"/>
+          <p:nvPr/>
+        </p:nvSpPr>
+        <p:spPr>
+          <a:xfrm>
+            <a:off x="457200" y="1353312"/>
+            <a:ext cx="5093061" cy="5047488"/>
           </a:xfrm>
           <a:prstGeom prst="rect">
             <a:avLst/>
@@ -7826,7 +7297,7 @@
                 </a:solidFill>
                 <a:latin typeface="Calibri"/>
               </a:rPr>
-              <a:t>–   Un paquete de diseño no es una carpeta de archivos sueltos: es un sistema de documentos que deben decir lo mismo con las mismas palabras.</a:t>
+              <a:t>–   Todos deben decir lo mismo con las mismas palabras, aunque se escribieron en semanas distintas.</a:t>
             </a:r>
           </a:p>
           <a:p>
@@ -7842,7 +7313,7 @@
                 </a:solidFill>
                 <a:latin typeface="Calibri"/>
               </a:rPr>
-              <a:t>–   El problema es que esos documentos se escribieron en semanas distintas, muchas veces por personas distintas del equipo, y cada semana el entendimiento del dominio cambio un poquito.</a:t>
+              <a:t>–   RF-07 promete recordatorios; ningún caso de uso los tiene; ninguna clase los soporta.</a:t>
             </a:r>
           </a:p>
           <a:p>
@@ -7858,14 +7329,30 @@
                 </a:solidFill>
                 <a:latin typeface="Calibri"/>
               </a:rPr>
-              <a:t>–   Ninguno de los tres documentos esta mal por si solo; lo que esta mal es el conjunto.</a:t>
-            </a:r>
-          </a:p>
-        </p:txBody>
-      </p:sp>
-      <p:sp>
-        <p:nvSpPr>
-          <p:cNvPr id="6" name="TextBox 5"/>
+              <a:t>–   Ninguno está mal por sí solo: lo que está mal es el conjunto.</a:t>
+            </a:r>
+          </a:p>
+          <a:p>
+            <a:pPr>
+              <a:spcAft>
+                <a:spcPts val="800"/>
+              </a:spcAft>
+            </a:pPr>
+            <a:r>
+              <a:rPr sz="2000" b="0" i="0">
+                <a:solidFill>
+                  <a:srgbClr val="333333"/>
+                </a:solidFill>
+                <a:latin typeface="Calibri"/>
+              </a:rPr>
+              <a:t>–   Corregirlo hoy cuesta una hoja; cuando ya hay pantallas y código, carísimo.</a:t>
+            </a:r>
+          </a:p>
+        </p:txBody>
+      </p:sp>
+      <p:sp>
+        <p:nvSpPr>
+          <p:cNvPr id="15" name="TextBox 14"/>
           <p:cNvSpPr txBox="1"/>
           <p:nvPr/>
         </p:nvSpPr>
@@ -7903,6 +7390,142 @@
   <p:clrMapOvr>
     <a:masterClrMapping/>
   </p:clrMapOvr>
+  <p:timing>
+    <p:tnLst>
+      <p:par>
+        <p:cTn id="1" dur="indefinite" restart="never" nodeType="tmRoot">
+          <p:childTnLst>
+            <p:seq concurrent="1" nextAc="seek">
+              <p:cTn id="2" dur="indefinite" nodeType="mainSeq">
+                <p:childTnLst>
+                  <p:par>
+                    <p:cTn id="3" fill="hold">
+                      <p:stCondLst>
+                        <p:cond delay="indefinite"/>
+                      </p:stCondLst>
+                      <p:childTnLst>
+                        <p:par>
+                          <p:cTn id="4" fill="hold">
+                            <p:stCondLst>
+                              <p:cond delay="0"/>
+                            </p:stCondLst>
+                            <p:childTnLst>
+                              <p:par>
+                                <p:cTn id="5" presetID="10" presetClass="entr" presetSubtype="0" fill="hold" nodeType="clickEffect">
+                                  <p:stCondLst>
+                                    <p:cond delay="0"/>
+                                  </p:stCondLst>
+                                  <p:childTnLst>
+                                    <p:set>
+                                      <p:cBhvr>
+                                        <p:cTn id="6" dur="1" fill="hold">
+                                          <p:stCondLst>
+                                            <p:cond delay="0"/>
+                                          </p:stCondLst>
+                                        </p:cTn>
+                                        <p:tgtEl>
+                                          <p:spTgt spid="7"/>
+                                        </p:tgtEl>
+                                        <p:attrNameLst>
+                                          <p:attrName>style.visibility</p:attrName>
+                                        </p:attrNameLst>
+                                      </p:cBhvr>
+                                      <p:to>
+                                        <p:strVal val="visible"/>
+                                      </p:to>
+                                    </p:set>
+                                    <p:animEffect transition="in" filter="fade">
+                                      <p:cBhvr>
+                                        <p:cTn id="7" dur="450"/>
+                                        <p:tgtEl>
+                                          <p:spTgt spid="7"/>
+                                        </p:tgtEl>
+                                      </p:cBhvr>
+                                    </p:animEffect>
+                                  </p:childTnLst>
+                                </p:cTn>
+                              </p:par>
+                            </p:childTnLst>
+                          </p:cTn>
+                        </p:par>
+                      </p:childTnLst>
+                    </p:cTn>
+                  </p:par>
+                  <p:par>
+                    <p:cTn id="8" fill="hold">
+                      <p:stCondLst>
+                        <p:cond delay="indefinite"/>
+                      </p:stCondLst>
+                      <p:childTnLst>
+                        <p:par>
+                          <p:cTn id="9" fill="hold">
+                            <p:stCondLst>
+                              <p:cond delay="0"/>
+                            </p:stCondLst>
+                            <p:childTnLst>
+                              <p:par>
+                                <p:cTn id="10" presetID="10" presetClass="entr" presetSubtype="0" fill="hold" nodeType="clickEffect">
+                                  <p:stCondLst>
+                                    <p:cond delay="0"/>
+                                  </p:stCondLst>
+                                  <p:childTnLst>
+                                    <p:set>
+                                      <p:cBhvr>
+                                        <p:cTn id="11" dur="1" fill="hold">
+                                          <p:stCondLst>
+                                            <p:cond delay="0"/>
+                                          </p:stCondLst>
+                                        </p:cTn>
+                                        <p:tgtEl>
+                                          <p:spTgt spid="8"/>
+                                        </p:tgtEl>
+                                        <p:attrNameLst>
+                                          <p:attrName>style.visibility</p:attrName>
+                                        </p:attrNameLst>
+                                      </p:cBhvr>
+                                      <p:to>
+                                        <p:strVal val="visible"/>
+                                      </p:to>
+                                    </p:set>
+                                    <p:animEffect transition="in" filter="fade">
+                                      <p:cBhvr>
+                                        <p:cTn id="12" dur="450"/>
+                                        <p:tgtEl>
+                                          <p:spTgt spid="8"/>
+                                        </p:tgtEl>
+                                      </p:cBhvr>
+                                    </p:animEffect>
+                                  </p:childTnLst>
+                                </p:cTn>
+                              </p:par>
+                            </p:childTnLst>
+                          </p:cTn>
+                        </p:par>
+                      </p:childTnLst>
+                    </p:cTn>
+                  </p:par>
+                </p:childTnLst>
+              </p:cTn>
+              <p:prevCondLst>
+                <p:cond evt="onPrev" delay="0">
+                  <p:tgtEl>
+                    <p:sldTgt/>
+                  </p:tgtEl>
+                </p:cond>
+              </p:prevCondLst>
+              <p:nextCondLst>
+                <p:cond evt="onNext" delay="0">
+                  <p:tgtEl>
+                    <p:sldTgt/>
+                  </p:tgtEl>
+                </p:cond>
+              </p:nextCondLst>
+            </p:seq>
+          </p:childTnLst>
+        </p:cTn>
+      </p:par>
+    </p:tnLst>
+  </p:timing>
 </p:sld>
 </file>
 
@@ -8039,21 +7662,173 @@
                 </a:solidFill>
                 <a:latin typeface="Calibri"/>
               </a:rPr>
-              <a:t>La herramienta central para eso es la trazabilidad, y se verifica en... (1/2)</a:t>
-            </a:r>
-          </a:p>
-        </p:txBody>
-      </p:sp>
-      <p:sp>
-        <p:nvSpPr>
-          <p:cNvPr id="5" name="TextBox 4"/>
+              <a:t>Requisitos huérfanos y elementos viudos</a:t>
+            </a:r>
+          </a:p>
+        </p:txBody>
+      </p:sp>
+      <p:sp>
+        <p:nvSpPr>
+          <p:cNvPr id="5" name="Rounded Rectangle 4"/>
+          <p:cNvSpPr/>
+          <p:nvPr/>
+        </p:nvSpPr>
+        <p:spPr>
+          <a:xfrm>
+            <a:off x="5803166" y="1188719"/>
+            <a:ext cx="5998464" cy="4828032"/>
+          </a:xfrm>
+          <a:prstGeom prst="roundRect">
+            <a:avLst>
+              <a:gd name="adj" fmla="val 4000"/>
+            </a:avLst>
+          </a:prstGeom>
+          <a:solidFill>
+            <a:srgbClr val="E8EEF4"/>
+          </a:solidFill>
+          <a:ln>
+            <a:noFill/>
+          </a:ln>
+        </p:spPr>
+        <p:style>
+          <a:lnRef idx="1">
+            <a:schemeClr val="accent1"/>
+          </a:lnRef>
+          <a:fillRef idx="3">
+            <a:schemeClr val="accent1"/>
+          </a:fillRef>
+          <a:effectRef idx="2">
+            <a:schemeClr val="accent1"/>
+          </a:effectRef>
+          <a:fontRef idx="minor">
+            <a:schemeClr val="lt1"/>
+          </a:fontRef>
+        </p:style>
+        <p:txBody>
+          <a:bodyPr rtlCol="0" anchor="ctr"/>
+          <a:lstStyle/>
+          <a:p>
+            <a:pPr algn="ctr"/>
+          </a:p>
+        </p:txBody>
+      </p:sp>
+      <p:pic>
+        <p:nvPicPr>
+          <p:cNvPr id="6" name="Picture 5" descr="huerfano-viudo-paso1.png"/>
+          <p:cNvPicPr>
+            <a:picLocks noChangeAspect="1"/>
+          </p:cNvPicPr>
+          <p:nvPr/>
+        </p:nvPicPr>
+        <p:blipFill>
+          <a:blip r:embed="rId2"/>
+          <a:stretch>
+            <a:fillRect/>
+          </a:stretch>
+        </p:blipFill>
+        <p:spPr>
+          <a:xfrm>
+            <a:off x="5876318" y="1261872"/>
+            <a:ext cx="5852160" cy="4681728"/>
+          </a:xfrm>
+          <a:prstGeom prst="rect">
+            <a:avLst/>
+          </a:prstGeom>
+        </p:spPr>
+      </p:pic>
+      <p:pic>
+        <p:nvPicPr>
+          <p:cNvPr id="7" name="Picture 6" descr="huerfano-viudo-paso2.png"/>
+          <p:cNvPicPr>
+            <a:picLocks noChangeAspect="1"/>
+          </p:cNvPicPr>
+          <p:nvPr/>
+        </p:nvPicPr>
+        <p:blipFill>
+          <a:blip r:embed="rId3"/>
+          <a:stretch>
+            <a:fillRect/>
+          </a:stretch>
+        </p:blipFill>
+        <p:spPr>
+          <a:xfrm>
+            <a:off x="5876318" y="1261872"/>
+            <a:ext cx="5852160" cy="4681728"/>
+          </a:xfrm>
+          <a:prstGeom prst="rect">
+            <a:avLst/>
+          </a:prstGeom>
+        </p:spPr>
+      </p:pic>
+      <p:pic>
+        <p:nvPicPr>
+          <p:cNvPr id="8" name="Picture 7" descr="huerfano-viudo-paso3.png"/>
+          <p:cNvPicPr>
+            <a:picLocks noChangeAspect="1"/>
+          </p:cNvPicPr>
+          <p:nvPr/>
+        </p:nvPicPr>
+        <p:blipFill>
+          <a:blip r:embed="rId4"/>
+          <a:stretch>
+            <a:fillRect/>
+          </a:stretch>
+        </p:blipFill>
+        <p:spPr>
+          <a:xfrm>
+            <a:off x="5876318" y="1261872"/>
+            <a:ext cx="5852160" cy="4681728"/>
+          </a:xfrm>
+          <a:prstGeom prst="rect">
+            <a:avLst/>
+          </a:prstGeom>
+        </p:spPr>
+      </p:pic>
+      <p:sp>
+        <p:nvSpPr>
+          <p:cNvPr id="13" name="TextBox 12"/>
           <p:cNvSpPr txBox="1"/>
           <p:nvPr/>
         </p:nvSpPr>
         <p:spPr>
           <a:xfrm>
-            <a:off x="457200" y="1170432"/>
-            <a:ext cx="11277295" cy="5230368"/>
+            <a:off x="5870301" y="5961888"/>
+            <a:ext cx="5864193" cy="320040"/>
+          </a:xfrm>
+          <a:prstGeom prst="rect">
+            <a:avLst/>
+          </a:prstGeom>
+          <a:noFill/>
+        </p:spPr>
+        <p:txBody>
+          <a:bodyPr wrap="square">
+            <a:spAutoFit/>
+          </a:bodyPr>
+          <a:lstStyle/>
+          <a:p>
+            <a:pPr algn="ctr"/>
+            <a:r>
+              <a:rPr sz="1100" b="0" i="1">
+                <a:solidFill>
+                  <a:srgbClr val="666666"/>
+                </a:solidFill>
+                <a:latin typeface="Calibri"/>
+              </a:rPr>
+              <a:t>Clic para avanzar la animación</a:t>
+            </a:r>
+          </a:p>
+        </p:txBody>
+      </p:sp>
+      <p:sp>
+        <p:nvSpPr>
+          <p:cNvPr id="14" name="TextBox 13"/>
+          <p:cNvSpPr txBox="1"/>
+          <p:nvPr/>
+        </p:nvSpPr>
+        <p:spPr>
+          <a:xfrm>
+            <a:off x="457200" y="1353312"/>
+            <a:ext cx="5093061" cy="5047488"/>
           </a:xfrm>
           <a:prstGeom prst="rect">
             <a:avLst/>
@@ -8078,7 +7853,7 @@
                 </a:solidFill>
                 <a:latin typeface="Calibri"/>
               </a:rPr>
-              <a:t>–   La herramienta central para eso es la trazabilidad, y se verifica en dos direcciones.</a:t>
+              <a:t>–   Hacia adelante: ¿todo RF llega a un caso de uso y a una clase que lo soporte?</a:t>
             </a:r>
           </a:p>
           <a:p>
@@ -8094,7 +7869,7 @@
                 </a:solidFill>
                 <a:latin typeface="Calibri"/>
               </a:rPr>
-              <a:t>–   Hacia adelante se pregunta si todo requisito funcional llega a algun caso de uso y si ese caso de uso llega a alguna clase, atributo u operacion que lo soporte</a:t>
+              <a:t>–   Un RF que no llega a nada es huérfano: se prometió algo que el diseño no cumple.</a:t>
             </a:r>
           </a:p>
           <a:p>
@@ -8110,7 +7885,7 @@
                 </a:solidFill>
                 <a:latin typeface="Calibri"/>
               </a:rPr>
-              <a:t>–   Si un RF no llega a nada, es un requisito huerfano y significa que el equipo prometio algo que el diseño no cumple.</a:t>
+              <a:t>–   Hacia atrás: ¿todo elemento del diseño nace de un requisito? Si no, es viudo.</a:t>
             </a:r>
           </a:p>
           <a:p>
@@ -8126,30 +7901,14 @@
                 </a:solidFill>
                 <a:latin typeface="Calibri"/>
               </a:rPr>
-              <a:t>–   Hacia atras se pregunta si todo elemento del diseño nace de algun requisito</a:t>
-            </a:r>
-          </a:p>
-          <a:p>
-            <a:pPr>
-              <a:spcAft>
-                <a:spcPts val="800"/>
-              </a:spcAft>
-            </a:pPr>
-            <a:r>
-              <a:rPr sz="2000" b="0" i="0">
-                <a:solidFill>
-                  <a:srgbClr val="333333"/>
-                </a:solidFill>
-                <a:latin typeface="Calibri"/>
-              </a:rPr>
-              <a:t>–   Si un caso de uso o una clase no viene de ningun RF, es un elemento viudo y casi siempre significa que alguien agrego funcionalidad por gusto propio o que la fila de la matriz quedo sin diligenciar.</a:t>
-            </a:r>
-          </a:p>
-        </p:txBody>
-      </p:sp>
-      <p:sp>
-        <p:nvSpPr>
-          <p:cNvPr id="6" name="TextBox 5"/>
+              <a:t>–   La matriz de trazabilidad es la única prueba objetiva de que el paquete es coherente.</a:t>
+            </a:r>
+          </a:p>
+        </p:txBody>
+      </p:sp>
+      <p:sp>
+        <p:nvSpPr>
+          <p:cNvPr id="15" name="TextBox 14"/>
           <p:cNvSpPr txBox="1"/>
           <p:nvPr/>
         </p:nvSpPr>
@@ -8187,6 +7946,142 @@
   <p:clrMapOvr>
     <a:masterClrMapping/>
   </p:clrMapOvr>
+  <p:timing>
+    <p:tnLst>
+      <p:par>
+        <p:cTn id="1" dur="indefinite" restart="never" nodeType="tmRoot">
+          <p:childTnLst>
+            <p:seq concurrent="1" nextAc="seek">
+              <p:cTn id="2" dur="indefinite" nodeType="mainSeq">
+                <p:childTnLst>
+                  <p:par>
+                    <p:cTn id="3" fill="hold">
+                      <p:stCondLst>
+                        <p:cond delay="indefinite"/>
+                      </p:stCondLst>
+                      <p:childTnLst>
+                        <p:par>
+                          <p:cTn id="4" fill="hold">
+                            <p:stCondLst>
+                              <p:cond delay="0"/>
+                            </p:stCondLst>
+                            <p:childTnLst>
+                              <p:par>
+                                <p:cTn id="5" presetID="10" presetClass="entr" presetSubtype="0" fill="hold" nodeType="clickEffect">
+                                  <p:stCondLst>
+                                    <p:cond delay="0"/>
+                                  </p:stCondLst>
+                                  <p:childTnLst>
+                                    <p:set>
+                                      <p:cBhvr>
+                                        <p:cTn id="6" dur="1" fill="hold">
+                                          <p:stCondLst>
+                                            <p:cond delay="0"/>
+                                          </p:stCondLst>
+                                        </p:cTn>
+                                        <p:tgtEl>
+                                          <p:spTgt spid="7"/>
+                                        </p:tgtEl>
+                                        <p:attrNameLst>
+                                          <p:attrName>style.visibility</p:attrName>
+                                        </p:attrNameLst>
+                                      </p:cBhvr>
+                                      <p:to>
+                                        <p:strVal val="visible"/>
+                                      </p:to>
+                                    </p:set>
+                                    <p:animEffect transition="in" filter="fade">
+                                      <p:cBhvr>
+                                        <p:cTn id="7" dur="450"/>
+                                        <p:tgtEl>
+                                          <p:spTgt spid="7"/>
+                                        </p:tgtEl>
+                                      </p:cBhvr>
+                                    </p:animEffect>
+                                  </p:childTnLst>
+                                </p:cTn>
+                              </p:par>
+                            </p:childTnLst>
+                          </p:cTn>
+                        </p:par>
+                      </p:childTnLst>
+                    </p:cTn>
+                  </p:par>
+                  <p:par>
+                    <p:cTn id="8" fill="hold">
+                      <p:stCondLst>
+                        <p:cond delay="indefinite"/>
+                      </p:stCondLst>
+                      <p:childTnLst>
+                        <p:par>
+                          <p:cTn id="9" fill="hold">
+                            <p:stCondLst>
+                              <p:cond delay="0"/>
+                            </p:stCondLst>
+                            <p:childTnLst>
+                              <p:par>
+                                <p:cTn id="10" presetID="10" presetClass="entr" presetSubtype="0" fill="hold" nodeType="clickEffect">
+                                  <p:stCondLst>
+                                    <p:cond delay="0"/>
+                                  </p:stCondLst>
+                                  <p:childTnLst>
+                                    <p:set>
+                                      <p:cBhvr>
+                                        <p:cTn id="11" dur="1" fill="hold">
+                                          <p:stCondLst>
+                                            <p:cond delay="0"/>
+                                          </p:stCondLst>
+                                        </p:cTn>
+                                        <p:tgtEl>
+                                          <p:spTgt spid="8"/>
+                                        </p:tgtEl>
+                                        <p:attrNameLst>
+                                          <p:attrName>style.visibility</p:attrName>
+                                        </p:attrNameLst>
+                                      </p:cBhvr>
+                                      <p:to>
+                                        <p:strVal val="visible"/>
+                                      </p:to>
+                                    </p:set>
+                                    <p:animEffect transition="in" filter="fade">
+                                      <p:cBhvr>
+                                        <p:cTn id="12" dur="450"/>
+                                        <p:tgtEl>
+                                          <p:spTgt spid="8"/>
+                                        </p:tgtEl>
+                                      </p:cBhvr>
+                                    </p:animEffect>
+                                  </p:childTnLst>
+                                </p:cTn>
+                              </p:par>
+                            </p:childTnLst>
+                          </p:cTn>
+                        </p:par>
+                      </p:childTnLst>
+                    </p:cTn>
+                  </p:par>
+                </p:childTnLst>
+              </p:cTn>
+              <p:prevCondLst>
+                <p:cond evt="onPrev" delay="0">
+                  <p:tgtEl>
+                    <p:sldTgt/>
+                  </p:tgtEl>
+                </p:cond>
+              </p:prevCondLst>
+              <p:nextCondLst>
+                <p:cond evt="onNext" delay="0">
+                  <p:tgtEl>
+                    <p:sldTgt/>
+                  </p:tgtEl>
+                </p:cond>
+              </p:nextCondLst>
+            </p:seq>
+          </p:childTnLst>
+        </p:cTn>
+      </p:par>
+    </p:tnLst>
+  </p:timing>
 </p:sld>
 </file>
 
@@ -8323,21 +8218,238 @@
                 </a:solidFill>
                 <a:latin typeface="Calibri"/>
               </a:rPr>
-              <a:t>La herramienta central para eso es la trazabilidad, y se verifica en... (2/2)</a:t>
-            </a:r>
-          </a:p>
-        </p:txBody>
-      </p:sp>
-      <p:sp>
-        <p:nvSpPr>
-          <p:cNvPr id="5" name="TextBox 4"/>
+              <a:t>Auditoria cruzada: la matriz que delata contradicciones</a:t>
+            </a:r>
+          </a:p>
+        </p:txBody>
+      </p:sp>
+      <p:sp>
+        <p:nvSpPr>
+          <p:cNvPr id="5" name="Rounded Rectangle 4"/>
+          <p:cNvSpPr/>
+          <p:nvPr/>
+        </p:nvSpPr>
+        <p:spPr>
+          <a:xfrm>
+            <a:off x="457200" y="1261872"/>
+            <a:ext cx="11277295" cy="4311114"/>
+          </a:xfrm>
+          <a:prstGeom prst="roundRect">
+            <a:avLst>
+              <a:gd name="adj" fmla="val 4000"/>
+            </a:avLst>
+          </a:prstGeom>
+          <a:solidFill>
+            <a:srgbClr val="1E1E1E"/>
+          </a:solidFill>
+          <a:ln>
+            <a:noFill/>
+          </a:ln>
+        </p:spPr>
+        <p:style>
+          <a:lnRef idx="1">
+            <a:schemeClr val="accent1"/>
+          </a:lnRef>
+          <a:fillRef idx="3">
+            <a:schemeClr val="accent1"/>
+          </a:fillRef>
+          <a:effectRef idx="2">
+            <a:schemeClr val="accent1"/>
+          </a:effectRef>
+          <a:fontRef idx="minor">
+            <a:schemeClr val="lt1"/>
+          </a:fontRef>
+        </p:style>
+        <p:txBody>
+          <a:bodyPr rtlCol="0" anchor="ctr"/>
+          <a:lstStyle/>
+          <a:p>
+            <a:pPr algn="ctr"/>
+          </a:p>
+        </p:txBody>
+      </p:sp>
+      <p:sp>
+        <p:nvSpPr>
+          <p:cNvPr id="6" name="Rectangle 5"/>
+          <p:cNvSpPr/>
+          <p:nvPr/>
+        </p:nvSpPr>
+        <p:spPr>
+          <a:xfrm>
+            <a:off x="457200" y="1261872"/>
+            <a:ext cx="11277295" cy="365760"/>
+          </a:xfrm>
+          <a:prstGeom prst="rect">
+            <a:avLst/>
+          </a:prstGeom>
+          <a:solidFill>
+            <a:srgbClr val="2D2D30"/>
+          </a:solidFill>
+          <a:ln>
+            <a:noFill/>
+          </a:ln>
+        </p:spPr>
+        <p:style>
+          <a:lnRef idx="1">
+            <a:schemeClr val="accent1"/>
+          </a:lnRef>
+          <a:fillRef idx="3">
+            <a:schemeClr val="accent1"/>
+          </a:fillRef>
+          <a:effectRef idx="2">
+            <a:schemeClr val="accent1"/>
+          </a:effectRef>
+          <a:fontRef idx="minor">
+            <a:schemeClr val="lt1"/>
+          </a:fontRef>
+        </p:style>
+        <p:txBody>
+          <a:bodyPr rtlCol="0" anchor="ctr"/>
+          <a:lstStyle/>
+          <a:p>
+            <a:pPr algn="ctr"/>
+          </a:p>
+        </p:txBody>
+      </p:sp>
+      <p:sp>
+        <p:nvSpPr>
+          <p:cNvPr id="7" name="Oval 6"/>
+          <p:cNvSpPr/>
+          <p:nvPr/>
+        </p:nvSpPr>
+        <p:spPr>
+          <a:xfrm>
+            <a:off x="658368" y="1380743"/>
+            <a:ext cx="128016" cy="128016"/>
+          </a:xfrm>
+          <a:prstGeom prst="ellipse">
+            <a:avLst/>
+          </a:prstGeom>
+          <a:solidFill>
+            <a:srgbClr val="FF5F56"/>
+          </a:solidFill>
+          <a:ln>
+            <a:noFill/>
+          </a:ln>
+        </p:spPr>
+        <p:style>
+          <a:lnRef idx="1">
+            <a:schemeClr val="accent1"/>
+          </a:lnRef>
+          <a:fillRef idx="3">
+            <a:schemeClr val="accent1"/>
+          </a:fillRef>
+          <a:effectRef idx="2">
+            <a:schemeClr val="accent1"/>
+          </a:effectRef>
+          <a:fontRef idx="minor">
+            <a:schemeClr val="lt1"/>
+          </a:fontRef>
+        </p:style>
+        <p:txBody>
+          <a:bodyPr rtlCol="0" anchor="ctr"/>
+          <a:lstStyle/>
+          <a:p>
+            <a:pPr algn="ctr"/>
+          </a:p>
+        </p:txBody>
+      </p:sp>
+      <p:sp>
+        <p:nvSpPr>
+          <p:cNvPr id="8" name="Oval 7"/>
+          <p:cNvSpPr/>
+          <p:nvPr/>
+        </p:nvSpPr>
+        <p:spPr>
+          <a:xfrm>
+            <a:off x="877824" y="1380743"/>
+            <a:ext cx="128016" cy="128016"/>
+          </a:xfrm>
+          <a:prstGeom prst="ellipse">
+            <a:avLst/>
+          </a:prstGeom>
+          <a:solidFill>
+            <a:srgbClr val="FFBD2E"/>
+          </a:solidFill>
+          <a:ln>
+            <a:noFill/>
+          </a:ln>
+        </p:spPr>
+        <p:style>
+          <a:lnRef idx="1">
+            <a:schemeClr val="accent1"/>
+          </a:lnRef>
+          <a:fillRef idx="3">
+            <a:schemeClr val="accent1"/>
+          </a:fillRef>
+          <a:effectRef idx="2">
+            <a:schemeClr val="accent1"/>
+          </a:effectRef>
+          <a:fontRef idx="minor">
+            <a:schemeClr val="lt1"/>
+          </a:fontRef>
+        </p:style>
+        <p:txBody>
+          <a:bodyPr rtlCol="0" anchor="ctr"/>
+          <a:lstStyle/>
+          <a:p>
+            <a:pPr algn="ctr"/>
+          </a:p>
+        </p:txBody>
+      </p:sp>
+      <p:sp>
+        <p:nvSpPr>
+          <p:cNvPr id="9" name="Oval 8"/>
+          <p:cNvSpPr/>
+          <p:nvPr/>
+        </p:nvSpPr>
+        <p:spPr>
+          <a:xfrm>
+            <a:off x="1097280" y="1380743"/>
+            <a:ext cx="128016" cy="128016"/>
+          </a:xfrm>
+          <a:prstGeom prst="ellipse">
+            <a:avLst/>
+          </a:prstGeom>
+          <a:solidFill>
+            <a:srgbClr val="27C93F"/>
+          </a:solidFill>
+          <a:ln>
+            <a:noFill/>
+          </a:ln>
+        </p:spPr>
+        <p:style>
+          <a:lnRef idx="1">
+            <a:schemeClr val="accent1"/>
+          </a:lnRef>
+          <a:fillRef idx="3">
+            <a:schemeClr val="accent1"/>
+          </a:fillRef>
+          <a:effectRef idx="2">
+            <a:schemeClr val="accent1"/>
+          </a:effectRef>
+          <a:fontRef idx="minor">
+            <a:schemeClr val="lt1"/>
+          </a:fontRef>
+        </p:style>
+        <p:txBody>
+          <a:bodyPr rtlCol="0" anchor="ctr"/>
+          <a:lstStyle/>
+          <a:p>
+            <a:pPr algn="ctr"/>
+          </a:p>
+        </p:txBody>
+      </p:sp>
+      <p:sp>
+        <p:nvSpPr>
+          <p:cNvPr id="10" name="TextBox 9"/>
           <p:cNvSpPr txBox="1"/>
           <p:nvPr/>
         </p:nvSpPr>
         <p:spPr>
           <a:xfrm>
-            <a:off x="457200" y="1170432"/>
-            <a:ext cx="11277295" cy="5230368"/>
+            <a:off x="1371600" y="1298448"/>
+            <a:ext cx="10180015" cy="292608"/>
           </a:xfrm>
           <a:prstGeom prst="rect">
             <a:avLst/>
@@ -8345,79 +8457,3173 @@
           <a:noFill/>
         </p:spPr>
         <p:txBody>
+          <a:bodyPr wrap="square" anchor="ctr"/>
+          <a:lstStyle/>
+          <a:p>
+            <a:pPr algn="r"/>
+            <a:r>
+              <a:rPr sz="1100" b="1" i="0">
+                <a:solidFill>
+                  <a:srgbClr val="BBBBBB"/>
+                </a:solidFill>
+                <a:latin typeface="Calibri"/>
+              </a:rPr>
+              <a:t>Tabla Markdown</a:t>
+            </a:r>
+          </a:p>
+        </p:txBody>
+      </p:sp>
+      <p:sp>
+        <p:nvSpPr>
+          <p:cNvPr id="11" name="TextBox 10"/>
+          <p:cNvSpPr txBox="1"/>
+          <p:nvPr/>
+        </p:nvSpPr>
+        <p:spPr>
+          <a:xfrm>
+            <a:off x="685800" y="1719072"/>
+            <a:ext cx="502920" cy="3716754"/>
+          </a:xfrm>
+          <a:prstGeom prst="rect">
+            <a:avLst/>
+          </a:prstGeom>
+          <a:noFill/>
+        </p:spPr>
+        <p:txBody>
           <a:bodyPr wrap="square">
             <a:spAutoFit/>
           </a:bodyPr>
           <a:lstStyle/>
           <a:p>
+            <a:pPr algn="r">
+              <a:spcAft>
+                <a:spcPts val="300"/>
+              </a:spcAft>
+            </a:pPr>
+            <a:r>
+              <a:rPr sz="1400" i="0" b="0">
+                <a:solidFill>
+                  <a:srgbClr val="858585"/>
+                </a:solidFill>
+                <a:latin typeface="Consolas"/>
+              </a:rPr>
+              <a:t>1</a:t>
+            </a:r>
+          </a:p>
+          <a:p>
+            <a:pPr algn="r">
+              <a:spcAft>
+                <a:spcPts val="300"/>
+              </a:spcAft>
+            </a:pPr>
+            <a:r>
+              <a:rPr sz="1400" i="0" b="0">
+                <a:solidFill>
+                  <a:srgbClr val="858585"/>
+                </a:solidFill>
+                <a:latin typeface="Consolas"/>
+              </a:rPr>
+              <a:t>2</a:t>
+            </a:r>
+          </a:p>
+          <a:p>
+            <a:pPr algn="r">
+              <a:spcAft>
+                <a:spcPts val="300"/>
+              </a:spcAft>
+            </a:pPr>
+            <a:r>
+              <a:rPr sz="1400" i="0" b="0">
+                <a:solidFill>
+                  <a:srgbClr val="858585"/>
+                </a:solidFill>
+                <a:latin typeface="Consolas"/>
+              </a:rPr>
+              <a:t>3</a:t>
+            </a:r>
+          </a:p>
+          <a:p>
+            <a:pPr algn="r">
+              <a:spcAft>
+                <a:spcPts val="300"/>
+              </a:spcAft>
+            </a:pPr>
+            <a:r>
+              <a:rPr sz="1400" i="0" b="0">
+                <a:solidFill>
+                  <a:srgbClr val="858585"/>
+                </a:solidFill>
+                <a:latin typeface="Consolas"/>
+              </a:rPr>
+              <a:t>4</a:t>
+            </a:r>
+          </a:p>
+          <a:p>
+            <a:pPr algn="r">
+              <a:spcAft>
+                <a:spcPts val="300"/>
+              </a:spcAft>
+            </a:pPr>
+            <a:r>
+              <a:rPr sz="1400" i="0" b="0">
+                <a:solidFill>
+                  <a:srgbClr val="858585"/>
+                </a:solidFill>
+                <a:latin typeface="Consolas"/>
+              </a:rPr>
+              <a:t>5</a:t>
+            </a:r>
+          </a:p>
+          <a:p>
+            <a:pPr algn="r">
+              <a:spcAft>
+                <a:spcPts val="300"/>
+              </a:spcAft>
+            </a:pPr>
+            <a:r>
+              <a:rPr sz="1400" i="0" b="0">
+                <a:solidFill>
+                  <a:srgbClr val="858585"/>
+                </a:solidFill>
+                <a:latin typeface="Consolas"/>
+              </a:rPr>
+              <a:t>6</a:t>
+            </a:r>
+          </a:p>
+          <a:p>
+            <a:pPr algn="r">
+              <a:spcAft>
+                <a:spcPts val="300"/>
+              </a:spcAft>
+            </a:pPr>
+            <a:r>
+              <a:rPr sz="1400" i="0" b="0">
+                <a:solidFill>
+                  <a:srgbClr val="858585"/>
+                </a:solidFill>
+                <a:latin typeface="Consolas"/>
+              </a:rPr>
+              <a:t>7</a:t>
+            </a:r>
+          </a:p>
+          <a:p>
+            <a:pPr algn="r">
+              <a:spcAft>
+                <a:spcPts val="300"/>
+              </a:spcAft>
+            </a:pPr>
+            <a:r>
+              <a:rPr sz="1400" i="0" b="0">
+                <a:solidFill>
+                  <a:srgbClr val="858585"/>
+                </a:solidFill>
+                <a:latin typeface="Consolas"/>
+              </a:rPr>
+              <a:t>8</a:t>
+            </a:r>
+          </a:p>
+          <a:p>
+            <a:pPr algn="r">
+              <a:spcAft>
+                <a:spcPts val="300"/>
+              </a:spcAft>
+            </a:pPr>
+            <a:r>
+              <a:rPr sz="1400" i="0" b="0">
+                <a:solidFill>
+                  <a:srgbClr val="858585"/>
+                </a:solidFill>
+                <a:latin typeface="Consolas"/>
+              </a:rPr>
+              <a:t>9</a:t>
+            </a:r>
+          </a:p>
+          <a:p>
+            <a:pPr algn="r">
+              <a:spcAft>
+                <a:spcPts val="300"/>
+              </a:spcAft>
+            </a:pPr>
+            <a:r>
+              <a:rPr sz="1400" i="0" b="0">
+                <a:solidFill>
+                  <a:srgbClr val="858585"/>
+                </a:solidFill>
+                <a:latin typeface="Consolas"/>
+              </a:rPr>
+              <a:t>10</a:t>
+            </a:r>
+          </a:p>
+          <a:p>
+            <a:pPr algn="r">
+              <a:spcAft>
+                <a:spcPts val="300"/>
+              </a:spcAft>
+            </a:pPr>
+            <a:r>
+              <a:rPr sz="1400" i="0" b="0">
+                <a:solidFill>
+                  <a:srgbClr val="858585"/>
+                </a:solidFill>
+                <a:latin typeface="Consolas"/>
+              </a:rPr>
+              <a:t>11</a:t>
+            </a:r>
+          </a:p>
+          <a:p>
+            <a:pPr algn="r">
+              <a:spcAft>
+                <a:spcPts val="300"/>
+              </a:spcAft>
+            </a:pPr>
+            <a:r>
+              <a:rPr sz="1400" i="0" b="0">
+                <a:solidFill>
+                  <a:srgbClr val="858585"/>
+                </a:solidFill>
+                <a:latin typeface="Consolas"/>
+              </a:rPr>
+              <a:t>12</a:t>
+            </a:r>
+          </a:p>
+          <a:p>
+            <a:pPr algn="r">
+              <a:spcAft>
+                <a:spcPts val="300"/>
+              </a:spcAft>
+            </a:pPr>
+            <a:r>
+              <a:rPr sz="1400" i="0" b="0">
+                <a:solidFill>
+                  <a:srgbClr val="858585"/>
+                </a:solidFill>
+                <a:latin typeface="Consolas"/>
+              </a:rPr>
+              <a:t>13</a:t>
+            </a:r>
+          </a:p>
+          <a:p>
+            <a:pPr algn="r">
+              <a:spcAft>
+                <a:spcPts val="300"/>
+              </a:spcAft>
+            </a:pPr>
+            <a:r>
+              <a:rPr sz="1400" i="0" b="0">
+                <a:solidFill>
+                  <a:srgbClr val="858585"/>
+                </a:solidFill>
+                <a:latin typeface="Consolas"/>
+              </a:rPr>
+              <a:t>14</a:t>
+            </a:r>
+          </a:p>
+        </p:txBody>
+      </p:sp>
+      <p:sp>
+        <p:nvSpPr>
+          <p:cNvPr id="12" name="TextBox 11"/>
+          <p:cNvSpPr txBox="1"/>
+          <p:nvPr/>
+        </p:nvSpPr>
+        <p:spPr>
+          <a:xfrm>
+            <a:off x="1188720" y="1719072"/>
+            <a:ext cx="10271455" cy="3716754"/>
+          </a:xfrm>
+          <a:prstGeom prst="rect">
+            <a:avLst/>
+          </a:prstGeom>
+          <a:noFill/>
+        </p:spPr>
+        <p:txBody>
+          <a:bodyPr wrap="square">
+            <a:spAutoFit/>
+          </a:bodyPr>
+          <a:lstStyle/>
+          <a:p>
             <a:pPr>
               <a:spcAft>
-                <a:spcPts val="800"/>
+                <a:spcPts val="300"/>
               </a:spcAft>
             </a:pPr>
             <a:r>
-              <a:rPr sz="2000" b="0" i="0">
-                <a:solidFill>
-                  <a:srgbClr val="333333"/>
-                </a:solidFill>
-                <a:latin typeface="Calibri"/>
-              </a:rPr>
-              <a:t>–   En la clinica esto se vuelve concreto rapidisimo: RF-05, consultar el expediente de una mascota, junto con el RNF-02 que exige que el resultado aparezca en menos de tres segundos</a:t>
+              <a:rPr sz="1400" i="0" b="0">
+                <a:solidFill>
+                  <a:srgbClr val="D4D4D4"/>
+                </a:solidFill>
+                <a:latin typeface="Consolas"/>
+              </a:rPr>
+              <a:t>| </a:t>
+            </a:r>
+            <a:r>
+              <a:rPr sz="1400" i="0" b="0">
+                <a:solidFill>
+                  <a:srgbClr val="D4D4D4"/>
+                </a:solidFill>
+                <a:latin typeface="Consolas"/>
+              </a:rPr>
+              <a:t>RF</a:t>
+            </a:r>
+            <a:r>
+              <a:rPr sz="1400" i="0" b="0">
+                <a:solidFill>
+                  <a:srgbClr val="D4D4D4"/>
+                </a:solidFill>
+                <a:latin typeface="Consolas"/>
+              </a:rPr>
+              <a:t>     | </a:t>
+            </a:r>
+            <a:r>
+              <a:rPr sz="1400" i="0" b="0">
+                <a:solidFill>
+                  <a:srgbClr val="D4D4D4"/>
+                </a:solidFill>
+                <a:latin typeface="Consolas"/>
+              </a:rPr>
+              <a:t>Caso</a:t>
+            </a:r>
+            <a:r>
+              <a:rPr sz="1400" i="0" b="0">
+                <a:solidFill>
+                  <a:srgbClr val="D4D4D4"/>
+                </a:solidFill>
+                <a:latin typeface="Consolas"/>
+              </a:rPr>
+              <a:t> </a:t>
+            </a:r>
+            <a:r>
+              <a:rPr sz="1400" i="0" b="0">
+                <a:solidFill>
+                  <a:srgbClr val="D4D4D4"/>
+                </a:solidFill>
+                <a:latin typeface="Consolas"/>
+              </a:rPr>
+              <a:t>de</a:t>
+            </a:r>
+            <a:r>
+              <a:rPr sz="1400" i="0" b="0">
+                <a:solidFill>
+                  <a:srgbClr val="D4D4D4"/>
+                </a:solidFill>
+                <a:latin typeface="Consolas"/>
+              </a:rPr>
+              <a:t> </a:t>
+            </a:r>
+            <a:r>
+              <a:rPr sz="1400" i="0" b="0">
+                <a:solidFill>
+                  <a:srgbClr val="D4D4D4"/>
+                </a:solidFill>
+                <a:latin typeface="Consolas"/>
+              </a:rPr>
+              <a:t>uso</a:t>
+            </a:r>
+            <a:r>
+              <a:rPr sz="1400" i="0" b="0">
+                <a:solidFill>
+                  <a:srgbClr val="D4D4D4"/>
+                </a:solidFill>
+                <a:latin typeface="Consolas"/>
+              </a:rPr>
+              <a:t>                  | </a:t>
+            </a:r>
+            <a:r>
+              <a:rPr sz="1400" i="0" b="0">
+                <a:solidFill>
+                  <a:srgbClr val="D4D4D4"/>
+                </a:solidFill>
+                <a:latin typeface="Consolas"/>
+              </a:rPr>
+              <a:t>Clases</a:t>
+            </a:r>
+            <a:r>
+              <a:rPr sz="1400" i="0" b="0">
+                <a:solidFill>
+                  <a:srgbClr val="D4D4D4"/>
+                </a:solidFill>
+                <a:latin typeface="Consolas"/>
+              </a:rPr>
+              <a:t> </a:t>
+            </a:r>
+            <a:r>
+              <a:rPr sz="1400" i="0" b="0">
+                <a:solidFill>
+                  <a:srgbClr val="D4D4D4"/>
+                </a:solidFill>
+                <a:latin typeface="Consolas"/>
+              </a:rPr>
+              <a:t>implicadas</a:t>
+            </a:r>
+            <a:r>
+              <a:rPr sz="1400" i="0" b="0">
+                <a:solidFill>
+                  <a:srgbClr val="D4D4D4"/>
+                </a:solidFill>
+                <a:latin typeface="Consolas"/>
+              </a:rPr>
+              <a:t>      | </a:t>
+            </a:r>
+            <a:r>
+              <a:rPr sz="1400" i="0" b="0">
+                <a:solidFill>
+                  <a:srgbClr val="D4D4D4"/>
+                </a:solidFill>
+                <a:latin typeface="Consolas"/>
+              </a:rPr>
+              <a:t>Mockup</a:t>
+            </a:r>
+            <a:r>
+              <a:rPr sz="1400" i="0" b="0">
+                <a:solidFill>
+                  <a:srgbClr val="D4D4D4"/>
+                </a:solidFill>
+                <a:latin typeface="Consolas"/>
+              </a:rPr>
+              <a:t> | </a:t>
+            </a:r>
+            <a:r>
+              <a:rPr sz="1400" i="0" b="0">
+                <a:solidFill>
+                  <a:srgbClr val="D4D4D4"/>
+                </a:solidFill>
+                <a:latin typeface="Consolas"/>
+              </a:rPr>
+              <a:t>Estado</a:t>
+            </a:r>
+            <a:r>
+              <a:rPr sz="1400" i="0" b="0">
+                <a:solidFill>
+                  <a:srgbClr val="D4D4D4"/>
+                </a:solidFill>
+                <a:latin typeface="Consolas"/>
+              </a:rPr>
+              <a:t>      |</a:t>
             </a:r>
           </a:p>
           <a:p>
             <a:pPr>
               <a:spcAft>
-                <a:spcPts val="800"/>
+                <a:spcPts val="300"/>
               </a:spcAft>
             </a:pPr>
             <a:r>
-              <a:rPr sz="2000" b="0" i="0">
-                <a:solidFill>
-                  <a:srgbClr val="333333"/>
-                </a:solidFill>
-                <a:latin typeface="Calibri"/>
-              </a:rPr>
-              <a:t>–   Debe llegar a CU-02 Buscar expediente y de ahi a las clases Mascota y Consulta, con una operacion de busqueda por codigo o por nombre</a:t>
+              <a:rPr sz="1400" i="0" b="0">
+                <a:solidFill>
+                  <a:srgbClr val="D4D4D4"/>
+                </a:solidFill>
+                <a:latin typeface="Consolas"/>
+              </a:rPr>
+              <a:t>|------</a:t>
+            </a:r>
+            <a:r>
+              <a:rPr sz="1400" i="0" b="0">
+                <a:solidFill>
+                  <a:srgbClr val="D4D4D4"/>
+                </a:solidFill>
+                <a:latin typeface="Consolas"/>
+              </a:rPr>
+              <a:t>--|------------------------------|------------------------|--------|-------------|</a:t>
             </a:r>
           </a:p>
           <a:p>
             <a:pPr>
               <a:spcAft>
-                <a:spcPts val="800"/>
+                <a:spcPts val="300"/>
               </a:spcAft>
             </a:pPr>
             <a:r>
-              <a:rPr sz="2000" b="0" i="0">
-                <a:solidFill>
-                  <a:srgbClr val="333333"/>
-                </a:solidFill>
-                <a:latin typeface="Calibri"/>
-              </a:rPr>
-              <a:t>–   Si ese camino se rompe en cualquier punto, el problema numero dos de la clinica sigue sin resolverse aunque el equipo tenga veinte paginas escritas.</a:t>
+              <a:rPr sz="1400" i="0" b="0">
+                <a:solidFill>
+                  <a:srgbClr val="D4D4D4"/>
+                </a:solidFill>
+                <a:latin typeface="Consolas"/>
+              </a:rPr>
+              <a:t>| </a:t>
+            </a:r>
+            <a:r>
+              <a:rPr sz="1400" i="0" b="0">
+                <a:solidFill>
+                  <a:srgbClr val="D4D4D4"/>
+                </a:solidFill>
+                <a:latin typeface="Consolas"/>
+              </a:rPr>
+              <a:t>RF</a:t>
+            </a:r>
+            <a:r>
+              <a:rPr sz="1400" i="0" b="0">
+                <a:solidFill>
+                  <a:srgbClr val="D4D4D4"/>
+                </a:solidFill>
+                <a:latin typeface="Consolas"/>
+              </a:rPr>
+              <a:t>-</a:t>
+            </a:r>
+            <a:r>
+              <a:rPr sz="1400" i="0" b="0">
+                <a:solidFill>
+                  <a:srgbClr val="B5CEA8"/>
+                </a:solidFill>
+                <a:latin typeface="Consolas"/>
+              </a:rPr>
+              <a:t>02</a:t>
+            </a:r>
+            <a:r>
+              <a:rPr sz="1400" i="0" b="0">
+                <a:solidFill>
+                  <a:srgbClr val="D4D4D4"/>
+                </a:solidFill>
+                <a:latin typeface="Consolas"/>
+              </a:rPr>
+              <a:t>  | </a:t>
+            </a:r>
+            <a:r>
+              <a:rPr sz="1400" i="0" b="0">
+                <a:solidFill>
+                  <a:srgbClr val="D4D4D4"/>
+                </a:solidFill>
+                <a:latin typeface="Consolas"/>
+              </a:rPr>
+              <a:t>CU</a:t>
+            </a:r>
+            <a:r>
+              <a:rPr sz="1400" i="0" b="0">
+                <a:solidFill>
+                  <a:srgbClr val="D4D4D4"/>
+                </a:solidFill>
+                <a:latin typeface="Consolas"/>
+              </a:rPr>
+              <a:t>-</a:t>
+            </a:r>
+            <a:r>
+              <a:rPr sz="1400" i="0" b="0">
+                <a:solidFill>
+                  <a:srgbClr val="B5CEA8"/>
+                </a:solidFill>
+                <a:latin typeface="Consolas"/>
+              </a:rPr>
+              <a:t>00</a:t>
+            </a:r>
+            <a:r>
+              <a:rPr sz="1400" i="0" b="0">
+                <a:solidFill>
+                  <a:srgbClr val="D4D4D4"/>
+                </a:solidFill>
+                <a:latin typeface="Consolas"/>
+              </a:rPr>
+              <a:t> </a:t>
+            </a:r>
+            <a:r>
+              <a:rPr sz="1400" i="0" b="0">
+                <a:solidFill>
+                  <a:srgbClr val="D4D4D4"/>
+                </a:solidFill>
+                <a:latin typeface="Consolas"/>
+              </a:rPr>
+              <a:t>Registrar</a:t>
+            </a:r>
+            <a:r>
+              <a:rPr sz="1400" i="0" b="0">
+                <a:solidFill>
+                  <a:srgbClr val="D4D4D4"/>
+                </a:solidFill>
+                <a:latin typeface="Consolas"/>
+              </a:rPr>
+              <a:t> </a:t>
+            </a:r>
+            <a:r>
+              <a:rPr sz="1400" i="0" b="0">
+                <a:solidFill>
+                  <a:srgbClr val="D4D4D4"/>
+                </a:solidFill>
+                <a:latin typeface="Consolas"/>
+              </a:rPr>
+              <a:t>propietario</a:t>
+            </a:r>
+            <a:r>
+              <a:rPr sz="1400" i="0" b="0">
+                <a:solidFill>
+                  <a:srgbClr val="D4D4D4"/>
+                </a:solidFill>
+                <a:latin typeface="Consolas"/>
+              </a:rPr>
+              <a:t>  | </a:t>
+            </a:r>
+            <a:r>
+              <a:rPr sz="1400" i="0" b="0">
+                <a:solidFill>
+                  <a:srgbClr val="D4D4D4"/>
+                </a:solidFill>
+                <a:latin typeface="Consolas"/>
+              </a:rPr>
+              <a:t>Propietario</a:t>
+            </a:r>
+            <a:r>
+              <a:rPr sz="1400" i="0" b="0">
+                <a:solidFill>
+                  <a:srgbClr val="D4D4D4"/>
+                </a:solidFill>
+                <a:latin typeface="Consolas"/>
+              </a:rPr>
+              <a:t>            | </a:t>
+            </a:r>
+            <a:r>
+              <a:rPr sz="1400" i="0" b="0">
+                <a:solidFill>
+                  <a:srgbClr val="D4D4D4"/>
+                </a:solidFill>
+                <a:latin typeface="Consolas"/>
+              </a:rPr>
+              <a:t>M</a:t>
+            </a:r>
+            <a:r>
+              <a:rPr sz="1400" i="0" b="0">
+                <a:solidFill>
+                  <a:srgbClr val="D4D4D4"/>
+                </a:solidFill>
+                <a:latin typeface="Consolas"/>
+              </a:rPr>
+              <a:t>-</a:t>
+            </a:r>
+            <a:r>
+              <a:rPr sz="1400" i="0" b="0">
+                <a:solidFill>
+                  <a:srgbClr val="B5CEA8"/>
+                </a:solidFill>
+                <a:latin typeface="Consolas"/>
+              </a:rPr>
+              <a:t>01</a:t>
+            </a:r>
+            <a:r>
+              <a:rPr sz="1400" i="0" b="0">
+                <a:solidFill>
+                  <a:srgbClr val="D4D4D4"/>
+                </a:solidFill>
+                <a:latin typeface="Consolas"/>
+              </a:rPr>
+              <a:t>   | </a:t>
+            </a:r>
+            <a:r>
+              <a:rPr sz="1400" i="0" b="0">
+                <a:solidFill>
+                  <a:srgbClr val="D4D4D4"/>
+                </a:solidFill>
+                <a:latin typeface="Consolas"/>
+              </a:rPr>
+              <a:t>OK</a:t>
+            </a:r>
+            <a:r>
+              <a:rPr sz="1400" i="0" b="0">
+                <a:solidFill>
+                  <a:srgbClr val="D4D4D4"/>
+                </a:solidFill>
+                <a:latin typeface="Consolas"/>
+              </a:rPr>
+              <a:t>          |</a:t>
             </a:r>
           </a:p>
           <a:p>
             <a:pPr>
               <a:spcAft>
-                <a:spcPts val="800"/>
+                <a:spcPts val="300"/>
               </a:spcAft>
             </a:pPr>
             <a:r>
-              <a:rPr sz="2000" b="0" i="0">
-                <a:solidFill>
-                  <a:srgbClr val="333333"/>
+              <a:rPr sz="1400" i="0" b="0">
+                <a:solidFill>
+                  <a:srgbClr val="D4D4D4"/>
+                </a:solidFill>
+                <a:latin typeface="Consolas"/>
+              </a:rPr>
+              <a:t>| </a:t>
+            </a:r>
+            <a:r>
+              <a:rPr sz="1400" i="0" b="0">
+                <a:solidFill>
+                  <a:srgbClr val="D4D4D4"/>
+                </a:solidFill>
+                <a:latin typeface="Consolas"/>
+              </a:rPr>
+              <a:t>RF</a:t>
+            </a:r>
+            <a:r>
+              <a:rPr sz="1400" i="0" b="0">
+                <a:solidFill>
+                  <a:srgbClr val="D4D4D4"/>
+                </a:solidFill>
+                <a:latin typeface="Consolas"/>
+              </a:rPr>
+              <a:t>-</a:t>
+            </a:r>
+            <a:r>
+              <a:rPr sz="1400" i="0" b="0">
+                <a:solidFill>
+                  <a:srgbClr val="B5CEA8"/>
+                </a:solidFill>
+                <a:latin typeface="Consolas"/>
+              </a:rPr>
+              <a:t>03</a:t>
+            </a:r>
+            <a:r>
+              <a:rPr sz="1400" i="0" b="0">
+                <a:solidFill>
+                  <a:srgbClr val="D4D4D4"/>
+                </a:solidFill>
+                <a:latin typeface="Consolas"/>
+              </a:rPr>
+              <a:t>  | </a:t>
+            </a:r>
+            <a:r>
+              <a:rPr sz="1400" i="0" b="0">
+                <a:solidFill>
+                  <a:srgbClr val="D4D4D4"/>
+                </a:solidFill>
+                <a:latin typeface="Consolas"/>
+              </a:rPr>
+              <a:t>CU</a:t>
+            </a:r>
+            <a:r>
+              <a:rPr sz="1400" i="0" b="0">
+                <a:solidFill>
+                  <a:srgbClr val="D4D4D4"/>
+                </a:solidFill>
+                <a:latin typeface="Consolas"/>
+              </a:rPr>
+              <a:t>-</a:t>
+            </a:r>
+            <a:r>
+              <a:rPr sz="1400" i="0" b="0">
+                <a:solidFill>
+                  <a:srgbClr val="B5CEA8"/>
+                </a:solidFill>
+                <a:latin typeface="Consolas"/>
+              </a:rPr>
+              <a:t>01</a:t>
+            </a:r>
+            <a:r>
+              <a:rPr sz="1400" i="0" b="0">
+                <a:solidFill>
+                  <a:srgbClr val="D4D4D4"/>
+                </a:solidFill>
+                <a:latin typeface="Consolas"/>
+              </a:rPr>
+              <a:t> </a:t>
+            </a:r>
+            <a:r>
+              <a:rPr sz="1400" i="0" b="0">
+                <a:solidFill>
+                  <a:srgbClr val="D4D4D4"/>
+                </a:solidFill>
+                <a:latin typeface="Consolas"/>
+              </a:rPr>
+              <a:t>Registrar</a:t>
+            </a:r>
+            <a:r>
+              <a:rPr sz="1400" i="0" b="0">
+                <a:solidFill>
+                  <a:srgbClr val="D4D4D4"/>
+                </a:solidFill>
+                <a:latin typeface="Consolas"/>
+              </a:rPr>
+              <a:t> </a:t>
+            </a:r>
+            <a:r>
+              <a:rPr sz="1400" i="0" b="0">
+                <a:solidFill>
+                  <a:srgbClr val="D4D4D4"/>
+                </a:solidFill>
+                <a:latin typeface="Consolas"/>
+              </a:rPr>
+              <a:t>mascota</a:t>
+            </a:r>
+            <a:r>
+              <a:rPr sz="1400" i="0" b="0">
+                <a:solidFill>
+                  <a:srgbClr val="D4D4D4"/>
+                </a:solidFill>
+                <a:latin typeface="Consolas"/>
+              </a:rPr>
+              <a:t>      | </a:t>
+            </a:r>
+            <a:r>
+              <a:rPr sz="1400" i="0" b="0">
+                <a:solidFill>
+                  <a:srgbClr val="D4D4D4"/>
+                </a:solidFill>
+                <a:latin typeface="Consolas"/>
+              </a:rPr>
+              <a:t>Mascota</a:t>
+            </a:r>
+            <a:r>
+              <a:rPr sz="1400" i="0" b="0">
+                <a:solidFill>
+                  <a:srgbClr val="D4D4D4"/>
+                </a:solidFill>
+                <a:latin typeface="Consolas"/>
+              </a:rPr>
+              <a:t>, </a:t>
+            </a:r>
+            <a:r>
+              <a:rPr sz="1400" i="0" b="0">
+                <a:solidFill>
+                  <a:srgbClr val="D4D4D4"/>
+                </a:solidFill>
+                <a:latin typeface="Consolas"/>
+              </a:rPr>
+              <a:t>Propietario</a:t>
+            </a:r>
+            <a:r>
+              <a:rPr sz="1400" i="0" b="0">
+                <a:solidFill>
+                  <a:srgbClr val="D4D4D4"/>
+                </a:solidFill>
+                <a:latin typeface="Consolas"/>
+              </a:rPr>
+              <a:t>   | </a:t>
+            </a:r>
+            <a:r>
+              <a:rPr sz="1400" i="0" b="0">
+                <a:solidFill>
+                  <a:srgbClr val="D4D4D4"/>
+                </a:solidFill>
+                <a:latin typeface="Consolas"/>
+              </a:rPr>
+              <a:t>M</a:t>
+            </a:r>
+            <a:r>
+              <a:rPr sz="1400" i="0" b="0">
+                <a:solidFill>
+                  <a:srgbClr val="D4D4D4"/>
+                </a:solidFill>
+                <a:latin typeface="Consolas"/>
+              </a:rPr>
+              <a:t>-</a:t>
+            </a:r>
+            <a:r>
+              <a:rPr sz="1400" i="0" b="0">
+                <a:solidFill>
+                  <a:srgbClr val="B5CEA8"/>
+                </a:solidFill>
+                <a:latin typeface="Consolas"/>
+              </a:rPr>
+              <a:t>02</a:t>
+            </a:r>
+            <a:r>
+              <a:rPr sz="1400" i="0" b="0">
+                <a:solidFill>
+                  <a:srgbClr val="D4D4D4"/>
+                </a:solidFill>
+                <a:latin typeface="Consolas"/>
+              </a:rPr>
+              <a:t>   | </a:t>
+            </a:r>
+            <a:r>
+              <a:rPr sz="1400" i="0" b="0">
+                <a:solidFill>
+                  <a:srgbClr val="D4D4D4"/>
+                </a:solidFill>
+                <a:latin typeface="Consolas"/>
+              </a:rPr>
+              <a:t>OK</a:t>
+            </a:r>
+            <a:r>
+              <a:rPr sz="1400" i="0" b="0">
+                <a:solidFill>
+                  <a:srgbClr val="D4D4D4"/>
+                </a:solidFill>
+                <a:latin typeface="Consolas"/>
+              </a:rPr>
+              <a:t>          |</a:t>
+            </a:r>
+          </a:p>
+          <a:p>
+            <a:pPr>
+              <a:spcAft>
+                <a:spcPts val="300"/>
+              </a:spcAft>
+            </a:pPr>
+            <a:r>
+              <a:rPr sz="1400" i="0" b="0">
+                <a:solidFill>
+                  <a:srgbClr val="D4D4D4"/>
+                </a:solidFill>
+                <a:latin typeface="Consolas"/>
+              </a:rPr>
+              <a:t>| </a:t>
+            </a:r>
+            <a:r>
+              <a:rPr sz="1400" i="0" b="0">
+                <a:solidFill>
+                  <a:srgbClr val="D4D4D4"/>
+                </a:solidFill>
+                <a:latin typeface="Consolas"/>
+              </a:rPr>
+              <a:t>RF</a:t>
+            </a:r>
+            <a:r>
+              <a:rPr sz="1400" i="0" b="0">
+                <a:solidFill>
+                  <a:srgbClr val="D4D4D4"/>
+                </a:solidFill>
+                <a:latin typeface="Consolas"/>
+              </a:rPr>
+              <a:t>-</a:t>
+            </a:r>
+            <a:r>
+              <a:rPr sz="1400" i="0" b="0">
+                <a:solidFill>
+                  <a:srgbClr val="B5CEA8"/>
+                </a:solidFill>
+                <a:latin typeface="Consolas"/>
+              </a:rPr>
+              <a:t>05</a:t>
+            </a:r>
+            <a:r>
+              <a:rPr sz="1400" i="0" b="0">
+                <a:solidFill>
+                  <a:srgbClr val="D4D4D4"/>
+                </a:solidFill>
+                <a:latin typeface="Consolas"/>
+              </a:rPr>
+              <a:t>  | </a:t>
+            </a:r>
+            <a:r>
+              <a:rPr sz="1400" i="0" b="0">
+                <a:solidFill>
+                  <a:srgbClr val="D4D4D4"/>
+                </a:solidFill>
+                <a:latin typeface="Consolas"/>
+              </a:rPr>
+              <a:t>CU</a:t>
+            </a:r>
+            <a:r>
+              <a:rPr sz="1400" i="0" b="0">
+                <a:solidFill>
+                  <a:srgbClr val="D4D4D4"/>
+                </a:solidFill>
+                <a:latin typeface="Consolas"/>
+              </a:rPr>
+              <a:t>-</a:t>
+            </a:r>
+            <a:r>
+              <a:rPr sz="1400" i="0" b="0">
+                <a:solidFill>
+                  <a:srgbClr val="B5CEA8"/>
+                </a:solidFill>
+                <a:latin typeface="Consolas"/>
+              </a:rPr>
+              <a:t>02</a:t>
+            </a:r>
+            <a:r>
+              <a:rPr sz="1400" i="0" b="0">
+                <a:solidFill>
+                  <a:srgbClr val="D4D4D4"/>
+                </a:solidFill>
+                <a:latin typeface="Consolas"/>
+              </a:rPr>
+              <a:t> </a:t>
+            </a:r>
+            <a:r>
+              <a:rPr sz="1400" i="0" b="0">
+                <a:solidFill>
+                  <a:srgbClr val="D4D4D4"/>
+                </a:solidFill>
+                <a:latin typeface="Consolas"/>
+              </a:rPr>
+              <a:t>Buscar</a:t>
+            </a:r>
+            <a:r>
+              <a:rPr sz="1400" i="0" b="0">
+                <a:solidFill>
+                  <a:srgbClr val="D4D4D4"/>
+                </a:solidFill>
+                <a:latin typeface="Consolas"/>
+              </a:rPr>
+              <a:t> </a:t>
+            </a:r>
+            <a:r>
+              <a:rPr sz="1400" i="0" b="0">
+                <a:solidFill>
+                  <a:srgbClr val="D4D4D4"/>
+                </a:solidFill>
+                <a:latin typeface="Consolas"/>
+              </a:rPr>
+              <a:t>expediente</a:t>
+            </a:r>
+            <a:r>
+              <a:rPr sz="1400" i="0" b="0">
+                <a:solidFill>
+                  <a:srgbClr val="D4D4D4"/>
+                </a:solidFill>
+                <a:latin typeface="Consolas"/>
+              </a:rPr>
+              <a:t>      | </a:t>
+            </a:r>
+            <a:r>
+              <a:rPr sz="1400" i="0" b="0">
+                <a:solidFill>
+                  <a:srgbClr val="D4D4D4"/>
+                </a:solidFill>
+                <a:latin typeface="Consolas"/>
+              </a:rPr>
+              <a:t>Mascota</a:t>
+            </a:r>
+            <a:r>
+              <a:rPr sz="1400" i="0" b="0">
+                <a:solidFill>
+                  <a:srgbClr val="D4D4D4"/>
+                </a:solidFill>
+                <a:latin typeface="Consolas"/>
+              </a:rPr>
+              <a:t>, </a:t>
+            </a:r>
+            <a:r>
+              <a:rPr sz="1400" i="0" b="0">
+                <a:solidFill>
+                  <a:srgbClr val="D4D4D4"/>
+                </a:solidFill>
+                <a:latin typeface="Consolas"/>
+              </a:rPr>
+              <a:t>Consulta</a:t>
+            </a:r>
+            <a:r>
+              <a:rPr sz="1400" i="0" b="0">
+                <a:solidFill>
+                  <a:srgbClr val="D4D4D4"/>
+                </a:solidFill>
+                <a:latin typeface="Consolas"/>
+              </a:rPr>
+              <a:t>      | </a:t>
+            </a:r>
+            <a:r>
+              <a:rPr sz="1400" i="0" b="0">
+                <a:solidFill>
+                  <a:srgbClr val="D4D4D4"/>
+                </a:solidFill>
+                <a:latin typeface="Consolas"/>
+              </a:rPr>
+              <a:t>M</a:t>
+            </a:r>
+            <a:r>
+              <a:rPr sz="1400" i="0" b="0">
+                <a:solidFill>
+                  <a:srgbClr val="D4D4D4"/>
+                </a:solidFill>
+                <a:latin typeface="Consolas"/>
+              </a:rPr>
+              <a:t>-</a:t>
+            </a:r>
+            <a:r>
+              <a:rPr sz="1400" i="0" b="0">
+                <a:solidFill>
+                  <a:srgbClr val="B5CEA8"/>
+                </a:solidFill>
+                <a:latin typeface="Consolas"/>
+              </a:rPr>
+              <a:t>03</a:t>
+            </a:r>
+            <a:r>
+              <a:rPr sz="1400" i="0" b="0">
+                <a:solidFill>
+                  <a:srgbClr val="D4D4D4"/>
+                </a:solidFill>
+                <a:latin typeface="Consolas"/>
+              </a:rPr>
+              <a:t>   | </a:t>
+            </a:r>
+            <a:r>
+              <a:rPr sz="1400" i="0" b="0">
+                <a:solidFill>
+                  <a:srgbClr val="D4D4D4"/>
+                </a:solidFill>
+                <a:latin typeface="Consolas"/>
+              </a:rPr>
+              <a:t>OK</a:t>
+            </a:r>
+            <a:r>
+              <a:rPr sz="1400" i="0" b="0">
+                <a:solidFill>
+                  <a:srgbClr val="D4D4D4"/>
+                </a:solidFill>
+                <a:latin typeface="Consolas"/>
+              </a:rPr>
+              <a:t>          |</a:t>
+            </a:r>
+          </a:p>
+          <a:p>
+            <a:pPr>
+              <a:spcAft>
+                <a:spcPts val="300"/>
+              </a:spcAft>
+            </a:pPr>
+            <a:r>
+              <a:rPr sz="1400" i="0" b="0">
+                <a:solidFill>
+                  <a:srgbClr val="D4D4D4"/>
+                </a:solidFill>
+                <a:latin typeface="Consolas"/>
+              </a:rPr>
+              <a:t>| </a:t>
+            </a:r>
+            <a:r>
+              <a:rPr sz="1400" i="0" b="0">
+                <a:solidFill>
+                  <a:srgbClr val="D4D4D4"/>
+                </a:solidFill>
+                <a:latin typeface="Consolas"/>
+              </a:rPr>
+              <a:t>RF</a:t>
+            </a:r>
+            <a:r>
+              <a:rPr sz="1400" i="0" b="0">
+                <a:solidFill>
+                  <a:srgbClr val="D4D4D4"/>
+                </a:solidFill>
+                <a:latin typeface="Consolas"/>
+              </a:rPr>
+              <a:t>-</a:t>
+            </a:r>
+            <a:r>
+              <a:rPr sz="1400" i="0" b="0">
+                <a:solidFill>
+                  <a:srgbClr val="B5CEA8"/>
+                </a:solidFill>
+                <a:latin typeface="Consolas"/>
+              </a:rPr>
+              <a:t>06</a:t>
+            </a:r>
+            <a:r>
+              <a:rPr sz="1400" i="0" b="0">
+                <a:solidFill>
+                  <a:srgbClr val="D4D4D4"/>
+                </a:solidFill>
+                <a:latin typeface="Consolas"/>
+              </a:rPr>
+              <a:t>  | </a:t>
+            </a:r>
+            <a:r>
+              <a:rPr sz="1400" i="0" b="0">
+                <a:solidFill>
+                  <a:srgbClr val="D4D4D4"/>
+                </a:solidFill>
+                <a:latin typeface="Consolas"/>
+              </a:rPr>
+              <a:t>CU</a:t>
+            </a:r>
+            <a:r>
+              <a:rPr sz="1400" i="0" b="0">
+                <a:solidFill>
+                  <a:srgbClr val="D4D4D4"/>
+                </a:solidFill>
+                <a:latin typeface="Consolas"/>
+              </a:rPr>
+              <a:t>-</a:t>
+            </a:r>
+            <a:r>
+              <a:rPr sz="1400" i="0" b="0">
+                <a:solidFill>
+                  <a:srgbClr val="B5CEA8"/>
+                </a:solidFill>
+                <a:latin typeface="Consolas"/>
+              </a:rPr>
+              <a:t>03</a:t>
+            </a:r>
+            <a:r>
+              <a:rPr sz="1400" i="0" b="0">
+                <a:solidFill>
+                  <a:srgbClr val="D4D4D4"/>
+                </a:solidFill>
+                <a:latin typeface="Consolas"/>
+              </a:rPr>
+              <a:t> </a:t>
+            </a:r>
+            <a:r>
+              <a:rPr sz="1400" i="0" b="0">
+                <a:solidFill>
+                  <a:srgbClr val="D4D4D4"/>
+                </a:solidFill>
+                <a:latin typeface="Consolas"/>
+              </a:rPr>
+              <a:t>Registrar</a:t>
+            </a:r>
+            <a:r>
+              <a:rPr sz="1400" i="0" b="0">
+                <a:solidFill>
+                  <a:srgbClr val="D4D4D4"/>
+                </a:solidFill>
+                <a:latin typeface="Consolas"/>
+              </a:rPr>
+              <a:t> </a:t>
+            </a:r>
+            <a:r>
+              <a:rPr sz="1400" i="0" b="0">
+                <a:solidFill>
+                  <a:srgbClr val="D4D4D4"/>
+                </a:solidFill>
+                <a:latin typeface="Consolas"/>
+              </a:rPr>
+              <a:t>consulta</a:t>
+            </a:r>
+            <a:r>
+              <a:rPr sz="1400" i="0" b="0">
+                <a:solidFill>
+                  <a:srgbClr val="D4D4D4"/>
+                </a:solidFill>
+                <a:latin typeface="Consolas"/>
+              </a:rPr>
+              <a:t>     | </a:t>
+            </a:r>
+            <a:r>
+              <a:rPr sz="1400" i="0" b="0">
+                <a:solidFill>
+                  <a:srgbClr val="D4D4D4"/>
+                </a:solidFill>
+                <a:latin typeface="Consolas"/>
+              </a:rPr>
+              <a:t>Consulta</a:t>
+            </a:r>
+            <a:r>
+              <a:rPr sz="1400" i="0" b="0">
+                <a:solidFill>
+                  <a:srgbClr val="D4D4D4"/>
+                </a:solidFill>
+                <a:latin typeface="Consolas"/>
+              </a:rPr>
+              <a:t>, ???          | </a:t>
+            </a:r>
+            <a:r>
+              <a:rPr sz="1400" i="0" b="0">
+                <a:solidFill>
+                  <a:srgbClr val="D4D4D4"/>
+                </a:solidFill>
+                <a:latin typeface="Consolas"/>
+              </a:rPr>
+              <a:t>M</a:t>
+            </a:r>
+            <a:r>
+              <a:rPr sz="1400" i="0" b="0">
+                <a:solidFill>
+                  <a:srgbClr val="D4D4D4"/>
+                </a:solidFill>
+                <a:latin typeface="Consolas"/>
+              </a:rPr>
+              <a:t>-</a:t>
+            </a:r>
+            <a:r>
+              <a:rPr sz="1400" i="0" b="0">
+                <a:solidFill>
+                  <a:srgbClr val="B5CEA8"/>
+                </a:solidFill>
+                <a:latin typeface="Consolas"/>
+              </a:rPr>
+              <a:t>05</a:t>
+            </a:r>
+            <a:r>
+              <a:rPr sz="1400" i="0" b="0">
+                <a:solidFill>
+                  <a:srgbClr val="D4D4D4"/>
+                </a:solidFill>
+                <a:latin typeface="Consolas"/>
+              </a:rPr>
+              <a:t>   | </a:t>
+            </a:r>
+            <a:r>
+              <a:rPr sz="1400" i="0" b="0">
+                <a:solidFill>
+                  <a:srgbClr val="D4D4D4"/>
+                </a:solidFill>
+                <a:latin typeface="Consolas"/>
+              </a:rPr>
+              <a:t>HALLAZGO</a:t>
+            </a:r>
+            <a:r>
+              <a:rPr sz="1400" i="0" b="0">
+                <a:solidFill>
+                  <a:srgbClr val="D4D4D4"/>
+                </a:solidFill>
+                <a:latin typeface="Consolas"/>
+              </a:rPr>
+              <a:t>    |</a:t>
+            </a:r>
+          </a:p>
+          <a:p>
+            <a:pPr>
+              <a:spcAft>
+                <a:spcPts val="300"/>
+              </a:spcAft>
+            </a:pPr>
+            <a:r>
+              <a:rPr sz="1400" i="0" b="0">
+                <a:solidFill>
+                  <a:srgbClr val="D4D4D4"/>
+                </a:solidFill>
+                <a:latin typeface="Consolas"/>
+              </a:rPr>
+              <a:t>| </a:t>
+            </a:r>
+            <a:r>
+              <a:rPr sz="1400" i="0" b="0">
+                <a:solidFill>
+                  <a:srgbClr val="D4D4D4"/>
+                </a:solidFill>
+                <a:latin typeface="Consolas"/>
+              </a:rPr>
+              <a:t>RF</a:t>
+            </a:r>
+            <a:r>
+              <a:rPr sz="1400" i="0" b="0">
+                <a:solidFill>
+                  <a:srgbClr val="D4D4D4"/>
+                </a:solidFill>
+                <a:latin typeface="Consolas"/>
+              </a:rPr>
+              <a:t>-</a:t>
+            </a:r>
+            <a:r>
+              <a:rPr sz="1400" i="0" b="0">
+                <a:solidFill>
+                  <a:srgbClr val="B5CEA8"/>
+                </a:solidFill>
+                <a:latin typeface="Consolas"/>
+              </a:rPr>
+              <a:t>07</a:t>
+            </a:r>
+            <a:r>
+              <a:rPr sz="1400" i="0" b="0">
+                <a:solidFill>
+                  <a:srgbClr val="D4D4D4"/>
+                </a:solidFill>
+                <a:latin typeface="Consolas"/>
+              </a:rPr>
+              <a:t>  | (</a:t>
+            </a:r>
+            <a:r>
+              <a:rPr sz="1400" i="0" b="0">
+                <a:solidFill>
+                  <a:srgbClr val="D4D4D4"/>
+                </a:solidFill>
+                <a:latin typeface="Consolas"/>
+              </a:rPr>
+              <a:t>no</a:t>
+            </a:r>
+            <a:r>
+              <a:rPr sz="1400" i="0" b="0">
+                <a:solidFill>
+                  <a:srgbClr val="D4D4D4"/>
+                </a:solidFill>
+                <a:latin typeface="Consolas"/>
+              </a:rPr>
+              <a:t> </a:t>
+            </a:r>
+            <a:r>
+              <a:rPr sz="1400" i="0" b="0">
+                <a:solidFill>
+                  <a:srgbClr val="D4D4D4"/>
+                </a:solidFill>
+                <a:latin typeface="Consolas"/>
+              </a:rPr>
+              <a:t>existe</a:t>
+            </a:r>
+            <a:r>
+              <a:rPr sz="1400" i="0" b="0">
+                <a:solidFill>
+                  <a:srgbClr val="D4D4D4"/>
+                </a:solidFill>
+                <a:latin typeface="Consolas"/>
+              </a:rPr>
+              <a:t>)                  | (</a:t>
+            </a:r>
+            <a:r>
+              <a:rPr sz="1400" i="0" b="0">
+                <a:solidFill>
+                  <a:srgbClr val="D4D4D4"/>
+                </a:solidFill>
+                <a:latin typeface="Consolas"/>
+              </a:rPr>
+              <a:t>no</a:t>
+            </a:r>
+            <a:r>
+              <a:rPr sz="1400" i="0" b="0">
+                <a:solidFill>
+                  <a:srgbClr val="D4D4D4"/>
+                </a:solidFill>
+                <a:latin typeface="Consolas"/>
+              </a:rPr>
+              <a:t> </a:t>
+            </a:r>
+            <a:r>
+              <a:rPr sz="1400" i="0" b="0">
+                <a:solidFill>
+                  <a:srgbClr val="D4D4D4"/>
+                </a:solidFill>
+                <a:latin typeface="Consolas"/>
+              </a:rPr>
+              <a:t>existe</a:t>
+            </a:r>
+            <a:r>
+              <a:rPr sz="1400" i="0" b="0">
+                <a:solidFill>
+                  <a:srgbClr val="D4D4D4"/>
+                </a:solidFill>
+                <a:latin typeface="Consolas"/>
+              </a:rPr>
+              <a:t>)            | </a:t>
+            </a:r>
+            <a:r>
+              <a:rPr sz="1400" i="0" b="0">
+                <a:solidFill>
+                  <a:srgbClr val="D4D4D4"/>
+                </a:solidFill>
+                <a:latin typeface="Consolas"/>
+              </a:rPr>
+              <a:t>--     | HUERFANO    |</a:t>
+            </a:r>
+          </a:p>
+          <a:p>
+            <a:pPr>
+              <a:spcAft>
+                <a:spcPts val="300"/>
+              </a:spcAft>
+            </a:pPr>
+            <a:r>
+              <a:rPr sz="1400" i="0" b="0">
+                <a:solidFill>
+                  <a:srgbClr val="D4D4D4"/>
+                </a:solidFill>
+                <a:latin typeface="Consolas"/>
+              </a:rPr>
+              <a:t>| (</a:t>
+            </a:r>
+            <a:r>
+              <a:rPr sz="1400" i="0" b="0">
+                <a:solidFill>
+                  <a:srgbClr val="D4D4D4"/>
+                </a:solidFill>
+                <a:latin typeface="Consolas"/>
+              </a:rPr>
+              <a:t>sin</a:t>
+            </a:r>
+            <a:r>
+              <a:rPr sz="1400" i="0" b="0">
+                <a:solidFill>
+                  <a:srgbClr val="D4D4D4"/>
+                </a:solidFill>
+                <a:latin typeface="Consolas"/>
+              </a:rPr>
+              <a:t>)  | </a:t>
+            </a:r>
+            <a:r>
+              <a:rPr sz="1400" i="0" b="0">
+                <a:solidFill>
+                  <a:srgbClr val="D4D4D4"/>
+                </a:solidFill>
+                <a:latin typeface="Consolas"/>
+              </a:rPr>
+              <a:t>CU</a:t>
+            </a:r>
+            <a:r>
+              <a:rPr sz="1400" i="0" b="0">
+                <a:solidFill>
+                  <a:srgbClr val="D4D4D4"/>
+                </a:solidFill>
+                <a:latin typeface="Consolas"/>
+              </a:rPr>
+              <a:t>-</a:t>
+            </a:r>
+            <a:r>
+              <a:rPr sz="1400" i="0" b="0">
+                <a:solidFill>
+                  <a:srgbClr val="B5CEA8"/>
+                </a:solidFill>
+                <a:latin typeface="Consolas"/>
+              </a:rPr>
+              <a:t>04</a:t>
+            </a:r>
+            <a:r>
+              <a:rPr sz="1400" i="0" b="0">
+                <a:solidFill>
+                  <a:srgbClr val="D4D4D4"/>
+                </a:solidFill>
+                <a:latin typeface="Consolas"/>
+              </a:rPr>
+              <a:t> </a:t>
+            </a:r>
+            <a:r>
+              <a:rPr sz="1400" i="0" b="0">
+                <a:solidFill>
+                  <a:srgbClr val="D4D4D4"/>
+                </a:solidFill>
+                <a:latin typeface="Consolas"/>
+              </a:rPr>
+              <a:t>Agendar</a:t>
+            </a:r>
+            <a:r>
+              <a:rPr sz="1400" i="0" b="0">
+                <a:solidFill>
+                  <a:srgbClr val="D4D4D4"/>
+                </a:solidFill>
+                <a:latin typeface="Consolas"/>
+              </a:rPr>
+              <a:t> </a:t>
+            </a:r>
+            <a:r>
+              <a:rPr sz="1400" i="0" b="0">
+                <a:solidFill>
+                  <a:srgbClr val="D4D4D4"/>
+                </a:solidFill>
+                <a:latin typeface="Consolas"/>
+              </a:rPr>
+              <a:t>cita</a:t>
+            </a:r>
+            <a:r>
+              <a:rPr sz="1400" i="0" b="0">
+                <a:solidFill>
+                  <a:srgbClr val="D4D4D4"/>
+                </a:solidFill>
+                <a:latin typeface="Consolas"/>
+              </a:rPr>
+              <a:t>           | </a:t>
+            </a:r>
+            <a:r>
+              <a:rPr sz="1400" i="0" b="0">
+                <a:solidFill>
+                  <a:srgbClr val="D4D4D4"/>
+                </a:solidFill>
+                <a:latin typeface="Consolas"/>
+              </a:rPr>
+              <a:t>Cita</a:t>
+            </a:r>
+            <a:r>
+              <a:rPr sz="1400" i="0" b="0">
+                <a:solidFill>
+                  <a:srgbClr val="D4D4D4"/>
+                </a:solidFill>
+                <a:latin typeface="Consolas"/>
+              </a:rPr>
+              <a:t>, </a:t>
+            </a:r>
+            <a:r>
+              <a:rPr sz="1400" i="0" b="0">
+                <a:solidFill>
+                  <a:srgbClr val="D4D4D4"/>
+                </a:solidFill>
+                <a:latin typeface="Consolas"/>
+              </a:rPr>
+              <a:t>Veterinario</a:t>
+            </a:r>
+            <a:r>
+              <a:rPr sz="1400" i="0" b="0">
+                <a:solidFill>
+                  <a:srgbClr val="D4D4D4"/>
+                </a:solidFill>
+                <a:latin typeface="Consolas"/>
+              </a:rPr>
+              <a:t>      | </a:t>
+            </a:r>
+            <a:r>
+              <a:rPr sz="1400" i="0" b="0">
+                <a:solidFill>
+                  <a:srgbClr val="D4D4D4"/>
+                </a:solidFill>
+                <a:latin typeface="Consolas"/>
+              </a:rPr>
+              <a:t>M</a:t>
+            </a:r>
+            <a:r>
+              <a:rPr sz="1400" i="0" b="0">
+                <a:solidFill>
+                  <a:srgbClr val="D4D4D4"/>
+                </a:solidFill>
+                <a:latin typeface="Consolas"/>
+              </a:rPr>
+              <a:t>-</a:t>
+            </a:r>
+            <a:r>
+              <a:rPr sz="1400" i="0" b="0">
+                <a:solidFill>
+                  <a:srgbClr val="B5CEA8"/>
+                </a:solidFill>
+                <a:latin typeface="Consolas"/>
+              </a:rPr>
+              <a:t>04</a:t>
+            </a:r>
+            <a:r>
+              <a:rPr sz="1400" i="0" b="0">
+                <a:solidFill>
+                  <a:srgbClr val="D4D4D4"/>
+                </a:solidFill>
+                <a:latin typeface="Consolas"/>
+              </a:rPr>
+              <a:t>   | </a:t>
+            </a:r>
+            <a:r>
+              <a:rPr sz="1400" i="0" b="0">
+                <a:solidFill>
+                  <a:srgbClr val="D4D4D4"/>
+                </a:solidFill>
+                <a:latin typeface="Consolas"/>
+              </a:rPr>
+              <a:t>SIN</a:t>
+            </a:r>
+            <a:r>
+              <a:rPr sz="1400" i="0" b="0">
+                <a:solidFill>
+                  <a:srgbClr val="D4D4D4"/>
+                </a:solidFill>
+                <a:latin typeface="Consolas"/>
+              </a:rPr>
+              <a:t> </a:t>
+            </a:r>
+            <a:r>
+              <a:rPr sz="1400" i="0" b="0">
+                <a:solidFill>
+                  <a:srgbClr val="D4D4D4"/>
+                </a:solidFill>
+                <a:latin typeface="Consolas"/>
+              </a:rPr>
+              <a:t>ORIGEN</a:t>
+            </a:r>
+            <a:r>
+              <a:rPr sz="1400" i="0" b="0">
+                <a:solidFill>
+                  <a:srgbClr val="D4D4D4"/>
+                </a:solidFill>
+                <a:latin typeface="Consolas"/>
+              </a:rPr>
+              <a:t>  |</a:t>
+            </a:r>
+          </a:p>
+          <a:p>
+            <a:pPr>
+              <a:spcAft>
+                <a:spcPts val="300"/>
+              </a:spcAft>
+            </a:pPr>
+            <a:r>
+              <a:rPr sz="1400" i="0" b="0">
+                <a:solidFill>
+                  <a:srgbClr val="D4D4D4"/>
+                </a:solidFill>
+                <a:latin typeface="Consolas"/>
+              </a:rPr>
+              <a:t/>
+            </a:r>
+          </a:p>
+          <a:p>
+            <a:pPr>
+              <a:spcAft>
+                <a:spcPts val="300"/>
+              </a:spcAft>
+            </a:pPr>
+            <a:r>
+              <a:rPr sz="1400" i="0" b="0">
+                <a:solidFill>
+                  <a:srgbClr val="D4D4D4"/>
+                </a:solidFill>
+                <a:latin typeface="Consolas"/>
+              </a:rPr>
+              <a:t>H</a:t>
+            </a:r>
+            <a:r>
+              <a:rPr sz="1400" i="0" b="0">
+                <a:solidFill>
+                  <a:srgbClr val="D4D4D4"/>
+                </a:solidFill>
+                <a:latin typeface="Consolas"/>
+              </a:rPr>
+              <a:t>-</a:t>
+            </a:r>
+            <a:r>
+              <a:rPr sz="1400" i="0" b="0">
+                <a:solidFill>
+                  <a:srgbClr val="B5CEA8"/>
+                </a:solidFill>
+                <a:latin typeface="Consolas"/>
+              </a:rPr>
+              <a:t>01</a:t>
+            </a:r>
+            <a:r>
+              <a:rPr sz="1400" i="0" b="0">
+                <a:solidFill>
+                  <a:srgbClr val="D4D4D4"/>
+                </a:solidFill>
+                <a:latin typeface="Consolas"/>
+              </a:rPr>
+              <a:t> (</a:t>
+            </a:r>
+            <a:r>
+              <a:rPr sz="1400" i="0" b="0">
+                <a:solidFill>
+                  <a:srgbClr val="D4D4D4"/>
+                </a:solidFill>
+                <a:latin typeface="Consolas"/>
+              </a:rPr>
+              <a:t>mayor</a:t>
+            </a:r>
+            <a:r>
+              <a:rPr sz="1400" i="0" b="0">
+                <a:solidFill>
+                  <a:srgbClr val="D4D4D4"/>
+                </a:solidFill>
+                <a:latin typeface="Consolas"/>
+              </a:rPr>
+              <a:t>)     : </a:t>
+            </a:r>
+            <a:r>
+              <a:rPr sz="1400" i="0" b="0">
+                <a:solidFill>
+                  <a:srgbClr val="D4D4D4"/>
+                </a:solidFill>
+                <a:latin typeface="Consolas"/>
+              </a:rPr>
+              <a:t>CU</a:t>
+            </a:r>
+            <a:r>
+              <a:rPr sz="1400" i="0" b="0">
+                <a:solidFill>
+                  <a:srgbClr val="D4D4D4"/>
+                </a:solidFill>
+                <a:latin typeface="Consolas"/>
+              </a:rPr>
+              <a:t>-</a:t>
+            </a:r>
+            <a:r>
+              <a:rPr sz="1400" i="0" b="0">
+                <a:solidFill>
+                  <a:srgbClr val="B5CEA8"/>
+                </a:solidFill>
+                <a:latin typeface="Consolas"/>
+              </a:rPr>
+              <a:t>03</a:t>
+            </a:r>
+            <a:r>
+              <a:rPr sz="1400" i="0" b="0">
+                <a:solidFill>
+                  <a:srgbClr val="D4D4D4"/>
+                </a:solidFill>
+                <a:latin typeface="Consolas"/>
+              </a:rPr>
+              <a:t> </a:t>
+            </a:r>
+            <a:r>
+              <a:rPr sz="1400" i="0" b="0">
+                <a:solidFill>
+                  <a:srgbClr val="D4D4D4"/>
+                </a:solidFill>
+                <a:latin typeface="Consolas"/>
+              </a:rPr>
+              <a:t>exige</a:t>
+            </a:r>
+            <a:r>
+              <a:rPr sz="1400" i="0" b="0">
+                <a:solidFill>
+                  <a:srgbClr val="D4D4D4"/>
+                </a:solidFill>
+                <a:latin typeface="Consolas"/>
+              </a:rPr>
+              <a:t> </a:t>
+            </a:r>
+            <a:r>
+              <a:rPr sz="1400" i="0" b="0">
+                <a:solidFill>
+                  <a:srgbClr val="D4D4D4"/>
+                </a:solidFill>
+                <a:latin typeface="Consolas"/>
+              </a:rPr>
+              <a:t>registrar</a:t>
+            </a:r>
+            <a:r>
+              <a:rPr sz="1400" i="0" b="0">
+                <a:solidFill>
+                  <a:srgbClr val="D4D4D4"/>
+                </a:solidFill>
+                <a:latin typeface="Consolas"/>
+              </a:rPr>
+              <a:t> </a:t>
+            </a:r>
+            <a:r>
+              <a:rPr sz="1400" i="0" b="0">
+                <a:solidFill>
+                  <a:srgbClr val="D4D4D4"/>
+                </a:solidFill>
+                <a:latin typeface="Consolas"/>
+              </a:rPr>
+              <a:t>quien</a:t>
+            </a:r>
+            <a:r>
+              <a:rPr sz="1400" i="0" b="0">
+                <a:solidFill>
+                  <a:srgbClr val="D4D4D4"/>
+                </a:solidFill>
+                <a:latin typeface="Consolas"/>
+              </a:rPr>
+              <a:t> </a:t>
+            </a:r>
+            <a:r>
+              <a:rPr sz="1400" i="0" b="0">
+                <a:solidFill>
+                  <a:srgbClr val="D4D4D4"/>
+                </a:solidFill>
+                <a:latin typeface="Consolas"/>
+              </a:rPr>
+              <a:t>atendio</a:t>
+            </a:r>
+            <a:r>
+              <a:rPr sz="1400" i="0" b="0">
+                <a:solidFill>
+                  <a:srgbClr val="D4D4D4"/>
+                </a:solidFill>
+                <a:latin typeface="Consolas"/>
+              </a:rPr>
+              <a:t>, </a:t>
+            </a:r>
+            <a:r>
+              <a:rPr sz="1400" i="0" b="0">
+                <a:solidFill>
+                  <a:srgbClr val="D4D4D4"/>
+                </a:solidFill>
+                <a:latin typeface="Consolas"/>
+              </a:rPr>
+              <a:t>pero</a:t>
+            </a:r>
+            <a:r>
+              <a:rPr sz="1400" i="0" b="0">
+                <a:solidFill>
+                  <a:srgbClr val="D4D4D4"/>
+                </a:solidFill>
+                <a:latin typeface="Consolas"/>
+              </a:rPr>
+              <a:t> </a:t>
+            </a:r>
+            <a:r>
+              <a:rPr sz="1400" i="0" b="0">
+                <a:solidFill>
+                  <a:srgbClr val="D4D4D4"/>
+                </a:solidFill>
+                <a:latin typeface="Consolas"/>
+              </a:rPr>
+              <a:t>Consulta</a:t>
+            </a:r>
+            <a:r>
+              <a:rPr sz="1400" i="0" b="0">
+                <a:solidFill>
+                  <a:srgbClr val="D4D4D4"/>
+                </a:solidFill>
+                <a:latin typeface="Consolas"/>
+              </a:rPr>
+              <a:t> </a:t>
+            </a:r>
+            <a:r>
+              <a:rPr sz="1400" i="0" b="0">
+                <a:solidFill>
+                  <a:srgbClr val="D4D4D4"/>
+                </a:solidFill>
+                <a:latin typeface="Consolas"/>
+              </a:rPr>
+              <a:t>no</a:t>
+            </a:r>
+            <a:r>
+              <a:rPr sz="1400" i="0" b="0">
+                <a:solidFill>
+                  <a:srgbClr val="D4D4D4"/>
+                </a:solidFill>
+                <a:latin typeface="Consolas"/>
+              </a:rPr>
+              <a:t> </a:t>
+            </a:r>
+            <a:r>
+              <a:rPr sz="1400" i="0" b="0">
+                <a:solidFill>
+                  <a:srgbClr val="D4D4D4"/>
+                </a:solidFill>
+                <a:latin typeface="Consolas"/>
+              </a:rPr>
+              <a:t>se</a:t>
+            </a:r>
+            <a:r>
+              <a:rPr sz="1400" i="0" b="0">
+                <a:solidFill>
+                  <a:srgbClr val="D4D4D4"/>
+                </a:solidFill>
+                <a:latin typeface="Consolas"/>
+              </a:rPr>
+              <a:t> </a:t>
+            </a:r>
+            <a:r>
+              <a:rPr sz="1400" i="0" b="0">
+                <a:solidFill>
+                  <a:srgbClr val="D4D4D4"/>
+                </a:solidFill>
+                <a:latin typeface="Consolas"/>
+              </a:rPr>
+              <a:t>relaciona</a:t>
+            </a:r>
+            <a:r>
+              <a:rPr sz="1400" i="0" b="0">
+                <a:solidFill>
+                  <a:srgbClr val="D4D4D4"/>
+                </a:solidFill>
+                <a:latin typeface="Consolas"/>
+              </a:rPr>
+              <a:t> </a:t>
+            </a:r>
+            <a:r>
+              <a:rPr sz="1400" i="0" b="0">
+                <a:solidFill>
+                  <a:srgbClr val="D4D4D4"/>
+                </a:solidFill>
+                <a:latin typeface="Consolas"/>
+              </a:rPr>
+              <a:t>con</a:t>
+            </a:r>
+            <a:r>
+              <a:rPr sz="1400" i="0" b="0">
+                <a:solidFill>
+                  <a:srgbClr val="D4D4D4"/>
+                </a:solidFill>
+                <a:latin typeface="Consolas"/>
+              </a:rPr>
+              <a:t> </a:t>
+            </a:r>
+            <a:r>
+              <a:rPr sz="1400" i="0" b="0">
+                <a:solidFill>
+                  <a:srgbClr val="D4D4D4"/>
+                </a:solidFill>
+                <a:latin typeface="Consolas"/>
+              </a:rPr>
+              <a:t>Veterinario</a:t>
+            </a:r>
+            <a:r>
+              <a:rPr sz="1400" i="0" b="0">
+                <a:solidFill>
+                  <a:srgbClr val="D4D4D4"/>
+                </a:solidFill>
+                <a:latin typeface="Consolas"/>
+              </a:rPr>
+              <a:t>.</a:t>
+            </a:r>
+          </a:p>
+          <a:p>
+            <a:pPr>
+              <a:spcAft>
+                <a:spcPts val="300"/>
+              </a:spcAft>
+            </a:pPr>
+            <a:r>
+              <a:rPr sz="1400" i="0" b="0">
+                <a:solidFill>
+                  <a:srgbClr val="D4D4D4"/>
+                </a:solidFill>
+                <a:latin typeface="Consolas"/>
+              </a:rPr>
+              <a:t>H</a:t>
+            </a:r>
+            <a:r>
+              <a:rPr sz="1400" i="0" b="0">
+                <a:solidFill>
+                  <a:srgbClr val="D4D4D4"/>
+                </a:solidFill>
+                <a:latin typeface="Consolas"/>
+              </a:rPr>
+              <a:t>-</a:t>
+            </a:r>
+            <a:r>
+              <a:rPr sz="1400" i="0" b="0">
+                <a:solidFill>
+                  <a:srgbClr val="B5CEA8"/>
+                </a:solidFill>
+                <a:latin typeface="Consolas"/>
+              </a:rPr>
+              <a:t>02</a:t>
+            </a:r>
+            <a:r>
+              <a:rPr sz="1400" i="0" b="0">
+                <a:solidFill>
+                  <a:srgbClr val="D4D4D4"/>
+                </a:solidFill>
+                <a:latin typeface="Consolas"/>
+              </a:rPr>
+              <a:t> (</a:t>
+            </a:r>
+            <a:r>
+              <a:rPr sz="1400" i="0" b="0">
+                <a:solidFill>
+                  <a:srgbClr val="D4D4D4"/>
+                </a:solidFill>
+                <a:latin typeface="Consolas"/>
+              </a:rPr>
+              <a:t>mayor</a:t>
+            </a:r>
+            <a:r>
+              <a:rPr sz="1400" i="0" b="0">
+                <a:solidFill>
+                  <a:srgbClr val="D4D4D4"/>
+                </a:solidFill>
+                <a:latin typeface="Consolas"/>
+              </a:rPr>
+              <a:t>)     : </a:t>
+            </a:r>
+            <a:r>
+              <a:rPr sz="1400" i="0" b="0">
+                <a:solidFill>
+                  <a:srgbClr val="D4D4D4"/>
+                </a:solidFill>
+                <a:latin typeface="Consolas"/>
+              </a:rPr>
+              <a:t>la</a:t>
+            </a:r>
+            <a:r>
+              <a:rPr sz="1400" i="0" b="0">
+                <a:solidFill>
+                  <a:srgbClr val="D4D4D4"/>
+                </a:solidFill>
+                <a:latin typeface="Consolas"/>
+              </a:rPr>
+              <a:t> </a:t>
+            </a:r>
+            <a:r>
+              <a:rPr sz="1400" i="0" b="0">
+                <a:solidFill>
+                  <a:srgbClr val="D4D4D4"/>
+                </a:solidFill>
+                <a:latin typeface="Consolas"/>
+              </a:rPr>
+              <a:t>fila</a:t>
+            </a:r>
+            <a:r>
+              <a:rPr sz="1400" i="0" b="0">
+                <a:solidFill>
+                  <a:srgbClr val="D4D4D4"/>
+                </a:solidFill>
+                <a:latin typeface="Consolas"/>
+              </a:rPr>
+              <a:t> </a:t>
+            </a:r>
+            <a:r>
+              <a:rPr sz="1400" i="0" b="0">
+                <a:solidFill>
+                  <a:srgbClr val="D4D4D4"/>
+                </a:solidFill>
+                <a:latin typeface="Consolas"/>
+              </a:rPr>
+              <a:t>de</a:t>
+            </a:r>
+            <a:r>
+              <a:rPr sz="1400" i="0" b="0">
+                <a:solidFill>
+                  <a:srgbClr val="D4D4D4"/>
+                </a:solidFill>
+                <a:latin typeface="Consolas"/>
+              </a:rPr>
+              <a:t> </a:t>
+            </a:r>
+            <a:r>
+              <a:rPr sz="1400" i="0" b="0">
+                <a:solidFill>
+                  <a:srgbClr val="D4D4D4"/>
+                </a:solidFill>
+                <a:latin typeface="Consolas"/>
+              </a:rPr>
+              <a:t>CU</a:t>
+            </a:r>
+            <a:r>
+              <a:rPr sz="1400" i="0" b="0">
+                <a:solidFill>
+                  <a:srgbClr val="D4D4D4"/>
+                </a:solidFill>
+                <a:latin typeface="Consolas"/>
+              </a:rPr>
+              <a:t>-</a:t>
+            </a:r>
+            <a:r>
+              <a:rPr sz="1400" i="0" b="0">
+                <a:solidFill>
+                  <a:srgbClr val="B5CEA8"/>
+                </a:solidFill>
+                <a:latin typeface="Consolas"/>
+              </a:rPr>
+              <a:t>04</a:t>
+            </a:r>
+            <a:r>
+              <a:rPr sz="1400" i="0" b="0">
+                <a:solidFill>
+                  <a:srgbClr val="D4D4D4"/>
+                </a:solidFill>
+                <a:latin typeface="Consolas"/>
+              </a:rPr>
+              <a:t> </a:t>
+            </a:r>
+            <a:r>
+              <a:rPr sz="1400" i="0" b="0">
+                <a:solidFill>
+                  <a:srgbClr val="D4D4D4"/>
+                </a:solidFill>
+                <a:latin typeface="Consolas"/>
+              </a:rPr>
+              <a:t>quedo</a:t>
+            </a:r>
+            <a:r>
+              <a:rPr sz="1400" i="0" b="0">
+                <a:solidFill>
+                  <a:srgbClr val="D4D4D4"/>
+                </a:solidFill>
+                <a:latin typeface="Consolas"/>
+              </a:rPr>
+              <a:t> </a:t>
+            </a:r>
+            <a:r>
+              <a:rPr sz="1400" i="0" b="0">
+                <a:solidFill>
+                  <a:srgbClr val="D4D4D4"/>
+                </a:solidFill>
+                <a:latin typeface="Consolas"/>
+              </a:rPr>
+              <a:t>sin</a:t>
+            </a:r>
+            <a:r>
+              <a:rPr sz="1400" i="0" b="0">
+                <a:solidFill>
+                  <a:srgbClr val="D4D4D4"/>
+                </a:solidFill>
+                <a:latin typeface="Consolas"/>
+              </a:rPr>
+              <a:t> </a:t>
+            </a:r>
+            <a:r>
+              <a:rPr sz="1400" i="0" b="0">
+                <a:solidFill>
+                  <a:srgbClr val="D4D4D4"/>
+                </a:solidFill>
+                <a:latin typeface="Consolas"/>
+              </a:rPr>
+              <a:t>RF</a:t>
+            </a:r>
+            <a:r>
+              <a:rPr sz="1400" i="0" b="0">
+                <a:solidFill>
+                  <a:srgbClr val="D4D4D4"/>
+                </a:solidFill>
+                <a:latin typeface="Consolas"/>
+              </a:rPr>
+              <a:t>; </a:t>
+            </a:r>
+            <a:r>
+              <a:rPr sz="1400" i="0" b="0">
+                <a:solidFill>
+                  <a:srgbClr val="D4D4D4"/>
+                </a:solidFill>
+                <a:latin typeface="Consolas"/>
+              </a:rPr>
+              <a:t>debe</a:t>
+            </a:r>
+            <a:r>
+              <a:rPr sz="1400" i="0" b="0">
+                <a:solidFill>
+                  <a:srgbClr val="D4D4D4"/>
+                </a:solidFill>
+                <a:latin typeface="Consolas"/>
+              </a:rPr>
+              <a:t> </a:t>
+            </a:r>
+            <a:r>
+              <a:rPr sz="1400" i="0" b="0">
+                <a:solidFill>
+                  <a:srgbClr val="D4D4D4"/>
+                </a:solidFill>
+                <a:latin typeface="Consolas"/>
+              </a:rPr>
+              <a:t>ligarse</a:t>
+            </a:r>
+            <a:r>
+              <a:rPr sz="1400" i="0" b="0">
+                <a:solidFill>
+                  <a:srgbClr val="D4D4D4"/>
+                </a:solidFill>
+                <a:latin typeface="Consolas"/>
+              </a:rPr>
+              <a:t> </a:t>
+            </a:r>
+            <a:r>
+              <a:rPr sz="1400" i="0" b="0">
+                <a:solidFill>
+                  <a:srgbClr val="D4D4D4"/>
+                </a:solidFill>
+                <a:latin typeface="Consolas"/>
+              </a:rPr>
+              <a:t>a</a:t>
+            </a:r>
+            <a:r>
+              <a:rPr sz="1400" i="0" b="0">
+                <a:solidFill>
+                  <a:srgbClr val="D4D4D4"/>
+                </a:solidFill>
+                <a:latin typeface="Consolas"/>
+              </a:rPr>
+              <a:t> </a:t>
+            </a:r>
+            <a:r>
+              <a:rPr sz="1400" i="0" b="0">
+                <a:solidFill>
+                  <a:srgbClr val="D4D4D4"/>
+                </a:solidFill>
+                <a:latin typeface="Consolas"/>
+              </a:rPr>
+              <a:t>RF</a:t>
+            </a:r>
+            <a:r>
+              <a:rPr sz="1400" i="0" b="0">
+                <a:solidFill>
+                  <a:srgbClr val="D4D4D4"/>
+                </a:solidFill>
+                <a:latin typeface="Consolas"/>
+              </a:rPr>
+              <a:t>-</a:t>
+            </a:r>
+            <a:r>
+              <a:rPr sz="1400" i="0" b="0">
+                <a:solidFill>
+                  <a:srgbClr val="B5CEA8"/>
+                </a:solidFill>
+                <a:latin typeface="Consolas"/>
+              </a:rPr>
+              <a:t>08</a:t>
+            </a:r>
+            <a:r>
+              <a:rPr sz="1400" i="0" b="0">
+                <a:solidFill>
+                  <a:srgbClr val="D4D4D4"/>
+                </a:solidFill>
+                <a:latin typeface="Consolas"/>
+              </a:rPr>
+              <a:t> </a:t>
+            </a:r>
+            <a:r>
+              <a:rPr sz="1400" i="0" b="0">
+                <a:solidFill>
+                  <a:srgbClr val="D4D4D4"/>
+                </a:solidFill>
+                <a:latin typeface="Consolas"/>
+              </a:rPr>
+              <a:t>Agendar</a:t>
+            </a:r>
+            <a:r>
+              <a:rPr sz="1400" i="0" b="0">
+                <a:solidFill>
+                  <a:srgbClr val="D4D4D4"/>
+                </a:solidFill>
+                <a:latin typeface="Consolas"/>
+              </a:rPr>
+              <a:t> </a:t>
+            </a:r>
+            <a:r>
+              <a:rPr sz="1400" i="0" b="0">
+                <a:solidFill>
+                  <a:srgbClr val="D4D4D4"/>
+                </a:solidFill>
+                <a:latin typeface="Consolas"/>
+              </a:rPr>
+              <a:t>cita</a:t>
+            </a:r>
+            <a:r>
+              <a:rPr sz="1400" i="0" b="0">
+                <a:solidFill>
+                  <a:srgbClr val="D4D4D4"/>
+                </a:solidFill>
+                <a:latin typeface="Consolas"/>
+              </a:rPr>
+              <a:t> </a:t>
+            </a:r>
+            <a:r>
+              <a:rPr sz="1400" i="0" b="0">
+                <a:solidFill>
+                  <a:srgbClr val="D4D4D4"/>
+                </a:solidFill>
+                <a:latin typeface="Consolas"/>
+              </a:rPr>
+              <a:t>o</a:t>
+            </a:r>
+            <a:r>
+              <a:rPr sz="1400" i="0" b="0">
+                <a:solidFill>
+                  <a:srgbClr val="D4D4D4"/>
+                </a:solidFill>
+                <a:latin typeface="Consolas"/>
+              </a:rPr>
+              <a:t> </a:t>
+            </a:r>
+            <a:r>
+              <a:rPr sz="1400" i="0" b="0">
+                <a:solidFill>
+                  <a:srgbClr val="D4D4D4"/>
+                </a:solidFill>
+                <a:latin typeface="Consolas"/>
+              </a:rPr>
+              <a:t>eliminarse</a:t>
+            </a:r>
+            <a:r>
+              <a:rPr sz="1400" i="0" b="0">
+                <a:solidFill>
+                  <a:srgbClr val="D4D4D4"/>
+                </a:solidFill>
+                <a:latin typeface="Consolas"/>
+              </a:rPr>
+              <a:t> </a:t>
+            </a:r>
+            <a:r>
+              <a:rPr sz="1400" i="0" b="0">
+                <a:solidFill>
+                  <a:srgbClr val="D4D4D4"/>
+                </a:solidFill>
+                <a:latin typeface="Consolas"/>
+              </a:rPr>
+              <a:t>el</a:t>
+            </a:r>
+            <a:r>
+              <a:rPr sz="1400" i="0" b="0">
+                <a:solidFill>
+                  <a:srgbClr val="D4D4D4"/>
+                </a:solidFill>
+                <a:latin typeface="Consolas"/>
+              </a:rPr>
+              <a:t> </a:t>
+            </a:r>
+            <a:r>
+              <a:rPr sz="1400" i="0" b="0">
+                <a:solidFill>
+                  <a:srgbClr val="D4D4D4"/>
+                </a:solidFill>
+                <a:latin typeface="Consolas"/>
+              </a:rPr>
+              <a:t>CU</a:t>
+            </a:r>
+            <a:r>
+              <a:rPr sz="1400" i="0" b="0">
+                <a:solidFill>
+                  <a:srgbClr val="D4D4D4"/>
+                </a:solidFill>
+                <a:latin typeface="Consolas"/>
+              </a:rPr>
+              <a:t>.</a:t>
+            </a:r>
+          </a:p>
+          <a:p>
+            <a:pPr>
+              <a:spcAft>
+                <a:spcPts val="300"/>
+              </a:spcAft>
+            </a:pPr>
+            <a:r>
+              <a:rPr sz="1400" i="0" b="0">
+                <a:solidFill>
+                  <a:srgbClr val="D4D4D4"/>
+                </a:solidFill>
+                <a:latin typeface="Consolas"/>
+              </a:rPr>
+              <a:t>H</a:t>
+            </a:r>
+            <a:r>
+              <a:rPr sz="1400" i="0" b="0">
+                <a:solidFill>
+                  <a:srgbClr val="D4D4D4"/>
+                </a:solidFill>
+                <a:latin typeface="Consolas"/>
+              </a:rPr>
+              <a:t>-</a:t>
+            </a:r>
+            <a:r>
+              <a:rPr sz="1400" i="0" b="0">
+                <a:solidFill>
+                  <a:srgbClr val="B5CEA8"/>
+                </a:solidFill>
+                <a:latin typeface="Consolas"/>
+              </a:rPr>
+              <a:t>03</a:t>
+            </a:r>
+            <a:r>
+              <a:rPr sz="1400" i="0" b="0">
+                <a:solidFill>
+                  <a:srgbClr val="D4D4D4"/>
+                </a:solidFill>
+                <a:latin typeface="Consolas"/>
+              </a:rPr>
+              <a:t> (</a:t>
+            </a:r>
+            <a:r>
+              <a:rPr sz="1400" i="0" b="0">
+                <a:solidFill>
+                  <a:srgbClr val="D4D4D4"/>
+                </a:solidFill>
+                <a:latin typeface="Consolas"/>
+              </a:rPr>
+              <a:t>bloqueante</a:t>
+            </a:r>
+            <a:r>
+              <a:rPr sz="1400" i="0" b="0">
+                <a:solidFill>
+                  <a:srgbClr val="D4D4D4"/>
+                </a:solidFill>
+                <a:latin typeface="Consolas"/>
+              </a:rPr>
+              <a:t>): </a:t>
+            </a:r>
+            <a:r>
+              <a:rPr sz="1400" i="0" b="0">
+                <a:solidFill>
+                  <a:srgbClr val="D4D4D4"/>
+                </a:solidFill>
+                <a:latin typeface="Consolas"/>
+              </a:rPr>
+              <a:t>la</a:t>
+            </a:r>
+            <a:r>
+              <a:rPr sz="1400" i="0" b="0">
+                <a:solidFill>
+                  <a:srgbClr val="D4D4D4"/>
+                </a:solidFill>
+                <a:latin typeface="Consolas"/>
+              </a:rPr>
+              <a:t> </a:t>
+            </a:r>
+            <a:r>
+              <a:rPr sz="1400" i="0" b="0">
+                <a:solidFill>
+                  <a:srgbClr val="D4D4D4"/>
+                </a:solidFill>
+                <a:latin typeface="Consolas"/>
+              </a:rPr>
+              <a:t>clase</a:t>
+            </a:r>
+            <a:r>
+              <a:rPr sz="1400" i="0" b="0">
+                <a:solidFill>
+                  <a:srgbClr val="D4D4D4"/>
+                </a:solidFill>
+                <a:latin typeface="Consolas"/>
+              </a:rPr>
+              <a:t> </a:t>
+            </a:r>
+            <a:r>
+              <a:rPr sz="1400" i="0" b="0">
+                <a:solidFill>
+                  <a:srgbClr val="D4D4D4"/>
+                </a:solidFill>
+                <a:latin typeface="Consolas"/>
+              </a:rPr>
+              <a:t>Mascota</a:t>
+            </a:r>
+            <a:r>
+              <a:rPr sz="1400" i="0" b="0">
+                <a:solidFill>
+                  <a:srgbClr val="D4D4D4"/>
+                </a:solidFill>
+                <a:latin typeface="Consolas"/>
+              </a:rPr>
+              <a:t> </a:t>
+            </a:r>
+            <a:r>
+              <a:rPr sz="1400" i="0" b="0">
+                <a:solidFill>
+                  <a:srgbClr val="D4D4D4"/>
+                </a:solidFill>
+                <a:latin typeface="Consolas"/>
+              </a:rPr>
+              <a:t>guarda</a:t>
+            </a:r>
+            <a:r>
+              <a:rPr sz="1400" i="0" b="0">
+                <a:solidFill>
+                  <a:srgbClr val="D4D4D4"/>
+                </a:solidFill>
+                <a:latin typeface="Consolas"/>
+              </a:rPr>
+              <a:t> </a:t>
+            </a:r>
+            <a:r>
+              <a:rPr sz="1400" i="0" b="0">
+                <a:solidFill>
+                  <a:srgbClr val="D4D4D4"/>
+                </a:solidFill>
+                <a:latin typeface="Consolas"/>
+              </a:rPr>
+              <a:t>dueño</a:t>
+            </a:r>
+            <a:r>
+              <a:rPr sz="1400" i="0" b="0">
+                <a:solidFill>
+                  <a:srgbClr val="D4D4D4"/>
+                </a:solidFill>
+                <a:latin typeface="Consolas"/>
+              </a:rPr>
+              <a:t> </a:t>
+            </a:r>
+            <a:r>
+              <a:rPr sz="1400" i="0" b="0">
+                <a:solidFill>
+                  <a:srgbClr val="D4D4D4"/>
+                </a:solidFill>
+                <a:latin typeface="Consolas"/>
+              </a:rPr>
+              <a:t>como</a:t>
+            </a:r>
+            <a:r>
+              <a:rPr sz="1400" i="0" b="0">
+                <a:solidFill>
+                  <a:srgbClr val="D4D4D4"/>
+                </a:solidFill>
+                <a:latin typeface="Consolas"/>
+              </a:rPr>
+              <a:t> </a:t>
+            </a:r>
+            <a:r>
+              <a:rPr sz="1400" i="0" b="0">
+                <a:solidFill>
+                  <a:srgbClr val="D4D4D4"/>
+                </a:solidFill>
+                <a:latin typeface="Consolas"/>
+              </a:rPr>
+              <a:t>texto</a:t>
+            </a:r>
+            <a:r>
+              <a:rPr sz="1400" i="0" b="0">
+                <a:solidFill>
+                  <a:srgbClr val="D4D4D4"/>
+                </a:solidFill>
+                <a:latin typeface="Consolas"/>
+              </a:rPr>
+              <a:t> </a:t>
+            </a:r>
+            <a:r>
+              <a:rPr sz="1400" i="0" b="0">
+                <a:solidFill>
+                  <a:srgbClr val="D4D4D4"/>
+                </a:solidFill>
+                <a:latin typeface="Consolas"/>
+              </a:rPr>
+              <a:t>en</a:t>
+            </a:r>
+            <a:r>
+              <a:rPr sz="1400" i="0" b="0">
+                <a:solidFill>
+                  <a:srgbClr val="D4D4D4"/>
+                </a:solidFill>
+                <a:latin typeface="Consolas"/>
+              </a:rPr>
+              <a:t> </a:t>
+            </a:r>
+            <a:r>
+              <a:rPr sz="1400" i="0" b="0">
+                <a:solidFill>
+                  <a:srgbClr val="D4D4D4"/>
+                </a:solidFill>
+                <a:latin typeface="Consolas"/>
+              </a:rPr>
+              <a:t>lugar</a:t>
+            </a:r>
+            <a:r>
+              <a:rPr sz="1400" i="0" b="0">
+                <a:solidFill>
+                  <a:srgbClr val="D4D4D4"/>
+                </a:solidFill>
+                <a:latin typeface="Consolas"/>
+              </a:rPr>
+              <a:t> </a:t>
+            </a:r>
+            <a:r>
+              <a:rPr sz="1400" i="0" b="0">
+                <a:solidFill>
+                  <a:srgbClr val="D4D4D4"/>
+                </a:solidFill>
+                <a:latin typeface="Consolas"/>
+              </a:rPr>
+              <a:t>de</a:t>
+            </a:r>
+            <a:r>
+              <a:rPr sz="1400" i="0" b="0">
+                <a:solidFill>
+                  <a:srgbClr val="D4D4D4"/>
+                </a:solidFill>
+                <a:latin typeface="Consolas"/>
+              </a:rPr>
+              <a:t> </a:t>
+            </a:r>
+            <a:r>
+              <a:rPr sz="1400" i="0" b="0">
+                <a:solidFill>
+                  <a:srgbClr val="D4D4D4"/>
+                </a:solidFill>
+                <a:latin typeface="Consolas"/>
+              </a:rPr>
+              <a:t>asociarse</a:t>
+            </a:r>
+            <a:r>
+              <a:rPr sz="1400" i="0" b="0">
+                <a:solidFill>
+                  <a:srgbClr val="D4D4D4"/>
+                </a:solidFill>
+                <a:latin typeface="Consolas"/>
+              </a:rPr>
+              <a:t> </a:t>
+            </a:r>
+            <a:r>
+              <a:rPr sz="1400" i="0" b="0">
+                <a:solidFill>
+                  <a:srgbClr val="D4D4D4"/>
+                </a:solidFill>
+                <a:latin typeface="Consolas"/>
+              </a:rPr>
+              <a:t>a</a:t>
+            </a:r>
+            <a:r>
+              <a:rPr sz="1400" i="0" b="0">
+                <a:solidFill>
+                  <a:srgbClr val="D4D4D4"/>
+                </a:solidFill>
+                <a:latin typeface="Consolas"/>
+              </a:rPr>
+              <a:t> </a:t>
+            </a:r>
+            <a:r>
+              <a:rPr sz="1400" i="0" b="0">
+                <a:solidFill>
+                  <a:srgbClr val="D4D4D4"/>
+                </a:solidFill>
+                <a:latin typeface="Consolas"/>
+              </a:rPr>
+              <a:t>Propietario</a:t>
+            </a:r>
+            <a:r>
+              <a:rPr sz="1400" i="0" b="0">
+                <a:solidFill>
+                  <a:srgbClr val="D4D4D4"/>
+                </a:solidFill>
+                <a:latin typeface="Consolas"/>
+              </a:rPr>
+              <a:t>.</a:t>
+            </a:r>
+          </a:p>
+          <a:p>
+            <a:pPr>
+              <a:spcAft>
+                <a:spcPts val="300"/>
+              </a:spcAft>
+            </a:pPr>
+            <a:r>
+              <a:rPr sz="1400" i="0" b="0">
+                <a:solidFill>
+                  <a:srgbClr val="D4D4D4"/>
+                </a:solidFill>
+                <a:latin typeface="Consolas"/>
+              </a:rPr>
+              <a:t>H</a:t>
+            </a:r>
+            <a:r>
+              <a:rPr sz="1400" i="0" b="0">
+                <a:solidFill>
+                  <a:srgbClr val="D4D4D4"/>
+                </a:solidFill>
+                <a:latin typeface="Consolas"/>
+              </a:rPr>
+              <a:t>-</a:t>
+            </a:r>
+            <a:r>
+              <a:rPr sz="1400" i="0" b="0">
+                <a:solidFill>
+                  <a:srgbClr val="B5CEA8"/>
+                </a:solidFill>
+                <a:latin typeface="Consolas"/>
+              </a:rPr>
+              <a:t>04</a:t>
+            </a:r>
+            <a:r>
+              <a:rPr sz="1400" i="0" b="0">
+                <a:solidFill>
+                  <a:srgbClr val="D4D4D4"/>
+                </a:solidFill>
+                <a:latin typeface="Consolas"/>
+              </a:rPr>
+              <a:t> (</a:t>
+            </a:r>
+            <a:r>
+              <a:rPr sz="1400" i="0" b="0">
+                <a:solidFill>
+                  <a:srgbClr val="D4D4D4"/>
+                </a:solidFill>
+                <a:latin typeface="Consolas"/>
+              </a:rPr>
+              <a:t>menor</a:t>
+            </a:r>
+            <a:r>
+              <a:rPr sz="1400" i="0" b="0">
+                <a:solidFill>
+                  <a:srgbClr val="D4D4D4"/>
+                </a:solidFill>
+                <a:latin typeface="Consolas"/>
+              </a:rPr>
+              <a:t>)     : </a:t>
+            </a:r>
+            <a:r>
+              <a:rPr sz="1400" i="0" b="0">
+                <a:solidFill>
+                  <a:srgbClr val="D4D4D4"/>
+                </a:solidFill>
+                <a:latin typeface="Consolas"/>
+              </a:rPr>
+              <a:t>el</a:t>
+            </a:r>
+            <a:r>
+              <a:rPr sz="1400" i="0" b="0">
+                <a:solidFill>
+                  <a:srgbClr val="D4D4D4"/>
+                </a:solidFill>
+                <a:latin typeface="Consolas"/>
+              </a:rPr>
+              <a:t> </a:t>
+            </a:r>
+            <a:r>
+              <a:rPr sz="1400" i="0" b="0">
+                <a:solidFill>
+                  <a:srgbClr val="D4D4D4"/>
+                </a:solidFill>
+                <a:latin typeface="Consolas"/>
+              </a:rPr>
+              <a:t>RNF</a:t>
+            </a:r>
+            <a:r>
+              <a:rPr sz="1400" i="0" b="0">
+                <a:solidFill>
+                  <a:srgbClr val="D4D4D4"/>
+                </a:solidFill>
+                <a:latin typeface="Consolas"/>
+              </a:rPr>
+              <a:t>-</a:t>
+            </a:r>
+            <a:r>
+              <a:rPr sz="1400" i="0" b="0">
+                <a:solidFill>
+                  <a:srgbClr val="B5CEA8"/>
+                </a:solidFill>
+                <a:latin typeface="Consolas"/>
+              </a:rPr>
+              <a:t>02</a:t>
+            </a:r>
+            <a:r>
+              <a:rPr sz="1400" i="0" b="0">
+                <a:solidFill>
+                  <a:srgbClr val="D4D4D4"/>
+                </a:solidFill>
+                <a:latin typeface="Consolas"/>
+              </a:rPr>
+              <a:t> </a:t>
+            </a:r>
+            <a:r>
+              <a:rPr sz="1400" i="0" b="0">
+                <a:solidFill>
+                  <a:srgbClr val="D4D4D4"/>
+                </a:solidFill>
+                <a:latin typeface="Consolas"/>
+              </a:rPr>
+              <a:t>de</a:t>
+            </a:r>
+            <a:r>
+              <a:rPr sz="1400" i="0" b="0">
+                <a:solidFill>
+                  <a:srgbClr val="D4D4D4"/>
+                </a:solidFill>
+                <a:latin typeface="Consolas"/>
+              </a:rPr>
+              <a:t> </a:t>
+            </a:r>
+            <a:r>
+              <a:rPr sz="1400" i="0" b="0">
+                <a:solidFill>
+                  <a:srgbClr val="B5CEA8"/>
+                </a:solidFill>
+                <a:latin typeface="Consolas"/>
+              </a:rPr>
+              <a:t>3</a:t>
+            </a:r>
+            <a:r>
+              <a:rPr sz="1400" i="0" b="0">
+                <a:solidFill>
+                  <a:srgbClr val="D4D4D4"/>
+                </a:solidFill>
+                <a:latin typeface="Consolas"/>
+              </a:rPr>
+              <a:t> </a:t>
+            </a:r>
+            <a:r>
+              <a:rPr sz="1400" i="0" b="0">
+                <a:solidFill>
+                  <a:srgbClr val="D4D4D4"/>
+                </a:solidFill>
+                <a:latin typeface="Consolas"/>
+              </a:rPr>
+              <a:t>segundos</a:t>
+            </a:r>
+            <a:r>
+              <a:rPr sz="1400" i="0" b="0">
+                <a:solidFill>
+                  <a:srgbClr val="D4D4D4"/>
+                </a:solidFill>
+                <a:latin typeface="Consolas"/>
+              </a:rPr>
+              <a:t> </a:t>
+            </a:r>
+            <a:r>
+              <a:rPr sz="1400" i="0" b="0">
+                <a:solidFill>
+                  <a:srgbClr val="D4D4D4"/>
+                </a:solidFill>
+                <a:latin typeface="Consolas"/>
+              </a:rPr>
+              <a:t>no</a:t>
+            </a:r>
+            <a:r>
+              <a:rPr sz="1400" i="0" b="0">
+                <a:solidFill>
+                  <a:srgbClr val="D4D4D4"/>
+                </a:solidFill>
+                <a:latin typeface="Consolas"/>
+              </a:rPr>
+              <a:t> </a:t>
+            </a:r>
+            <a:r>
+              <a:rPr sz="1400" i="0" b="0">
+                <a:solidFill>
+                  <a:srgbClr val="D4D4D4"/>
+                </a:solidFill>
+                <a:latin typeface="Consolas"/>
+              </a:rPr>
+              <a:t>aparece</a:t>
+            </a:r>
+            <a:r>
+              <a:rPr sz="1400" i="0" b="0">
+                <a:solidFill>
+                  <a:srgbClr val="D4D4D4"/>
+                </a:solidFill>
+                <a:latin typeface="Consolas"/>
+              </a:rPr>
+              <a:t> </a:t>
+            </a:r>
+            <a:r>
+              <a:rPr sz="1400" i="0" b="0">
+                <a:solidFill>
+                  <a:srgbClr val="D4D4D4"/>
+                </a:solidFill>
+                <a:latin typeface="Consolas"/>
+              </a:rPr>
+              <a:t>en</a:t>
+            </a:r>
+            <a:r>
+              <a:rPr sz="1400" i="0" b="0">
+                <a:solidFill>
+                  <a:srgbClr val="D4D4D4"/>
+                </a:solidFill>
+                <a:latin typeface="Consolas"/>
+              </a:rPr>
+              <a:t> </a:t>
+            </a:r>
+            <a:r>
+              <a:rPr sz="1400" i="0" b="0">
+                <a:solidFill>
+                  <a:srgbClr val="D4D4D4"/>
+                </a:solidFill>
+                <a:latin typeface="Consolas"/>
+              </a:rPr>
+              <a:t>ninguna</a:t>
+            </a:r>
+            <a:r>
+              <a:rPr sz="1400" i="0" b="0">
+                <a:solidFill>
+                  <a:srgbClr val="D4D4D4"/>
+                </a:solidFill>
+                <a:latin typeface="Consolas"/>
+              </a:rPr>
+              <a:t> </a:t>
+            </a:r>
+            <a:r>
+              <a:rPr sz="1400" i="0" b="0">
+                <a:solidFill>
+                  <a:srgbClr val="D4D4D4"/>
+                </a:solidFill>
+                <a:latin typeface="Consolas"/>
+              </a:rPr>
+              <a:t>postcondicion</a:t>
+            </a:r>
+            <a:r>
+              <a:rPr sz="1400" i="0" b="0">
+                <a:solidFill>
+                  <a:srgbClr val="D4D4D4"/>
+                </a:solidFill>
+                <a:latin typeface="Consolas"/>
+              </a:rPr>
+              <a:t> </a:t>
+            </a:r>
+            <a:r>
+              <a:rPr sz="1400" i="0" b="0">
+                <a:solidFill>
+                  <a:srgbClr val="D4D4D4"/>
+                </a:solidFill>
+                <a:latin typeface="Consolas"/>
+              </a:rPr>
+              <a:t>de</a:t>
+            </a:r>
+            <a:r>
+              <a:rPr sz="1400" i="0" b="0">
+                <a:solidFill>
+                  <a:srgbClr val="D4D4D4"/>
+                </a:solidFill>
+                <a:latin typeface="Consolas"/>
+              </a:rPr>
+              <a:t> </a:t>
+            </a:r>
+            <a:r>
+              <a:rPr sz="1400" i="0" b="0">
+                <a:solidFill>
+                  <a:srgbClr val="D4D4D4"/>
+                </a:solidFill>
+                <a:latin typeface="Consolas"/>
+              </a:rPr>
+              <a:t>CU</a:t>
+            </a:r>
+            <a:r>
+              <a:rPr sz="1400" i="0" b="0">
+                <a:solidFill>
+                  <a:srgbClr val="D4D4D4"/>
+                </a:solidFill>
+                <a:latin typeface="Consolas"/>
+              </a:rPr>
+              <a:t>-</a:t>
+            </a:r>
+            <a:r>
+              <a:rPr sz="1400" i="0" b="0">
+                <a:solidFill>
+                  <a:srgbClr val="B5CEA8"/>
+                </a:solidFill>
+                <a:latin typeface="Consolas"/>
+              </a:rPr>
+              <a:t>02</a:t>
+            </a:r>
+            <a:r>
+              <a:rPr sz="1400" i="0" b="0">
+                <a:solidFill>
+                  <a:srgbClr val="D4D4D4"/>
+                </a:solidFill>
+                <a:latin typeface="Consolas"/>
+              </a:rPr>
+              <a:t>.</a:t>
+            </a:r>
+          </a:p>
+          <a:p>
+            <a:pPr>
+              <a:spcAft>
+                <a:spcPts val="300"/>
+              </a:spcAft>
+            </a:pPr>
+            <a:r>
+              <a:rPr sz="1400" i="0" b="0">
+                <a:solidFill>
+                  <a:srgbClr val="D4D4D4"/>
+                </a:solidFill>
+                <a:latin typeface="Consolas"/>
+              </a:rPr>
+              <a:t>Glosario</a:t>
+            </a:r>
+            <a:r>
+              <a:rPr sz="1400" i="0" b="0">
+                <a:solidFill>
+                  <a:srgbClr val="D4D4D4"/>
+                </a:solidFill>
+                <a:latin typeface="Consolas"/>
+              </a:rPr>
+              <a:t> </a:t>
+            </a:r>
+            <a:r>
+              <a:rPr sz="1400" i="0" b="0">
+                <a:solidFill>
+                  <a:srgbClr val="D4D4D4"/>
+                </a:solidFill>
+                <a:latin typeface="Consolas"/>
+              </a:rPr>
+              <a:t>canonico</a:t>
+            </a:r>
+            <a:r>
+              <a:rPr sz="1400" i="0" b="0">
+                <a:solidFill>
+                  <a:srgbClr val="D4D4D4"/>
+                </a:solidFill>
+                <a:latin typeface="Consolas"/>
+              </a:rPr>
+              <a:t>: </a:t>
+            </a:r>
+            <a:r>
+              <a:rPr sz="1400" i="0" b="0">
+                <a:solidFill>
+                  <a:srgbClr val="DCDCAA"/>
+                </a:solidFill>
+                <a:latin typeface="Consolas"/>
+              </a:rPr>
+              <a:t>Propietario</a:t>
+            </a:r>
+            <a:r>
+              <a:rPr sz="1400" i="0" b="0">
+                <a:solidFill>
+                  <a:srgbClr val="D4D4D4"/>
+                </a:solidFill>
+                <a:latin typeface="Consolas"/>
+              </a:rPr>
+              <a:t> (</a:t>
+            </a:r>
+            <a:r>
+              <a:rPr sz="1400" i="0" b="0">
+                <a:solidFill>
+                  <a:srgbClr val="D4D4D4"/>
+                </a:solidFill>
+                <a:latin typeface="Consolas"/>
+              </a:rPr>
+              <a:t>prohibido</a:t>
+            </a:r>
+            <a:r>
+              <a:rPr sz="1400" i="0" b="0">
+                <a:solidFill>
+                  <a:srgbClr val="D4D4D4"/>
+                </a:solidFill>
+                <a:latin typeface="Consolas"/>
+              </a:rPr>
+              <a:t> </a:t>
+            </a:r>
+            <a:r>
+              <a:rPr sz="1400" i="0" b="0">
+                <a:solidFill>
+                  <a:srgbClr val="D4D4D4"/>
+                </a:solidFill>
+                <a:latin typeface="Consolas"/>
+              </a:rPr>
+              <a:t>Dueño</a:t>
+            </a:r>
+            <a:r>
+              <a:rPr sz="1400" i="0" b="0">
+                <a:solidFill>
+                  <a:srgbClr val="D4D4D4"/>
+                </a:solidFill>
+                <a:latin typeface="Consolas"/>
+              </a:rPr>
+              <a:t>, </a:t>
+            </a:r>
+            <a:r>
+              <a:rPr sz="1400" i="0" b="0">
+                <a:solidFill>
+                  <a:srgbClr val="D4D4D4"/>
+                </a:solidFill>
+                <a:latin typeface="Consolas"/>
+              </a:rPr>
+              <a:t>Cliente</a:t>
+            </a:r>
+            <a:r>
+              <a:rPr sz="1400" i="0" b="0">
+                <a:solidFill>
+                  <a:srgbClr val="D4D4D4"/>
+                </a:solidFill>
+                <a:latin typeface="Consolas"/>
+              </a:rPr>
+              <a:t>, </a:t>
+            </a:r>
+            <a:r>
+              <a:rPr sz="1400" i="0" b="0">
+                <a:solidFill>
+                  <a:srgbClr val="D4D4D4"/>
+                </a:solidFill>
+                <a:latin typeface="Consolas"/>
+              </a:rPr>
+              <a:t>Responsable</a:t>
+            </a:r>
+            <a:r>
+              <a:rPr sz="1400" i="0" b="0">
+                <a:solidFill>
+                  <a:srgbClr val="D4D4D4"/>
+                </a:solidFill>
+                <a:latin typeface="Consolas"/>
+              </a:rPr>
+              <a:t>) | </a:t>
+            </a:r>
+            <a:r>
+              <a:rPr sz="1400" i="0" b="0">
+                <a:solidFill>
+                  <a:srgbClr val="D4D4D4"/>
+                </a:solidFill>
+                <a:latin typeface="Consolas"/>
+              </a:rPr>
+              <a:t>Cita</a:t>
+            </a:r>
+            <a:r>
+              <a:rPr sz="1400" i="0" b="0">
+                <a:solidFill>
+                  <a:srgbClr val="D4D4D4"/>
+                </a:solidFill>
+                <a:latin typeface="Consolas"/>
+              </a:rPr>
+              <a:t> != </a:t>
+            </a:r>
+            <a:r>
+              <a:rPr sz="1400" i="0" b="0">
+                <a:solidFill>
+                  <a:srgbClr val="D4D4D4"/>
+                </a:solidFill>
+                <a:latin typeface="Consolas"/>
+              </a:rPr>
+              <a:t>Consulta</a:t>
+            </a:r>
+            <a:r>
+              <a:rPr sz="1400" i="0" b="0">
+                <a:solidFill>
+                  <a:srgbClr val="D4D4D4"/>
+                </a:solidFill>
+                <a:latin typeface="Consolas"/>
+              </a:rPr>
+              <a:t>.</a:t>
+            </a:r>
+          </a:p>
+        </p:txBody>
+      </p:sp>
+      <p:sp>
+        <p:nvSpPr>
+          <p:cNvPr id="13" name="TextBox 12"/>
+          <p:cNvSpPr txBox="1"/>
+          <p:nvPr/>
+        </p:nvSpPr>
+        <p:spPr>
+          <a:xfrm>
+            <a:off x="457200" y="6035040"/>
+            <a:ext cx="11277295" cy="365760"/>
+          </a:xfrm>
+          <a:prstGeom prst="rect">
+            <a:avLst/>
+          </a:prstGeom>
+          <a:noFill/>
+        </p:spPr>
+        <p:txBody>
+          <a:bodyPr wrap="square">
+            <a:spAutoFit/>
+          </a:bodyPr>
+          <a:lstStyle/>
+          <a:p>
+            <a:pPr algn="ctr"/>
+            <a:r>
+              <a:rPr sz="1300" b="0" i="1">
+                <a:solidFill>
+                  <a:srgbClr val="666666"/>
                 </a:solidFill>
                 <a:latin typeface="Calibri"/>
               </a:rPr>
-              <a:t>–   La matriz de trazabilidad es apenas una tabla de cuatro columnas, pero es la unica prueba objetiva de que el paquete es coherente.</a:t>
-            </a:r>
-          </a:p>
-        </p:txBody>
-      </p:sp>
-      <p:sp>
-        <p:nvSpPr>
-          <p:cNvPr id="6" name="TextBox 5"/>
+              <a:t>Una tabla de cuatro columnas encuentra en veinte minutos las contradicciones que un equipo no ve en tres semanas.</a:t>
+            </a:r>
+          </a:p>
+        </p:txBody>
+      </p:sp>
+      <p:sp>
+        <p:nvSpPr>
+          <p:cNvPr id="14" name="TextBox 13"/>
           <p:cNvSpPr txBox="1"/>
           <p:nvPr/>
         </p:nvSpPr>
@@ -8591,21 +11797,173 @@
                 </a:solidFill>
                 <a:latin typeface="Calibri"/>
               </a:rPr>
-              <a:t>El segundo eje de la auditoria es el lenguaje (1/2)</a:t>
-            </a:r>
-          </a:p>
-        </p:txBody>
-      </p:sp>
-      <p:sp>
-        <p:nvSpPr>
-          <p:cNvPr id="5" name="TextBox 4"/>
+              <a:t>El glosario canónico</a:t>
+            </a:r>
+          </a:p>
+        </p:txBody>
+      </p:sp>
+      <p:sp>
+        <p:nvSpPr>
+          <p:cNvPr id="5" name="Rounded Rectangle 4"/>
+          <p:cNvSpPr/>
+          <p:nvPr/>
+        </p:nvSpPr>
+        <p:spPr>
+          <a:xfrm>
+            <a:off x="5803166" y="1188719"/>
+            <a:ext cx="5998464" cy="4828032"/>
+          </a:xfrm>
+          <a:prstGeom prst="roundRect">
+            <a:avLst>
+              <a:gd name="adj" fmla="val 4000"/>
+            </a:avLst>
+          </a:prstGeom>
+          <a:solidFill>
+            <a:srgbClr val="E8EEF4"/>
+          </a:solidFill>
+          <a:ln>
+            <a:noFill/>
+          </a:ln>
+        </p:spPr>
+        <p:style>
+          <a:lnRef idx="1">
+            <a:schemeClr val="accent1"/>
+          </a:lnRef>
+          <a:fillRef idx="3">
+            <a:schemeClr val="accent1"/>
+          </a:fillRef>
+          <a:effectRef idx="2">
+            <a:schemeClr val="accent1"/>
+          </a:effectRef>
+          <a:fontRef idx="minor">
+            <a:schemeClr val="lt1"/>
+          </a:fontRef>
+        </p:style>
+        <p:txBody>
+          <a:bodyPr rtlCol="0" anchor="ctr"/>
+          <a:lstStyle/>
+          <a:p>
+            <a:pPr algn="ctr"/>
+          </a:p>
+        </p:txBody>
+      </p:sp>
+      <p:pic>
+        <p:nvPicPr>
+          <p:cNvPr id="6" name="Picture 5" descr="glosario-paso1.png"/>
+          <p:cNvPicPr>
+            <a:picLocks noChangeAspect="1"/>
+          </p:cNvPicPr>
+          <p:nvPr/>
+        </p:nvPicPr>
+        <p:blipFill>
+          <a:blip r:embed="rId2"/>
+          <a:stretch>
+            <a:fillRect/>
+          </a:stretch>
+        </p:blipFill>
+        <p:spPr>
+          <a:xfrm>
+            <a:off x="5876318" y="1261872"/>
+            <a:ext cx="5852160" cy="4681728"/>
+          </a:xfrm>
+          <a:prstGeom prst="rect">
+            <a:avLst/>
+          </a:prstGeom>
+        </p:spPr>
+      </p:pic>
+      <p:pic>
+        <p:nvPicPr>
+          <p:cNvPr id="7" name="Picture 6" descr="glosario-paso2.png"/>
+          <p:cNvPicPr>
+            <a:picLocks noChangeAspect="1"/>
+          </p:cNvPicPr>
+          <p:nvPr/>
+        </p:nvPicPr>
+        <p:blipFill>
+          <a:blip r:embed="rId3"/>
+          <a:stretch>
+            <a:fillRect/>
+          </a:stretch>
+        </p:blipFill>
+        <p:spPr>
+          <a:xfrm>
+            <a:off x="5876318" y="1261872"/>
+            <a:ext cx="5852160" cy="4681728"/>
+          </a:xfrm>
+          <a:prstGeom prst="rect">
+            <a:avLst/>
+          </a:prstGeom>
+        </p:spPr>
+      </p:pic>
+      <p:pic>
+        <p:nvPicPr>
+          <p:cNvPr id="8" name="Picture 7" descr="glosario-paso3.png"/>
+          <p:cNvPicPr>
+            <a:picLocks noChangeAspect="1"/>
+          </p:cNvPicPr>
+          <p:nvPr/>
+        </p:nvPicPr>
+        <p:blipFill>
+          <a:blip r:embed="rId4"/>
+          <a:stretch>
+            <a:fillRect/>
+          </a:stretch>
+        </p:blipFill>
+        <p:spPr>
+          <a:xfrm>
+            <a:off x="5876318" y="1261872"/>
+            <a:ext cx="5852160" cy="4681728"/>
+          </a:xfrm>
+          <a:prstGeom prst="rect">
+            <a:avLst/>
+          </a:prstGeom>
+        </p:spPr>
+      </p:pic>
+      <p:sp>
+        <p:nvSpPr>
+          <p:cNvPr id="13" name="TextBox 12"/>
           <p:cNvSpPr txBox="1"/>
           <p:nvPr/>
         </p:nvSpPr>
         <p:spPr>
           <a:xfrm>
-            <a:off x="457200" y="1170432"/>
-            <a:ext cx="11277295" cy="5230368"/>
+            <a:off x="5870301" y="5961888"/>
+            <a:ext cx="5864193" cy="320040"/>
+          </a:xfrm>
+          <a:prstGeom prst="rect">
+            <a:avLst/>
+          </a:prstGeom>
+          <a:noFill/>
+        </p:spPr>
+        <p:txBody>
+          <a:bodyPr wrap="square">
+            <a:spAutoFit/>
+          </a:bodyPr>
+          <a:lstStyle/>
+          <a:p>
+            <a:pPr algn="ctr"/>
+            <a:r>
+              <a:rPr sz="1100" b="0" i="1">
+                <a:solidFill>
+                  <a:srgbClr val="666666"/>
+                </a:solidFill>
+                <a:latin typeface="Calibri"/>
+              </a:rPr>
+              <a:t>Clic para avanzar la animación</a:t>
+            </a:r>
+          </a:p>
+        </p:txBody>
+      </p:sp>
+      <p:sp>
+        <p:nvSpPr>
+          <p:cNvPr id="14" name="TextBox 13"/>
+          <p:cNvSpPr txBox="1"/>
+          <p:nvPr/>
+        </p:nvSpPr>
+        <p:spPr>
+          <a:xfrm>
+            <a:off x="457200" y="1353312"/>
+            <a:ext cx="5093061" cy="5047488"/>
           </a:xfrm>
           <a:prstGeom prst="rect">
             <a:avLst/>
@@ -8630,7 +11988,7 @@
                 </a:solidFill>
                 <a:latin typeface="Calibri"/>
               </a:rPr>
-              <a:t>–   El segundo eje de la auditoria es el lenguaje.</a:t>
+              <a:t>–   Dueño, Propietario, Cliente y Responsable no son cuatro sinónimos: son cuatro tablas en potencia.</a:t>
             </a:r>
           </a:p>
           <a:p>
@@ -8646,7 +12004,7 @@
                 </a:solidFill>
                 <a:latin typeface="Calibri"/>
               </a:rPr>
-              <a:t>–   Cuando en un documento se lee Dueño, en otro Propietario, en otro Cliente y en el mockup Responsable, no hay cuatro sinonimos: hay cuatro oportunidades de que alguien crea que son cuatro cosas distintas y termine con cuatro tablas.</a:t>
+              <a:t>–   Cada concepto: un nombre único, una definición de una línea y sus sinónimos prohibidos.</a:t>
             </a:r>
           </a:p>
           <a:p>
@@ -8662,7 +12020,7 @@
                 </a:solidFill>
                 <a:latin typeface="Calibri"/>
               </a:rPr>
-              <a:t>–   La solucion es un glosario canonico donde cada concepto del dominio tiene un nombre unico, una definicion de una linea y una lista explicita de sinonimos prohibidos.</a:t>
+              <a:t>–   El glosario manda sobre todos los artefactos, sin excepciones.</a:t>
             </a:r>
           </a:p>
           <a:p>
@@ -8678,14 +12036,14 @@
                 </a:solidFill>
                 <a:latin typeface="Calibri"/>
               </a:rPr>
-              <a:t>–   Ese glosario manda sobre todos los artefactos: si el nombre canonico es Propietario, entonces el requisito, el caso de uso, el mockup, el diccionario de datos y la clase se llaman Propietario, sin excepciones y sin diminutivos.</a:t>
-            </a:r>
-          </a:p>
-        </p:txBody>
-      </p:sp>
-      <p:sp>
-        <p:nvSpPr>
-          <p:cNvPr id="6" name="TextBox 5"/>
+              <a:t>–   Separa parejas peligrosas: Cita es la reserva futura; Consulta, la atención ya realizada.</a:t>
+            </a:r>
+          </a:p>
+        </p:txBody>
+      </p:sp>
+      <p:sp>
+        <p:nvSpPr>
+          <p:cNvPr id="15" name="TextBox 14"/>
           <p:cNvSpPr txBox="1"/>
           <p:nvPr/>
         </p:nvSpPr>
@@ -8723,6 +12081,142 @@
   <p:clrMapOvr>
     <a:masterClrMapping/>
   </p:clrMapOvr>
+  <p:timing>
+    <p:tnLst>
+      <p:par>
+        <p:cTn id="1" dur="indefinite" restart="never" nodeType="tmRoot">
+          <p:childTnLst>
+            <p:seq concurrent="1" nextAc="seek">
+              <p:cTn id="2" dur="indefinite" nodeType="mainSeq">
+                <p:childTnLst>
+                  <p:par>
+                    <p:cTn id="3" fill="hold">
+                      <p:stCondLst>
+                        <p:cond delay="indefinite"/>
+                      </p:stCondLst>
+                      <p:childTnLst>
+                        <p:par>
+                          <p:cTn id="4" fill="hold">
+                            <p:stCondLst>
+                              <p:cond delay="0"/>
+                            </p:stCondLst>
+                            <p:childTnLst>
+                              <p:par>
+                                <p:cTn id="5" presetID="10" presetClass="entr" presetSubtype="0" fill="hold" nodeType="clickEffect">
+                                  <p:stCondLst>
+                                    <p:cond delay="0"/>
+                                  </p:stCondLst>
+                                  <p:childTnLst>
+                                    <p:set>
+                                      <p:cBhvr>
+                                        <p:cTn id="6" dur="1" fill="hold">
+                                          <p:stCondLst>
+                                            <p:cond delay="0"/>
+                                          </p:stCondLst>
+                                        </p:cTn>
+                                        <p:tgtEl>
+                                          <p:spTgt spid="7"/>
+                                        </p:tgtEl>
+                                        <p:attrNameLst>
+                                          <p:attrName>style.visibility</p:attrName>
+                                        </p:attrNameLst>
+                                      </p:cBhvr>
+                                      <p:to>
+                                        <p:strVal val="visible"/>
+                                      </p:to>
+                                    </p:set>
+                                    <p:animEffect transition="in" filter="fade">
+                                      <p:cBhvr>
+                                        <p:cTn id="7" dur="450"/>
+                                        <p:tgtEl>
+                                          <p:spTgt spid="7"/>
+                                        </p:tgtEl>
+                                      </p:cBhvr>
+                                    </p:animEffect>
+                                  </p:childTnLst>
+                                </p:cTn>
+                              </p:par>
+                            </p:childTnLst>
+                          </p:cTn>
+                        </p:par>
+                      </p:childTnLst>
+                    </p:cTn>
+                  </p:par>
+                  <p:par>
+                    <p:cTn id="8" fill="hold">
+                      <p:stCondLst>
+                        <p:cond delay="indefinite"/>
+                      </p:stCondLst>
+                      <p:childTnLst>
+                        <p:par>
+                          <p:cTn id="9" fill="hold">
+                            <p:stCondLst>
+                              <p:cond delay="0"/>
+                            </p:stCondLst>
+                            <p:childTnLst>
+                              <p:par>
+                                <p:cTn id="10" presetID="10" presetClass="entr" presetSubtype="0" fill="hold" nodeType="clickEffect">
+                                  <p:stCondLst>
+                                    <p:cond delay="0"/>
+                                  </p:stCondLst>
+                                  <p:childTnLst>
+                                    <p:set>
+                                      <p:cBhvr>
+                                        <p:cTn id="11" dur="1" fill="hold">
+                                          <p:stCondLst>
+                                            <p:cond delay="0"/>
+                                          </p:stCondLst>
+                                        </p:cTn>
+                                        <p:tgtEl>
+                                          <p:spTgt spid="8"/>
+                                        </p:tgtEl>
+                                        <p:attrNameLst>
+                                          <p:attrName>style.visibility</p:attrName>
+                                        </p:attrNameLst>
+                                      </p:cBhvr>
+                                      <p:to>
+                                        <p:strVal val="visible"/>
+                                      </p:to>
+                                    </p:set>
+                                    <p:animEffect transition="in" filter="fade">
+                                      <p:cBhvr>
+                                        <p:cTn id="12" dur="450"/>
+                                        <p:tgtEl>
+                                          <p:spTgt spid="8"/>
+                                        </p:tgtEl>
+                                      </p:cBhvr>
+                                    </p:animEffect>
+                                  </p:childTnLst>
+                                </p:cTn>
+                              </p:par>
+                            </p:childTnLst>
+                          </p:cTn>
+                        </p:par>
+                      </p:childTnLst>
+                    </p:cTn>
+                  </p:par>
+                </p:childTnLst>
+              </p:cTn>
+              <p:prevCondLst>
+                <p:cond evt="onPrev" delay="0">
+                  <p:tgtEl>
+                    <p:sldTgt/>
+                  </p:tgtEl>
+                </p:cond>
+              </p:prevCondLst>
+              <p:nextCondLst>
+                <p:cond evt="onNext" delay="0">
+                  <p:tgtEl>
+                    <p:sldTgt/>
+                  </p:tgtEl>
+                </p:cond>
+              </p:nextCondLst>
+            </p:seq>
+          </p:childTnLst>
+        </p:cTn>
+      </p:par>
+    </p:tnLst>
+  </p:timing>
 </p:sld>
 </file>
 
@@ -8859,21 +12353,238 @@
                 </a:solidFill>
                 <a:latin typeface="Calibri"/>
               </a:rPr>
-              <a:t>El segundo eje de la auditoria es el lenguaje (2/2)</a:t>
-            </a:r>
-          </a:p>
-        </p:txBody>
-      </p:sp>
-      <p:sp>
-        <p:nvSpPr>
-          <p:cNvPr id="5" name="TextBox 4"/>
+              <a:t>El glosario de nombres canonicos: el hueco mas comun</a:t>
+            </a:r>
+          </a:p>
+        </p:txBody>
+      </p:sp>
+      <p:sp>
+        <p:nvSpPr>
+          <p:cNvPr id="5" name="Rounded Rectangle 4"/>
+          <p:cNvSpPr/>
+          <p:nvPr/>
+        </p:nvSpPr>
+        <p:spPr>
+          <a:xfrm>
+            <a:off x="457200" y="1261872"/>
+            <a:ext cx="11277295" cy="4568884"/>
+          </a:xfrm>
+          <a:prstGeom prst="roundRect">
+            <a:avLst>
+              <a:gd name="adj" fmla="val 4000"/>
+            </a:avLst>
+          </a:prstGeom>
+          <a:solidFill>
+            <a:srgbClr val="1E1E1E"/>
+          </a:solidFill>
+          <a:ln>
+            <a:noFill/>
+          </a:ln>
+        </p:spPr>
+        <p:style>
+          <a:lnRef idx="1">
+            <a:schemeClr val="accent1"/>
+          </a:lnRef>
+          <a:fillRef idx="3">
+            <a:schemeClr val="accent1"/>
+          </a:fillRef>
+          <a:effectRef idx="2">
+            <a:schemeClr val="accent1"/>
+          </a:effectRef>
+          <a:fontRef idx="minor">
+            <a:schemeClr val="lt1"/>
+          </a:fontRef>
+        </p:style>
+        <p:txBody>
+          <a:bodyPr rtlCol="0" anchor="ctr"/>
+          <a:lstStyle/>
+          <a:p>
+            <a:pPr algn="ctr"/>
+          </a:p>
+        </p:txBody>
+      </p:sp>
+      <p:sp>
+        <p:nvSpPr>
+          <p:cNvPr id="6" name="Rectangle 5"/>
+          <p:cNvSpPr/>
+          <p:nvPr/>
+        </p:nvSpPr>
+        <p:spPr>
+          <a:xfrm>
+            <a:off x="457200" y="1261872"/>
+            <a:ext cx="11277295" cy="365760"/>
+          </a:xfrm>
+          <a:prstGeom prst="rect">
+            <a:avLst/>
+          </a:prstGeom>
+          <a:solidFill>
+            <a:srgbClr val="2D2D30"/>
+          </a:solidFill>
+          <a:ln>
+            <a:noFill/>
+          </a:ln>
+        </p:spPr>
+        <p:style>
+          <a:lnRef idx="1">
+            <a:schemeClr val="accent1"/>
+          </a:lnRef>
+          <a:fillRef idx="3">
+            <a:schemeClr val="accent1"/>
+          </a:fillRef>
+          <a:effectRef idx="2">
+            <a:schemeClr val="accent1"/>
+          </a:effectRef>
+          <a:fontRef idx="minor">
+            <a:schemeClr val="lt1"/>
+          </a:fontRef>
+        </p:style>
+        <p:txBody>
+          <a:bodyPr rtlCol="0" anchor="ctr"/>
+          <a:lstStyle/>
+          <a:p>
+            <a:pPr algn="ctr"/>
+          </a:p>
+        </p:txBody>
+      </p:sp>
+      <p:sp>
+        <p:nvSpPr>
+          <p:cNvPr id="7" name="Oval 6"/>
+          <p:cNvSpPr/>
+          <p:nvPr/>
+        </p:nvSpPr>
+        <p:spPr>
+          <a:xfrm>
+            <a:off x="658368" y="1380743"/>
+            <a:ext cx="128016" cy="128016"/>
+          </a:xfrm>
+          <a:prstGeom prst="ellipse">
+            <a:avLst/>
+          </a:prstGeom>
+          <a:solidFill>
+            <a:srgbClr val="FF5F56"/>
+          </a:solidFill>
+          <a:ln>
+            <a:noFill/>
+          </a:ln>
+        </p:spPr>
+        <p:style>
+          <a:lnRef idx="1">
+            <a:schemeClr val="accent1"/>
+          </a:lnRef>
+          <a:fillRef idx="3">
+            <a:schemeClr val="accent1"/>
+          </a:fillRef>
+          <a:effectRef idx="2">
+            <a:schemeClr val="accent1"/>
+          </a:effectRef>
+          <a:fontRef idx="minor">
+            <a:schemeClr val="lt1"/>
+          </a:fontRef>
+        </p:style>
+        <p:txBody>
+          <a:bodyPr rtlCol="0" anchor="ctr"/>
+          <a:lstStyle/>
+          <a:p>
+            <a:pPr algn="ctr"/>
+          </a:p>
+        </p:txBody>
+      </p:sp>
+      <p:sp>
+        <p:nvSpPr>
+          <p:cNvPr id="8" name="Oval 7"/>
+          <p:cNvSpPr/>
+          <p:nvPr/>
+        </p:nvSpPr>
+        <p:spPr>
+          <a:xfrm>
+            <a:off x="877824" y="1380743"/>
+            <a:ext cx="128016" cy="128016"/>
+          </a:xfrm>
+          <a:prstGeom prst="ellipse">
+            <a:avLst/>
+          </a:prstGeom>
+          <a:solidFill>
+            <a:srgbClr val="FFBD2E"/>
+          </a:solidFill>
+          <a:ln>
+            <a:noFill/>
+          </a:ln>
+        </p:spPr>
+        <p:style>
+          <a:lnRef idx="1">
+            <a:schemeClr val="accent1"/>
+          </a:lnRef>
+          <a:fillRef idx="3">
+            <a:schemeClr val="accent1"/>
+          </a:fillRef>
+          <a:effectRef idx="2">
+            <a:schemeClr val="accent1"/>
+          </a:effectRef>
+          <a:fontRef idx="minor">
+            <a:schemeClr val="lt1"/>
+          </a:fontRef>
+        </p:style>
+        <p:txBody>
+          <a:bodyPr rtlCol="0" anchor="ctr"/>
+          <a:lstStyle/>
+          <a:p>
+            <a:pPr algn="ctr"/>
+          </a:p>
+        </p:txBody>
+      </p:sp>
+      <p:sp>
+        <p:nvSpPr>
+          <p:cNvPr id="9" name="Oval 8"/>
+          <p:cNvSpPr/>
+          <p:nvPr/>
+        </p:nvSpPr>
+        <p:spPr>
+          <a:xfrm>
+            <a:off x="1097280" y="1380743"/>
+            <a:ext cx="128016" cy="128016"/>
+          </a:xfrm>
+          <a:prstGeom prst="ellipse">
+            <a:avLst/>
+          </a:prstGeom>
+          <a:solidFill>
+            <a:srgbClr val="27C93F"/>
+          </a:solidFill>
+          <a:ln>
+            <a:noFill/>
+          </a:ln>
+        </p:spPr>
+        <p:style>
+          <a:lnRef idx="1">
+            <a:schemeClr val="accent1"/>
+          </a:lnRef>
+          <a:fillRef idx="3">
+            <a:schemeClr val="accent1"/>
+          </a:fillRef>
+          <a:effectRef idx="2">
+            <a:schemeClr val="accent1"/>
+          </a:effectRef>
+          <a:fontRef idx="minor">
+            <a:schemeClr val="lt1"/>
+          </a:fontRef>
+        </p:style>
+        <p:txBody>
+          <a:bodyPr rtlCol="0" anchor="ctr"/>
+          <a:lstStyle/>
+          <a:p>
+            <a:pPr algn="ctr"/>
+          </a:p>
+        </p:txBody>
+      </p:sp>
+      <p:sp>
+        <p:nvSpPr>
+          <p:cNvPr id="10" name="TextBox 9"/>
           <p:cNvSpPr txBox="1"/>
           <p:nvPr/>
         </p:nvSpPr>
         <p:spPr>
           <a:xfrm>
-            <a:off x="457200" y="1170432"/>
-            <a:ext cx="11277295" cy="5230368"/>
+            <a:off x="1371600" y="1298448"/>
+            <a:ext cx="10180015" cy="292608"/>
           </a:xfrm>
           <a:prstGeom prst="rect">
             <a:avLst/>
@@ -8881,63 +12592,1026 @@
           <a:noFill/>
         </p:spPr>
         <p:txBody>
+          <a:bodyPr wrap="square" anchor="ctr"/>
+          <a:lstStyle/>
+          <a:p>
+            <a:pPr algn="r"/>
+            <a:r>
+              <a:rPr sz="1100" b="1" i="0">
+                <a:solidFill>
+                  <a:srgbClr val="BBBBBB"/>
+                </a:solidFill>
+                <a:latin typeface="Calibri"/>
+              </a:rPr>
+              <a:t>Tabla Markdown</a:t>
+            </a:r>
+          </a:p>
+        </p:txBody>
+      </p:sp>
+      <p:sp>
+        <p:nvSpPr>
+          <p:cNvPr id="11" name="TextBox 10"/>
+          <p:cNvSpPr txBox="1"/>
+          <p:nvPr/>
+        </p:nvSpPr>
+        <p:spPr>
+          <a:xfrm>
+            <a:off x="685800" y="1719072"/>
+            <a:ext cx="502920" cy="3974524"/>
+          </a:xfrm>
+          <a:prstGeom prst="rect">
+            <a:avLst/>
+          </a:prstGeom>
+          <a:noFill/>
+        </p:spPr>
+        <p:txBody>
           <a:bodyPr wrap="square">
             <a:spAutoFit/>
           </a:bodyPr>
           <a:lstStyle/>
           <a:p>
+            <a:pPr algn="r">
+              <a:spcAft>
+                <a:spcPts val="428"/>
+              </a:spcAft>
+            </a:pPr>
+            <a:r>
+              <a:rPr sz="2000" i="0" b="0">
+                <a:solidFill>
+                  <a:srgbClr val="858585"/>
+                </a:solidFill>
+                <a:latin typeface="Consolas"/>
+              </a:rPr>
+              <a:t>1</a:t>
+            </a:r>
+          </a:p>
+          <a:p>
+            <a:pPr algn="r">
+              <a:spcAft>
+                <a:spcPts val="428"/>
+              </a:spcAft>
+            </a:pPr>
+            <a:r>
+              <a:rPr sz="2000" i="0" b="0">
+                <a:solidFill>
+                  <a:srgbClr val="858585"/>
+                </a:solidFill>
+                <a:latin typeface="Consolas"/>
+              </a:rPr>
+              <a:t>2</a:t>
+            </a:r>
+          </a:p>
+          <a:p>
+            <a:pPr algn="r">
+              <a:spcAft>
+                <a:spcPts val="428"/>
+              </a:spcAft>
+            </a:pPr>
+            <a:r>
+              <a:rPr sz="2000" i="0" b="0">
+                <a:solidFill>
+                  <a:srgbClr val="858585"/>
+                </a:solidFill>
+                <a:latin typeface="Consolas"/>
+              </a:rPr>
+              <a:t>3</a:t>
+            </a:r>
+          </a:p>
+          <a:p>
+            <a:pPr algn="r">
+              <a:spcAft>
+                <a:spcPts val="428"/>
+              </a:spcAft>
+            </a:pPr>
+            <a:r>
+              <a:rPr sz="2000" i="0" b="0">
+                <a:solidFill>
+                  <a:srgbClr val="858585"/>
+                </a:solidFill>
+                <a:latin typeface="Consolas"/>
+              </a:rPr>
+              <a:t>4</a:t>
+            </a:r>
+          </a:p>
+          <a:p>
+            <a:pPr algn="r">
+              <a:spcAft>
+                <a:spcPts val="428"/>
+              </a:spcAft>
+            </a:pPr>
+            <a:r>
+              <a:rPr sz="2000" i="0" b="0">
+                <a:solidFill>
+                  <a:srgbClr val="858585"/>
+                </a:solidFill>
+                <a:latin typeface="Consolas"/>
+              </a:rPr>
+              <a:t>5</a:t>
+            </a:r>
+          </a:p>
+          <a:p>
+            <a:pPr algn="r">
+              <a:spcAft>
+                <a:spcPts val="428"/>
+              </a:spcAft>
+            </a:pPr>
+            <a:r>
+              <a:rPr sz="2000" i="0" b="0">
+                <a:solidFill>
+                  <a:srgbClr val="858585"/>
+                </a:solidFill>
+                <a:latin typeface="Consolas"/>
+              </a:rPr>
+              <a:t>6</a:t>
+            </a:r>
+          </a:p>
+          <a:p>
+            <a:pPr algn="r">
+              <a:spcAft>
+                <a:spcPts val="428"/>
+              </a:spcAft>
+            </a:pPr>
+            <a:r>
+              <a:rPr sz="2000" i="0" b="0">
+                <a:solidFill>
+                  <a:srgbClr val="858585"/>
+                </a:solidFill>
+                <a:latin typeface="Consolas"/>
+              </a:rPr>
+              <a:t>7</a:t>
+            </a:r>
+          </a:p>
+          <a:p>
+            <a:pPr algn="r">
+              <a:spcAft>
+                <a:spcPts val="428"/>
+              </a:spcAft>
+            </a:pPr>
+            <a:r>
+              <a:rPr sz="2000" i="0" b="0">
+                <a:solidFill>
+                  <a:srgbClr val="858585"/>
+                </a:solidFill>
+                <a:latin typeface="Consolas"/>
+              </a:rPr>
+              <a:t>8</a:t>
+            </a:r>
+          </a:p>
+          <a:p>
+            <a:pPr algn="r">
+              <a:spcAft>
+                <a:spcPts val="428"/>
+              </a:spcAft>
+            </a:pPr>
+            <a:r>
+              <a:rPr sz="2000" i="0" b="0">
+                <a:solidFill>
+                  <a:srgbClr val="858585"/>
+                </a:solidFill>
+                <a:latin typeface="Consolas"/>
+              </a:rPr>
+              <a:t>9</a:t>
+            </a:r>
+          </a:p>
+          <a:p>
+            <a:pPr algn="r">
+              <a:spcAft>
+                <a:spcPts val="428"/>
+              </a:spcAft>
+            </a:pPr>
+            <a:r>
+              <a:rPr sz="2000" i="0" b="0">
+                <a:solidFill>
+                  <a:srgbClr val="858585"/>
+                </a:solidFill>
+                <a:latin typeface="Consolas"/>
+              </a:rPr>
+              <a:t>10</a:t>
+            </a:r>
+          </a:p>
+          <a:p>
+            <a:pPr algn="r">
+              <a:spcAft>
+                <a:spcPts val="428"/>
+              </a:spcAft>
+            </a:pPr>
+            <a:r>
+              <a:rPr sz="2000" i="0" b="0">
+                <a:solidFill>
+                  <a:srgbClr val="858585"/>
+                </a:solidFill>
+                <a:latin typeface="Consolas"/>
+              </a:rPr>
+              <a:t>11</a:t>
+            </a:r>
+          </a:p>
+        </p:txBody>
+      </p:sp>
+      <p:sp>
+        <p:nvSpPr>
+          <p:cNvPr id="12" name="TextBox 11"/>
+          <p:cNvSpPr txBox="1"/>
+          <p:nvPr/>
+        </p:nvSpPr>
+        <p:spPr>
+          <a:xfrm>
+            <a:off x="1188720" y="1719072"/>
+            <a:ext cx="10271455" cy="3974524"/>
+          </a:xfrm>
+          <a:prstGeom prst="rect">
+            <a:avLst/>
+          </a:prstGeom>
+          <a:noFill/>
+        </p:spPr>
+        <p:txBody>
+          <a:bodyPr wrap="square">
+            <a:spAutoFit/>
+          </a:bodyPr>
+          <a:lstStyle/>
+          <a:p>
             <a:pPr>
               <a:spcAft>
-                <a:spcPts val="800"/>
+                <a:spcPts val="428"/>
               </a:spcAft>
             </a:pPr>
             <a:r>
-              <a:rPr sz="2000" b="0" i="0">
-                <a:solidFill>
-                  <a:srgbClr val="333333"/>
-                </a:solidFill>
-                <a:latin typeface="Calibri"/>
-              </a:rPr>
-              <a:t>–   El glosario tambien separa parejas peligrosas: en la clinica, Cita es la reserva de un horario futuro y Consulta es el registro de una atencion ya realizada, y confundirlas produce un modelo donde nadie sabe si se esta agendando o atendiendo.</a:t>
+              <a:rPr sz="2000" i="0" b="0">
+                <a:solidFill>
+                  <a:srgbClr val="D4D4D4"/>
+                </a:solidFill>
+                <a:latin typeface="Consolas"/>
+              </a:rPr>
+              <a:t>| </a:t>
+            </a:r>
+            <a:r>
+              <a:rPr sz="2000" i="0" b="0">
+                <a:solidFill>
+                  <a:srgbClr val="D4D4D4"/>
+                </a:solidFill>
+                <a:latin typeface="Consolas"/>
+              </a:rPr>
+              <a:t>Concepto</a:t>
+            </a:r>
+            <a:r>
+              <a:rPr sz="2000" i="0" b="0">
+                <a:solidFill>
+                  <a:srgbClr val="D4D4D4"/>
+                </a:solidFill>
+                <a:latin typeface="Consolas"/>
+              </a:rPr>
+              <a:t>      | </a:t>
+            </a:r>
+            <a:r>
+              <a:rPr sz="2000" i="0" b="0">
+                <a:solidFill>
+                  <a:srgbClr val="D4D4D4"/>
+                </a:solidFill>
+                <a:latin typeface="Consolas"/>
+              </a:rPr>
+              <a:t>Nombre</a:t>
+            </a:r>
+            <a:r>
+              <a:rPr sz="2000" i="0" b="0">
+                <a:solidFill>
+                  <a:srgbClr val="D4D4D4"/>
+                </a:solidFill>
+                <a:latin typeface="Consolas"/>
+              </a:rPr>
+              <a:t> </a:t>
+            </a:r>
+            <a:r>
+              <a:rPr sz="2000" i="0" b="0">
+                <a:solidFill>
+                  <a:srgbClr val="D4D4D4"/>
+                </a:solidFill>
+                <a:latin typeface="Consolas"/>
+              </a:rPr>
+              <a:t>canonico</a:t>
+            </a:r>
+            <a:r>
+              <a:rPr sz="2000" i="0" b="0">
+                <a:solidFill>
+                  <a:srgbClr val="D4D4D4"/>
+                </a:solidFill>
+                <a:latin typeface="Consolas"/>
+              </a:rPr>
+              <a:t> | </a:t>
+            </a:r>
+            <a:r>
+              <a:rPr sz="2000" i="0" b="0">
+                <a:solidFill>
+                  <a:srgbClr val="D4D4D4"/>
+                </a:solidFill>
+                <a:latin typeface="Consolas"/>
+              </a:rPr>
+              <a:t>Como</a:t>
+            </a:r>
+            <a:r>
+              <a:rPr sz="2000" i="0" b="0">
+                <a:solidFill>
+                  <a:srgbClr val="D4D4D4"/>
+                </a:solidFill>
+                <a:latin typeface="Consolas"/>
+              </a:rPr>
+              <a:t> </a:t>
+            </a:r>
+            <a:r>
+              <a:rPr sz="2000" i="0" b="0">
+                <a:solidFill>
+                  <a:srgbClr val="D4D4D4"/>
+                </a:solidFill>
+                <a:latin typeface="Consolas"/>
+              </a:rPr>
+              <a:t>aparece</a:t>
+            </a:r>
+            <a:r>
+              <a:rPr sz="2000" i="0" b="0">
+                <a:solidFill>
+                  <a:srgbClr val="D4D4D4"/>
+                </a:solidFill>
+                <a:latin typeface="Consolas"/>
+              </a:rPr>
+              <a:t> </a:t>
+            </a:r>
+            <a:r>
+              <a:rPr sz="2000" i="0" b="0">
+                <a:solidFill>
+                  <a:srgbClr val="D4D4D4"/>
+                </a:solidFill>
+                <a:latin typeface="Consolas"/>
+              </a:rPr>
+              <a:t>mal</a:t>
+            </a:r>
+            <a:r>
+              <a:rPr sz="2000" i="0" b="0">
+                <a:solidFill>
+                  <a:srgbClr val="D4D4D4"/>
+                </a:solidFill>
+                <a:latin typeface="Consolas"/>
+              </a:rPr>
+              <a:t> </a:t>
+            </a:r>
+            <a:r>
+              <a:rPr sz="2000" i="0" b="0">
+                <a:solidFill>
+                  <a:srgbClr val="D4D4D4"/>
+                </a:solidFill>
+                <a:latin typeface="Consolas"/>
+              </a:rPr>
+              <a:t>en</a:t>
+            </a:r>
+            <a:r>
+              <a:rPr sz="2000" i="0" b="0">
+                <a:solidFill>
+                  <a:srgbClr val="D4D4D4"/>
+                </a:solidFill>
+                <a:latin typeface="Consolas"/>
+              </a:rPr>
+              <a:t> </a:t>
+            </a:r>
+            <a:r>
+              <a:rPr sz="2000" i="0" b="0">
+                <a:solidFill>
+                  <a:srgbClr val="D4D4D4"/>
+                </a:solidFill>
+                <a:latin typeface="Consolas"/>
+              </a:rPr>
+              <a:t>el</a:t>
+            </a:r>
+            <a:r>
+              <a:rPr sz="2000" i="0" b="0">
+                <a:solidFill>
+                  <a:srgbClr val="D4D4D4"/>
+                </a:solidFill>
+                <a:latin typeface="Consolas"/>
+              </a:rPr>
+              <a:t> </a:t>
+            </a:r>
+            <a:r>
+              <a:rPr sz="2000" i="0" b="0">
+                <a:solidFill>
+                  <a:srgbClr val="D4D4D4"/>
+                </a:solidFill>
+                <a:latin typeface="Consolas"/>
+              </a:rPr>
+              <a:t>paquete</a:t>
+            </a:r>
+            <a:r>
+              <a:rPr sz="2000" i="0" b="0">
+                <a:solidFill>
+                  <a:srgbClr val="D4D4D4"/>
+                </a:solidFill>
+                <a:latin typeface="Consolas"/>
+              </a:rPr>
+              <a:t>     |</a:t>
             </a:r>
           </a:p>
           <a:p>
             <a:pPr>
               <a:spcAft>
-                <a:spcPts val="800"/>
+                <a:spcPts val="428"/>
               </a:spcAft>
             </a:pPr>
             <a:r>
-              <a:rPr sz="2000" b="0" i="0">
-                <a:solidFill>
-                  <a:srgbClr val="333333"/>
-                </a:solidFill>
-                <a:latin typeface="Calibri"/>
-              </a:rPr>
-              <a:t>–   La ganancia es inmediata para el compañero que solo cursa Programacion II, porque puede buscar una palabra en el documento y encontrarla en todos lados; y tambien para el que solo cursa Seminario</a:t>
+              <a:rPr sz="2000" i="0" b="0">
+                <a:solidFill>
+                  <a:srgbClr val="D4D4D4"/>
+                </a:solidFill>
+                <a:latin typeface="Consolas"/>
+              </a:rPr>
+              <a:t>|-------------</a:t>
+            </a:r>
+            <a:r>
+              <a:rPr sz="2000" i="0" b="0">
+                <a:solidFill>
+                  <a:srgbClr val="D4D4D4"/>
+                </a:solidFill>
+                <a:latin typeface="Consolas"/>
+              </a:rPr>
+              <a:t>--|-----------------|------------------------------------|</a:t>
             </a:r>
           </a:p>
           <a:p>
             <a:pPr>
               <a:spcAft>
-                <a:spcPts val="800"/>
+                <a:spcPts val="428"/>
               </a:spcAft>
             </a:pPr>
             <a:r>
-              <a:rPr sz="2000" b="0" i="0">
-                <a:solidFill>
-                  <a:srgbClr val="333333"/>
-                </a:solidFill>
-                <a:latin typeface="Calibri"/>
-              </a:rPr>
-              <a:t>–   Porque su documento de diseño se lee como un texto y no como un rompecabezas.</a:t>
-            </a:r>
-          </a:p>
-        </p:txBody>
-      </p:sp>
-      <p:sp>
-        <p:nvSpPr>
-          <p:cNvPr id="6" name="TextBox 5"/>
+              <a:rPr sz="2000" i="0" b="0">
+                <a:solidFill>
+                  <a:srgbClr val="D4D4D4"/>
+                </a:solidFill>
+                <a:latin typeface="Consolas"/>
+              </a:rPr>
+              <a:t>| </a:t>
+            </a:r>
+            <a:r>
+              <a:rPr sz="2000" i="0" b="0">
+                <a:solidFill>
+                  <a:srgbClr val="D4D4D4"/>
+                </a:solidFill>
+                <a:latin typeface="Consolas"/>
+              </a:rPr>
+              <a:t>el</a:t>
+            </a:r>
+            <a:r>
+              <a:rPr sz="2000" i="0" b="0">
+                <a:solidFill>
+                  <a:srgbClr val="D4D4D4"/>
+                </a:solidFill>
+                <a:latin typeface="Consolas"/>
+              </a:rPr>
+              <a:t> </a:t>
+            </a:r>
+            <a:r>
+              <a:rPr sz="2000" i="0" b="0">
+                <a:solidFill>
+                  <a:srgbClr val="D4D4D4"/>
+                </a:solidFill>
+                <a:latin typeface="Consolas"/>
+              </a:rPr>
+              <a:t>animal</a:t>
+            </a:r>
+            <a:r>
+              <a:rPr sz="2000" i="0" b="0">
+                <a:solidFill>
+                  <a:srgbClr val="D4D4D4"/>
+                </a:solidFill>
+                <a:latin typeface="Consolas"/>
+              </a:rPr>
+              <a:t>     | </a:t>
+            </a:r>
+            <a:r>
+              <a:rPr sz="2000" i="0" b="0">
+                <a:solidFill>
+                  <a:srgbClr val="D4D4D4"/>
+                </a:solidFill>
+                <a:latin typeface="Consolas"/>
+              </a:rPr>
+              <a:t>Mascota</a:t>
+            </a:r>
+            <a:r>
+              <a:rPr sz="2000" i="0" b="0">
+                <a:solidFill>
+                  <a:srgbClr val="D4D4D4"/>
+                </a:solidFill>
+                <a:latin typeface="Consolas"/>
+              </a:rPr>
+              <a:t>         | </a:t>
+            </a:r>
+            <a:r>
+              <a:rPr sz="2000" i="0" b="0">
+                <a:solidFill>
+                  <a:srgbClr val="D4D4D4"/>
+                </a:solidFill>
+                <a:latin typeface="Consolas"/>
+              </a:rPr>
+              <a:t>Paciente</a:t>
+            </a:r>
+            <a:r>
+              <a:rPr sz="2000" i="0" b="0">
+                <a:solidFill>
+                  <a:srgbClr val="D4D4D4"/>
+                </a:solidFill>
+                <a:latin typeface="Consolas"/>
+              </a:rPr>
+              <a:t>, </a:t>
+            </a:r>
+            <a:r>
+              <a:rPr sz="2000" i="0" b="0">
+                <a:solidFill>
+                  <a:srgbClr val="D4D4D4"/>
+                </a:solidFill>
+                <a:latin typeface="Consolas"/>
+              </a:rPr>
+              <a:t>Animal</a:t>
+            </a:r>
+            <a:r>
+              <a:rPr sz="2000" i="0" b="0">
+                <a:solidFill>
+                  <a:srgbClr val="D4D4D4"/>
+                </a:solidFill>
+                <a:latin typeface="Consolas"/>
+              </a:rPr>
+              <a:t>, </a:t>
+            </a:r>
+            <a:r>
+              <a:rPr sz="2000" i="0" b="0">
+                <a:solidFill>
+                  <a:srgbClr val="D4D4D4"/>
+                </a:solidFill>
+                <a:latin typeface="Consolas"/>
+              </a:rPr>
+              <a:t>mascotas</a:t>
+            </a:r>
+            <a:r>
+              <a:rPr sz="2000" i="0" b="0">
+                <a:solidFill>
+                  <a:srgbClr val="D4D4D4"/>
+                </a:solidFill>
+                <a:latin typeface="Consolas"/>
+              </a:rPr>
+              <a:t>         |</a:t>
+            </a:r>
+          </a:p>
+          <a:p>
+            <a:pPr>
+              <a:spcAft>
+                <a:spcPts val="428"/>
+              </a:spcAft>
+            </a:pPr>
+            <a:r>
+              <a:rPr sz="2000" i="0" b="0">
+                <a:solidFill>
+                  <a:srgbClr val="D4D4D4"/>
+                </a:solidFill>
+                <a:latin typeface="Consolas"/>
+              </a:rPr>
+              <a:t>| </a:t>
+            </a:r>
+            <a:r>
+              <a:rPr sz="2000" i="0" b="0">
+                <a:solidFill>
+                  <a:srgbClr val="D4D4D4"/>
+                </a:solidFill>
+                <a:latin typeface="Consolas"/>
+              </a:rPr>
+              <a:t>quien</a:t>
+            </a:r>
+            <a:r>
+              <a:rPr sz="2000" i="0" b="0">
+                <a:solidFill>
+                  <a:srgbClr val="D4D4D4"/>
+                </a:solidFill>
+                <a:latin typeface="Consolas"/>
+              </a:rPr>
+              <a:t> </a:t>
+            </a:r>
+            <a:r>
+              <a:rPr sz="2000" i="0" b="0">
+                <a:solidFill>
+                  <a:srgbClr val="D4D4D4"/>
+                </a:solidFill>
+                <a:latin typeface="Consolas"/>
+              </a:rPr>
+              <a:t>lo</a:t>
+            </a:r>
+            <a:r>
+              <a:rPr sz="2000" i="0" b="0">
+                <a:solidFill>
+                  <a:srgbClr val="D4D4D4"/>
+                </a:solidFill>
+                <a:latin typeface="Consolas"/>
+              </a:rPr>
+              <a:t> </a:t>
+            </a:r>
+            <a:r>
+              <a:rPr sz="2000" i="0" b="0">
+                <a:solidFill>
+                  <a:srgbClr val="D4D4D4"/>
+                </a:solidFill>
+                <a:latin typeface="Consolas"/>
+              </a:rPr>
+              <a:t>trae</a:t>
+            </a:r>
+            <a:r>
+              <a:rPr sz="2000" i="0" b="0">
+                <a:solidFill>
+                  <a:srgbClr val="D4D4D4"/>
+                </a:solidFill>
+                <a:latin typeface="Consolas"/>
+              </a:rPr>
+              <a:t> | </a:t>
+            </a:r>
+            <a:r>
+              <a:rPr sz="2000" i="0" b="0">
+                <a:solidFill>
+                  <a:srgbClr val="D4D4D4"/>
+                </a:solidFill>
+                <a:latin typeface="Consolas"/>
+              </a:rPr>
+              <a:t>Propietario</a:t>
+            </a:r>
+            <a:r>
+              <a:rPr sz="2000" i="0" b="0">
+                <a:solidFill>
+                  <a:srgbClr val="D4D4D4"/>
+                </a:solidFill>
+                <a:latin typeface="Consolas"/>
+              </a:rPr>
+              <a:t>     | </a:t>
+            </a:r>
+            <a:r>
+              <a:rPr sz="2000" i="0" b="0">
+                <a:solidFill>
+                  <a:srgbClr val="D4D4D4"/>
+                </a:solidFill>
+                <a:latin typeface="Consolas"/>
+              </a:rPr>
+              <a:t>Dueno</a:t>
+            </a:r>
+            <a:r>
+              <a:rPr sz="2000" i="0" b="0">
+                <a:solidFill>
+                  <a:srgbClr val="D4D4D4"/>
+                </a:solidFill>
+                <a:latin typeface="Consolas"/>
+              </a:rPr>
+              <a:t>, </a:t>
+            </a:r>
+            <a:r>
+              <a:rPr sz="2000" i="0" b="0">
+                <a:solidFill>
+                  <a:srgbClr val="D4D4D4"/>
+                </a:solidFill>
+                <a:latin typeface="Consolas"/>
+              </a:rPr>
+              <a:t>Cliente</a:t>
+            </a:r>
+            <a:r>
+              <a:rPr sz="2000" i="0" b="0">
+                <a:solidFill>
+                  <a:srgbClr val="D4D4D4"/>
+                </a:solidFill>
+                <a:latin typeface="Consolas"/>
+              </a:rPr>
+              <a:t>, </a:t>
+            </a:r>
+            <a:r>
+              <a:rPr sz="2000" i="0" b="0">
+                <a:solidFill>
+                  <a:srgbClr val="D4D4D4"/>
+                </a:solidFill>
+                <a:latin typeface="Consolas"/>
+              </a:rPr>
+              <a:t>Responsable</a:t>
+            </a:r>
+            <a:r>
+              <a:rPr sz="2000" i="0" b="0">
+                <a:solidFill>
+                  <a:srgbClr val="D4D4D4"/>
+                </a:solidFill>
+                <a:latin typeface="Consolas"/>
+              </a:rPr>
+              <a:t>        |</a:t>
+            </a:r>
+          </a:p>
+          <a:p>
+            <a:pPr>
+              <a:spcAft>
+                <a:spcPts val="428"/>
+              </a:spcAft>
+            </a:pPr>
+            <a:r>
+              <a:rPr sz="2000" i="0" b="0">
+                <a:solidFill>
+                  <a:srgbClr val="D4D4D4"/>
+                </a:solidFill>
+                <a:latin typeface="Consolas"/>
+              </a:rPr>
+              <a:t>| </a:t>
+            </a:r>
+            <a:r>
+              <a:rPr sz="2000" i="0" b="0">
+                <a:solidFill>
+                  <a:srgbClr val="D4D4D4"/>
+                </a:solidFill>
+                <a:latin typeface="Consolas"/>
+              </a:rPr>
+              <a:t>el</a:t>
+            </a:r>
+            <a:r>
+              <a:rPr sz="2000" i="0" b="0">
+                <a:solidFill>
+                  <a:srgbClr val="D4D4D4"/>
+                </a:solidFill>
+                <a:latin typeface="Consolas"/>
+              </a:rPr>
+              <a:t> </a:t>
+            </a:r>
+            <a:r>
+              <a:rPr sz="2000" i="0" b="0">
+                <a:solidFill>
+                  <a:srgbClr val="D4D4D4"/>
+                </a:solidFill>
+                <a:latin typeface="Consolas"/>
+              </a:rPr>
+              <a:t>encuentro</a:t>
+            </a:r>
+            <a:r>
+              <a:rPr sz="2000" i="0" b="0">
+                <a:solidFill>
+                  <a:srgbClr val="D4D4D4"/>
+                </a:solidFill>
+                <a:latin typeface="Consolas"/>
+              </a:rPr>
+              <a:t>  | </a:t>
+            </a:r>
+            <a:r>
+              <a:rPr sz="2000" i="0" b="0">
+                <a:solidFill>
+                  <a:srgbClr val="D4D4D4"/>
+                </a:solidFill>
+                <a:latin typeface="Consolas"/>
+              </a:rPr>
+              <a:t>Cita</a:t>
+            </a:r>
+            <a:r>
+              <a:rPr sz="2000" i="0" b="0">
+                <a:solidFill>
+                  <a:srgbClr val="D4D4D4"/>
+                </a:solidFill>
+                <a:latin typeface="Consolas"/>
+              </a:rPr>
+              <a:t>            | </a:t>
+            </a:r>
+            <a:r>
+              <a:rPr sz="2000" i="0" b="0">
+                <a:solidFill>
+                  <a:srgbClr val="D4D4D4"/>
+                </a:solidFill>
+                <a:latin typeface="Consolas"/>
+              </a:rPr>
+              <a:t>Turno</a:t>
+            </a:r>
+            <a:r>
+              <a:rPr sz="2000" i="0" b="0">
+                <a:solidFill>
+                  <a:srgbClr val="D4D4D4"/>
+                </a:solidFill>
+                <a:latin typeface="Consolas"/>
+              </a:rPr>
+              <a:t>, </a:t>
+            </a:r>
+            <a:r>
+              <a:rPr sz="2000" i="0" b="0">
+                <a:solidFill>
+                  <a:srgbClr val="D4D4D4"/>
+                </a:solidFill>
+                <a:latin typeface="Consolas"/>
+              </a:rPr>
+              <a:t>Agendamiento</a:t>
+            </a:r>
+            <a:r>
+              <a:rPr sz="2000" i="0" b="0">
+                <a:solidFill>
+                  <a:srgbClr val="D4D4D4"/>
+                </a:solidFill>
+                <a:latin typeface="Consolas"/>
+              </a:rPr>
+              <a:t>, </a:t>
+            </a:r>
+            <a:r>
+              <a:rPr sz="2000" i="0" b="0">
+                <a:solidFill>
+                  <a:srgbClr val="D4D4D4"/>
+                </a:solidFill>
+                <a:latin typeface="Consolas"/>
+              </a:rPr>
+              <a:t>Reserva</a:t>
+            </a:r>
+            <a:r>
+              <a:rPr sz="2000" i="0" b="0">
+                <a:solidFill>
+                  <a:srgbClr val="D4D4D4"/>
+                </a:solidFill>
+                <a:latin typeface="Consolas"/>
+              </a:rPr>
+              <a:t>       |</a:t>
+            </a:r>
+          </a:p>
+          <a:p>
+            <a:pPr>
+              <a:spcAft>
+                <a:spcPts val="428"/>
+              </a:spcAft>
+            </a:pPr>
+            <a:r>
+              <a:rPr sz="2000" i="0" b="0">
+                <a:solidFill>
+                  <a:srgbClr val="D4D4D4"/>
+                </a:solidFill>
+                <a:latin typeface="Consolas"/>
+              </a:rPr>
+              <a:t>| </a:t>
+            </a:r>
+            <a:r>
+              <a:rPr sz="2000" i="0" b="0">
+                <a:solidFill>
+                  <a:srgbClr val="D4D4D4"/>
+                </a:solidFill>
+                <a:latin typeface="Consolas"/>
+              </a:rPr>
+              <a:t>el</a:t>
+            </a:r>
+            <a:r>
+              <a:rPr sz="2000" i="0" b="0">
+                <a:solidFill>
+                  <a:srgbClr val="D4D4D4"/>
+                </a:solidFill>
+                <a:latin typeface="Consolas"/>
+              </a:rPr>
+              <a:t> </a:t>
+            </a:r>
+            <a:r>
+              <a:rPr sz="2000" i="0" b="0">
+                <a:solidFill>
+                  <a:srgbClr val="D4D4D4"/>
+                </a:solidFill>
+                <a:latin typeface="Consolas"/>
+              </a:rPr>
+              <a:t>registro</a:t>
+            </a:r>
+            <a:r>
+              <a:rPr sz="2000" i="0" b="0">
+                <a:solidFill>
+                  <a:srgbClr val="D4D4D4"/>
+                </a:solidFill>
+                <a:latin typeface="Consolas"/>
+              </a:rPr>
+              <a:t>   | </a:t>
+            </a:r>
+            <a:r>
+              <a:rPr sz="2000" i="0" b="0">
+                <a:solidFill>
+                  <a:srgbClr val="D4D4D4"/>
+                </a:solidFill>
+                <a:latin typeface="Consolas"/>
+              </a:rPr>
+              <a:t>Consulta</a:t>
+            </a:r>
+            <a:r>
+              <a:rPr sz="2000" i="0" b="0">
+                <a:solidFill>
+                  <a:srgbClr val="D4D4D4"/>
+                </a:solidFill>
+                <a:latin typeface="Consolas"/>
+              </a:rPr>
+              <a:t>        | </a:t>
+            </a:r>
+            <a:r>
+              <a:rPr sz="2000" i="0" b="0">
+                <a:solidFill>
+                  <a:srgbClr val="D4D4D4"/>
+                </a:solidFill>
+                <a:latin typeface="Consolas"/>
+              </a:rPr>
+              <a:t>Atencion</a:t>
+            </a:r>
+            <a:r>
+              <a:rPr sz="2000" i="0" b="0">
+                <a:solidFill>
+                  <a:srgbClr val="D4D4D4"/>
+                </a:solidFill>
+                <a:latin typeface="Consolas"/>
+              </a:rPr>
+              <a:t>, </a:t>
+            </a:r>
+            <a:r>
+              <a:rPr sz="2000" i="0" b="0">
+                <a:solidFill>
+                  <a:srgbClr val="D4D4D4"/>
+                </a:solidFill>
+                <a:latin typeface="Consolas"/>
+              </a:rPr>
+              <a:t>HistoriaClinica</a:t>
+            </a:r>
+            <a:r>
+              <a:rPr sz="2000" i="0" b="0">
+                <a:solidFill>
+                  <a:srgbClr val="D4D4D4"/>
+                </a:solidFill>
+                <a:latin typeface="Consolas"/>
+              </a:rPr>
+              <a:t>          |</a:t>
+            </a:r>
+          </a:p>
+          <a:p>
+            <a:pPr>
+              <a:spcAft>
+                <a:spcPts val="428"/>
+              </a:spcAft>
+            </a:pPr>
+            <a:r>
+              <a:rPr sz="2000" i="0" b="0">
+                <a:solidFill>
+                  <a:srgbClr val="D4D4D4"/>
+                </a:solidFill>
+                <a:latin typeface="Consolas"/>
+              </a:rPr>
+              <a:t/>
+            </a:r>
+          </a:p>
+          <a:p>
+            <a:pPr>
+              <a:spcAft>
+                <a:spcPts val="428"/>
+              </a:spcAft>
+            </a:pPr>
+            <a:r>
+              <a:rPr sz="2000" i="0" b="0">
+                <a:solidFill>
+                  <a:srgbClr val="D4D4D4"/>
+                </a:solidFill>
+                <a:latin typeface="Consolas"/>
+              </a:rPr>
+              <a:t>-- El diagrama de clases dice Mascota, el caso de uso dice Paciente y el</a:t>
+            </a:r>
+          </a:p>
+          <a:p>
+            <a:pPr>
+              <a:spcAft>
+                <a:spcPts val="428"/>
+              </a:spcAft>
+            </a:pPr>
+            <a:r>
+              <a:rPr sz="2000" i="0" b="0">
+                <a:solidFill>
+                  <a:srgbClr val="D4D4D4"/>
+                </a:solidFill>
+                <a:latin typeface="Consolas"/>
+              </a:rPr>
+              <a:t>-- wireframe dice Animal: son tres artefactos que hablan de cosas</a:t>
+            </a:r>
+          </a:p>
+          <a:p>
+            <a:pPr>
+              <a:spcAft>
+                <a:spcPts val="428"/>
+              </a:spcAft>
+            </a:pPr>
+            <a:r>
+              <a:rPr sz="2000" i="0" b="0">
+                <a:solidFill>
+                  <a:srgbClr val="D4D4D4"/>
+                </a:solidFill>
+                <a:latin typeface="Consolas"/>
+              </a:rPr>
+              <a:t>-- distintas para quien los lee. Un solo nombre por concepto, y el mismo</a:t>
+            </a:r>
+          </a:p>
+          <a:p>
+            <a:pPr>
+              <a:spcAft>
+                <a:spcPts val="428"/>
+              </a:spcAft>
+            </a:pPr>
+            <a:r>
+              <a:rPr sz="2000" i="0" b="0">
+                <a:solidFill>
+                  <a:srgbClr val="D4D4D4"/>
+                </a:solidFill>
+                <a:latin typeface="Consolas"/>
+              </a:rPr>
+              <a:t>-- en TODOS los artefactos.</a:t>
+            </a:r>
+          </a:p>
+        </p:txBody>
+      </p:sp>
+      <p:sp>
+        <p:nvSpPr>
+          <p:cNvPr id="13" name="TextBox 12"/>
           <p:cNvSpPr txBox="1"/>
           <p:nvPr/>
         </p:nvSpPr>
@@ -9111,21 +13785,173 @@
                 </a:solidFill>
                 <a:latin typeface="Calibri"/>
               </a:rPr>
-              <a:t>La revision entre pares se hace con reglas o no sirve (1/2)</a:t>
-            </a:r>
-          </a:p>
-        </p:txBody>
-      </p:sp>
-      <p:sp>
-        <p:nvSpPr>
-          <p:cNvPr id="5" name="TextBox 4"/>
+              <a:t>Revisión entre pares con reglas</a:t>
+            </a:r>
+          </a:p>
+        </p:txBody>
+      </p:sp>
+      <p:sp>
+        <p:nvSpPr>
+          <p:cNvPr id="5" name="Rounded Rectangle 4"/>
+          <p:cNvSpPr/>
+          <p:nvPr/>
+        </p:nvSpPr>
+        <p:spPr>
+          <a:xfrm>
+            <a:off x="5803166" y="1188719"/>
+            <a:ext cx="5998464" cy="4828032"/>
+          </a:xfrm>
+          <a:prstGeom prst="roundRect">
+            <a:avLst>
+              <a:gd name="adj" fmla="val 4000"/>
+            </a:avLst>
+          </a:prstGeom>
+          <a:solidFill>
+            <a:srgbClr val="E8EEF4"/>
+          </a:solidFill>
+          <a:ln>
+            <a:noFill/>
+          </a:ln>
+        </p:spPr>
+        <p:style>
+          <a:lnRef idx="1">
+            <a:schemeClr val="accent1"/>
+          </a:lnRef>
+          <a:fillRef idx="3">
+            <a:schemeClr val="accent1"/>
+          </a:fillRef>
+          <a:effectRef idx="2">
+            <a:schemeClr val="accent1"/>
+          </a:effectRef>
+          <a:fontRef idx="minor">
+            <a:schemeClr val="lt1"/>
+          </a:fontRef>
+        </p:style>
+        <p:txBody>
+          <a:bodyPr rtlCol="0" anchor="ctr"/>
+          <a:lstStyle/>
+          <a:p>
+            <a:pPr algn="ctr"/>
+          </a:p>
+        </p:txBody>
+      </p:sp>
+      <p:pic>
+        <p:nvPicPr>
+          <p:cNvPr id="6" name="Picture 5" descr="revision-roles-paso1.png"/>
+          <p:cNvPicPr>
+            <a:picLocks noChangeAspect="1"/>
+          </p:cNvPicPr>
+          <p:nvPr/>
+        </p:nvPicPr>
+        <p:blipFill>
+          <a:blip r:embed="rId2"/>
+          <a:stretch>
+            <a:fillRect/>
+          </a:stretch>
+        </p:blipFill>
+        <p:spPr>
+          <a:xfrm>
+            <a:off x="5876318" y="1261872"/>
+            <a:ext cx="5852160" cy="4681728"/>
+          </a:xfrm>
+          <a:prstGeom prst="rect">
+            <a:avLst/>
+          </a:prstGeom>
+        </p:spPr>
+      </p:pic>
+      <p:pic>
+        <p:nvPicPr>
+          <p:cNvPr id="7" name="Picture 6" descr="revision-roles-paso2.png"/>
+          <p:cNvPicPr>
+            <a:picLocks noChangeAspect="1"/>
+          </p:cNvPicPr>
+          <p:nvPr/>
+        </p:nvPicPr>
+        <p:blipFill>
+          <a:blip r:embed="rId3"/>
+          <a:stretch>
+            <a:fillRect/>
+          </a:stretch>
+        </p:blipFill>
+        <p:spPr>
+          <a:xfrm>
+            <a:off x="5876318" y="1261872"/>
+            <a:ext cx="5852160" cy="4681728"/>
+          </a:xfrm>
+          <a:prstGeom prst="rect">
+            <a:avLst/>
+          </a:prstGeom>
+        </p:spPr>
+      </p:pic>
+      <p:pic>
+        <p:nvPicPr>
+          <p:cNvPr id="8" name="Picture 7" descr="revision-roles-paso3.png"/>
+          <p:cNvPicPr>
+            <a:picLocks noChangeAspect="1"/>
+          </p:cNvPicPr>
+          <p:nvPr/>
+        </p:nvPicPr>
+        <p:blipFill>
+          <a:blip r:embed="rId4"/>
+          <a:stretch>
+            <a:fillRect/>
+          </a:stretch>
+        </p:blipFill>
+        <p:spPr>
+          <a:xfrm>
+            <a:off x="5876318" y="1261872"/>
+            <a:ext cx="5852160" cy="4681728"/>
+          </a:xfrm>
+          <a:prstGeom prst="rect">
+            <a:avLst/>
+          </a:prstGeom>
+        </p:spPr>
+      </p:pic>
+      <p:sp>
+        <p:nvSpPr>
+          <p:cNvPr id="13" name="TextBox 12"/>
           <p:cNvSpPr txBox="1"/>
           <p:nvPr/>
         </p:nvSpPr>
         <p:spPr>
           <a:xfrm>
-            <a:off x="457200" y="1170432"/>
-            <a:ext cx="11277295" cy="5230368"/>
+            <a:off x="5870301" y="5961888"/>
+            <a:ext cx="5864193" cy="320040"/>
+          </a:xfrm>
+          <a:prstGeom prst="rect">
+            <a:avLst/>
+          </a:prstGeom>
+          <a:noFill/>
+        </p:spPr>
+        <p:txBody>
+          <a:bodyPr wrap="square">
+            <a:spAutoFit/>
+          </a:bodyPr>
+          <a:lstStyle/>
+          <a:p>
+            <a:pPr algn="ctr"/>
+            <a:r>
+              <a:rPr sz="1100" b="0" i="1">
+                <a:solidFill>
+                  <a:srgbClr val="666666"/>
+                </a:solidFill>
+                <a:latin typeface="Calibri"/>
+              </a:rPr>
+              <a:t>Clic para avanzar la animación</a:t>
+            </a:r>
+          </a:p>
+        </p:txBody>
+      </p:sp>
+      <p:sp>
+        <p:nvSpPr>
+          <p:cNvPr id="14" name="TextBox 13"/>
+          <p:cNvSpPr txBox="1"/>
+          <p:nvPr/>
+        </p:nvSpPr>
+        <p:spPr>
+          <a:xfrm>
+            <a:off x="457200" y="1353312"/>
+            <a:ext cx="5093061" cy="5047488"/>
           </a:xfrm>
           <a:prstGeom prst="rect">
             <a:avLst/>
@@ -9150,7 +13976,7 @@
                 </a:solidFill>
                 <a:latin typeface="Calibri"/>
               </a:rPr>
-              <a:t>–   La revision entre pares se hace con reglas o no sirve.</a:t>
+              <a:t>–   Se revisa el artefacto, nunca a la persona.</a:t>
             </a:r>
           </a:p>
           <a:p>
@@ -9166,7 +13992,7 @@
                 </a:solidFill>
                 <a:latin typeface="Calibri"/>
               </a:rPr>
-              <a:t>–   Se revisa el artefacto, nunca a la persona, y para eso se asignan tres roles: el autor, que entrega su paquete y permanece en silencio mientras lo revisan; el revisor</a:t>
+              <a:t>–   Roles: autor (en silencio), revisor (hechos observables) y moderador (tiempo y registro).</a:t>
             </a:r>
           </a:p>
           <a:p>
@@ -9182,7 +14008,7 @@
                 </a:solidFill>
                 <a:latin typeface="Calibri"/>
               </a:rPr>
-              <a:t>–   Que recorre la lista de verificacion punto por punto y solo reporta hechos observables; y el moderador, que controla el tiempo y escribe los hallazgos.</a:t>
+              <a:t>–   Cada hallazgo: ubicación exacta, inconsistencia y severidad: bloqueante, mayor o menor.</a:t>
             </a:r>
           </a:p>
           <a:p>
@@ -9198,14 +14024,14 @@
                 </a:solidFill>
                 <a:latin typeface="Calibri"/>
               </a:rPr>
-              <a:t>–   Cada hallazgo se anota con ubicacion exacta, descripcion de la inconsistencia y severidad: bloqueante cuando impide construir el sistema, mayor cuando obliga a rehacer un artefacto completo, menor cuando es cosmetico.</a:t>
-            </a:r>
-          </a:p>
-        </p:txBody>
-      </p:sp>
-      <p:sp>
-        <p:nvSpPr>
-          <p:cNvPr id="6" name="TextBox 5"/>
+              <a:t>–   «No me gusta» no es un hallazgo: es una opinión.</a:t>
+            </a:r>
+          </a:p>
+        </p:txBody>
+      </p:sp>
+      <p:sp>
+        <p:nvSpPr>
+          <p:cNvPr id="15" name="TextBox 14"/>
           <p:cNvSpPr txBox="1"/>
           <p:nvPr/>
         </p:nvSpPr>
@@ -9243,6 +14069,142 @@
   <p:clrMapOvr>
     <a:masterClrMapping/>
   </p:clrMapOvr>
+  <p:timing>
+    <p:tnLst>
+      <p:par>
+        <p:cTn id="1" dur="indefinite" restart="never" nodeType="tmRoot">
+          <p:childTnLst>
+            <p:seq concurrent="1" nextAc="seek">
+              <p:cTn id="2" dur="indefinite" nodeType="mainSeq">
+                <p:childTnLst>
+                  <p:par>
+                    <p:cTn id="3" fill="hold">
+                      <p:stCondLst>
+                        <p:cond delay="indefinite"/>
+                      </p:stCondLst>
+                      <p:childTnLst>
+                        <p:par>
+                          <p:cTn id="4" fill="hold">
+                            <p:stCondLst>
+                              <p:cond delay="0"/>
+                            </p:stCondLst>
+                            <p:childTnLst>
+                              <p:par>
+                                <p:cTn id="5" presetID="10" presetClass="entr" presetSubtype="0" fill="hold" nodeType="clickEffect">
+                                  <p:stCondLst>
+                                    <p:cond delay="0"/>
+                                  </p:stCondLst>
+                                  <p:childTnLst>
+                                    <p:set>
+                                      <p:cBhvr>
+                                        <p:cTn id="6" dur="1" fill="hold">
+                                          <p:stCondLst>
+                                            <p:cond delay="0"/>
+                                          </p:stCondLst>
+                                        </p:cTn>
+                                        <p:tgtEl>
+                                          <p:spTgt spid="7"/>
+                                        </p:tgtEl>
+                                        <p:attrNameLst>
+                                          <p:attrName>style.visibility</p:attrName>
+                                        </p:attrNameLst>
+                                      </p:cBhvr>
+                                      <p:to>
+                                        <p:strVal val="visible"/>
+                                      </p:to>
+                                    </p:set>
+                                    <p:animEffect transition="in" filter="fade">
+                                      <p:cBhvr>
+                                        <p:cTn id="7" dur="450"/>
+                                        <p:tgtEl>
+                                          <p:spTgt spid="7"/>
+                                        </p:tgtEl>
+                                      </p:cBhvr>
+                                    </p:animEffect>
+                                  </p:childTnLst>
+                                </p:cTn>
+                              </p:par>
+                            </p:childTnLst>
+                          </p:cTn>
+                        </p:par>
+                      </p:childTnLst>
+                    </p:cTn>
+                  </p:par>
+                  <p:par>
+                    <p:cTn id="8" fill="hold">
+                      <p:stCondLst>
+                        <p:cond delay="indefinite"/>
+                      </p:stCondLst>
+                      <p:childTnLst>
+                        <p:par>
+                          <p:cTn id="9" fill="hold">
+                            <p:stCondLst>
+                              <p:cond delay="0"/>
+                            </p:stCondLst>
+                            <p:childTnLst>
+                              <p:par>
+                                <p:cTn id="10" presetID="10" presetClass="entr" presetSubtype="0" fill="hold" nodeType="clickEffect">
+                                  <p:stCondLst>
+                                    <p:cond delay="0"/>
+                                  </p:stCondLst>
+                                  <p:childTnLst>
+                                    <p:set>
+                                      <p:cBhvr>
+                                        <p:cTn id="11" dur="1" fill="hold">
+                                          <p:stCondLst>
+                                            <p:cond delay="0"/>
+                                          </p:stCondLst>
+                                        </p:cTn>
+                                        <p:tgtEl>
+                                          <p:spTgt spid="8"/>
+                                        </p:tgtEl>
+                                        <p:attrNameLst>
+                                          <p:attrName>style.visibility</p:attrName>
+                                        </p:attrNameLst>
+                                      </p:cBhvr>
+                                      <p:to>
+                                        <p:strVal val="visible"/>
+                                      </p:to>
+                                    </p:set>
+                                    <p:animEffect transition="in" filter="fade">
+                                      <p:cBhvr>
+                                        <p:cTn id="12" dur="450"/>
+                                        <p:tgtEl>
+                                          <p:spTgt spid="8"/>
+                                        </p:tgtEl>
+                                      </p:cBhvr>
+                                    </p:animEffect>
+                                  </p:childTnLst>
+                                </p:cTn>
+                              </p:par>
+                            </p:childTnLst>
+                          </p:cTn>
+                        </p:par>
+                      </p:childTnLst>
+                    </p:cTn>
+                  </p:par>
+                </p:childTnLst>
+              </p:cTn>
+              <p:prevCondLst>
+                <p:cond evt="onPrev" delay="0">
+                  <p:tgtEl>
+                    <p:sldTgt/>
+                  </p:tgtEl>
+                </p:cond>
+              </p:prevCondLst>
+              <p:nextCondLst>
+                <p:cond evt="onNext" delay="0">
+                  <p:tgtEl>
+                    <p:sldTgt/>
+                  </p:tgtEl>
+                </p:cond>
+              </p:nextCondLst>
+            </p:seq>
+          </p:childTnLst>
+        </p:cTn>
+      </p:par>
+    </p:tnLst>
+  </p:timing>
 </p:sld>
 </file>
 

--- a/Seminario de Sistemas/Clases/Clase 11 - Avance del proyecto de diseno/Presentacion.pptx
+++ b/Seminario de Sistemas/Clases/Clase 11 - Avance del proyecto de diseno/Presentacion.pptx
@@ -1046,94 +1046,6 @@
           <a:p>
             <a:r>
               <a:t>Todo lo que se encuentra se convierte en backlog de deuda de diseño, no en angustia.</a:t>
-            </a:r>
-          </a:p>
-        </p:txBody>
-      </p:sp>
-      <p:sp>
-        <p:nvSpPr>
-          <p:cNvPr id="4" name="Slide Number Placeholder 3"/>
-          <p:cNvSpPr>
-            <a:spLocks noGrp="1"/>
-          </p:cNvSpPr>
-          <p:nvPr>
-            <p:ph type="sldNum" idx="5" sz="quarter"/>
-          </p:nvPr>
-        </p:nvSpPr>
-        <p:spPr/>
-      </p:sp>
-    </p:spTree>
-  </p:cSld>
-  <p:clrMapOvr>
-    <a:masterClrMapping/>
-  </p:clrMapOvr>
-</p:notes>
-</file>
-
-<file path=ppt/notesSlides/notesSlide6.xml><?xml version="1.0" encoding="utf-8"?>
-<p:notes xmlns:a="http://schemas.openxmlformats.org/drawingml/2006/main" xmlns:p="http://schemas.openxmlformats.org/presentationml/2006/main" xmlns:r="http://schemas.openxmlformats.org/officeDocument/2006/relationships">
-  <p:cSld>
-    <p:spTree>
-      <p:nvGrpSpPr>
-        <p:cNvPr id="1" name=""/>
-        <p:cNvGrpSpPr/>
-        <p:nvPr/>
-      </p:nvGrpSpPr>
-      <p:grpSpPr>
-        <a:xfrm>
-          <a:off x="0" y="0"/>
-          <a:ext cx="0" cy="0"/>
-          <a:chOff x="0" y="0"/>
-          <a:chExt cx="0" cy="0"/>
-        </a:xfrm>
-      </p:grpSpPr>
-      <p:sp>
-        <p:nvSpPr>
-          <p:cNvPr id="2" name="Slide Image Placeholder 1"/>
-          <p:cNvSpPr>
-            <a:spLocks noGrp="1"/>
-          </p:cNvSpPr>
-          <p:nvPr>
-            <p:ph type="sldImg" idx="2"/>
-          </p:nvPr>
-        </p:nvSpPr>
-        <p:spPr/>
-      </p:sp>
-      <p:sp>
-        <p:nvSpPr>
-          <p:cNvPr id="3" name="Notes Placeholder 2"/>
-          <p:cNvSpPr>
-            <a:spLocks noGrp="1"/>
-          </p:cNvSpPr>
-          <p:nvPr>
-            <p:ph type="body" idx="3" sz="quarter"/>
-          </p:nvPr>
-        </p:nvSpPr>
-        <p:spPr/>
-        <p:txBody>
-          <a:bodyPr/>
-          <a:lstStyle/>
-          <a:p>
-            <a:r>
-              <a:t>TEXTO COMPLETO DE LA LÁMINA (se proyecta resumido):</a:t>
-            </a:r>
-          </a:p>
-          <a:p/>
-          <a:p>
-            <a:r>
-              <a:t>Herramienta: Google Docs · draw.io</a:t>
-            </a:r>
-          </a:p>
-          <a:p/>
-          <a:p>
-            <a:r>
-              <a:t>Demo: Se proyecta el paquete de un equipo ficticio de la clinica y encuentra en vivo tres inconsistencias: un RF sin caso de uso, una clase llamada Dueño que en el catalogo de requisitos se llama Propietario, y un caso de uso que ninguna clase puede soportar.</a:t>
-            </a:r>
-          </a:p>
-          <a:p/>
-          <a:p>
-            <a:r>
-              <a:t>Mismo dominio: la clinica veterinaria — no otro ejemplo. Aqui se diseña, no se programa.</a:t>
             </a:r>
           </a:p>
         </p:txBody>
@@ -5220,118 +5132,14 @@
       </p:sp>
       <p:sp>
         <p:nvSpPr>
-          <p:cNvPr id="5" name="Rounded Rectangle 4"/>
-          <p:cNvSpPr/>
-          <p:nvPr/>
-        </p:nvSpPr>
-        <p:spPr>
-          <a:xfrm>
-            <a:off x="5797149" y="1573813"/>
-            <a:ext cx="6010497" cy="4057845"/>
-          </a:xfrm>
-          <a:prstGeom prst="roundRect">
-            <a:avLst>
-              <a:gd name="adj" fmla="val 4000"/>
-            </a:avLst>
-          </a:prstGeom>
-          <a:solidFill>
-            <a:srgbClr val="E8EEF4"/>
-          </a:solidFill>
-          <a:ln>
-            <a:noFill/>
-          </a:ln>
-        </p:spPr>
-        <p:style>
-          <a:lnRef idx="1">
-            <a:schemeClr val="accent1"/>
-          </a:lnRef>
-          <a:fillRef idx="3">
-            <a:schemeClr val="accent1"/>
-          </a:fillRef>
-          <a:effectRef idx="2">
-            <a:schemeClr val="accent1"/>
-          </a:effectRef>
-          <a:fontRef idx="minor">
-            <a:schemeClr val="lt1"/>
-          </a:fontRef>
-        </p:style>
-        <p:txBody>
-          <a:bodyPr rtlCol="0" anchor="ctr"/>
-          <a:lstStyle/>
-          <a:p>
-            <a:pPr algn="ctr"/>
-          </a:p>
-        </p:txBody>
-      </p:sp>
-      <p:pic>
-        <p:nvPicPr>
-          <p:cNvPr id="6" name="Picture 5" descr="laptop-code-live-demo.jpg"/>
-          <p:cNvPicPr>
-            <a:picLocks noChangeAspect="1"/>
-          </p:cNvPicPr>
-          <p:nvPr/>
-        </p:nvPicPr>
-        <p:blipFill>
-          <a:blip r:embed="rId2"/>
-          <a:stretch>
-            <a:fillRect/>
-          </a:stretch>
-        </p:blipFill>
-        <p:spPr>
-          <a:xfrm>
-            <a:off x="5870301" y="1646965"/>
-            <a:ext cx="5864193" cy="3911541"/>
-          </a:xfrm>
-          <a:prstGeom prst="rect">
-            <a:avLst/>
-          </a:prstGeom>
-        </p:spPr>
-      </p:pic>
-      <p:sp>
-        <p:nvSpPr>
-          <p:cNvPr id="7" name="TextBox 6"/>
+          <p:cNvPr id="5" name="TextBox 4"/>
           <p:cNvSpPr txBox="1"/>
           <p:nvPr/>
         </p:nvSpPr>
         <p:spPr>
           <a:xfrm>
-            <a:off x="5870301" y="5961888"/>
-            <a:ext cx="5864193" cy="320040"/>
-          </a:xfrm>
-          <a:prstGeom prst="rect">
-            <a:avLst/>
-          </a:prstGeom>
-          <a:noFill/>
-        </p:spPr>
-        <p:txBody>
-          <a:bodyPr wrap="square">
-            <a:spAutoFit/>
-          </a:bodyPr>
-          <a:lstStyle/>
-          <a:p>
-            <a:pPr algn="ctr"/>
-            <a:r>
-              <a:rPr sz="1100" b="0" i="1">
-                <a:solidFill>
-                  <a:srgbClr val="666666"/>
-                </a:solidFill>
-                <a:latin typeface="Calibri"/>
-              </a:rPr>
-              <a:t>Foto: olia danilevich · Pexels</a:t>
-            </a:r>
-          </a:p>
-        </p:txBody>
-      </p:sp>
-      <p:sp>
-        <p:nvSpPr>
-          <p:cNvPr id="8" name="TextBox 7"/>
-          <p:cNvSpPr txBox="1"/>
-          <p:nvPr/>
-        </p:nvSpPr>
-        <p:spPr>
-          <a:xfrm>
-            <a:off x="457200" y="1353312"/>
-            <a:ext cx="5093061" cy="5047488"/>
+            <a:off x="457200" y="1170432"/>
+            <a:ext cx="11277295" cy="5230368"/>
           </a:xfrm>
           <a:prstGeom prst="rect">
             <a:avLst/>
@@ -5408,7 +5216,7 @@
                 </a:solidFill>
                 <a:latin typeface="Calibri"/>
               </a:rPr>
-              <a:t> Se proyecta el paquete de un equipo ficticio de la clinica y encuentra en vivo tres inconsistencias:</a:t>
+              <a:t> Se proyecta el paquete de un equipo ficticio de la clinica y encuentra en vivo tres inconsistencias: un RF sin caso de uso, una clase llamada Dueño que en el catalogo de requisitos se llama Propietario, y un caso de uso que ninguna clase puede soportar.</a:t>
             </a:r>
           </a:p>
           <a:p>
@@ -5431,7 +5239,7 @@
       </p:sp>
       <p:sp>
         <p:nvSpPr>
-          <p:cNvPr id="9" name="TextBox 8"/>
+          <p:cNvPr id="6" name="TextBox 5"/>
           <p:cNvSpPr txBox="1"/>
           <p:nvPr/>
         </p:nvSpPr>
@@ -5844,118 +5652,14 @@
       </p:sp>
       <p:sp>
         <p:nvSpPr>
-          <p:cNvPr id="5" name="Rounded Rectangle 4"/>
-          <p:cNvSpPr/>
-          <p:nvPr/>
-        </p:nvSpPr>
-        <p:spPr>
-          <a:xfrm>
-            <a:off x="5797149" y="1573813"/>
-            <a:ext cx="6010497" cy="4057845"/>
-          </a:xfrm>
-          <a:prstGeom prst="roundRect">
-            <a:avLst>
-              <a:gd name="adj" fmla="val 4000"/>
-            </a:avLst>
-          </a:prstGeom>
-          <a:solidFill>
-            <a:srgbClr val="E8EEF4"/>
-          </a:solidFill>
-          <a:ln>
-            <a:noFill/>
-          </a:ln>
-        </p:spPr>
-        <p:style>
-          <a:lnRef idx="1">
-            <a:schemeClr val="accent1"/>
-          </a:lnRef>
-          <a:fillRef idx="3">
-            <a:schemeClr val="accent1"/>
-          </a:fillRef>
-          <a:effectRef idx="2">
-            <a:schemeClr val="accent1"/>
-          </a:effectRef>
-          <a:fontRef idx="minor">
-            <a:schemeClr val="lt1"/>
-          </a:fontRef>
-        </p:style>
-        <p:txBody>
-          <a:bodyPr rtlCol="0" anchor="ctr"/>
-          <a:lstStyle/>
-          <a:p>
-            <a:pPr algn="ctr"/>
-          </a:p>
-        </p:txBody>
-      </p:sp>
-      <p:pic>
-        <p:nvPicPr>
-          <p:cNvPr id="6" name="Picture 5" descr="notebook-planning-desk-coffee.jpg"/>
-          <p:cNvPicPr>
-            <a:picLocks noChangeAspect="1"/>
-          </p:cNvPicPr>
-          <p:nvPr/>
-        </p:nvPicPr>
-        <p:blipFill>
-          <a:blip r:embed="rId2"/>
-          <a:stretch>
-            <a:fillRect/>
-          </a:stretch>
-        </p:blipFill>
-        <p:spPr>
-          <a:xfrm>
-            <a:off x="5870301" y="1646965"/>
-            <a:ext cx="5864193" cy="3911541"/>
-          </a:xfrm>
-          <a:prstGeom prst="rect">
-            <a:avLst/>
-          </a:prstGeom>
-        </p:spPr>
-      </p:pic>
-      <p:sp>
-        <p:nvSpPr>
-          <p:cNvPr id="7" name="TextBox 6"/>
+          <p:cNvPr id="5" name="TextBox 4"/>
           <p:cNvSpPr txBox="1"/>
           <p:nvPr/>
         </p:nvSpPr>
         <p:spPr>
           <a:xfrm>
-            <a:off x="5870301" y="5961888"/>
-            <a:ext cx="5864193" cy="320040"/>
-          </a:xfrm>
-          <a:prstGeom prst="rect">
-            <a:avLst/>
-          </a:prstGeom>
-          <a:noFill/>
-        </p:spPr>
-        <p:txBody>
-          <a:bodyPr wrap="square">
-            <a:spAutoFit/>
-          </a:bodyPr>
-          <a:lstStyle/>
-          <a:p>
-            <a:pPr algn="ctr"/>
-            <a:r>
-              <a:rPr sz="1100" b="0" i="1">
-                <a:solidFill>
-                  <a:srgbClr val="666666"/>
-                </a:solidFill>
-                <a:latin typeface="Calibri"/>
-              </a:rPr>
-              <a:t>Foto: Cup of  Couple · Pexels</a:t>
-            </a:r>
-          </a:p>
-        </p:txBody>
-      </p:sp>
-      <p:sp>
-        <p:nvSpPr>
-          <p:cNvPr id="8" name="TextBox 7"/>
-          <p:cNvSpPr txBox="1"/>
-          <p:nvPr/>
-        </p:nvSpPr>
-        <p:spPr>
-          <a:xfrm>
-            <a:off x="457200" y="1353312"/>
-            <a:ext cx="5093061" cy="5047488"/>
+            <a:off x="457200" y="1170432"/>
+            <a:ext cx="11277295" cy="5230368"/>
           </a:xfrm>
           <a:prstGeom prst="rect">
             <a:avLst/>
@@ -6080,7 +5784,7 @@
       </p:sp>
       <p:sp>
         <p:nvSpPr>
-          <p:cNvPr id="9" name="TextBox 8"/>
+          <p:cNvPr id="6" name="TextBox 5"/>
           <p:cNvSpPr txBox="1"/>
           <p:nvPr/>
         </p:nvSpPr>

--- a/Seminario de Sistemas/Clases/Clase 11 - Avance del proyecto de diseno/Presentacion.pptx
+++ b/Seminario de Sistemas/Clases/Clase 11 - Avance del proyecto de diseno/Presentacion.pptx
@@ -1046,6 +1046,94 @@
           <a:p>
             <a:r>
               <a:t>Todo lo que se encuentra se convierte en backlog de deuda de diseño, no en angustia.</a:t>
+            </a:r>
+          </a:p>
+        </p:txBody>
+      </p:sp>
+      <p:sp>
+        <p:nvSpPr>
+          <p:cNvPr id="4" name="Slide Number Placeholder 3"/>
+          <p:cNvSpPr>
+            <a:spLocks noGrp="1"/>
+          </p:cNvSpPr>
+          <p:nvPr>
+            <p:ph type="sldNum" idx="5" sz="quarter"/>
+          </p:nvPr>
+        </p:nvSpPr>
+        <p:spPr/>
+      </p:sp>
+    </p:spTree>
+  </p:cSld>
+  <p:clrMapOvr>
+    <a:masterClrMapping/>
+  </p:clrMapOvr>
+</p:notes>
+</file>
+
+<file path=ppt/notesSlides/notesSlide6.xml><?xml version="1.0" encoding="utf-8"?>
+<p:notes xmlns:a="http://schemas.openxmlformats.org/drawingml/2006/main" xmlns:p="http://schemas.openxmlformats.org/presentationml/2006/main" xmlns:r="http://schemas.openxmlformats.org/officeDocument/2006/relationships">
+  <p:cSld>
+    <p:spTree>
+      <p:nvGrpSpPr>
+        <p:cNvPr id="1" name=""/>
+        <p:cNvGrpSpPr/>
+        <p:nvPr/>
+      </p:nvGrpSpPr>
+      <p:grpSpPr>
+        <a:xfrm>
+          <a:off x="0" y="0"/>
+          <a:ext cx="0" cy="0"/>
+          <a:chOff x="0" y="0"/>
+          <a:chExt cx="0" cy="0"/>
+        </a:xfrm>
+      </p:grpSpPr>
+      <p:sp>
+        <p:nvSpPr>
+          <p:cNvPr id="2" name="Slide Image Placeholder 1"/>
+          <p:cNvSpPr>
+            <a:spLocks noGrp="1"/>
+          </p:cNvSpPr>
+          <p:nvPr>
+            <p:ph type="sldImg" idx="2"/>
+          </p:nvPr>
+        </p:nvSpPr>
+        <p:spPr/>
+      </p:sp>
+      <p:sp>
+        <p:nvSpPr>
+          <p:cNvPr id="3" name="Notes Placeholder 2"/>
+          <p:cNvSpPr>
+            <a:spLocks noGrp="1"/>
+          </p:cNvSpPr>
+          <p:nvPr>
+            <p:ph type="body" idx="3" sz="quarter"/>
+          </p:nvPr>
+        </p:nvSpPr>
+        <p:spPr/>
+        <p:txBody>
+          <a:bodyPr/>
+          <a:lstStyle/>
+          <a:p>
+            <a:r>
+              <a:t>TEXTO COMPLETO DE LA LÁMINA (se proyecta resumido):</a:t>
+            </a:r>
+          </a:p>
+          <a:p/>
+          <a:p>
+            <a:r>
+              <a:t>Herramienta: Google Docs · draw.io</a:t>
+            </a:r>
+          </a:p>
+          <a:p/>
+          <a:p>
+            <a:r>
+              <a:t>Demo: Se proyecta el paquete de un equipo ficticio de la clinica y encuentra en vivo tres inconsistencias: un RF sin caso de uso, una clase llamada Dueño que en el catalogo de requisitos se llama Propietario, y un caso de uso que ninguna clase puede soportar.</a:t>
+            </a:r>
+          </a:p>
+          <a:p/>
+          <a:p>
+            <a:r>
+              <a:t>Mismo dominio: la clinica veterinaria — no otro ejemplo. Aqui se diseña, no se programa.</a:t>
             </a:r>
           </a:p>
         </p:txBody>
@@ -5132,14 +5220,83 @@
       </p:sp>
       <p:sp>
         <p:nvSpPr>
-          <p:cNvPr id="5" name="TextBox 4"/>
+          <p:cNvPr id="5" name="Rounded Rectangle 4"/>
+          <p:cNvSpPr/>
+          <p:nvPr/>
+        </p:nvSpPr>
+        <p:spPr>
+          <a:xfrm>
+            <a:off x="5797149" y="1343926"/>
+            <a:ext cx="6010497" cy="4837658"/>
+          </a:xfrm>
+          <a:prstGeom prst="roundRect">
+            <a:avLst>
+              <a:gd name="adj" fmla="val 4000"/>
+            </a:avLst>
+          </a:prstGeom>
+          <a:solidFill>
+            <a:srgbClr val="E8EEF4"/>
+          </a:solidFill>
+          <a:ln>
+            <a:noFill/>
+          </a:ln>
+        </p:spPr>
+        <p:style>
+          <a:lnRef idx="1">
+            <a:schemeClr val="accent1"/>
+          </a:lnRef>
+          <a:fillRef idx="3">
+            <a:schemeClr val="accent1"/>
+          </a:fillRef>
+          <a:effectRef idx="2">
+            <a:schemeClr val="accent1"/>
+          </a:effectRef>
+          <a:fontRef idx="minor">
+            <a:schemeClr val="lt1"/>
+          </a:fontRef>
+        </p:style>
+        <p:txBody>
+          <a:bodyPr rtlCol="0" anchor="ctr"/>
+          <a:lstStyle/>
+          <a:p>
+            <a:pPr algn="ctr"/>
+          </a:p>
+        </p:txBody>
+      </p:sp>
+      <p:pic>
+        <p:nvPicPr>
+          <p:cNvPr id="6" name="Picture 5" descr="ilus-demo-paso1.png"/>
+          <p:cNvPicPr>
+            <a:picLocks noChangeAspect="1"/>
+          </p:cNvPicPr>
+          <p:nvPr/>
+        </p:nvPicPr>
+        <p:blipFill>
+          <a:blip r:embed="rId2"/>
+          <a:stretch>
+            <a:fillRect/>
+          </a:stretch>
+        </p:blipFill>
+        <p:spPr>
+          <a:xfrm>
+            <a:off x="5870301" y="1417078"/>
+            <a:ext cx="5864193" cy="4691354"/>
+          </a:xfrm>
+          <a:prstGeom prst="rect">
+            <a:avLst/>
+          </a:prstGeom>
+        </p:spPr>
+      </p:pic>
+      <p:sp>
+        <p:nvSpPr>
+          <p:cNvPr id="7" name="TextBox 6"/>
           <p:cNvSpPr txBox="1"/>
           <p:nvPr/>
         </p:nvSpPr>
         <p:spPr>
           <a:xfrm>
-            <a:off x="457200" y="1170432"/>
-            <a:ext cx="11277295" cy="5230368"/>
+            <a:off x="457200" y="1353312"/>
+            <a:ext cx="5093061" cy="5047488"/>
           </a:xfrm>
           <a:prstGeom prst="rect">
             <a:avLst/>
@@ -5216,7 +5373,7 @@
                 </a:solidFill>
                 <a:latin typeface="Calibri"/>
               </a:rPr>
-              <a:t> Se proyecta el paquete de un equipo ficticio de la clinica y encuentra en vivo tres inconsistencias: un RF sin caso de uso, una clase llamada Dueño que en el catalogo de requisitos se llama Propietario, y un caso de uso que ninguna clase puede soportar.</a:t>
+              <a:t> Se proyecta el paquete de un equipo ficticio de la clinica y encuentra en vivo tres inconsistencias:</a:t>
             </a:r>
           </a:p>
           <a:p>
@@ -5239,7 +5396,7 @@
       </p:sp>
       <p:sp>
         <p:nvSpPr>
-          <p:cNvPr id="6" name="TextBox 5"/>
+          <p:cNvPr id="8" name="TextBox 7"/>
           <p:cNvSpPr txBox="1"/>
           <p:nvPr/>
         </p:nvSpPr>

--- a/Seminario de Sistemas/Clases/Clase 11 - Avance del proyecto de diseno/Presentacion.pptx
+++ b/Seminario de Sistemas/Clases/Clase 11 - Avance del proyecto de diseno/Presentacion.pptx
@@ -8093,7 +8093,7 @@
         <p:spPr>
           <a:xfrm>
             <a:off x="457200" y="1261872"/>
-            <a:ext cx="11277295" cy="4311114"/>
+            <a:ext cx="11277295" cy="4094073"/>
           </a:xfrm>
           <a:prstGeom prst="roundRect">
             <a:avLst>
@@ -8343,7 +8343,7 @@
         <p:spPr>
           <a:xfrm>
             <a:off x="685800" y="1719072"/>
-            <a:ext cx="502920" cy="3716754"/>
+            <a:ext cx="502920" cy="3499713"/>
           </a:xfrm>
           <a:prstGeom prst="rect">
             <a:avLst/>
@@ -8358,11 +8358,11 @@
           <a:p>
             <a:pPr algn="r">
               <a:spcAft>
-                <a:spcPts val="300"/>
+                <a:spcPts val="278"/>
               </a:spcAft>
             </a:pPr>
             <a:r>
-              <a:rPr sz="1400" i="0" b="0">
+              <a:rPr sz="1300" i="0" b="0">
                 <a:solidFill>
                   <a:srgbClr val="858585"/>
                 </a:solidFill>
@@ -8374,11 +8374,11 @@
           <a:p>
             <a:pPr algn="r">
               <a:spcAft>
-                <a:spcPts val="300"/>
+                <a:spcPts val="278"/>
               </a:spcAft>
             </a:pPr>
             <a:r>
-              <a:rPr sz="1400" i="0" b="0">
+              <a:rPr sz="1300" i="0" b="0">
                 <a:solidFill>
                   <a:srgbClr val="858585"/>
                 </a:solidFill>
@@ -8390,11 +8390,11 @@
           <a:p>
             <a:pPr algn="r">
               <a:spcAft>
-                <a:spcPts val="300"/>
+                <a:spcPts val="278"/>
               </a:spcAft>
             </a:pPr>
             <a:r>
-              <a:rPr sz="1400" i="0" b="0">
+              <a:rPr sz="1300" i="0" b="0">
                 <a:solidFill>
                   <a:srgbClr val="858585"/>
                 </a:solidFill>
@@ -8406,11 +8406,11 @@
           <a:p>
             <a:pPr algn="r">
               <a:spcAft>
-                <a:spcPts val="300"/>
+                <a:spcPts val="278"/>
               </a:spcAft>
             </a:pPr>
             <a:r>
-              <a:rPr sz="1400" i="0" b="0">
+              <a:rPr sz="1300" i="0" b="0">
                 <a:solidFill>
                   <a:srgbClr val="858585"/>
                 </a:solidFill>
@@ -8422,11 +8422,11 @@
           <a:p>
             <a:pPr algn="r">
               <a:spcAft>
-                <a:spcPts val="300"/>
+                <a:spcPts val="278"/>
               </a:spcAft>
             </a:pPr>
             <a:r>
-              <a:rPr sz="1400" i="0" b="0">
+              <a:rPr sz="1300" i="0" b="0">
                 <a:solidFill>
                   <a:srgbClr val="858585"/>
                 </a:solidFill>
@@ -8438,11 +8438,11 @@
           <a:p>
             <a:pPr algn="r">
               <a:spcAft>
-                <a:spcPts val="300"/>
+                <a:spcPts val="278"/>
               </a:spcAft>
             </a:pPr>
             <a:r>
-              <a:rPr sz="1400" i="0" b="0">
+              <a:rPr sz="1300" i="0" b="0">
                 <a:solidFill>
                   <a:srgbClr val="858585"/>
                 </a:solidFill>
@@ -8454,11 +8454,11 @@
           <a:p>
             <a:pPr algn="r">
               <a:spcAft>
-                <a:spcPts val="300"/>
+                <a:spcPts val="278"/>
               </a:spcAft>
             </a:pPr>
             <a:r>
-              <a:rPr sz="1400" i="0" b="0">
+              <a:rPr sz="1300" i="0" b="0">
                 <a:solidFill>
                   <a:srgbClr val="858585"/>
                 </a:solidFill>
@@ -8470,11 +8470,11 @@
           <a:p>
             <a:pPr algn="r">
               <a:spcAft>
-                <a:spcPts val="300"/>
+                <a:spcPts val="278"/>
               </a:spcAft>
             </a:pPr>
             <a:r>
-              <a:rPr sz="1400" i="0" b="0">
+              <a:rPr sz="1300" i="0" b="0">
                 <a:solidFill>
                   <a:srgbClr val="858585"/>
                 </a:solidFill>
@@ -8486,11 +8486,11 @@
           <a:p>
             <a:pPr algn="r">
               <a:spcAft>
-                <a:spcPts val="300"/>
+                <a:spcPts val="278"/>
               </a:spcAft>
             </a:pPr>
             <a:r>
-              <a:rPr sz="1400" i="0" b="0">
+              <a:rPr sz="1300" i="0" b="0">
                 <a:solidFill>
                   <a:srgbClr val="858585"/>
                 </a:solidFill>
@@ -8502,11 +8502,11 @@
           <a:p>
             <a:pPr algn="r">
               <a:spcAft>
-                <a:spcPts val="300"/>
+                <a:spcPts val="278"/>
               </a:spcAft>
             </a:pPr>
             <a:r>
-              <a:rPr sz="1400" i="0" b="0">
+              <a:rPr sz="1300" i="0" b="0">
                 <a:solidFill>
                   <a:srgbClr val="858585"/>
                 </a:solidFill>
@@ -8518,11 +8518,11 @@
           <a:p>
             <a:pPr algn="r">
               <a:spcAft>
-                <a:spcPts val="300"/>
+                <a:spcPts val="278"/>
               </a:spcAft>
             </a:pPr>
             <a:r>
-              <a:rPr sz="1400" i="0" b="0">
+              <a:rPr sz="1300" i="0" b="0">
                 <a:solidFill>
                   <a:srgbClr val="858585"/>
                 </a:solidFill>
@@ -8534,11 +8534,11 @@
           <a:p>
             <a:pPr algn="r">
               <a:spcAft>
-                <a:spcPts val="300"/>
+                <a:spcPts val="278"/>
               </a:spcAft>
             </a:pPr>
             <a:r>
-              <a:rPr sz="1400" i="0" b="0">
+              <a:rPr sz="1300" i="0" b="0">
                 <a:solidFill>
                   <a:srgbClr val="858585"/>
                 </a:solidFill>
@@ -8550,11 +8550,11 @@
           <a:p>
             <a:pPr algn="r">
               <a:spcAft>
-                <a:spcPts val="300"/>
+                <a:spcPts val="278"/>
               </a:spcAft>
             </a:pPr>
             <a:r>
-              <a:rPr sz="1400" i="0" b="0">
+              <a:rPr sz="1300" i="0" b="0">
                 <a:solidFill>
                   <a:srgbClr val="858585"/>
                 </a:solidFill>
@@ -8566,11 +8566,11 @@
           <a:p>
             <a:pPr algn="r">
               <a:spcAft>
-                <a:spcPts val="300"/>
+                <a:spcPts val="278"/>
               </a:spcAft>
             </a:pPr>
             <a:r>
-              <a:rPr sz="1400" i="0" b="0">
+              <a:rPr sz="1300" i="0" b="0">
                 <a:solidFill>
                   <a:srgbClr val="858585"/>
                 </a:solidFill>
@@ -8590,7 +8590,7 @@
         <p:spPr>
           <a:xfrm>
             <a:off x="1188720" y="1719072"/>
-            <a:ext cx="10271455" cy="3716754"/>
+            <a:ext cx="10271455" cy="3499713"/>
           </a:xfrm>
           <a:prstGeom prst="rect">
             <a:avLst/>
@@ -8605,11 +8605,11 @@
           <a:p>
             <a:pPr>
               <a:spcAft>
-                <a:spcPts val="300"/>
+                <a:spcPts val="278"/>
               </a:spcAft>
             </a:pPr>
             <a:r>
-              <a:rPr sz="1400" i="0" b="0">
+              <a:rPr sz="1300" i="0" b="0">
                 <a:solidFill>
                   <a:srgbClr val="D4D4D4"/>
                 </a:solidFill>
@@ -8618,7 +8618,7 @@
               <a:t>| </a:t>
             </a:r>
             <a:r>
-              <a:rPr sz="1400" i="0" b="0">
+              <a:rPr sz="1300" i="0" b="0">
                 <a:solidFill>
                   <a:srgbClr val="D4D4D4"/>
                 </a:solidFill>
@@ -8627,7 +8627,7 @@
               <a:t>RF</a:t>
             </a:r>
             <a:r>
-              <a:rPr sz="1400" i="0" b="0">
+              <a:rPr sz="1300" i="0" b="0">
                 <a:solidFill>
                   <a:srgbClr val="D4D4D4"/>
                 </a:solidFill>
@@ -8636,7 +8636,7 @@
               <a:t>     | </a:t>
             </a:r>
             <a:r>
-              <a:rPr sz="1400" i="0" b="0">
+              <a:rPr sz="1300" i="0" b="0">
                 <a:solidFill>
                   <a:srgbClr val="D4D4D4"/>
                 </a:solidFill>
@@ -8645,7 +8645,7 @@
               <a:t>Caso</a:t>
             </a:r>
             <a:r>
-              <a:rPr sz="1400" i="0" b="0">
+              <a:rPr sz="1300" i="0" b="0">
                 <a:solidFill>
                   <a:srgbClr val="D4D4D4"/>
                 </a:solidFill>
@@ -8654,7 +8654,7 @@
               <a:t> </a:t>
             </a:r>
             <a:r>
-              <a:rPr sz="1400" i="0" b="0">
+              <a:rPr sz="1300" i="0" b="0">
                 <a:solidFill>
                   <a:srgbClr val="D4D4D4"/>
                 </a:solidFill>
@@ -8663,7 +8663,7 @@
               <a:t>de</a:t>
             </a:r>
             <a:r>
-              <a:rPr sz="1400" i="0" b="0">
+              <a:rPr sz="1300" i="0" b="0">
                 <a:solidFill>
                   <a:srgbClr val="D4D4D4"/>
                 </a:solidFill>
@@ -8672,7 +8672,7 @@
               <a:t> </a:t>
             </a:r>
             <a:r>
-              <a:rPr sz="1400" i="0" b="0">
+              <a:rPr sz="1300" i="0" b="0">
                 <a:solidFill>
                   <a:srgbClr val="D4D4D4"/>
                 </a:solidFill>
@@ -8681,7 +8681,7 @@
               <a:t>uso</a:t>
             </a:r>
             <a:r>
-              <a:rPr sz="1400" i="0" b="0">
+              <a:rPr sz="1300" i="0" b="0">
                 <a:solidFill>
                   <a:srgbClr val="D4D4D4"/>
                 </a:solidFill>
@@ -8690,7 +8690,7 @@
               <a:t>                  | </a:t>
             </a:r>
             <a:r>
-              <a:rPr sz="1400" i="0" b="0">
+              <a:rPr sz="1300" i="0" b="0">
                 <a:solidFill>
                   <a:srgbClr val="D4D4D4"/>
                 </a:solidFill>
@@ -8699,7 +8699,7 @@
               <a:t>Clases</a:t>
             </a:r>
             <a:r>
-              <a:rPr sz="1400" i="0" b="0">
+              <a:rPr sz="1300" i="0" b="0">
                 <a:solidFill>
                   <a:srgbClr val="D4D4D4"/>
                 </a:solidFill>
@@ -8708,7 +8708,7 @@
               <a:t> </a:t>
             </a:r>
             <a:r>
-              <a:rPr sz="1400" i="0" b="0">
+              <a:rPr sz="1300" i="0" b="0">
                 <a:solidFill>
                   <a:srgbClr val="D4D4D4"/>
                 </a:solidFill>
@@ -8717,7 +8717,7 @@
               <a:t>implicadas</a:t>
             </a:r>
             <a:r>
-              <a:rPr sz="1400" i="0" b="0">
+              <a:rPr sz="1300" i="0" b="0">
                 <a:solidFill>
                   <a:srgbClr val="D4D4D4"/>
                 </a:solidFill>
@@ -8726,7 +8726,7 @@
               <a:t>      | </a:t>
             </a:r>
             <a:r>
-              <a:rPr sz="1400" i="0" b="0">
+              <a:rPr sz="1300" i="0" b="0">
                 <a:solidFill>
                   <a:srgbClr val="D4D4D4"/>
                 </a:solidFill>
@@ -8735,7 +8735,7 @@
               <a:t>Mockup</a:t>
             </a:r>
             <a:r>
-              <a:rPr sz="1400" i="0" b="0">
+              <a:rPr sz="1300" i="0" b="0">
                 <a:solidFill>
                   <a:srgbClr val="D4D4D4"/>
                 </a:solidFill>
@@ -8744,7 +8744,7 @@
               <a:t> | </a:t>
             </a:r>
             <a:r>
-              <a:rPr sz="1400" i="0" b="0">
+              <a:rPr sz="1300" i="0" b="0">
                 <a:solidFill>
                   <a:srgbClr val="D4D4D4"/>
                 </a:solidFill>
@@ -8753,7 +8753,7 @@
               <a:t>Estado</a:t>
             </a:r>
             <a:r>
-              <a:rPr sz="1400" i="0" b="0">
+              <a:rPr sz="1300" i="0" b="0">
                 <a:solidFill>
                   <a:srgbClr val="D4D4D4"/>
                 </a:solidFill>
@@ -8765,11 +8765,11 @@
           <a:p>
             <a:pPr>
               <a:spcAft>
-                <a:spcPts val="300"/>
+                <a:spcPts val="278"/>
               </a:spcAft>
             </a:pPr>
             <a:r>
-              <a:rPr sz="1400" i="0" b="0">
+              <a:rPr sz="1300" i="0" b="0">
                 <a:solidFill>
                   <a:srgbClr val="D4D4D4"/>
                 </a:solidFill>
@@ -8778,7 +8778,7 @@
               <a:t>|------</a:t>
             </a:r>
             <a:r>
-              <a:rPr sz="1400" i="0" b="0">
+              <a:rPr sz="1300" i="0" b="0">
                 <a:solidFill>
                   <a:srgbClr val="D4D4D4"/>
                 </a:solidFill>
@@ -8790,11 +8790,11 @@
           <a:p>
             <a:pPr>
               <a:spcAft>
-                <a:spcPts val="300"/>
+                <a:spcPts val="278"/>
               </a:spcAft>
             </a:pPr>
             <a:r>
-              <a:rPr sz="1400" i="0" b="0">
+              <a:rPr sz="1300" i="0" b="0">
                 <a:solidFill>
                   <a:srgbClr val="D4D4D4"/>
                 </a:solidFill>
@@ -8803,7 +8803,7 @@
               <a:t>| </a:t>
             </a:r>
             <a:r>
-              <a:rPr sz="1400" i="0" b="0">
+              <a:rPr sz="1300" i="0" b="0">
                 <a:solidFill>
                   <a:srgbClr val="D4D4D4"/>
                 </a:solidFill>
@@ -8812,7 +8812,7 @@
               <a:t>RF</a:t>
             </a:r>
             <a:r>
-              <a:rPr sz="1400" i="0" b="0">
+              <a:rPr sz="1300" i="0" b="0">
                 <a:solidFill>
                   <a:srgbClr val="D4D4D4"/>
                 </a:solidFill>
@@ -8821,7 +8821,7 @@
               <a:t>-</a:t>
             </a:r>
             <a:r>
-              <a:rPr sz="1400" i="0" b="0">
+              <a:rPr sz="1300" i="0" b="0">
                 <a:solidFill>
                   <a:srgbClr val="B5CEA8"/>
                 </a:solidFill>
@@ -8830,7 +8830,7 @@
               <a:t>02</a:t>
             </a:r>
             <a:r>
-              <a:rPr sz="1400" i="0" b="0">
+              <a:rPr sz="1300" i="0" b="0">
                 <a:solidFill>
                   <a:srgbClr val="D4D4D4"/>
                 </a:solidFill>
@@ -8839,7 +8839,7 @@
               <a:t>  | </a:t>
             </a:r>
             <a:r>
-              <a:rPr sz="1400" i="0" b="0">
+              <a:rPr sz="1300" i="0" b="0">
                 <a:solidFill>
                   <a:srgbClr val="D4D4D4"/>
                 </a:solidFill>
@@ -8848,7 +8848,7 @@
               <a:t>CU</a:t>
             </a:r>
             <a:r>
-              <a:rPr sz="1400" i="0" b="0">
+              <a:rPr sz="1300" i="0" b="0">
                 <a:solidFill>
                   <a:srgbClr val="D4D4D4"/>
                 </a:solidFill>
@@ -8857,7 +8857,7 @@
               <a:t>-</a:t>
             </a:r>
             <a:r>
-              <a:rPr sz="1400" i="0" b="0">
+              <a:rPr sz="1300" i="0" b="0">
                 <a:solidFill>
                   <a:srgbClr val="B5CEA8"/>
                 </a:solidFill>
@@ -8866,7 +8866,7 @@
               <a:t>00</a:t>
             </a:r>
             <a:r>
-              <a:rPr sz="1400" i="0" b="0">
+              <a:rPr sz="1300" i="0" b="0">
                 <a:solidFill>
                   <a:srgbClr val="D4D4D4"/>
                 </a:solidFill>
@@ -8875,7 +8875,7 @@
               <a:t> </a:t>
             </a:r>
             <a:r>
-              <a:rPr sz="1400" i="0" b="0">
+              <a:rPr sz="1300" i="0" b="0">
                 <a:solidFill>
                   <a:srgbClr val="D4D4D4"/>
                 </a:solidFill>
@@ -8884,7 +8884,7 @@
               <a:t>Registrar</a:t>
             </a:r>
             <a:r>
-              <a:rPr sz="1400" i="0" b="0">
+              <a:rPr sz="1300" i="0" b="0">
                 <a:solidFill>
                   <a:srgbClr val="D4D4D4"/>
                 </a:solidFill>
@@ -8893,7 +8893,7 @@
               <a:t> </a:t>
             </a:r>
             <a:r>
-              <a:rPr sz="1400" i="0" b="0">
+              <a:rPr sz="1300" i="0" b="0">
                 <a:solidFill>
                   <a:srgbClr val="D4D4D4"/>
                 </a:solidFill>
@@ -8902,7 +8902,7 @@
               <a:t>propietario</a:t>
             </a:r>
             <a:r>
-              <a:rPr sz="1400" i="0" b="0">
+              <a:rPr sz="1300" i="0" b="0">
                 <a:solidFill>
                   <a:srgbClr val="D4D4D4"/>
                 </a:solidFill>
@@ -8911,7 +8911,7 @@
               <a:t>  | </a:t>
             </a:r>
             <a:r>
-              <a:rPr sz="1400" i="0" b="0">
+              <a:rPr sz="1300" i="0" b="0">
                 <a:solidFill>
                   <a:srgbClr val="D4D4D4"/>
                 </a:solidFill>
@@ -8920,7 +8920,7 @@
               <a:t>Propietario</a:t>
             </a:r>
             <a:r>
-              <a:rPr sz="1400" i="0" b="0">
+              <a:rPr sz="1300" i="0" b="0">
                 <a:solidFill>
                   <a:srgbClr val="D4D4D4"/>
                 </a:solidFill>
@@ -8929,7 +8929,7 @@
               <a:t>            | </a:t>
             </a:r>
             <a:r>
-              <a:rPr sz="1400" i="0" b="0">
+              <a:rPr sz="1300" i="0" b="0">
                 <a:solidFill>
                   <a:srgbClr val="D4D4D4"/>
                 </a:solidFill>
@@ -8938,7 +8938,7 @@
               <a:t>M</a:t>
             </a:r>
             <a:r>
-              <a:rPr sz="1400" i="0" b="0">
+              <a:rPr sz="1300" i="0" b="0">
                 <a:solidFill>
                   <a:srgbClr val="D4D4D4"/>
                 </a:solidFill>
@@ -8947,7 +8947,7 @@
               <a:t>-</a:t>
             </a:r>
             <a:r>
-              <a:rPr sz="1400" i="0" b="0">
+              <a:rPr sz="1300" i="0" b="0">
                 <a:solidFill>
                   <a:srgbClr val="B5CEA8"/>
                 </a:solidFill>
@@ -8956,7 +8956,7 @@
               <a:t>01</a:t>
             </a:r>
             <a:r>
-              <a:rPr sz="1400" i="0" b="0">
+              <a:rPr sz="1300" i="0" b="0">
                 <a:solidFill>
                   <a:srgbClr val="D4D4D4"/>
                 </a:solidFill>
@@ -8965,7 +8965,7 @@
               <a:t>   | </a:t>
             </a:r>
             <a:r>
-              <a:rPr sz="1400" i="0" b="0">
+              <a:rPr sz="1300" i="0" b="0">
                 <a:solidFill>
                   <a:srgbClr val="D4D4D4"/>
                 </a:solidFill>
@@ -8974,7 +8974,7 @@
               <a:t>OK</a:t>
             </a:r>
             <a:r>
-              <a:rPr sz="1400" i="0" b="0">
+              <a:rPr sz="1300" i="0" b="0">
                 <a:solidFill>
                   <a:srgbClr val="D4D4D4"/>
                 </a:solidFill>
@@ -8986,11 +8986,11 @@
           <a:p>
             <a:pPr>
               <a:spcAft>
-                <a:spcPts val="300"/>
+                <a:spcPts val="278"/>
               </a:spcAft>
             </a:pPr>
             <a:r>
-              <a:rPr sz="1400" i="0" b="0">
+              <a:rPr sz="1300" i="0" b="0">
                 <a:solidFill>
                   <a:srgbClr val="D4D4D4"/>
                 </a:solidFill>
@@ -8999,7 +8999,7 @@
               <a:t>| </a:t>
             </a:r>
             <a:r>
-              <a:rPr sz="1400" i="0" b="0">
+              <a:rPr sz="1300" i="0" b="0">
                 <a:solidFill>
                   <a:srgbClr val="D4D4D4"/>
                 </a:solidFill>
@@ -9008,7 +9008,7 @@
               <a:t>RF</a:t>
             </a:r>
             <a:r>
-              <a:rPr sz="1400" i="0" b="0">
+              <a:rPr sz="1300" i="0" b="0">
                 <a:solidFill>
                   <a:srgbClr val="D4D4D4"/>
                 </a:solidFill>
@@ -9017,7 +9017,7 @@
               <a:t>-</a:t>
             </a:r>
             <a:r>
-              <a:rPr sz="1400" i="0" b="0">
+              <a:rPr sz="1300" i="0" b="0">
                 <a:solidFill>
                   <a:srgbClr val="B5CEA8"/>
                 </a:solidFill>
@@ -9026,7 +9026,7 @@
               <a:t>03</a:t>
             </a:r>
             <a:r>
-              <a:rPr sz="1400" i="0" b="0">
+              <a:rPr sz="1300" i="0" b="0">
                 <a:solidFill>
                   <a:srgbClr val="D4D4D4"/>
                 </a:solidFill>
@@ -9035,7 +9035,7 @@
               <a:t>  | </a:t>
             </a:r>
             <a:r>
-              <a:rPr sz="1400" i="0" b="0">
+              <a:rPr sz="1300" i="0" b="0">
                 <a:solidFill>
                   <a:srgbClr val="D4D4D4"/>
                 </a:solidFill>
@@ -9044,7 +9044,7 @@
               <a:t>CU</a:t>
             </a:r>
             <a:r>
-              <a:rPr sz="1400" i="0" b="0">
+              <a:rPr sz="1300" i="0" b="0">
                 <a:solidFill>
                   <a:srgbClr val="D4D4D4"/>
                 </a:solidFill>
@@ -9053,7 +9053,7 @@
               <a:t>-</a:t>
             </a:r>
             <a:r>
-              <a:rPr sz="1400" i="0" b="0">
+              <a:rPr sz="1300" i="0" b="0">
                 <a:solidFill>
                   <a:srgbClr val="B5CEA8"/>
                 </a:solidFill>
@@ -9062,7 +9062,7 @@
               <a:t>01</a:t>
             </a:r>
             <a:r>
-              <a:rPr sz="1400" i="0" b="0">
+              <a:rPr sz="1300" i="0" b="0">
                 <a:solidFill>
                   <a:srgbClr val="D4D4D4"/>
                 </a:solidFill>
@@ -9071,7 +9071,7 @@
               <a:t> </a:t>
             </a:r>
             <a:r>
-              <a:rPr sz="1400" i="0" b="0">
+              <a:rPr sz="1300" i="0" b="0">
                 <a:solidFill>
                   <a:srgbClr val="D4D4D4"/>
                 </a:solidFill>
@@ -9080,7 +9080,7 @@
               <a:t>Registrar</a:t>
             </a:r>
             <a:r>
-              <a:rPr sz="1400" i="0" b="0">
+              <a:rPr sz="1300" i="0" b="0">
                 <a:solidFill>
                   <a:srgbClr val="D4D4D4"/>
                 </a:solidFill>
@@ -9089,7 +9089,7 @@
               <a:t> </a:t>
             </a:r>
             <a:r>
-              <a:rPr sz="1400" i="0" b="0">
+              <a:rPr sz="1300" i="0" b="0">
                 <a:solidFill>
                   <a:srgbClr val="D4D4D4"/>
                 </a:solidFill>
@@ -9098,7 +9098,7 @@
               <a:t>mascota</a:t>
             </a:r>
             <a:r>
-              <a:rPr sz="1400" i="0" b="0">
+              <a:rPr sz="1300" i="0" b="0">
                 <a:solidFill>
                   <a:srgbClr val="D4D4D4"/>
                 </a:solidFill>
@@ -9107,7 +9107,7 @@
               <a:t>      | </a:t>
             </a:r>
             <a:r>
-              <a:rPr sz="1400" i="0" b="0">
+              <a:rPr sz="1300" i="0" b="0">
                 <a:solidFill>
                   <a:srgbClr val="D4D4D4"/>
                 </a:solidFill>
@@ -9116,7 +9116,7 @@
               <a:t>Mascota</a:t>
             </a:r>
             <a:r>
-              <a:rPr sz="1400" i="0" b="0">
+              <a:rPr sz="1300" i="0" b="0">
                 <a:solidFill>
                   <a:srgbClr val="D4D4D4"/>
                 </a:solidFill>
@@ -9125,7 +9125,7 @@
               <a:t>, </a:t>
             </a:r>
             <a:r>
-              <a:rPr sz="1400" i="0" b="0">
+              <a:rPr sz="1300" i="0" b="0">
                 <a:solidFill>
                   <a:srgbClr val="D4D4D4"/>
                 </a:solidFill>
@@ -9134,7 +9134,7 @@
               <a:t>Propietario</a:t>
             </a:r>
             <a:r>
-              <a:rPr sz="1400" i="0" b="0">
+              <a:rPr sz="1300" i="0" b="0">
                 <a:solidFill>
                   <a:srgbClr val="D4D4D4"/>
                 </a:solidFill>
@@ -9143,7 +9143,7 @@
               <a:t>   | </a:t>
             </a:r>
             <a:r>
-              <a:rPr sz="1400" i="0" b="0">
+              <a:rPr sz="1300" i="0" b="0">
                 <a:solidFill>
                   <a:srgbClr val="D4D4D4"/>
                 </a:solidFill>
@@ -9152,7 +9152,7 @@
               <a:t>M</a:t>
             </a:r>
             <a:r>
-              <a:rPr sz="1400" i="0" b="0">
+              <a:rPr sz="1300" i="0" b="0">
                 <a:solidFill>
                   <a:srgbClr val="D4D4D4"/>
                 </a:solidFill>
@@ -9161,7 +9161,7 @@
               <a:t>-</a:t>
             </a:r>
             <a:r>
-              <a:rPr sz="1400" i="0" b="0">
+              <a:rPr sz="1300" i="0" b="0">
                 <a:solidFill>
                   <a:srgbClr val="B5CEA8"/>
                 </a:solidFill>
@@ -9170,7 +9170,7 @@
               <a:t>02</a:t>
             </a:r>
             <a:r>
-              <a:rPr sz="1400" i="0" b="0">
+              <a:rPr sz="1300" i="0" b="0">
                 <a:solidFill>
                   <a:srgbClr val="D4D4D4"/>
                 </a:solidFill>
@@ -9179,7 +9179,7 @@
               <a:t>   | </a:t>
             </a:r>
             <a:r>
-              <a:rPr sz="1400" i="0" b="0">
+              <a:rPr sz="1300" i="0" b="0">
                 <a:solidFill>
                   <a:srgbClr val="D4D4D4"/>
                 </a:solidFill>
@@ -9188,7 +9188,7 @@
               <a:t>OK</a:t>
             </a:r>
             <a:r>
-              <a:rPr sz="1400" i="0" b="0">
+              <a:rPr sz="1300" i="0" b="0">
                 <a:solidFill>
                   <a:srgbClr val="D4D4D4"/>
                 </a:solidFill>
@@ -9200,11 +9200,11 @@
           <a:p>
             <a:pPr>
               <a:spcAft>
-                <a:spcPts val="300"/>
+                <a:spcPts val="278"/>
               </a:spcAft>
             </a:pPr>
             <a:r>
-              <a:rPr sz="1400" i="0" b="0">
+              <a:rPr sz="1300" i="0" b="0">
                 <a:solidFill>
                   <a:srgbClr val="D4D4D4"/>
                 </a:solidFill>
@@ -9213,7 +9213,7 @@
               <a:t>| </a:t>
             </a:r>
             <a:r>
-              <a:rPr sz="1400" i="0" b="0">
+              <a:rPr sz="1300" i="0" b="0">
                 <a:solidFill>
                   <a:srgbClr val="D4D4D4"/>
                 </a:solidFill>
@@ -9222,7 +9222,7 @@
               <a:t>RF</a:t>
             </a:r>
             <a:r>
-              <a:rPr sz="1400" i="0" b="0">
+              <a:rPr sz="1300" i="0" b="0">
                 <a:solidFill>
                   <a:srgbClr val="D4D4D4"/>
                 </a:solidFill>
@@ -9231,7 +9231,7 @@
               <a:t>-</a:t>
             </a:r>
             <a:r>
-              <a:rPr sz="1400" i="0" b="0">
+              <a:rPr sz="1300" i="0" b="0">
                 <a:solidFill>
                   <a:srgbClr val="B5CEA8"/>
                 </a:solidFill>
@@ -9240,7 +9240,7 @@
               <a:t>05</a:t>
             </a:r>
             <a:r>
-              <a:rPr sz="1400" i="0" b="0">
+              <a:rPr sz="1300" i="0" b="0">
                 <a:solidFill>
                   <a:srgbClr val="D4D4D4"/>
                 </a:solidFill>
@@ -9249,7 +9249,7 @@
               <a:t>  | </a:t>
             </a:r>
             <a:r>
-              <a:rPr sz="1400" i="0" b="0">
+              <a:rPr sz="1300" i="0" b="0">
                 <a:solidFill>
                   <a:srgbClr val="D4D4D4"/>
                 </a:solidFill>
@@ -9258,7 +9258,7 @@
               <a:t>CU</a:t>
             </a:r>
             <a:r>
-              <a:rPr sz="1400" i="0" b="0">
+              <a:rPr sz="1300" i="0" b="0">
                 <a:solidFill>
                   <a:srgbClr val="D4D4D4"/>
                 </a:solidFill>
@@ -9267,7 +9267,7 @@
               <a:t>-</a:t>
             </a:r>
             <a:r>
-              <a:rPr sz="1400" i="0" b="0">
+              <a:rPr sz="1300" i="0" b="0">
                 <a:solidFill>
                   <a:srgbClr val="B5CEA8"/>
                 </a:solidFill>
@@ -9276,7 +9276,7 @@
               <a:t>02</a:t>
             </a:r>
             <a:r>
-              <a:rPr sz="1400" i="0" b="0">
+              <a:rPr sz="1300" i="0" b="0">
                 <a:solidFill>
                   <a:srgbClr val="D4D4D4"/>
                 </a:solidFill>
@@ -9285,7 +9285,7 @@
               <a:t> </a:t>
             </a:r>
             <a:r>
-              <a:rPr sz="1400" i="0" b="0">
+              <a:rPr sz="1300" i="0" b="0">
                 <a:solidFill>
                   <a:srgbClr val="D4D4D4"/>
                 </a:solidFill>
@@ -9294,7 +9294,7 @@
               <a:t>Buscar</a:t>
             </a:r>
             <a:r>
-              <a:rPr sz="1400" i="0" b="0">
+              <a:rPr sz="1300" i="0" b="0">
                 <a:solidFill>
                   <a:srgbClr val="D4D4D4"/>
                 </a:solidFill>
@@ -9303,7 +9303,7 @@
               <a:t> </a:t>
             </a:r>
             <a:r>
-              <a:rPr sz="1400" i="0" b="0">
+              <a:rPr sz="1300" i="0" b="0">
                 <a:solidFill>
                   <a:srgbClr val="D4D4D4"/>
                 </a:solidFill>
@@ -9312,7 +9312,7 @@
               <a:t>expediente</a:t>
             </a:r>
             <a:r>
-              <a:rPr sz="1400" i="0" b="0">
+              <a:rPr sz="1300" i="0" b="0">
                 <a:solidFill>
                   <a:srgbClr val="D4D4D4"/>
                 </a:solidFill>
@@ -9321,7 +9321,7 @@
               <a:t>      | </a:t>
             </a:r>
             <a:r>
-              <a:rPr sz="1400" i="0" b="0">
+              <a:rPr sz="1300" i="0" b="0">
                 <a:solidFill>
                   <a:srgbClr val="D4D4D4"/>
                 </a:solidFill>
@@ -9330,7 +9330,7 @@
               <a:t>Mascota</a:t>
             </a:r>
             <a:r>
-              <a:rPr sz="1400" i="0" b="0">
+              <a:rPr sz="1300" i="0" b="0">
                 <a:solidFill>
                   <a:srgbClr val="D4D4D4"/>
                 </a:solidFill>
@@ -9339,7 +9339,7 @@
               <a:t>, </a:t>
             </a:r>
             <a:r>
-              <a:rPr sz="1400" i="0" b="0">
+              <a:rPr sz="1300" i="0" b="0">
                 <a:solidFill>
                   <a:srgbClr val="D4D4D4"/>
                 </a:solidFill>
@@ -9348,7 +9348,7 @@
               <a:t>Consulta</a:t>
             </a:r>
             <a:r>
-              <a:rPr sz="1400" i="0" b="0">
+              <a:rPr sz="1300" i="0" b="0">
                 <a:solidFill>
                   <a:srgbClr val="D4D4D4"/>
                 </a:solidFill>
@@ -9357,7 +9357,7 @@
               <a:t>      | </a:t>
             </a:r>
             <a:r>
-              <a:rPr sz="1400" i="0" b="0">
+              <a:rPr sz="1300" i="0" b="0">
                 <a:solidFill>
                   <a:srgbClr val="D4D4D4"/>
                 </a:solidFill>
@@ -9366,7 +9366,7 @@
               <a:t>M</a:t>
             </a:r>
             <a:r>
-              <a:rPr sz="1400" i="0" b="0">
+              <a:rPr sz="1300" i="0" b="0">
                 <a:solidFill>
                   <a:srgbClr val="D4D4D4"/>
                 </a:solidFill>
@@ -9375,7 +9375,7 @@
               <a:t>-</a:t>
             </a:r>
             <a:r>
-              <a:rPr sz="1400" i="0" b="0">
+              <a:rPr sz="1300" i="0" b="0">
                 <a:solidFill>
                   <a:srgbClr val="B5CEA8"/>
                 </a:solidFill>
@@ -9384,7 +9384,7 @@
               <a:t>03</a:t>
             </a:r>
             <a:r>
-              <a:rPr sz="1400" i="0" b="0">
+              <a:rPr sz="1300" i="0" b="0">
                 <a:solidFill>
                   <a:srgbClr val="D4D4D4"/>
                 </a:solidFill>
@@ -9393,7 +9393,7 @@
               <a:t>   | </a:t>
             </a:r>
             <a:r>
-              <a:rPr sz="1400" i="0" b="0">
+              <a:rPr sz="1300" i="0" b="0">
                 <a:solidFill>
                   <a:srgbClr val="D4D4D4"/>
                 </a:solidFill>
@@ -9402,7 +9402,7 @@
               <a:t>OK</a:t>
             </a:r>
             <a:r>
-              <a:rPr sz="1400" i="0" b="0">
+              <a:rPr sz="1300" i="0" b="0">
                 <a:solidFill>
                   <a:srgbClr val="D4D4D4"/>
                 </a:solidFill>
@@ -9414,11 +9414,11 @@
           <a:p>
             <a:pPr>
               <a:spcAft>
-                <a:spcPts val="300"/>
+                <a:spcPts val="278"/>
               </a:spcAft>
             </a:pPr>
             <a:r>
-              <a:rPr sz="1400" i="0" b="0">
+              <a:rPr sz="1300" i="0" b="0">
                 <a:solidFill>
                   <a:srgbClr val="D4D4D4"/>
                 </a:solidFill>
@@ -9427,7 +9427,7 @@
               <a:t>| </a:t>
             </a:r>
             <a:r>
-              <a:rPr sz="1400" i="0" b="0">
+              <a:rPr sz="1300" i="0" b="0">
                 <a:solidFill>
                   <a:srgbClr val="D4D4D4"/>
                 </a:solidFill>
@@ -9436,7 +9436,7 @@
               <a:t>RF</a:t>
             </a:r>
             <a:r>
-              <a:rPr sz="1400" i="0" b="0">
+              <a:rPr sz="1300" i="0" b="0">
                 <a:solidFill>
                   <a:srgbClr val="D4D4D4"/>
                 </a:solidFill>
@@ -9445,7 +9445,7 @@
               <a:t>-</a:t>
             </a:r>
             <a:r>
-              <a:rPr sz="1400" i="0" b="0">
+              <a:rPr sz="1300" i="0" b="0">
                 <a:solidFill>
                   <a:srgbClr val="B5CEA8"/>
                 </a:solidFill>
@@ -9454,7 +9454,7 @@
               <a:t>06</a:t>
             </a:r>
             <a:r>
-              <a:rPr sz="1400" i="0" b="0">
+              <a:rPr sz="1300" i="0" b="0">
                 <a:solidFill>
                   <a:srgbClr val="D4D4D4"/>
                 </a:solidFill>
@@ -9463,7 +9463,7 @@
               <a:t>  | </a:t>
             </a:r>
             <a:r>
-              <a:rPr sz="1400" i="0" b="0">
+              <a:rPr sz="1300" i="0" b="0">
                 <a:solidFill>
                   <a:srgbClr val="D4D4D4"/>
                 </a:solidFill>
@@ -9472,7 +9472,7 @@
               <a:t>CU</a:t>
             </a:r>
             <a:r>
-              <a:rPr sz="1400" i="0" b="0">
+              <a:rPr sz="1300" i="0" b="0">
                 <a:solidFill>
                   <a:srgbClr val="D4D4D4"/>
                 </a:solidFill>
@@ -9481,7 +9481,7 @@
               <a:t>-</a:t>
             </a:r>
             <a:r>
-              <a:rPr sz="1400" i="0" b="0">
+              <a:rPr sz="1300" i="0" b="0">
                 <a:solidFill>
                   <a:srgbClr val="B5CEA8"/>
                 </a:solidFill>
@@ -9490,7 +9490,7 @@
               <a:t>03</a:t>
             </a:r>
             <a:r>
-              <a:rPr sz="1400" i="0" b="0">
+              <a:rPr sz="1300" i="0" b="0">
                 <a:solidFill>
                   <a:srgbClr val="D4D4D4"/>
                 </a:solidFill>
@@ -9499,7 +9499,7 @@
               <a:t> </a:t>
             </a:r>
             <a:r>
-              <a:rPr sz="1400" i="0" b="0">
+              <a:rPr sz="1300" i="0" b="0">
                 <a:solidFill>
                   <a:srgbClr val="D4D4D4"/>
                 </a:solidFill>
@@ -9508,7 +9508,7 @@
               <a:t>Registrar</a:t>
             </a:r>
             <a:r>
-              <a:rPr sz="1400" i="0" b="0">
+              <a:rPr sz="1300" i="0" b="0">
                 <a:solidFill>
                   <a:srgbClr val="D4D4D4"/>
                 </a:solidFill>
@@ -9517,7 +9517,7 @@
               <a:t> </a:t>
             </a:r>
             <a:r>
-              <a:rPr sz="1400" i="0" b="0">
+              <a:rPr sz="1300" i="0" b="0">
                 <a:solidFill>
                   <a:srgbClr val="D4D4D4"/>
                 </a:solidFill>
@@ -9526,7 +9526,7 @@
               <a:t>consulta</a:t>
             </a:r>
             <a:r>
-              <a:rPr sz="1400" i="0" b="0">
+              <a:rPr sz="1300" i="0" b="0">
                 <a:solidFill>
                   <a:srgbClr val="D4D4D4"/>
                 </a:solidFill>
@@ -9535,7 +9535,7 @@
               <a:t>     | </a:t>
             </a:r>
             <a:r>
-              <a:rPr sz="1400" i="0" b="0">
+              <a:rPr sz="1300" i="0" b="0">
                 <a:solidFill>
                   <a:srgbClr val="D4D4D4"/>
                 </a:solidFill>
@@ -9544,7 +9544,7 @@
               <a:t>Consulta</a:t>
             </a:r>
             <a:r>
-              <a:rPr sz="1400" i="0" b="0">
+              <a:rPr sz="1300" i="0" b="0">
                 <a:solidFill>
                   <a:srgbClr val="D4D4D4"/>
                 </a:solidFill>
@@ -9553,7 +9553,7 @@
               <a:t>, ???          | </a:t>
             </a:r>
             <a:r>
-              <a:rPr sz="1400" i="0" b="0">
+              <a:rPr sz="1300" i="0" b="0">
                 <a:solidFill>
                   <a:srgbClr val="D4D4D4"/>
                 </a:solidFill>
@@ -9562,7 +9562,7 @@
               <a:t>M</a:t>
             </a:r>
             <a:r>
-              <a:rPr sz="1400" i="0" b="0">
+              <a:rPr sz="1300" i="0" b="0">
                 <a:solidFill>
                   <a:srgbClr val="D4D4D4"/>
                 </a:solidFill>
@@ -9571,7 +9571,7 @@
               <a:t>-</a:t>
             </a:r>
             <a:r>
-              <a:rPr sz="1400" i="0" b="0">
+              <a:rPr sz="1300" i="0" b="0">
                 <a:solidFill>
                   <a:srgbClr val="B5CEA8"/>
                 </a:solidFill>
@@ -9580,7 +9580,7 @@
               <a:t>05</a:t>
             </a:r>
             <a:r>
-              <a:rPr sz="1400" i="0" b="0">
+              <a:rPr sz="1300" i="0" b="0">
                 <a:solidFill>
                   <a:srgbClr val="D4D4D4"/>
                 </a:solidFill>
@@ -9589,7 +9589,7 @@
               <a:t>   | </a:t>
             </a:r>
             <a:r>
-              <a:rPr sz="1400" i="0" b="0">
+              <a:rPr sz="1300" i="0" b="0">
                 <a:solidFill>
                   <a:srgbClr val="D4D4D4"/>
                 </a:solidFill>
@@ -9598,7 +9598,7 @@
               <a:t>HALLAZGO</a:t>
             </a:r>
             <a:r>
-              <a:rPr sz="1400" i="0" b="0">
+              <a:rPr sz="1300" i="0" b="0">
                 <a:solidFill>
                   <a:srgbClr val="D4D4D4"/>
                 </a:solidFill>
@@ -9610,11 +9610,11 @@
           <a:p>
             <a:pPr>
               <a:spcAft>
-                <a:spcPts val="300"/>
+                <a:spcPts val="278"/>
               </a:spcAft>
             </a:pPr>
             <a:r>
-              <a:rPr sz="1400" i="0" b="0">
+              <a:rPr sz="1300" i="0" b="0">
                 <a:solidFill>
                   <a:srgbClr val="D4D4D4"/>
                 </a:solidFill>
@@ -9623,7 +9623,7 @@
               <a:t>| </a:t>
             </a:r>
             <a:r>
-              <a:rPr sz="1400" i="0" b="0">
+              <a:rPr sz="1300" i="0" b="0">
                 <a:solidFill>
                   <a:srgbClr val="D4D4D4"/>
                 </a:solidFill>
@@ -9632,7 +9632,7 @@
               <a:t>RF</a:t>
             </a:r>
             <a:r>
-              <a:rPr sz="1400" i="0" b="0">
+              <a:rPr sz="1300" i="0" b="0">
                 <a:solidFill>
                   <a:srgbClr val="D4D4D4"/>
                 </a:solidFill>
@@ -9641,7 +9641,7 @@
               <a:t>-</a:t>
             </a:r>
             <a:r>
-              <a:rPr sz="1400" i="0" b="0">
+              <a:rPr sz="1300" i="0" b="0">
                 <a:solidFill>
                   <a:srgbClr val="B5CEA8"/>
                 </a:solidFill>
@@ -9650,7 +9650,7 @@
               <a:t>07</a:t>
             </a:r>
             <a:r>
-              <a:rPr sz="1400" i="0" b="0">
+              <a:rPr sz="1300" i="0" b="0">
                 <a:solidFill>
                   <a:srgbClr val="D4D4D4"/>
                 </a:solidFill>
@@ -9659,7 +9659,7 @@
               <a:t>  | (</a:t>
             </a:r>
             <a:r>
-              <a:rPr sz="1400" i="0" b="0">
+              <a:rPr sz="1300" i="0" b="0">
                 <a:solidFill>
                   <a:srgbClr val="D4D4D4"/>
                 </a:solidFill>
@@ -9668,7 +9668,7 @@
               <a:t>no</a:t>
             </a:r>
             <a:r>
-              <a:rPr sz="1400" i="0" b="0">
+              <a:rPr sz="1300" i="0" b="0">
                 <a:solidFill>
                   <a:srgbClr val="D4D4D4"/>
                 </a:solidFill>
@@ -9677,7 +9677,7 @@
               <a:t> </a:t>
             </a:r>
             <a:r>
-              <a:rPr sz="1400" i="0" b="0">
+              <a:rPr sz="1300" i="0" b="0">
                 <a:solidFill>
                   <a:srgbClr val="D4D4D4"/>
                 </a:solidFill>
@@ -9686,7 +9686,7 @@
               <a:t>existe</a:t>
             </a:r>
             <a:r>
-              <a:rPr sz="1400" i="0" b="0">
+              <a:rPr sz="1300" i="0" b="0">
                 <a:solidFill>
                   <a:srgbClr val="D4D4D4"/>
                 </a:solidFill>
@@ -9695,7 +9695,7 @@
               <a:t>)                  | (</a:t>
             </a:r>
             <a:r>
-              <a:rPr sz="1400" i="0" b="0">
+              <a:rPr sz="1300" i="0" b="0">
                 <a:solidFill>
                   <a:srgbClr val="D4D4D4"/>
                 </a:solidFill>
@@ -9704,7 +9704,7 @@
               <a:t>no</a:t>
             </a:r>
             <a:r>
-              <a:rPr sz="1400" i="0" b="0">
+              <a:rPr sz="1300" i="0" b="0">
                 <a:solidFill>
                   <a:srgbClr val="D4D4D4"/>
                 </a:solidFill>
@@ -9713,7 +9713,7 @@
               <a:t> </a:t>
             </a:r>
             <a:r>
-              <a:rPr sz="1400" i="0" b="0">
+              <a:rPr sz="1300" i="0" b="0">
                 <a:solidFill>
                   <a:srgbClr val="D4D4D4"/>
                 </a:solidFill>
@@ -9722,7 +9722,7 @@
               <a:t>existe</a:t>
             </a:r>
             <a:r>
-              <a:rPr sz="1400" i="0" b="0">
+              <a:rPr sz="1300" i="0" b="0">
                 <a:solidFill>
                   <a:srgbClr val="D4D4D4"/>
                 </a:solidFill>
@@ -9731,7 +9731,7 @@
               <a:t>)            | </a:t>
             </a:r>
             <a:r>
-              <a:rPr sz="1400" i="0" b="0">
+              <a:rPr sz="1300" i="0" b="0">
                 <a:solidFill>
                   <a:srgbClr val="D4D4D4"/>
                 </a:solidFill>
@@ -9743,11 +9743,11 @@
           <a:p>
             <a:pPr>
               <a:spcAft>
-                <a:spcPts val="300"/>
+                <a:spcPts val="278"/>
               </a:spcAft>
             </a:pPr>
             <a:r>
-              <a:rPr sz="1400" i="0" b="0">
+              <a:rPr sz="1300" i="0" b="0">
                 <a:solidFill>
                   <a:srgbClr val="D4D4D4"/>
                 </a:solidFill>
@@ -9756,7 +9756,7 @@
               <a:t>| (</a:t>
             </a:r>
             <a:r>
-              <a:rPr sz="1400" i="0" b="0">
+              <a:rPr sz="1300" i="0" b="0">
                 <a:solidFill>
                   <a:srgbClr val="D4D4D4"/>
                 </a:solidFill>
@@ -9765,7 +9765,7 @@
               <a:t>sin</a:t>
             </a:r>
             <a:r>
-              <a:rPr sz="1400" i="0" b="0">
+              <a:rPr sz="1300" i="0" b="0">
                 <a:solidFill>
                   <a:srgbClr val="D4D4D4"/>
                 </a:solidFill>
@@ -9774,7 +9774,7 @@
               <a:t>)  | </a:t>
             </a:r>
             <a:r>
-              <a:rPr sz="1400" i="0" b="0">
+              <a:rPr sz="1300" i="0" b="0">
                 <a:solidFill>
                   <a:srgbClr val="D4D4D4"/>
                 </a:solidFill>
@@ -9783,7 +9783,7 @@
               <a:t>CU</a:t>
             </a:r>
             <a:r>
-              <a:rPr sz="1400" i="0" b="0">
+              <a:rPr sz="1300" i="0" b="0">
                 <a:solidFill>
                   <a:srgbClr val="D4D4D4"/>
                 </a:solidFill>
@@ -9792,7 +9792,7 @@
               <a:t>-</a:t>
             </a:r>
             <a:r>
-              <a:rPr sz="1400" i="0" b="0">
+              <a:rPr sz="1300" i="0" b="0">
                 <a:solidFill>
                   <a:srgbClr val="B5CEA8"/>
                 </a:solidFill>
@@ -9801,7 +9801,7 @@
               <a:t>04</a:t>
             </a:r>
             <a:r>
-              <a:rPr sz="1400" i="0" b="0">
+              <a:rPr sz="1300" i="0" b="0">
                 <a:solidFill>
                   <a:srgbClr val="D4D4D4"/>
                 </a:solidFill>
@@ -9810,7 +9810,7 @@
               <a:t> </a:t>
             </a:r>
             <a:r>
-              <a:rPr sz="1400" i="0" b="0">
+              <a:rPr sz="1300" i="0" b="0">
                 <a:solidFill>
                   <a:srgbClr val="D4D4D4"/>
                 </a:solidFill>
@@ -9819,7 +9819,7 @@
               <a:t>Agendar</a:t>
             </a:r>
             <a:r>
-              <a:rPr sz="1400" i="0" b="0">
+              <a:rPr sz="1300" i="0" b="0">
                 <a:solidFill>
                   <a:srgbClr val="D4D4D4"/>
                 </a:solidFill>
@@ -9828,7 +9828,7 @@
               <a:t> </a:t>
             </a:r>
             <a:r>
-              <a:rPr sz="1400" i="0" b="0">
+              <a:rPr sz="1300" i="0" b="0">
                 <a:solidFill>
                   <a:srgbClr val="D4D4D4"/>
                 </a:solidFill>
@@ -9837,7 +9837,7 @@
               <a:t>cita</a:t>
             </a:r>
             <a:r>
-              <a:rPr sz="1400" i="0" b="0">
+              <a:rPr sz="1300" i="0" b="0">
                 <a:solidFill>
                   <a:srgbClr val="D4D4D4"/>
                 </a:solidFill>
@@ -9846,7 +9846,7 @@
               <a:t>           | </a:t>
             </a:r>
             <a:r>
-              <a:rPr sz="1400" i="0" b="0">
+              <a:rPr sz="1300" i="0" b="0">
                 <a:solidFill>
                   <a:srgbClr val="D4D4D4"/>
                 </a:solidFill>
@@ -9855,7 +9855,7 @@
               <a:t>Cita</a:t>
             </a:r>
             <a:r>
-              <a:rPr sz="1400" i="0" b="0">
+              <a:rPr sz="1300" i="0" b="0">
                 <a:solidFill>
                   <a:srgbClr val="D4D4D4"/>
                 </a:solidFill>
@@ -9864,7 +9864,7 @@
               <a:t>, </a:t>
             </a:r>
             <a:r>
-              <a:rPr sz="1400" i="0" b="0">
+              <a:rPr sz="1300" i="0" b="0">
                 <a:solidFill>
                   <a:srgbClr val="D4D4D4"/>
                 </a:solidFill>
@@ -9873,7 +9873,7 @@
               <a:t>Veterinario</a:t>
             </a:r>
             <a:r>
-              <a:rPr sz="1400" i="0" b="0">
+              <a:rPr sz="1300" i="0" b="0">
                 <a:solidFill>
                   <a:srgbClr val="D4D4D4"/>
                 </a:solidFill>
@@ -9882,7 +9882,7 @@
               <a:t>      | </a:t>
             </a:r>
             <a:r>
-              <a:rPr sz="1400" i="0" b="0">
+              <a:rPr sz="1300" i="0" b="0">
                 <a:solidFill>
                   <a:srgbClr val="D4D4D4"/>
                 </a:solidFill>
@@ -9891,7 +9891,7 @@
               <a:t>M</a:t>
             </a:r>
             <a:r>
-              <a:rPr sz="1400" i="0" b="0">
+              <a:rPr sz="1300" i="0" b="0">
                 <a:solidFill>
                   <a:srgbClr val="D4D4D4"/>
                 </a:solidFill>
@@ -9900,7 +9900,7 @@
               <a:t>-</a:t>
             </a:r>
             <a:r>
-              <a:rPr sz="1400" i="0" b="0">
+              <a:rPr sz="1300" i="0" b="0">
                 <a:solidFill>
                   <a:srgbClr val="B5CEA8"/>
                 </a:solidFill>
@@ -9909,7 +9909,7 @@
               <a:t>04</a:t>
             </a:r>
             <a:r>
-              <a:rPr sz="1400" i="0" b="0">
+              <a:rPr sz="1300" i="0" b="0">
                 <a:solidFill>
                   <a:srgbClr val="D4D4D4"/>
                 </a:solidFill>
@@ -9918,7 +9918,7 @@
               <a:t>   | </a:t>
             </a:r>
             <a:r>
-              <a:rPr sz="1400" i="0" b="0">
+              <a:rPr sz="1300" i="0" b="0">
                 <a:solidFill>
                   <a:srgbClr val="D4D4D4"/>
                 </a:solidFill>
@@ -9927,7 +9927,7 @@
               <a:t>SIN</a:t>
             </a:r>
             <a:r>
-              <a:rPr sz="1400" i="0" b="0">
+              <a:rPr sz="1300" i="0" b="0">
                 <a:solidFill>
                   <a:srgbClr val="D4D4D4"/>
                 </a:solidFill>
@@ -9936,7 +9936,7 @@
               <a:t> </a:t>
             </a:r>
             <a:r>
-              <a:rPr sz="1400" i="0" b="0">
+              <a:rPr sz="1300" i="0" b="0">
                 <a:solidFill>
                   <a:srgbClr val="D4D4D4"/>
                 </a:solidFill>
@@ -9945,7 +9945,7 @@
               <a:t>ORIGEN</a:t>
             </a:r>
             <a:r>
-              <a:rPr sz="1400" i="0" b="0">
+              <a:rPr sz="1300" i="0" b="0">
                 <a:solidFill>
                   <a:srgbClr val="D4D4D4"/>
                 </a:solidFill>
@@ -9957,11 +9957,11 @@
           <a:p>
             <a:pPr>
               <a:spcAft>
-                <a:spcPts val="300"/>
+                <a:spcPts val="278"/>
               </a:spcAft>
             </a:pPr>
             <a:r>
-              <a:rPr sz="1400" i="0" b="0">
+              <a:rPr sz="1300" i="0" b="0">
                 <a:solidFill>
                   <a:srgbClr val="D4D4D4"/>
                 </a:solidFill>
@@ -9973,11 +9973,11 @@
           <a:p>
             <a:pPr>
               <a:spcAft>
-                <a:spcPts val="300"/>
+                <a:spcPts val="278"/>
               </a:spcAft>
             </a:pPr>
             <a:r>
-              <a:rPr sz="1400" i="0" b="0">
+              <a:rPr sz="1300" i="0" b="0">
                 <a:solidFill>
                   <a:srgbClr val="D4D4D4"/>
                 </a:solidFill>
@@ -9986,7 +9986,7 @@
               <a:t>H</a:t>
             </a:r>
             <a:r>
-              <a:rPr sz="1400" i="0" b="0">
+              <a:rPr sz="1300" i="0" b="0">
                 <a:solidFill>
                   <a:srgbClr val="D4D4D4"/>
                 </a:solidFill>
@@ -9995,7 +9995,7 @@
               <a:t>-</a:t>
             </a:r>
             <a:r>
-              <a:rPr sz="1400" i="0" b="0">
+              <a:rPr sz="1300" i="0" b="0">
                 <a:solidFill>
                   <a:srgbClr val="B5CEA8"/>
                 </a:solidFill>
@@ -10004,7 +10004,7 @@
               <a:t>01</a:t>
             </a:r>
             <a:r>
-              <a:rPr sz="1400" i="0" b="0">
+              <a:rPr sz="1300" i="0" b="0">
                 <a:solidFill>
                   <a:srgbClr val="D4D4D4"/>
                 </a:solidFill>
@@ -10013,7 +10013,7 @@
               <a:t> (</a:t>
             </a:r>
             <a:r>
-              <a:rPr sz="1400" i="0" b="0">
+              <a:rPr sz="1300" i="0" b="0">
                 <a:solidFill>
                   <a:srgbClr val="D4D4D4"/>
                 </a:solidFill>
@@ -10022,7 +10022,7 @@
               <a:t>mayor</a:t>
             </a:r>
             <a:r>
-              <a:rPr sz="1400" i="0" b="0">
+              <a:rPr sz="1300" i="0" b="0">
                 <a:solidFill>
                   <a:srgbClr val="D4D4D4"/>
                 </a:solidFill>
@@ -10031,7 +10031,7 @@
               <a:t>)     : </a:t>
             </a:r>
             <a:r>
-              <a:rPr sz="1400" i="0" b="0">
+              <a:rPr sz="1300" i="0" b="0">
                 <a:solidFill>
                   <a:srgbClr val="D4D4D4"/>
                 </a:solidFill>
@@ -10040,7 +10040,7 @@
               <a:t>CU</a:t>
             </a:r>
             <a:r>
-              <a:rPr sz="1400" i="0" b="0">
+              <a:rPr sz="1300" i="0" b="0">
                 <a:solidFill>
                   <a:srgbClr val="D4D4D4"/>
                 </a:solidFill>
@@ -10049,7 +10049,7 @@
               <a:t>-</a:t>
             </a:r>
             <a:r>
-              <a:rPr sz="1400" i="0" b="0">
+              <a:rPr sz="1300" i="0" b="0">
                 <a:solidFill>
                   <a:srgbClr val="B5CEA8"/>
                 </a:solidFill>
@@ -10058,7 +10058,7 @@
               <a:t>03</a:t>
             </a:r>
             <a:r>
-              <a:rPr sz="1400" i="0" b="0">
+              <a:rPr sz="1300" i="0" b="0">
                 <a:solidFill>
                   <a:srgbClr val="D4D4D4"/>
                 </a:solidFill>
@@ -10067,7 +10067,7 @@
               <a:t> </a:t>
             </a:r>
             <a:r>
-              <a:rPr sz="1400" i="0" b="0">
+              <a:rPr sz="1300" i="0" b="0">
                 <a:solidFill>
                   <a:srgbClr val="D4D4D4"/>
                 </a:solidFill>
@@ -10076,7 +10076,7 @@
               <a:t>exige</a:t>
             </a:r>
             <a:r>
-              <a:rPr sz="1400" i="0" b="0">
+              <a:rPr sz="1300" i="0" b="0">
                 <a:solidFill>
                   <a:srgbClr val="D4D4D4"/>
                 </a:solidFill>
@@ -10085,7 +10085,7 @@
               <a:t> </a:t>
             </a:r>
             <a:r>
-              <a:rPr sz="1400" i="0" b="0">
+              <a:rPr sz="1300" i="0" b="0">
                 <a:solidFill>
                   <a:srgbClr val="D4D4D4"/>
                 </a:solidFill>
@@ -10094,7 +10094,7 @@
               <a:t>registrar</a:t>
             </a:r>
             <a:r>
-              <a:rPr sz="1400" i="0" b="0">
+              <a:rPr sz="1300" i="0" b="0">
                 <a:solidFill>
                   <a:srgbClr val="D4D4D4"/>
                 </a:solidFill>
@@ -10103,7 +10103,7 @@
               <a:t> </a:t>
             </a:r>
             <a:r>
-              <a:rPr sz="1400" i="0" b="0">
+              <a:rPr sz="1300" i="0" b="0">
                 <a:solidFill>
                   <a:srgbClr val="D4D4D4"/>
                 </a:solidFill>
@@ -10112,7 +10112,7 @@
               <a:t>quien</a:t>
             </a:r>
             <a:r>
-              <a:rPr sz="1400" i="0" b="0">
+              <a:rPr sz="1300" i="0" b="0">
                 <a:solidFill>
                   <a:srgbClr val="D4D4D4"/>
                 </a:solidFill>
@@ -10121,7 +10121,7 @@
               <a:t> </a:t>
             </a:r>
             <a:r>
-              <a:rPr sz="1400" i="0" b="0">
+              <a:rPr sz="1300" i="0" b="0">
                 <a:solidFill>
                   <a:srgbClr val="D4D4D4"/>
                 </a:solidFill>
@@ -10130,7 +10130,7 @@
               <a:t>atendio</a:t>
             </a:r>
             <a:r>
-              <a:rPr sz="1400" i="0" b="0">
+              <a:rPr sz="1300" i="0" b="0">
                 <a:solidFill>
                   <a:srgbClr val="D4D4D4"/>
                 </a:solidFill>
@@ -10139,7 +10139,7 @@
               <a:t>, </a:t>
             </a:r>
             <a:r>
-              <a:rPr sz="1400" i="0" b="0">
+              <a:rPr sz="1300" i="0" b="0">
                 <a:solidFill>
                   <a:srgbClr val="D4D4D4"/>
                 </a:solidFill>
@@ -10148,7 +10148,7 @@
               <a:t>pero</a:t>
             </a:r>
             <a:r>
-              <a:rPr sz="1400" i="0" b="0">
+              <a:rPr sz="1300" i="0" b="0">
                 <a:solidFill>
                   <a:srgbClr val="D4D4D4"/>
                 </a:solidFill>
@@ -10157,7 +10157,7 @@
               <a:t> </a:t>
             </a:r>
             <a:r>
-              <a:rPr sz="1400" i="0" b="0">
+              <a:rPr sz="1300" i="0" b="0">
                 <a:solidFill>
                   <a:srgbClr val="D4D4D4"/>
                 </a:solidFill>
@@ -10166,7 +10166,7 @@
               <a:t>Consulta</a:t>
             </a:r>
             <a:r>
-              <a:rPr sz="1400" i="0" b="0">
+              <a:rPr sz="1300" i="0" b="0">
                 <a:solidFill>
                   <a:srgbClr val="D4D4D4"/>
                 </a:solidFill>
@@ -10175,7 +10175,7 @@
               <a:t> </a:t>
             </a:r>
             <a:r>
-              <a:rPr sz="1400" i="0" b="0">
+              <a:rPr sz="1300" i="0" b="0">
                 <a:solidFill>
                   <a:srgbClr val="D4D4D4"/>
                 </a:solidFill>
@@ -10184,7 +10184,7 @@
               <a:t>no</a:t>
             </a:r>
             <a:r>
-              <a:rPr sz="1400" i="0" b="0">
+              <a:rPr sz="1300" i="0" b="0">
                 <a:solidFill>
                   <a:srgbClr val="D4D4D4"/>
                 </a:solidFill>
@@ -10193,7 +10193,7 @@
               <a:t> </a:t>
             </a:r>
             <a:r>
-              <a:rPr sz="1400" i="0" b="0">
+              <a:rPr sz="1300" i="0" b="0">
                 <a:solidFill>
                   <a:srgbClr val="D4D4D4"/>
                 </a:solidFill>
@@ -10202,7 +10202,7 @@
               <a:t>se</a:t>
             </a:r>
             <a:r>
-              <a:rPr sz="1400" i="0" b="0">
+              <a:rPr sz="1300" i="0" b="0">
                 <a:solidFill>
                   <a:srgbClr val="D4D4D4"/>
                 </a:solidFill>
@@ -10211,7 +10211,7 @@
               <a:t> </a:t>
             </a:r>
             <a:r>
-              <a:rPr sz="1400" i="0" b="0">
+              <a:rPr sz="1300" i="0" b="0">
                 <a:solidFill>
                   <a:srgbClr val="D4D4D4"/>
                 </a:solidFill>
@@ -10220,7 +10220,7 @@
               <a:t>relaciona</a:t>
             </a:r>
             <a:r>
-              <a:rPr sz="1400" i="0" b="0">
+              <a:rPr sz="1300" i="0" b="0">
                 <a:solidFill>
                   <a:srgbClr val="D4D4D4"/>
                 </a:solidFill>
@@ -10229,7 +10229,7 @@
               <a:t> </a:t>
             </a:r>
             <a:r>
-              <a:rPr sz="1400" i="0" b="0">
+              <a:rPr sz="1300" i="0" b="0">
                 <a:solidFill>
                   <a:srgbClr val="D4D4D4"/>
                 </a:solidFill>
@@ -10238,7 +10238,7 @@
               <a:t>con</a:t>
             </a:r>
             <a:r>
-              <a:rPr sz="1400" i="0" b="0">
+              <a:rPr sz="1300" i="0" b="0">
                 <a:solidFill>
                   <a:srgbClr val="D4D4D4"/>
                 </a:solidFill>
@@ -10247,7 +10247,7 @@
               <a:t> </a:t>
             </a:r>
             <a:r>
-              <a:rPr sz="1400" i="0" b="0">
+              <a:rPr sz="1300" i="0" b="0">
                 <a:solidFill>
                   <a:srgbClr val="D4D4D4"/>
                 </a:solidFill>
@@ -10256,7 +10256,7 @@
               <a:t>Veterinario</a:t>
             </a:r>
             <a:r>
-              <a:rPr sz="1400" i="0" b="0">
+              <a:rPr sz="1300" i="0" b="0">
                 <a:solidFill>
                   <a:srgbClr val="D4D4D4"/>
                 </a:solidFill>
@@ -10268,11 +10268,11 @@
           <a:p>
             <a:pPr>
               <a:spcAft>
-                <a:spcPts val="300"/>
+                <a:spcPts val="278"/>
               </a:spcAft>
             </a:pPr>
             <a:r>
-              <a:rPr sz="1400" i="0" b="0">
+              <a:rPr sz="1300" i="0" b="0">
                 <a:solidFill>
                   <a:srgbClr val="D4D4D4"/>
                 </a:solidFill>
@@ -10281,7 +10281,7 @@
               <a:t>H</a:t>
             </a:r>
             <a:r>
-              <a:rPr sz="1400" i="0" b="0">
+              <a:rPr sz="1300" i="0" b="0">
                 <a:solidFill>
                   <a:srgbClr val="D4D4D4"/>
                 </a:solidFill>
@@ -10290,7 +10290,7 @@
               <a:t>-</a:t>
             </a:r>
             <a:r>
-              <a:rPr sz="1400" i="0" b="0">
+              <a:rPr sz="1300" i="0" b="0">
                 <a:solidFill>
                   <a:srgbClr val="B5CEA8"/>
                 </a:solidFill>
@@ -10299,7 +10299,7 @@
               <a:t>02</a:t>
             </a:r>
             <a:r>
-              <a:rPr sz="1400" i="0" b="0">
+              <a:rPr sz="1300" i="0" b="0">
                 <a:solidFill>
                   <a:srgbClr val="D4D4D4"/>
                 </a:solidFill>
@@ -10308,7 +10308,7 @@
               <a:t> (</a:t>
             </a:r>
             <a:r>
-              <a:rPr sz="1400" i="0" b="0">
+              <a:rPr sz="1300" i="0" b="0">
                 <a:solidFill>
                   <a:srgbClr val="D4D4D4"/>
                 </a:solidFill>
@@ -10317,7 +10317,7 @@
               <a:t>mayor</a:t>
             </a:r>
             <a:r>
-              <a:rPr sz="1400" i="0" b="0">
+              <a:rPr sz="1300" i="0" b="0">
                 <a:solidFill>
                   <a:srgbClr val="D4D4D4"/>
                 </a:solidFill>
@@ -10326,7 +10326,7 @@
               <a:t>)     : </a:t>
             </a:r>
             <a:r>
-              <a:rPr sz="1400" i="0" b="0">
+              <a:rPr sz="1300" i="0" b="0">
                 <a:solidFill>
                   <a:srgbClr val="D4D4D4"/>
                 </a:solidFill>
@@ -10335,7 +10335,7 @@
               <a:t>la</a:t>
             </a:r>
             <a:r>
-              <a:rPr sz="1400" i="0" b="0">
+              <a:rPr sz="1300" i="0" b="0">
                 <a:solidFill>
                   <a:srgbClr val="D4D4D4"/>
                 </a:solidFill>
@@ -10344,7 +10344,7 @@
               <a:t> </a:t>
             </a:r>
             <a:r>
-              <a:rPr sz="1400" i="0" b="0">
+              <a:rPr sz="1300" i="0" b="0">
                 <a:solidFill>
                   <a:srgbClr val="D4D4D4"/>
                 </a:solidFill>
@@ -10353,7 +10353,7 @@
               <a:t>fila</a:t>
             </a:r>
             <a:r>
-              <a:rPr sz="1400" i="0" b="0">
+              <a:rPr sz="1300" i="0" b="0">
                 <a:solidFill>
                   <a:srgbClr val="D4D4D4"/>
                 </a:solidFill>
@@ -10362,7 +10362,7 @@
               <a:t> </a:t>
             </a:r>
             <a:r>
-              <a:rPr sz="1400" i="0" b="0">
+              <a:rPr sz="1300" i="0" b="0">
                 <a:solidFill>
                   <a:srgbClr val="D4D4D4"/>
                 </a:solidFill>
@@ -10371,7 +10371,7 @@
               <a:t>de</a:t>
             </a:r>
             <a:r>
-              <a:rPr sz="1400" i="0" b="0">
+              <a:rPr sz="1300" i="0" b="0">
                 <a:solidFill>
                   <a:srgbClr val="D4D4D4"/>
                 </a:solidFill>
@@ -10380,7 +10380,7 @@
               <a:t> </a:t>
             </a:r>
             <a:r>
-              <a:rPr sz="1400" i="0" b="0">
+              <a:rPr sz="1300" i="0" b="0">
                 <a:solidFill>
                   <a:srgbClr val="D4D4D4"/>
                 </a:solidFill>
@@ -10389,7 +10389,7 @@
               <a:t>CU</a:t>
             </a:r>
             <a:r>
-              <a:rPr sz="1400" i="0" b="0">
+              <a:rPr sz="1300" i="0" b="0">
                 <a:solidFill>
                   <a:srgbClr val="D4D4D4"/>
                 </a:solidFill>
@@ -10398,7 +10398,7 @@
               <a:t>-</a:t>
             </a:r>
             <a:r>
-              <a:rPr sz="1400" i="0" b="0">
+              <a:rPr sz="1300" i="0" b="0">
                 <a:solidFill>
                   <a:srgbClr val="B5CEA8"/>
                 </a:solidFill>
@@ -10407,7 +10407,7 @@
               <a:t>04</a:t>
             </a:r>
             <a:r>
-              <a:rPr sz="1400" i="0" b="0">
+              <a:rPr sz="1300" i="0" b="0">
                 <a:solidFill>
                   <a:srgbClr val="D4D4D4"/>
                 </a:solidFill>
@@ -10416,7 +10416,7 @@
               <a:t> </a:t>
             </a:r>
             <a:r>
-              <a:rPr sz="1400" i="0" b="0">
+              <a:rPr sz="1300" i="0" b="0">
                 <a:solidFill>
                   <a:srgbClr val="D4D4D4"/>
                 </a:solidFill>
@@ -10425,7 +10425,7 @@
               <a:t>quedo</a:t>
             </a:r>
             <a:r>
-              <a:rPr sz="1400" i="0" b="0">
+              <a:rPr sz="1300" i="0" b="0">
                 <a:solidFill>
                   <a:srgbClr val="D4D4D4"/>
                 </a:solidFill>
@@ -10434,7 +10434,7 @@
               <a:t> </a:t>
             </a:r>
             <a:r>
-              <a:rPr sz="1400" i="0" b="0">
+              <a:rPr sz="1300" i="0" b="0">
                 <a:solidFill>
                   <a:srgbClr val="D4D4D4"/>
                 </a:solidFill>
@@ -10443,7 +10443,7 @@
               <a:t>sin</a:t>
             </a:r>
             <a:r>
-              <a:rPr sz="1400" i="0" b="0">
+              <a:rPr sz="1300" i="0" b="0">
                 <a:solidFill>
                   <a:srgbClr val="D4D4D4"/>
                 </a:solidFill>
@@ -10452,7 +10452,7 @@
               <a:t> </a:t>
             </a:r>
             <a:r>
-              <a:rPr sz="1400" i="0" b="0">
+              <a:rPr sz="1300" i="0" b="0">
                 <a:solidFill>
                   <a:srgbClr val="D4D4D4"/>
                 </a:solidFill>
@@ -10461,7 +10461,7 @@
               <a:t>RF</a:t>
             </a:r>
             <a:r>
-              <a:rPr sz="1400" i="0" b="0">
+              <a:rPr sz="1300" i="0" b="0">
                 <a:solidFill>
                   <a:srgbClr val="D4D4D4"/>
                 </a:solidFill>
@@ -10470,7 +10470,7 @@
               <a:t>; </a:t>
             </a:r>
             <a:r>
-              <a:rPr sz="1400" i="0" b="0">
+              <a:rPr sz="1300" i="0" b="0">
                 <a:solidFill>
                   <a:srgbClr val="D4D4D4"/>
                 </a:solidFill>
@@ -10479,7 +10479,7 @@
               <a:t>debe</a:t>
             </a:r>
             <a:r>
-              <a:rPr sz="1400" i="0" b="0">
+              <a:rPr sz="1300" i="0" b="0">
                 <a:solidFill>
                   <a:srgbClr val="D4D4D4"/>
                 </a:solidFill>
@@ -10488,7 +10488,7 @@
               <a:t> </a:t>
             </a:r>
             <a:r>
-              <a:rPr sz="1400" i="0" b="0">
+              <a:rPr sz="1300" i="0" b="0">
                 <a:solidFill>
                   <a:srgbClr val="D4D4D4"/>
                 </a:solidFill>
@@ -10497,7 +10497,7 @@
               <a:t>ligarse</a:t>
             </a:r>
             <a:r>
-              <a:rPr sz="1400" i="0" b="0">
+              <a:rPr sz="1300" i="0" b="0">
                 <a:solidFill>
                   <a:srgbClr val="D4D4D4"/>
                 </a:solidFill>
@@ -10506,7 +10506,7 @@
               <a:t> </a:t>
             </a:r>
             <a:r>
-              <a:rPr sz="1400" i="0" b="0">
+              <a:rPr sz="1300" i="0" b="0">
                 <a:solidFill>
                   <a:srgbClr val="D4D4D4"/>
                 </a:solidFill>
@@ -10515,7 +10515,7 @@
               <a:t>a</a:t>
             </a:r>
             <a:r>
-              <a:rPr sz="1400" i="0" b="0">
+              <a:rPr sz="1300" i="0" b="0">
                 <a:solidFill>
                   <a:srgbClr val="D4D4D4"/>
                 </a:solidFill>
@@ -10524,7 +10524,7 @@
               <a:t> </a:t>
             </a:r>
             <a:r>
-              <a:rPr sz="1400" i="0" b="0">
+              <a:rPr sz="1300" i="0" b="0">
                 <a:solidFill>
                   <a:srgbClr val="D4D4D4"/>
                 </a:solidFill>
@@ -10533,7 +10533,7 @@
               <a:t>RF</a:t>
             </a:r>
             <a:r>
-              <a:rPr sz="1400" i="0" b="0">
+              <a:rPr sz="1300" i="0" b="0">
                 <a:solidFill>
                   <a:srgbClr val="D4D4D4"/>
                 </a:solidFill>
@@ -10542,7 +10542,7 @@
               <a:t>-</a:t>
             </a:r>
             <a:r>
-              <a:rPr sz="1400" i="0" b="0">
+              <a:rPr sz="1300" i="0" b="0">
                 <a:solidFill>
                   <a:srgbClr val="B5CEA8"/>
                 </a:solidFill>
@@ -10551,7 +10551,7 @@
               <a:t>08</a:t>
             </a:r>
             <a:r>
-              <a:rPr sz="1400" i="0" b="0">
+              <a:rPr sz="1300" i="0" b="0">
                 <a:solidFill>
                   <a:srgbClr val="D4D4D4"/>
                 </a:solidFill>
@@ -10560,7 +10560,7 @@
               <a:t> </a:t>
             </a:r>
             <a:r>
-              <a:rPr sz="1400" i="0" b="0">
+              <a:rPr sz="1300" i="0" b="0">
                 <a:solidFill>
                   <a:srgbClr val="D4D4D4"/>
                 </a:solidFill>
@@ -10569,7 +10569,7 @@
               <a:t>Agendar</a:t>
             </a:r>
             <a:r>
-              <a:rPr sz="1400" i="0" b="0">
+              <a:rPr sz="1300" i="0" b="0">
                 <a:solidFill>
                   <a:srgbClr val="D4D4D4"/>
                 </a:solidFill>
@@ -10578,7 +10578,7 @@
               <a:t> </a:t>
             </a:r>
             <a:r>
-              <a:rPr sz="1400" i="0" b="0">
+              <a:rPr sz="1300" i="0" b="0">
                 <a:solidFill>
                   <a:srgbClr val="D4D4D4"/>
                 </a:solidFill>
@@ -10587,7 +10587,7 @@
               <a:t>cita</a:t>
             </a:r>
             <a:r>
-              <a:rPr sz="1400" i="0" b="0">
+              <a:rPr sz="1300" i="0" b="0">
                 <a:solidFill>
                   <a:srgbClr val="D4D4D4"/>
                 </a:solidFill>
@@ -10596,7 +10596,7 @@
               <a:t> </a:t>
             </a:r>
             <a:r>
-              <a:rPr sz="1400" i="0" b="0">
+              <a:rPr sz="1300" i="0" b="0">
                 <a:solidFill>
                   <a:srgbClr val="D4D4D4"/>
                 </a:solidFill>
@@ -10605,7 +10605,7 @@
               <a:t>o</a:t>
             </a:r>
             <a:r>
-              <a:rPr sz="1400" i="0" b="0">
+              <a:rPr sz="1300" i="0" b="0">
                 <a:solidFill>
                   <a:srgbClr val="D4D4D4"/>
                 </a:solidFill>
@@ -10614,7 +10614,7 @@
               <a:t> </a:t>
             </a:r>
             <a:r>
-              <a:rPr sz="1400" i="0" b="0">
+              <a:rPr sz="1300" i="0" b="0">
                 <a:solidFill>
                   <a:srgbClr val="D4D4D4"/>
                 </a:solidFill>
@@ -10623,7 +10623,7 @@
               <a:t>eliminarse</a:t>
             </a:r>
             <a:r>
-              <a:rPr sz="1400" i="0" b="0">
+              <a:rPr sz="1300" i="0" b="0">
                 <a:solidFill>
                   <a:srgbClr val="D4D4D4"/>
                 </a:solidFill>
@@ -10632,7 +10632,7 @@
               <a:t> </a:t>
             </a:r>
             <a:r>
-              <a:rPr sz="1400" i="0" b="0">
+              <a:rPr sz="1300" i="0" b="0">
                 <a:solidFill>
                   <a:srgbClr val="D4D4D4"/>
                 </a:solidFill>
@@ -10641,7 +10641,7 @@
               <a:t>el</a:t>
             </a:r>
             <a:r>
-              <a:rPr sz="1400" i="0" b="0">
+              <a:rPr sz="1300" i="0" b="0">
                 <a:solidFill>
                   <a:srgbClr val="D4D4D4"/>
                 </a:solidFill>
@@ -10650,7 +10650,7 @@
               <a:t> </a:t>
             </a:r>
             <a:r>
-              <a:rPr sz="1400" i="0" b="0">
+              <a:rPr sz="1300" i="0" b="0">
                 <a:solidFill>
                   <a:srgbClr val="D4D4D4"/>
                 </a:solidFill>
@@ -10659,7 +10659,7 @@
               <a:t>CU</a:t>
             </a:r>
             <a:r>
-              <a:rPr sz="1400" i="0" b="0">
+              <a:rPr sz="1300" i="0" b="0">
                 <a:solidFill>
                   <a:srgbClr val="D4D4D4"/>
                 </a:solidFill>
@@ -10671,11 +10671,11 @@
           <a:p>
             <a:pPr>
               <a:spcAft>
-                <a:spcPts val="300"/>
+                <a:spcPts val="278"/>
               </a:spcAft>
             </a:pPr>
             <a:r>
-              <a:rPr sz="1400" i="0" b="0">
+              <a:rPr sz="1300" i="0" b="0">
                 <a:solidFill>
                   <a:srgbClr val="D4D4D4"/>
                 </a:solidFill>
@@ -10684,7 +10684,7 @@
               <a:t>H</a:t>
             </a:r>
             <a:r>
-              <a:rPr sz="1400" i="0" b="0">
+              <a:rPr sz="1300" i="0" b="0">
                 <a:solidFill>
                   <a:srgbClr val="D4D4D4"/>
                 </a:solidFill>
@@ -10693,7 +10693,7 @@
               <a:t>-</a:t>
             </a:r>
             <a:r>
-              <a:rPr sz="1400" i="0" b="0">
+              <a:rPr sz="1300" i="0" b="0">
                 <a:solidFill>
                   <a:srgbClr val="B5CEA8"/>
                 </a:solidFill>
@@ -10702,7 +10702,7 @@
               <a:t>03</a:t>
             </a:r>
             <a:r>
-              <a:rPr sz="1400" i="0" b="0">
+              <a:rPr sz="1300" i="0" b="0">
                 <a:solidFill>
                   <a:srgbClr val="D4D4D4"/>
                 </a:solidFill>
@@ -10711,7 +10711,7 @@
               <a:t> (</a:t>
             </a:r>
             <a:r>
-              <a:rPr sz="1400" i="0" b="0">
+              <a:rPr sz="1300" i="0" b="0">
                 <a:solidFill>
                   <a:srgbClr val="D4D4D4"/>
                 </a:solidFill>
@@ -10720,7 +10720,7 @@
               <a:t>bloqueante</a:t>
             </a:r>
             <a:r>
-              <a:rPr sz="1400" i="0" b="0">
+              <a:rPr sz="1300" i="0" b="0">
                 <a:solidFill>
                   <a:srgbClr val="D4D4D4"/>
                 </a:solidFill>
@@ -10729,7 +10729,7 @@
               <a:t>): </a:t>
             </a:r>
             <a:r>
-              <a:rPr sz="1400" i="0" b="0">
+              <a:rPr sz="1300" i="0" b="0">
                 <a:solidFill>
                   <a:srgbClr val="D4D4D4"/>
                 </a:solidFill>
@@ -10738,7 +10738,7 @@
               <a:t>la</a:t>
             </a:r>
             <a:r>
-              <a:rPr sz="1400" i="0" b="0">
+              <a:rPr sz="1300" i="0" b="0">
                 <a:solidFill>
                   <a:srgbClr val="D4D4D4"/>
                 </a:solidFill>
@@ -10747,7 +10747,7 @@
               <a:t> </a:t>
             </a:r>
             <a:r>
-              <a:rPr sz="1400" i="0" b="0">
+              <a:rPr sz="1300" i="0" b="0">
                 <a:solidFill>
                   <a:srgbClr val="D4D4D4"/>
                 </a:solidFill>
@@ -10756,7 +10756,7 @@
               <a:t>clase</a:t>
             </a:r>
             <a:r>
-              <a:rPr sz="1400" i="0" b="0">
+              <a:rPr sz="1300" i="0" b="0">
                 <a:solidFill>
                   <a:srgbClr val="D4D4D4"/>
                 </a:solidFill>
@@ -10765,7 +10765,7 @@
               <a:t> </a:t>
             </a:r>
             <a:r>
-              <a:rPr sz="1400" i="0" b="0">
+              <a:rPr sz="1300" i="0" b="0">
                 <a:solidFill>
                   <a:srgbClr val="D4D4D4"/>
                 </a:solidFill>
@@ -10774,7 +10774,7 @@
               <a:t>Mascota</a:t>
             </a:r>
             <a:r>
-              <a:rPr sz="1400" i="0" b="0">
+              <a:rPr sz="1300" i="0" b="0">
                 <a:solidFill>
                   <a:srgbClr val="D4D4D4"/>
                 </a:solidFill>
@@ -10783,7 +10783,7 @@
               <a:t> </a:t>
             </a:r>
             <a:r>
-              <a:rPr sz="1400" i="0" b="0">
+              <a:rPr sz="1300" i="0" b="0">
                 <a:solidFill>
                   <a:srgbClr val="D4D4D4"/>
                 </a:solidFill>
@@ -10792,7 +10792,7 @@
               <a:t>guarda</a:t>
             </a:r>
             <a:r>
-              <a:rPr sz="1400" i="0" b="0">
+              <a:rPr sz="1300" i="0" b="0">
                 <a:solidFill>
                   <a:srgbClr val="D4D4D4"/>
                 </a:solidFill>
@@ -10801,7 +10801,7 @@
               <a:t> </a:t>
             </a:r>
             <a:r>
-              <a:rPr sz="1400" i="0" b="0">
+              <a:rPr sz="1300" i="0" b="0">
                 <a:solidFill>
                   <a:srgbClr val="D4D4D4"/>
                 </a:solidFill>
@@ -10810,7 +10810,7 @@
               <a:t>dueño</a:t>
             </a:r>
             <a:r>
-              <a:rPr sz="1400" i="0" b="0">
+              <a:rPr sz="1300" i="0" b="0">
                 <a:solidFill>
                   <a:srgbClr val="D4D4D4"/>
                 </a:solidFill>
@@ -10819,7 +10819,7 @@
               <a:t> </a:t>
             </a:r>
             <a:r>
-              <a:rPr sz="1400" i="0" b="0">
+              <a:rPr sz="1300" i="0" b="0">
                 <a:solidFill>
                   <a:srgbClr val="D4D4D4"/>
                 </a:solidFill>
@@ -10828,7 +10828,7 @@
               <a:t>como</a:t>
             </a:r>
             <a:r>
-              <a:rPr sz="1400" i="0" b="0">
+              <a:rPr sz="1300" i="0" b="0">
                 <a:solidFill>
                   <a:srgbClr val="D4D4D4"/>
                 </a:solidFill>
@@ -10837,7 +10837,7 @@
               <a:t> </a:t>
             </a:r>
             <a:r>
-              <a:rPr sz="1400" i="0" b="0">
+              <a:rPr sz="1300" i="0" b="0">
                 <a:solidFill>
                   <a:srgbClr val="D4D4D4"/>
                 </a:solidFill>
@@ -10846,7 +10846,7 @@
               <a:t>texto</a:t>
             </a:r>
             <a:r>
-              <a:rPr sz="1400" i="0" b="0">
+              <a:rPr sz="1300" i="0" b="0">
                 <a:solidFill>
                   <a:srgbClr val="D4D4D4"/>
                 </a:solidFill>
@@ -10855,7 +10855,7 @@
               <a:t> </a:t>
             </a:r>
             <a:r>
-              <a:rPr sz="1400" i="0" b="0">
+              <a:rPr sz="1300" i="0" b="0">
                 <a:solidFill>
                   <a:srgbClr val="D4D4D4"/>
                 </a:solidFill>
@@ -10864,7 +10864,7 @@
               <a:t>en</a:t>
             </a:r>
             <a:r>
-              <a:rPr sz="1400" i="0" b="0">
+              <a:rPr sz="1300" i="0" b="0">
                 <a:solidFill>
                   <a:srgbClr val="D4D4D4"/>
                 </a:solidFill>
@@ -10873,7 +10873,7 @@
               <a:t> </a:t>
             </a:r>
             <a:r>
-              <a:rPr sz="1400" i="0" b="0">
+              <a:rPr sz="1300" i="0" b="0">
                 <a:solidFill>
                   <a:srgbClr val="D4D4D4"/>
                 </a:solidFill>
@@ -10882,7 +10882,7 @@
               <a:t>lugar</a:t>
             </a:r>
             <a:r>
-              <a:rPr sz="1400" i="0" b="0">
+              <a:rPr sz="1300" i="0" b="0">
                 <a:solidFill>
                   <a:srgbClr val="D4D4D4"/>
                 </a:solidFill>
@@ -10891,7 +10891,7 @@
               <a:t> </a:t>
             </a:r>
             <a:r>
-              <a:rPr sz="1400" i="0" b="0">
+              <a:rPr sz="1300" i="0" b="0">
                 <a:solidFill>
                   <a:srgbClr val="D4D4D4"/>
                 </a:solidFill>
@@ -10900,7 +10900,7 @@
               <a:t>de</a:t>
             </a:r>
             <a:r>
-              <a:rPr sz="1400" i="0" b="0">
+              <a:rPr sz="1300" i="0" b="0">
                 <a:solidFill>
                   <a:srgbClr val="D4D4D4"/>
                 </a:solidFill>
@@ -10909,7 +10909,7 @@
               <a:t> </a:t>
             </a:r>
             <a:r>
-              <a:rPr sz="1400" i="0" b="0">
+              <a:rPr sz="1300" i="0" b="0">
                 <a:solidFill>
                   <a:srgbClr val="D4D4D4"/>
                 </a:solidFill>
@@ -10918,7 +10918,7 @@
               <a:t>asociarse</a:t>
             </a:r>
             <a:r>
-              <a:rPr sz="1400" i="0" b="0">
+              <a:rPr sz="1300" i="0" b="0">
                 <a:solidFill>
                   <a:srgbClr val="D4D4D4"/>
                 </a:solidFill>
@@ -10927,7 +10927,7 @@
               <a:t> </a:t>
             </a:r>
             <a:r>
-              <a:rPr sz="1400" i="0" b="0">
+              <a:rPr sz="1300" i="0" b="0">
                 <a:solidFill>
                   <a:srgbClr val="D4D4D4"/>
                 </a:solidFill>
@@ -10936,7 +10936,7 @@
               <a:t>a</a:t>
             </a:r>
             <a:r>
-              <a:rPr sz="1400" i="0" b="0">
+              <a:rPr sz="1300" i="0" b="0">
                 <a:solidFill>
                   <a:srgbClr val="D4D4D4"/>
                 </a:solidFill>
@@ -10945,7 +10945,7 @@
               <a:t> </a:t>
             </a:r>
             <a:r>
-              <a:rPr sz="1400" i="0" b="0">
+              <a:rPr sz="1300" i="0" b="0">
                 <a:solidFill>
                   <a:srgbClr val="D4D4D4"/>
                 </a:solidFill>
@@ -10954,7 +10954,7 @@
               <a:t>Propietario</a:t>
             </a:r>
             <a:r>
-              <a:rPr sz="1400" i="0" b="0">
+              <a:rPr sz="1300" i="0" b="0">
                 <a:solidFill>
                   <a:srgbClr val="D4D4D4"/>
                 </a:solidFill>
@@ -10966,11 +10966,11 @@
           <a:p>
             <a:pPr>
               <a:spcAft>
-                <a:spcPts val="300"/>
+                <a:spcPts val="278"/>
               </a:spcAft>
             </a:pPr>
             <a:r>
-              <a:rPr sz="1400" i="0" b="0">
+              <a:rPr sz="1300" i="0" b="0">
                 <a:solidFill>
                   <a:srgbClr val="D4D4D4"/>
                 </a:solidFill>
@@ -10979,7 +10979,7 @@
               <a:t>H</a:t>
             </a:r>
             <a:r>
-              <a:rPr sz="1400" i="0" b="0">
+              <a:rPr sz="1300" i="0" b="0">
                 <a:solidFill>
                   <a:srgbClr val="D4D4D4"/>
                 </a:solidFill>
@@ -10988,7 +10988,7 @@
               <a:t>-</a:t>
             </a:r>
             <a:r>
-              <a:rPr sz="1400" i="0" b="0">
+              <a:rPr sz="1300" i="0" b="0">
                 <a:solidFill>
                   <a:srgbClr val="B5CEA8"/>
                 </a:solidFill>
@@ -10997,7 +10997,7 @@
               <a:t>04</a:t>
             </a:r>
             <a:r>
-              <a:rPr sz="1400" i="0" b="0">
+              <a:rPr sz="1300" i="0" b="0">
                 <a:solidFill>
                   <a:srgbClr val="D4D4D4"/>
                 </a:solidFill>
@@ -11006,7 +11006,7 @@
               <a:t> (</a:t>
             </a:r>
             <a:r>
-              <a:rPr sz="1400" i="0" b="0">
+              <a:rPr sz="1300" i="0" b="0">
                 <a:solidFill>
                   <a:srgbClr val="D4D4D4"/>
                 </a:solidFill>
@@ -11015,7 +11015,7 @@
               <a:t>menor</a:t>
             </a:r>
             <a:r>
-              <a:rPr sz="1400" i="0" b="0">
+              <a:rPr sz="1300" i="0" b="0">
                 <a:solidFill>
                   <a:srgbClr val="D4D4D4"/>
                 </a:solidFill>
@@ -11024,7 +11024,7 @@
               <a:t>)     : </a:t>
             </a:r>
             <a:r>
-              <a:rPr sz="1400" i="0" b="0">
+              <a:rPr sz="1300" i="0" b="0">
                 <a:solidFill>
                   <a:srgbClr val="D4D4D4"/>
                 </a:solidFill>
@@ -11033,7 +11033,7 @@
               <a:t>el</a:t>
             </a:r>
             <a:r>
-              <a:rPr sz="1400" i="0" b="0">
+              <a:rPr sz="1300" i="0" b="0">
                 <a:solidFill>
                   <a:srgbClr val="D4D4D4"/>
                 </a:solidFill>
@@ -11042,7 +11042,7 @@
               <a:t> </a:t>
             </a:r>
             <a:r>
-              <a:rPr sz="1400" i="0" b="0">
+              <a:rPr sz="1300" i="0" b="0">
                 <a:solidFill>
                   <a:srgbClr val="D4D4D4"/>
                 </a:solidFill>
@@ -11051,7 +11051,7 @@
               <a:t>RNF</a:t>
             </a:r>
             <a:r>
-              <a:rPr sz="1400" i="0" b="0">
+              <a:rPr sz="1300" i="0" b="0">
                 <a:solidFill>
                   <a:srgbClr val="D4D4D4"/>
                 </a:solidFill>
@@ -11060,7 +11060,7 @@
               <a:t>-</a:t>
             </a:r>
             <a:r>
-              <a:rPr sz="1400" i="0" b="0">
+              <a:rPr sz="1300" i="0" b="0">
                 <a:solidFill>
                   <a:srgbClr val="B5CEA8"/>
                 </a:solidFill>
@@ -11069,7 +11069,7 @@
               <a:t>02</a:t>
             </a:r>
             <a:r>
-              <a:rPr sz="1400" i="0" b="0">
+              <a:rPr sz="1300" i="0" b="0">
                 <a:solidFill>
                   <a:srgbClr val="D4D4D4"/>
                 </a:solidFill>
@@ -11078,7 +11078,7 @@
               <a:t> </a:t>
             </a:r>
             <a:r>
-              <a:rPr sz="1400" i="0" b="0">
+              <a:rPr sz="1300" i="0" b="0">
                 <a:solidFill>
                   <a:srgbClr val="D4D4D4"/>
                 </a:solidFill>
@@ -11087,7 +11087,7 @@
               <a:t>de</a:t>
             </a:r>
             <a:r>
-              <a:rPr sz="1400" i="0" b="0">
+              <a:rPr sz="1300" i="0" b="0">
                 <a:solidFill>
                   <a:srgbClr val="D4D4D4"/>
                 </a:solidFill>
@@ -11096,7 +11096,7 @@
               <a:t> </a:t>
             </a:r>
             <a:r>
-              <a:rPr sz="1400" i="0" b="0">
+              <a:rPr sz="1300" i="0" b="0">
                 <a:solidFill>
                   <a:srgbClr val="B5CEA8"/>
                 </a:solidFill>
@@ -11105,7 +11105,7 @@
               <a:t>3</a:t>
             </a:r>
             <a:r>
-              <a:rPr sz="1400" i="0" b="0">
+              <a:rPr sz="1300" i="0" b="0">
                 <a:solidFill>
                   <a:srgbClr val="D4D4D4"/>
                 </a:solidFill>
@@ -11114,7 +11114,7 @@
               <a:t> </a:t>
             </a:r>
             <a:r>
-              <a:rPr sz="1400" i="0" b="0">
+              <a:rPr sz="1300" i="0" b="0">
                 <a:solidFill>
                   <a:srgbClr val="D4D4D4"/>
                 </a:solidFill>
@@ -11123,7 +11123,7 @@
               <a:t>segundos</a:t>
             </a:r>
             <a:r>
-              <a:rPr sz="1400" i="0" b="0">
+              <a:rPr sz="1300" i="0" b="0">
                 <a:solidFill>
                   <a:srgbClr val="D4D4D4"/>
                 </a:solidFill>
@@ -11132,7 +11132,7 @@
               <a:t> </a:t>
             </a:r>
             <a:r>
-              <a:rPr sz="1400" i="0" b="0">
+              <a:rPr sz="1300" i="0" b="0">
                 <a:solidFill>
                   <a:srgbClr val="D4D4D4"/>
                 </a:solidFill>
@@ -11141,7 +11141,7 @@
               <a:t>no</a:t>
             </a:r>
             <a:r>
-              <a:rPr sz="1400" i="0" b="0">
+              <a:rPr sz="1300" i="0" b="0">
                 <a:solidFill>
                   <a:srgbClr val="D4D4D4"/>
                 </a:solidFill>
@@ -11150,7 +11150,7 @@
               <a:t> </a:t>
             </a:r>
             <a:r>
-              <a:rPr sz="1400" i="0" b="0">
+              <a:rPr sz="1300" i="0" b="0">
                 <a:solidFill>
                   <a:srgbClr val="D4D4D4"/>
                 </a:solidFill>
@@ -11159,7 +11159,7 @@
               <a:t>aparece</a:t>
             </a:r>
             <a:r>
-              <a:rPr sz="1400" i="0" b="0">
+              <a:rPr sz="1300" i="0" b="0">
                 <a:solidFill>
                   <a:srgbClr val="D4D4D4"/>
                 </a:solidFill>
@@ -11168,7 +11168,7 @@
               <a:t> </a:t>
             </a:r>
             <a:r>
-              <a:rPr sz="1400" i="0" b="0">
+              <a:rPr sz="1300" i="0" b="0">
                 <a:solidFill>
                   <a:srgbClr val="D4D4D4"/>
                 </a:solidFill>
@@ -11177,7 +11177,7 @@
               <a:t>en</a:t>
             </a:r>
             <a:r>
-              <a:rPr sz="1400" i="0" b="0">
+              <a:rPr sz="1300" i="0" b="0">
                 <a:solidFill>
                   <a:srgbClr val="D4D4D4"/>
                 </a:solidFill>
@@ -11186,7 +11186,7 @@
               <a:t> </a:t>
             </a:r>
             <a:r>
-              <a:rPr sz="1400" i="0" b="0">
+              <a:rPr sz="1300" i="0" b="0">
                 <a:solidFill>
                   <a:srgbClr val="D4D4D4"/>
                 </a:solidFill>
@@ -11195,7 +11195,7 @@
               <a:t>ninguna</a:t>
             </a:r>
             <a:r>
-              <a:rPr sz="1400" i="0" b="0">
+              <a:rPr sz="1300" i="0" b="0">
                 <a:solidFill>
                   <a:srgbClr val="D4D4D4"/>
                 </a:solidFill>
@@ -11204,7 +11204,7 @@
               <a:t> </a:t>
             </a:r>
             <a:r>
-              <a:rPr sz="1400" i="0" b="0">
+              <a:rPr sz="1300" i="0" b="0">
                 <a:solidFill>
                   <a:srgbClr val="D4D4D4"/>
                 </a:solidFill>
@@ -11213,7 +11213,7 @@
               <a:t>postcondicion</a:t>
             </a:r>
             <a:r>
-              <a:rPr sz="1400" i="0" b="0">
+              <a:rPr sz="1300" i="0" b="0">
                 <a:solidFill>
                   <a:srgbClr val="D4D4D4"/>
                 </a:solidFill>
@@ -11222,7 +11222,7 @@
               <a:t> </a:t>
             </a:r>
             <a:r>
-              <a:rPr sz="1400" i="0" b="0">
+              <a:rPr sz="1300" i="0" b="0">
                 <a:solidFill>
                   <a:srgbClr val="D4D4D4"/>
                 </a:solidFill>
@@ -11231,7 +11231,7 @@
               <a:t>de</a:t>
             </a:r>
             <a:r>
-              <a:rPr sz="1400" i="0" b="0">
+              <a:rPr sz="1300" i="0" b="0">
                 <a:solidFill>
                   <a:srgbClr val="D4D4D4"/>
                 </a:solidFill>
@@ -11240,7 +11240,7 @@
               <a:t> </a:t>
             </a:r>
             <a:r>
-              <a:rPr sz="1400" i="0" b="0">
+              <a:rPr sz="1300" i="0" b="0">
                 <a:solidFill>
                   <a:srgbClr val="D4D4D4"/>
                 </a:solidFill>
@@ -11249,7 +11249,7 @@
               <a:t>CU</a:t>
             </a:r>
             <a:r>
-              <a:rPr sz="1400" i="0" b="0">
+              <a:rPr sz="1300" i="0" b="0">
                 <a:solidFill>
                   <a:srgbClr val="D4D4D4"/>
                 </a:solidFill>
@@ -11258,7 +11258,7 @@
               <a:t>-</a:t>
             </a:r>
             <a:r>
-              <a:rPr sz="1400" i="0" b="0">
+              <a:rPr sz="1300" i="0" b="0">
                 <a:solidFill>
                   <a:srgbClr val="B5CEA8"/>
                 </a:solidFill>
@@ -11267,7 +11267,7 @@
               <a:t>02</a:t>
             </a:r>
             <a:r>
-              <a:rPr sz="1400" i="0" b="0">
+              <a:rPr sz="1300" i="0" b="0">
                 <a:solidFill>
                   <a:srgbClr val="D4D4D4"/>
                 </a:solidFill>
@@ -11279,11 +11279,11 @@
           <a:p>
             <a:pPr>
               <a:spcAft>
-                <a:spcPts val="300"/>
+                <a:spcPts val="278"/>
               </a:spcAft>
             </a:pPr>
             <a:r>
-              <a:rPr sz="1400" i="0" b="0">
+              <a:rPr sz="1300" i="0" b="0">
                 <a:solidFill>
                   <a:srgbClr val="D4D4D4"/>
                 </a:solidFill>
@@ -11292,7 +11292,7 @@
               <a:t>Glosario</a:t>
             </a:r>
             <a:r>
-              <a:rPr sz="1400" i="0" b="0">
+              <a:rPr sz="1300" i="0" b="0">
                 <a:solidFill>
                   <a:srgbClr val="D4D4D4"/>
                 </a:solidFill>
@@ -11301,7 +11301,7 @@
               <a:t> </a:t>
             </a:r>
             <a:r>
-              <a:rPr sz="1400" i="0" b="0">
+              <a:rPr sz="1300" i="0" b="0">
                 <a:solidFill>
                   <a:srgbClr val="D4D4D4"/>
                 </a:solidFill>
@@ -11310,7 +11310,7 @@
               <a:t>canonico</a:t>
             </a:r>
             <a:r>
-              <a:rPr sz="1400" i="0" b="0">
+              <a:rPr sz="1300" i="0" b="0">
                 <a:solidFill>
                   <a:srgbClr val="D4D4D4"/>
                 </a:solidFill>
@@ -11319,7 +11319,7 @@
               <a:t>: </a:t>
             </a:r>
             <a:r>
-              <a:rPr sz="1400" i="0" b="0">
+              <a:rPr sz="1300" i="0" b="0">
                 <a:solidFill>
                   <a:srgbClr val="DCDCAA"/>
                 </a:solidFill>
@@ -11328,7 +11328,7 @@
               <a:t>Propietario</a:t>
             </a:r>
             <a:r>
-              <a:rPr sz="1400" i="0" b="0">
+              <a:rPr sz="1300" i="0" b="0">
                 <a:solidFill>
                   <a:srgbClr val="D4D4D4"/>
                 </a:solidFill>
@@ -11337,7 +11337,7 @@
               <a:t> (</a:t>
             </a:r>
             <a:r>
-              <a:rPr sz="1400" i="0" b="0">
+              <a:rPr sz="1300" i="0" b="0">
                 <a:solidFill>
                   <a:srgbClr val="D4D4D4"/>
                 </a:solidFill>
@@ -11346,7 +11346,7 @@
               <a:t>prohibido</a:t>
             </a:r>
             <a:r>
-              <a:rPr sz="1400" i="0" b="0">
+              <a:rPr sz="1300" i="0" b="0">
                 <a:solidFill>
                   <a:srgbClr val="D4D4D4"/>
                 </a:solidFill>
@@ -11355,7 +11355,7 @@
               <a:t> </a:t>
             </a:r>
             <a:r>
-              <a:rPr sz="1400" i="0" b="0">
+              <a:rPr sz="1300" i="0" b="0">
                 <a:solidFill>
                   <a:srgbClr val="D4D4D4"/>
                 </a:solidFill>
@@ -11364,7 +11364,7 @@
               <a:t>Dueño</a:t>
             </a:r>
             <a:r>
-              <a:rPr sz="1400" i="0" b="0">
+              <a:rPr sz="1300" i="0" b="0">
                 <a:solidFill>
                   <a:srgbClr val="D4D4D4"/>
                 </a:solidFill>
@@ -11373,7 +11373,7 @@
               <a:t>, </a:t>
             </a:r>
             <a:r>
-              <a:rPr sz="1400" i="0" b="0">
+              <a:rPr sz="1300" i="0" b="0">
                 <a:solidFill>
                   <a:srgbClr val="D4D4D4"/>
                 </a:solidFill>
@@ -11382,7 +11382,7 @@
               <a:t>Cliente</a:t>
             </a:r>
             <a:r>
-              <a:rPr sz="1400" i="0" b="0">
+              <a:rPr sz="1300" i="0" b="0">
                 <a:solidFill>
                   <a:srgbClr val="D4D4D4"/>
                 </a:solidFill>
@@ -11391,7 +11391,7 @@
               <a:t>, </a:t>
             </a:r>
             <a:r>
-              <a:rPr sz="1400" i="0" b="0">
+              <a:rPr sz="1300" i="0" b="0">
                 <a:solidFill>
                   <a:srgbClr val="D4D4D4"/>
                 </a:solidFill>
@@ -11400,7 +11400,7 @@
               <a:t>Responsable</a:t>
             </a:r>
             <a:r>
-              <a:rPr sz="1400" i="0" b="0">
+              <a:rPr sz="1300" i="0" b="0">
                 <a:solidFill>
                   <a:srgbClr val="D4D4D4"/>
                 </a:solidFill>
@@ -11409,7 +11409,7 @@
               <a:t>) | </a:t>
             </a:r>
             <a:r>
-              <a:rPr sz="1400" i="0" b="0">
+              <a:rPr sz="1300" i="0" b="0">
                 <a:solidFill>
                   <a:srgbClr val="D4D4D4"/>
                 </a:solidFill>
@@ -11418,7 +11418,7 @@
               <a:t>Cita</a:t>
             </a:r>
             <a:r>
-              <a:rPr sz="1400" i="0" b="0">
+              <a:rPr sz="1300" i="0" b="0">
                 <a:solidFill>
                   <a:srgbClr val="D4D4D4"/>
                 </a:solidFill>
@@ -11427,7 +11427,7 @@
               <a:t> != </a:t>
             </a:r>
             <a:r>
-              <a:rPr sz="1400" i="0" b="0">
+              <a:rPr sz="1300" i="0" b="0">
                 <a:solidFill>
                   <a:srgbClr val="D4D4D4"/>
                 </a:solidFill>
@@ -11436,7 +11436,7 @@
               <a:t>Consulta</a:t>
             </a:r>
             <a:r>
-              <a:rPr sz="1400" i="0" b="0">
+              <a:rPr sz="1300" i="0" b="0">
                 <a:solidFill>
                   <a:srgbClr val="D4D4D4"/>
                 </a:solidFill>
@@ -12228,7 +12228,7 @@
         <p:spPr>
           <a:xfrm>
             <a:off x="457200" y="1261872"/>
-            <a:ext cx="11277295" cy="4568884"/>
+            <a:ext cx="11277295" cy="4227820"/>
           </a:xfrm>
           <a:prstGeom prst="roundRect">
             <a:avLst>
@@ -12478,7 +12478,7 @@
         <p:spPr>
           <a:xfrm>
             <a:off x="685800" y="1719072"/>
-            <a:ext cx="502920" cy="3974524"/>
+            <a:ext cx="502920" cy="3633460"/>
           </a:xfrm>
           <a:prstGeom prst="rect">
             <a:avLst/>
@@ -12493,11 +12493,11 @@
           <a:p>
             <a:pPr algn="r">
               <a:spcAft>
-                <a:spcPts val="428"/>
+                <a:spcPts val="385"/>
               </a:spcAft>
             </a:pPr>
             <a:r>
-              <a:rPr sz="2000" i="0" b="0">
+              <a:rPr sz="1800" i="0" b="0">
                 <a:solidFill>
                   <a:srgbClr val="858585"/>
                 </a:solidFill>
@@ -12509,11 +12509,11 @@
           <a:p>
             <a:pPr algn="r">
               <a:spcAft>
-                <a:spcPts val="428"/>
+                <a:spcPts val="385"/>
               </a:spcAft>
             </a:pPr>
             <a:r>
-              <a:rPr sz="2000" i="0" b="0">
+              <a:rPr sz="1800" i="0" b="0">
                 <a:solidFill>
                   <a:srgbClr val="858585"/>
                 </a:solidFill>
@@ -12525,11 +12525,11 @@
           <a:p>
             <a:pPr algn="r">
               <a:spcAft>
-                <a:spcPts val="428"/>
+                <a:spcPts val="385"/>
               </a:spcAft>
             </a:pPr>
             <a:r>
-              <a:rPr sz="2000" i="0" b="0">
+              <a:rPr sz="1800" i="0" b="0">
                 <a:solidFill>
                   <a:srgbClr val="858585"/>
                 </a:solidFill>
@@ -12541,11 +12541,11 @@
           <a:p>
             <a:pPr algn="r">
               <a:spcAft>
-                <a:spcPts val="428"/>
+                <a:spcPts val="385"/>
               </a:spcAft>
             </a:pPr>
             <a:r>
-              <a:rPr sz="2000" i="0" b="0">
+              <a:rPr sz="1800" i="0" b="0">
                 <a:solidFill>
                   <a:srgbClr val="858585"/>
                 </a:solidFill>
@@ -12557,11 +12557,11 @@
           <a:p>
             <a:pPr algn="r">
               <a:spcAft>
-                <a:spcPts val="428"/>
+                <a:spcPts val="385"/>
               </a:spcAft>
             </a:pPr>
             <a:r>
-              <a:rPr sz="2000" i="0" b="0">
+              <a:rPr sz="1800" i="0" b="0">
                 <a:solidFill>
                   <a:srgbClr val="858585"/>
                 </a:solidFill>
@@ -12573,11 +12573,11 @@
           <a:p>
             <a:pPr algn="r">
               <a:spcAft>
-                <a:spcPts val="428"/>
+                <a:spcPts val="385"/>
               </a:spcAft>
             </a:pPr>
             <a:r>
-              <a:rPr sz="2000" i="0" b="0">
+              <a:rPr sz="1800" i="0" b="0">
                 <a:solidFill>
                   <a:srgbClr val="858585"/>
                 </a:solidFill>
@@ -12589,11 +12589,11 @@
           <a:p>
             <a:pPr algn="r">
               <a:spcAft>
-                <a:spcPts val="428"/>
+                <a:spcPts val="385"/>
               </a:spcAft>
             </a:pPr>
             <a:r>
-              <a:rPr sz="2000" i="0" b="0">
+              <a:rPr sz="1800" i="0" b="0">
                 <a:solidFill>
                   <a:srgbClr val="858585"/>
                 </a:solidFill>
@@ -12605,11 +12605,11 @@
           <a:p>
             <a:pPr algn="r">
               <a:spcAft>
-                <a:spcPts val="428"/>
+                <a:spcPts val="385"/>
               </a:spcAft>
             </a:pPr>
             <a:r>
-              <a:rPr sz="2000" i="0" b="0">
+              <a:rPr sz="1800" i="0" b="0">
                 <a:solidFill>
                   <a:srgbClr val="858585"/>
                 </a:solidFill>
@@ -12621,11 +12621,11 @@
           <a:p>
             <a:pPr algn="r">
               <a:spcAft>
-                <a:spcPts val="428"/>
+                <a:spcPts val="385"/>
               </a:spcAft>
             </a:pPr>
             <a:r>
-              <a:rPr sz="2000" i="0" b="0">
+              <a:rPr sz="1800" i="0" b="0">
                 <a:solidFill>
                   <a:srgbClr val="858585"/>
                 </a:solidFill>
@@ -12637,11 +12637,11 @@
           <a:p>
             <a:pPr algn="r">
               <a:spcAft>
-                <a:spcPts val="428"/>
+                <a:spcPts val="385"/>
               </a:spcAft>
             </a:pPr>
             <a:r>
-              <a:rPr sz="2000" i="0" b="0">
+              <a:rPr sz="1800" i="0" b="0">
                 <a:solidFill>
                   <a:srgbClr val="858585"/>
                 </a:solidFill>
@@ -12653,11 +12653,11 @@
           <a:p>
             <a:pPr algn="r">
               <a:spcAft>
-                <a:spcPts val="428"/>
+                <a:spcPts val="385"/>
               </a:spcAft>
             </a:pPr>
             <a:r>
-              <a:rPr sz="2000" i="0" b="0">
+              <a:rPr sz="1800" i="0" b="0">
                 <a:solidFill>
                   <a:srgbClr val="858585"/>
                 </a:solidFill>
@@ -12677,7 +12677,7 @@
         <p:spPr>
           <a:xfrm>
             <a:off x="1188720" y="1719072"/>
-            <a:ext cx="10271455" cy="3974524"/>
+            <a:ext cx="10271455" cy="3633460"/>
           </a:xfrm>
           <a:prstGeom prst="rect">
             <a:avLst/>
@@ -12692,11 +12692,11 @@
           <a:p>
             <a:pPr>
               <a:spcAft>
-                <a:spcPts val="428"/>
+                <a:spcPts val="385"/>
               </a:spcAft>
             </a:pPr>
             <a:r>
-              <a:rPr sz="2000" i="0" b="0">
+              <a:rPr sz="1800" i="0" b="0">
                 <a:solidFill>
                   <a:srgbClr val="D4D4D4"/>
                 </a:solidFill>
@@ -12705,7 +12705,7 @@
               <a:t>| </a:t>
             </a:r>
             <a:r>
-              <a:rPr sz="2000" i="0" b="0">
+              <a:rPr sz="1800" i="0" b="0">
                 <a:solidFill>
                   <a:srgbClr val="D4D4D4"/>
                 </a:solidFill>
@@ -12714,7 +12714,7 @@
               <a:t>Concepto</a:t>
             </a:r>
             <a:r>
-              <a:rPr sz="2000" i="0" b="0">
+              <a:rPr sz="1800" i="0" b="0">
                 <a:solidFill>
                   <a:srgbClr val="D4D4D4"/>
                 </a:solidFill>
@@ -12723,7 +12723,7 @@
               <a:t>      | </a:t>
             </a:r>
             <a:r>
-              <a:rPr sz="2000" i="0" b="0">
+              <a:rPr sz="1800" i="0" b="0">
                 <a:solidFill>
                   <a:srgbClr val="D4D4D4"/>
                 </a:solidFill>
@@ -12732,7 +12732,7 @@
               <a:t>Nombre</a:t>
             </a:r>
             <a:r>
-              <a:rPr sz="2000" i="0" b="0">
+              <a:rPr sz="1800" i="0" b="0">
                 <a:solidFill>
                   <a:srgbClr val="D4D4D4"/>
                 </a:solidFill>
@@ -12741,7 +12741,7 @@
               <a:t> </a:t>
             </a:r>
             <a:r>
-              <a:rPr sz="2000" i="0" b="0">
+              <a:rPr sz="1800" i="0" b="0">
                 <a:solidFill>
                   <a:srgbClr val="D4D4D4"/>
                 </a:solidFill>
@@ -12750,7 +12750,7 @@
               <a:t>canonico</a:t>
             </a:r>
             <a:r>
-              <a:rPr sz="2000" i="0" b="0">
+              <a:rPr sz="1800" i="0" b="0">
                 <a:solidFill>
                   <a:srgbClr val="D4D4D4"/>
                 </a:solidFill>
@@ -12759,7 +12759,7 @@
               <a:t> | </a:t>
             </a:r>
             <a:r>
-              <a:rPr sz="2000" i="0" b="0">
+              <a:rPr sz="1800" i="0" b="0">
                 <a:solidFill>
                   <a:srgbClr val="D4D4D4"/>
                 </a:solidFill>
@@ -12768,7 +12768,7 @@
               <a:t>Como</a:t>
             </a:r>
             <a:r>
-              <a:rPr sz="2000" i="0" b="0">
+              <a:rPr sz="1800" i="0" b="0">
                 <a:solidFill>
                   <a:srgbClr val="D4D4D4"/>
                 </a:solidFill>
@@ -12777,7 +12777,7 @@
               <a:t> </a:t>
             </a:r>
             <a:r>
-              <a:rPr sz="2000" i="0" b="0">
+              <a:rPr sz="1800" i="0" b="0">
                 <a:solidFill>
                   <a:srgbClr val="D4D4D4"/>
                 </a:solidFill>
@@ -12786,7 +12786,7 @@
               <a:t>aparece</a:t>
             </a:r>
             <a:r>
-              <a:rPr sz="2000" i="0" b="0">
+              <a:rPr sz="1800" i="0" b="0">
                 <a:solidFill>
                   <a:srgbClr val="D4D4D4"/>
                 </a:solidFill>
@@ -12795,7 +12795,7 @@
               <a:t> </a:t>
             </a:r>
             <a:r>
-              <a:rPr sz="2000" i="0" b="0">
+              <a:rPr sz="1800" i="0" b="0">
                 <a:solidFill>
                   <a:srgbClr val="D4D4D4"/>
                 </a:solidFill>
@@ -12804,7 +12804,7 @@
               <a:t>mal</a:t>
             </a:r>
             <a:r>
-              <a:rPr sz="2000" i="0" b="0">
+              <a:rPr sz="1800" i="0" b="0">
                 <a:solidFill>
                   <a:srgbClr val="D4D4D4"/>
                 </a:solidFill>
@@ -12813,7 +12813,7 @@
               <a:t> </a:t>
             </a:r>
             <a:r>
-              <a:rPr sz="2000" i="0" b="0">
+              <a:rPr sz="1800" i="0" b="0">
                 <a:solidFill>
                   <a:srgbClr val="D4D4D4"/>
                 </a:solidFill>
@@ -12822,7 +12822,7 @@
               <a:t>en</a:t>
             </a:r>
             <a:r>
-              <a:rPr sz="2000" i="0" b="0">
+              <a:rPr sz="1800" i="0" b="0">
                 <a:solidFill>
                   <a:srgbClr val="D4D4D4"/>
                 </a:solidFill>
@@ -12831,7 +12831,7 @@
               <a:t> </a:t>
             </a:r>
             <a:r>
-              <a:rPr sz="2000" i="0" b="0">
+              <a:rPr sz="1800" i="0" b="0">
                 <a:solidFill>
                   <a:srgbClr val="D4D4D4"/>
                 </a:solidFill>
@@ -12840,7 +12840,7 @@
               <a:t>el</a:t>
             </a:r>
             <a:r>
-              <a:rPr sz="2000" i="0" b="0">
+              <a:rPr sz="1800" i="0" b="0">
                 <a:solidFill>
                   <a:srgbClr val="D4D4D4"/>
                 </a:solidFill>
@@ -12849,7 +12849,7 @@
               <a:t> </a:t>
             </a:r>
             <a:r>
-              <a:rPr sz="2000" i="0" b="0">
+              <a:rPr sz="1800" i="0" b="0">
                 <a:solidFill>
                   <a:srgbClr val="D4D4D4"/>
                 </a:solidFill>
@@ -12858,7 +12858,7 @@
               <a:t>paquete</a:t>
             </a:r>
             <a:r>
-              <a:rPr sz="2000" i="0" b="0">
+              <a:rPr sz="1800" i="0" b="0">
                 <a:solidFill>
                   <a:srgbClr val="D4D4D4"/>
                 </a:solidFill>
@@ -12870,11 +12870,11 @@
           <a:p>
             <a:pPr>
               <a:spcAft>
-                <a:spcPts val="428"/>
+                <a:spcPts val="385"/>
               </a:spcAft>
             </a:pPr>
             <a:r>
-              <a:rPr sz="2000" i="0" b="0">
+              <a:rPr sz="1800" i="0" b="0">
                 <a:solidFill>
                   <a:srgbClr val="D4D4D4"/>
                 </a:solidFill>
@@ -12883,7 +12883,7 @@
               <a:t>|-------------</a:t>
             </a:r>
             <a:r>
-              <a:rPr sz="2000" i="0" b="0">
+              <a:rPr sz="1800" i="0" b="0">
                 <a:solidFill>
                   <a:srgbClr val="D4D4D4"/>
                 </a:solidFill>
@@ -12895,11 +12895,11 @@
           <a:p>
             <a:pPr>
               <a:spcAft>
-                <a:spcPts val="428"/>
+                <a:spcPts val="385"/>
               </a:spcAft>
             </a:pPr>
             <a:r>
-              <a:rPr sz="2000" i="0" b="0">
+              <a:rPr sz="1800" i="0" b="0">
                 <a:solidFill>
                   <a:srgbClr val="D4D4D4"/>
                 </a:solidFill>
@@ -12908,7 +12908,7 @@
               <a:t>| </a:t>
             </a:r>
             <a:r>
-              <a:rPr sz="2000" i="0" b="0">
+              <a:rPr sz="1800" i="0" b="0">
                 <a:solidFill>
                   <a:srgbClr val="D4D4D4"/>
                 </a:solidFill>
@@ -12917,7 +12917,7 @@
               <a:t>el</a:t>
             </a:r>
             <a:r>
-              <a:rPr sz="2000" i="0" b="0">
+              <a:rPr sz="1800" i="0" b="0">
                 <a:solidFill>
                   <a:srgbClr val="D4D4D4"/>
                 </a:solidFill>
@@ -12926,7 +12926,7 @@
               <a:t> </a:t>
             </a:r>
             <a:r>
-              <a:rPr sz="2000" i="0" b="0">
+              <a:rPr sz="1800" i="0" b="0">
                 <a:solidFill>
                   <a:srgbClr val="D4D4D4"/>
                 </a:solidFill>
@@ -12935,7 +12935,7 @@
               <a:t>animal</a:t>
             </a:r>
             <a:r>
-              <a:rPr sz="2000" i="0" b="0">
+              <a:rPr sz="1800" i="0" b="0">
                 <a:solidFill>
                   <a:srgbClr val="D4D4D4"/>
                 </a:solidFill>
@@ -12944,7 +12944,7 @@
               <a:t>     | </a:t>
             </a:r>
             <a:r>
-              <a:rPr sz="2000" i="0" b="0">
+              <a:rPr sz="1800" i="0" b="0">
                 <a:solidFill>
                   <a:srgbClr val="D4D4D4"/>
                 </a:solidFill>
@@ -12953,7 +12953,7 @@
               <a:t>Mascota</a:t>
             </a:r>
             <a:r>
-              <a:rPr sz="2000" i="0" b="0">
+              <a:rPr sz="1800" i="0" b="0">
                 <a:solidFill>
                   <a:srgbClr val="D4D4D4"/>
                 </a:solidFill>
@@ -12962,7 +12962,7 @@
               <a:t>         | </a:t>
             </a:r>
             <a:r>
-              <a:rPr sz="2000" i="0" b="0">
+              <a:rPr sz="1800" i="0" b="0">
                 <a:solidFill>
                   <a:srgbClr val="D4D4D4"/>
                 </a:solidFill>
@@ -12971,7 +12971,7 @@
               <a:t>Paciente</a:t>
             </a:r>
             <a:r>
-              <a:rPr sz="2000" i="0" b="0">
+              <a:rPr sz="1800" i="0" b="0">
                 <a:solidFill>
                   <a:srgbClr val="D4D4D4"/>
                 </a:solidFill>
@@ -12980,7 +12980,7 @@
               <a:t>, </a:t>
             </a:r>
             <a:r>
-              <a:rPr sz="2000" i="0" b="0">
+              <a:rPr sz="1800" i="0" b="0">
                 <a:solidFill>
                   <a:srgbClr val="D4D4D4"/>
                 </a:solidFill>
@@ -12989,7 +12989,7 @@
               <a:t>Animal</a:t>
             </a:r>
             <a:r>
-              <a:rPr sz="2000" i="0" b="0">
+              <a:rPr sz="1800" i="0" b="0">
                 <a:solidFill>
                   <a:srgbClr val="D4D4D4"/>
                 </a:solidFill>
@@ -12998,7 +12998,7 @@
               <a:t>, </a:t>
             </a:r>
             <a:r>
-              <a:rPr sz="2000" i="0" b="0">
+              <a:rPr sz="1800" i="0" b="0">
                 <a:solidFill>
                   <a:srgbClr val="D4D4D4"/>
                 </a:solidFill>
@@ -13007,7 +13007,7 @@
               <a:t>mascotas</a:t>
             </a:r>
             <a:r>
-              <a:rPr sz="2000" i="0" b="0">
+              <a:rPr sz="1800" i="0" b="0">
                 <a:solidFill>
                   <a:srgbClr val="D4D4D4"/>
                 </a:solidFill>
@@ -13019,11 +13019,11 @@
           <a:p>
             <a:pPr>
               <a:spcAft>
-                <a:spcPts val="428"/>
+                <a:spcPts val="385"/>
               </a:spcAft>
             </a:pPr>
             <a:r>
-              <a:rPr sz="2000" i="0" b="0">
+              <a:rPr sz="1800" i="0" b="0">
                 <a:solidFill>
                   <a:srgbClr val="D4D4D4"/>
                 </a:solidFill>
@@ -13032,7 +13032,7 @@
               <a:t>| </a:t>
             </a:r>
             <a:r>
-              <a:rPr sz="2000" i="0" b="0">
+              <a:rPr sz="1800" i="0" b="0">
                 <a:solidFill>
                   <a:srgbClr val="D4D4D4"/>
                 </a:solidFill>
@@ -13041,7 +13041,7 @@
               <a:t>quien</a:t>
             </a:r>
             <a:r>
-              <a:rPr sz="2000" i="0" b="0">
+              <a:rPr sz="1800" i="0" b="0">
                 <a:solidFill>
                   <a:srgbClr val="D4D4D4"/>
                 </a:solidFill>
@@ -13050,7 +13050,7 @@
               <a:t> </a:t>
             </a:r>
             <a:r>
-              <a:rPr sz="2000" i="0" b="0">
+              <a:rPr sz="1800" i="0" b="0">
                 <a:solidFill>
                   <a:srgbClr val="D4D4D4"/>
                 </a:solidFill>
@@ -13059,7 +13059,7 @@
               <a:t>lo</a:t>
             </a:r>
             <a:r>
-              <a:rPr sz="2000" i="0" b="0">
+              <a:rPr sz="1800" i="0" b="0">
                 <a:solidFill>
                   <a:srgbClr val="D4D4D4"/>
                 </a:solidFill>
@@ -13068,7 +13068,7 @@
               <a:t> </a:t>
             </a:r>
             <a:r>
-              <a:rPr sz="2000" i="0" b="0">
+              <a:rPr sz="1800" i="0" b="0">
                 <a:solidFill>
                   <a:srgbClr val="D4D4D4"/>
                 </a:solidFill>
@@ -13077,7 +13077,7 @@
               <a:t>trae</a:t>
             </a:r>
             <a:r>
-              <a:rPr sz="2000" i="0" b="0">
+              <a:rPr sz="1800" i="0" b="0">
                 <a:solidFill>
                   <a:srgbClr val="D4D4D4"/>
                 </a:solidFill>
@@ -13086,7 +13086,7 @@
               <a:t> | </a:t>
             </a:r>
             <a:r>
-              <a:rPr sz="2000" i="0" b="0">
+              <a:rPr sz="1800" i="0" b="0">
                 <a:solidFill>
                   <a:srgbClr val="D4D4D4"/>
                 </a:solidFill>
@@ -13095,7 +13095,7 @@
               <a:t>Propietario</a:t>
             </a:r>
             <a:r>
-              <a:rPr sz="2000" i="0" b="0">
+              <a:rPr sz="1800" i="0" b="0">
                 <a:solidFill>
                   <a:srgbClr val="D4D4D4"/>
                 </a:solidFill>
@@ -13104,7 +13104,7 @@
               <a:t>     | </a:t>
             </a:r>
             <a:r>
-              <a:rPr sz="2000" i="0" b="0">
+              <a:rPr sz="1800" i="0" b="0">
                 <a:solidFill>
                   <a:srgbClr val="D4D4D4"/>
                 </a:solidFill>
@@ -13113,7 +13113,7 @@
               <a:t>Dueno</a:t>
             </a:r>
             <a:r>
-              <a:rPr sz="2000" i="0" b="0">
+              <a:rPr sz="1800" i="0" b="0">
                 <a:solidFill>
                   <a:srgbClr val="D4D4D4"/>
                 </a:solidFill>
@@ -13122,7 +13122,7 @@
               <a:t>, </a:t>
             </a:r>
             <a:r>
-              <a:rPr sz="2000" i="0" b="0">
+              <a:rPr sz="1800" i="0" b="0">
                 <a:solidFill>
                   <a:srgbClr val="D4D4D4"/>
                 </a:solidFill>
@@ -13131,7 +13131,7 @@
               <a:t>Cliente</a:t>
             </a:r>
             <a:r>
-              <a:rPr sz="2000" i="0" b="0">
+              <a:rPr sz="1800" i="0" b="0">
                 <a:solidFill>
                   <a:srgbClr val="D4D4D4"/>
                 </a:solidFill>
@@ -13140,7 +13140,7 @@
               <a:t>, </a:t>
             </a:r>
             <a:r>
-              <a:rPr sz="2000" i="0" b="0">
+              <a:rPr sz="1800" i="0" b="0">
                 <a:solidFill>
                   <a:srgbClr val="D4D4D4"/>
                 </a:solidFill>
@@ -13149,7 +13149,7 @@
               <a:t>Responsable</a:t>
             </a:r>
             <a:r>
-              <a:rPr sz="2000" i="0" b="0">
+              <a:rPr sz="1800" i="0" b="0">
                 <a:solidFill>
                   <a:srgbClr val="D4D4D4"/>
                 </a:solidFill>
@@ -13161,11 +13161,11 @@
           <a:p>
             <a:pPr>
               <a:spcAft>
-                <a:spcPts val="428"/>
+                <a:spcPts val="385"/>
               </a:spcAft>
             </a:pPr>
             <a:r>
-              <a:rPr sz="2000" i="0" b="0">
+              <a:rPr sz="1800" i="0" b="0">
                 <a:solidFill>
                   <a:srgbClr val="D4D4D4"/>
                 </a:solidFill>
@@ -13174,7 +13174,7 @@
               <a:t>| </a:t>
             </a:r>
             <a:r>
-              <a:rPr sz="2000" i="0" b="0">
+              <a:rPr sz="1800" i="0" b="0">
                 <a:solidFill>
                   <a:srgbClr val="D4D4D4"/>
                 </a:solidFill>
@@ -13183,7 +13183,7 @@
               <a:t>el</a:t>
             </a:r>
             <a:r>
-              <a:rPr sz="2000" i="0" b="0">
+              <a:rPr sz="1800" i="0" b="0">
                 <a:solidFill>
                   <a:srgbClr val="D4D4D4"/>
                 </a:solidFill>
@@ -13192,7 +13192,7 @@
               <a:t> </a:t>
             </a:r>
             <a:r>
-              <a:rPr sz="2000" i="0" b="0">
+              <a:rPr sz="1800" i="0" b="0">
                 <a:solidFill>
                   <a:srgbClr val="D4D4D4"/>
                 </a:solidFill>
@@ -13201,7 +13201,7 @@
               <a:t>encuentro</a:t>
             </a:r>
             <a:r>
-              <a:rPr sz="2000" i="0" b="0">
+              <a:rPr sz="1800" i="0" b="0">
                 <a:solidFill>
                   <a:srgbClr val="D4D4D4"/>
                 </a:solidFill>
@@ -13210,7 +13210,7 @@
               <a:t>  | </a:t>
             </a:r>
             <a:r>
-              <a:rPr sz="2000" i="0" b="0">
+              <a:rPr sz="1800" i="0" b="0">
                 <a:solidFill>
                   <a:srgbClr val="D4D4D4"/>
                 </a:solidFill>
@@ -13219,7 +13219,7 @@
               <a:t>Cita</a:t>
             </a:r>
             <a:r>
-              <a:rPr sz="2000" i="0" b="0">
+              <a:rPr sz="1800" i="0" b="0">
                 <a:solidFill>
                   <a:srgbClr val="D4D4D4"/>
                 </a:solidFill>
@@ -13228,7 +13228,7 @@
               <a:t>            | </a:t>
             </a:r>
             <a:r>
-              <a:rPr sz="2000" i="0" b="0">
+              <a:rPr sz="1800" i="0" b="0">
                 <a:solidFill>
                   <a:srgbClr val="D4D4D4"/>
                 </a:solidFill>
@@ -13237,7 +13237,7 @@
               <a:t>Turno</a:t>
             </a:r>
             <a:r>
-              <a:rPr sz="2000" i="0" b="0">
+              <a:rPr sz="1800" i="0" b="0">
                 <a:solidFill>
                   <a:srgbClr val="D4D4D4"/>
                 </a:solidFill>
@@ -13246,7 +13246,7 @@
               <a:t>, </a:t>
             </a:r>
             <a:r>
-              <a:rPr sz="2000" i="0" b="0">
+              <a:rPr sz="1800" i="0" b="0">
                 <a:solidFill>
                   <a:srgbClr val="D4D4D4"/>
                 </a:solidFill>
@@ -13255,7 +13255,7 @@
               <a:t>Agendamiento</a:t>
             </a:r>
             <a:r>
-              <a:rPr sz="2000" i="0" b="0">
+              <a:rPr sz="1800" i="0" b="0">
                 <a:solidFill>
                   <a:srgbClr val="D4D4D4"/>
                 </a:solidFill>
@@ -13264,7 +13264,7 @@
               <a:t>, </a:t>
             </a:r>
             <a:r>
-              <a:rPr sz="2000" i="0" b="0">
+              <a:rPr sz="1800" i="0" b="0">
                 <a:solidFill>
                   <a:srgbClr val="D4D4D4"/>
                 </a:solidFill>
@@ -13273,7 +13273,7 @@
               <a:t>Reserva</a:t>
             </a:r>
             <a:r>
-              <a:rPr sz="2000" i="0" b="0">
+              <a:rPr sz="1800" i="0" b="0">
                 <a:solidFill>
                   <a:srgbClr val="D4D4D4"/>
                 </a:solidFill>
@@ -13285,11 +13285,11 @@
           <a:p>
             <a:pPr>
               <a:spcAft>
-                <a:spcPts val="428"/>
+                <a:spcPts val="385"/>
               </a:spcAft>
             </a:pPr>
             <a:r>
-              <a:rPr sz="2000" i="0" b="0">
+              <a:rPr sz="1800" i="0" b="0">
                 <a:solidFill>
                   <a:srgbClr val="D4D4D4"/>
                 </a:solidFill>
@@ -13298,7 +13298,7 @@
               <a:t>| </a:t>
             </a:r>
             <a:r>
-              <a:rPr sz="2000" i="0" b="0">
+              <a:rPr sz="1800" i="0" b="0">
                 <a:solidFill>
                   <a:srgbClr val="D4D4D4"/>
                 </a:solidFill>
@@ -13307,7 +13307,7 @@
               <a:t>el</a:t>
             </a:r>
             <a:r>
-              <a:rPr sz="2000" i="0" b="0">
+              <a:rPr sz="1800" i="0" b="0">
                 <a:solidFill>
                   <a:srgbClr val="D4D4D4"/>
                 </a:solidFill>
@@ -13316,7 +13316,7 @@
               <a:t> </a:t>
             </a:r>
             <a:r>
-              <a:rPr sz="2000" i="0" b="0">
+              <a:rPr sz="1800" i="0" b="0">
                 <a:solidFill>
                   <a:srgbClr val="D4D4D4"/>
                 </a:solidFill>
@@ -13325,7 +13325,7 @@
               <a:t>registro</a:t>
             </a:r>
             <a:r>
-              <a:rPr sz="2000" i="0" b="0">
+              <a:rPr sz="1800" i="0" b="0">
                 <a:solidFill>
                   <a:srgbClr val="D4D4D4"/>
                 </a:solidFill>
@@ -13334,7 +13334,7 @@
               <a:t>   | </a:t>
             </a:r>
             <a:r>
-              <a:rPr sz="2000" i="0" b="0">
+              <a:rPr sz="1800" i="0" b="0">
                 <a:solidFill>
                   <a:srgbClr val="D4D4D4"/>
                 </a:solidFill>
@@ -13343,7 +13343,7 @@
               <a:t>Consulta</a:t>
             </a:r>
             <a:r>
-              <a:rPr sz="2000" i="0" b="0">
+              <a:rPr sz="1800" i="0" b="0">
                 <a:solidFill>
                   <a:srgbClr val="D4D4D4"/>
                 </a:solidFill>
@@ -13352,7 +13352,7 @@
               <a:t>        | </a:t>
             </a:r>
             <a:r>
-              <a:rPr sz="2000" i="0" b="0">
+              <a:rPr sz="1800" i="0" b="0">
                 <a:solidFill>
                   <a:srgbClr val="D4D4D4"/>
                 </a:solidFill>
@@ -13361,7 +13361,7 @@
               <a:t>Atencion</a:t>
             </a:r>
             <a:r>
-              <a:rPr sz="2000" i="0" b="0">
+              <a:rPr sz="1800" i="0" b="0">
                 <a:solidFill>
                   <a:srgbClr val="D4D4D4"/>
                 </a:solidFill>
@@ -13370,7 +13370,7 @@
               <a:t>, </a:t>
             </a:r>
             <a:r>
-              <a:rPr sz="2000" i="0" b="0">
+              <a:rPr sz="1800" i="0" b="0">
                 <a:solidFill>
                   <a:srgbClr val="D4D4D4"/>
                 </a:solidFill>
@@ -13379,7 +13379,7 @@
               <a:t>HistoriaClinica</a:t>
             </a:r>
             <a:r>
-              <a:rPr sz="2000" i="0" b="0">
+              <a:rPr sz="1800" i="0" b="0">
                 <a:solidFill>
                   <a:srgbClr val="D4D4D4"/>
                 </a:solidFill>
@@ -13391,11 +13391,11 @@
           <a:p>
             <a:pPr>
               <a:spcAft>
-                <a:spcPts val="428"/>
+                <a:spcPts val="385"/>
               </a:spcAft>
             </a:pPr>
             <a:r>
-              <a:rPr sz="2000" i="0" b="0">
+              <a:rPr sz="1800" i="0" b="0">
                 <a:solidFill>
                   <a:srgbClr val="D4D4D4"/>
                 </a:solidFill>
@@ -13407,11 +13407,11 @@
           <a:p>
             <a:pPr>
               <a:spcAft>
-                <a:spcPts val="428"/>
+                <a:spcPts val="385"/>
               </a:spcAft>
             </a:pPr>
             <a:r>
-              <a:rPr sz="2000" i="0" b="0">
+              <a:rPr sz="1800" i="0" b="0">
                 <a:solidFill>
                   <a:srgbClr val="D4D4D4"/>
                 </a:solidFill>
@@ -13423,11 +13423,11 @@
           <a:p>
             <a:pPr>
               <a:spcAft>
-                <a:spcPts val="428"/>
+                <a:spcPts val="385"/>
               </a:spcAft>
             </a:pPr>
             <a:r>
-              <a:rPr sz="2000" i="0" b="0">
+              <a:rPr sz="1800" i="0" b="0">
                 <a:solidFill>
                   <a:srgbClr val="D4D4D4"/>
                 </a:solidFill>
@@ -13439,11 +13439,11 @@
           <a:p>
             <a:pPr>
               <a:spcAft>
-                <a:spcPts val="428"/>
+                <a:spcPts val="385"/>
               </a:spcAft>
             </a:pPr>
             <a:r>
-              <a:rPr sz="2000" i="0" b="0">
+              <a:rPr sz="1800" i="0" b="0">
                 <a:solidFill>
                   <a:srgbClr val="D4D4D4"/>
                 </a:solidFill>
@@ -13455,11 +13455,11 @@
           <a:p>
             <a:pPr>
               <a:spcAft>
-                <a:spcPts val="428"/>
+                <a:spcPts val="385"/>
               </a:spcAft>
             </a:pPr>
             <a:r>
-              <a:rPr sz="2000" i="0" b="0">
+              <a:rPr sz="1800" i="0" b="0">
                 <a:solidFill>
                   <a:srgbClr val="D4D4D4"/>
                 </a:solidFill>

--- a/Seminario de Sistemas/Clases/Clase 11 - Avance del proyecto de diseno/Presentacion.pptx
+++ b/Seminario de Sistemas/Clases/Clase 11 - Avance del proyecto de diseno/Presentacion.pptx
@@ -897,7 +897,7 @@
           <a:p/>
           <a:p>
             <a:r>
-              <a:t>Cada hallazgo se anota con ubicacion exacta, descripcion de la inconsistencia y severidad: bloqueante cuando impide construir el sistema, mayor cuando obliga a rehacer un artefacto completo, menor cuando es cosmetico.</a:t>
+              <a:t>Cada hallazgo se anota con ubicacion exacta, descripcion de la inconsistencia y severidad: bloqueante cuando impide construir el sistema, mayor cuando obliga a rehacer un artefacto completo, menor cuando es de forma.</a:t>
             </a:r>
           </a:p>
           <a:p/>
